--- a/docs/community/marketing/decks/exec-phase1/OCM-Sovereign-Delivery-Exec.pptx
+++ b/docs/community/marketing/decks/exec-phase1/OCM-Sovereign-Delivery-Exec.pptx
@@ -15,6 +15,8 @@
     <p:sldId id="263" r:id="rId14"/>
     <p:sldId id="264" r:id="rId15"/>
     <p:sldId id="265" r:id="rId16"/>
+    <p:sldId id="266" r:id="rId17"/>
+    <p:sldId id="267" r:id="rId18"/>
   </p:sldIdLst>
   <p:sldSz cx="18288000" cy="10287000"/>
   <p:notesSz cx="6858000" cy="9144000"/>
@@ -154,7 +156,7 @@
         <ns0:spPr>
           <ns2:xfrm xmlns:ns2="http://schemas.openxmlformats.org/drawingml/2006/main">
             <ns2:off x="914400" y="1590675"/>
-            <ns2:ext cx="14287500" cy="1762125"/>
+            <ns2:ext cx="16192500" cy="1905000"/>
           </ns2:xfrm>
           <ns3:prstGeom xmlns:ns3="http://schemas.openxmlformats.org/drawingml/2006/main" prst="rect">
             <ns3:avLst/>
@@ -165,7 +167,7 @@
           <ns5:lstStyle xmlns:ns5="http://schemas.openxmlformats.org/drawingml/2006/main">
             <ns5:lvl1pPr marL="0" indent="0" algn="l">
               <ns5:buNone/>
-              <ns5:defRPr sz="7200" b="1">
+              <ns5:defRPr sz="11500" b="1">
                 <ns5:solidFill>
                   <ns5:srgbClr val="FFFFFF"/>
                 </ns5:solidFill>
@@ -194,8 +196,8 @@
         </ns0:nvSpPr>
         <ns0:spPr>
           <ns2:xfrm xmlns:ns2="http://schemas.openxmlformats.org/drawingml/2006/main">
-            <ns2:off x="914400" y="2876550"/>
-            <ns2:ext cx="14287500" cy="1762125"/>
+            <ns2:off x="914400" y="3067050"/>
+            <ns2:ext cx="16192500" cy="1905000"/>
           </ns2:xfrm>
           <ns3:prstGeom xmlns:ns3="http://schemas.openxmlformats.org/drawingml/2006/main" prst="rect">
             <ns3:avLst/>
@@ -206,7 +208,7 @@
           <ns5:lstStyle xmlns:ns5="http://schemas.openxmlformats.org/drawingml/2006/main">
             <ns5:lvl1pPr marL="0" indent="0" algn="l">
               <ns5:buNone/>
-              <ns5:defRPr sz="7200" b="1">
+              <ns5:defRPr sz="11500" b="1">
                 <ns5:solidFill>
                   <ns5:srgbClr val="5CD6FF"/>
                 </ns5:solidFill>
@@ -235,8 +237,8 @@
         </ns0:nvSpPr>
         <ns0:spPr>
           <ns2:xfrm xmlns:ns2="http://schemas.openxmlformats.org/drawingml/2006/main">
-            <ns2:off x="914400" y="5133975"/>
-            <ns2:ext cx="15087600" cy="676275"/>
+            <ns2:off x="914400" y="5257800"/>
+            <ns2:ext cx="16192500" cy="571500"/>
           </ns2:xfrm>
           <ns3:prstGeom xmlns:ns3="http://schemas.openxmlformats.org/drawingml/2006/main" prst="rect">
             <ns3:avLst/>
@@ -247,7 +249,7 @@
           <ns5:lstStyle xmlns:ns5="http://schemas.openxmlformats.org/drawingml/2006/main">
             <ns5:lvl1pPr marL="0" indent="0" algn="l">
               <ns5:buNone/>
-              <ns5:defRPr sz="2800">
+              <ns5:defRPr sz="3600">
                 <ns5:solidFill>
                   <ns5:srgbClr val="5CD6FF"/>
                 </ns5:solidFill>
@@ -276,8 +278,8 @@
         </ns0:nvSpPr>
         <ns0:spPr>
           <ns2:xfrm xmlns:ns2="http://schemas.openxmlformats.org/drawingml/2006/main">
-            <ns2:off x="914400" y="6210300"/>
-            <ns2:ext cx="14287500" cy="552450"/>
+            <ns2:off x="914400" y="6067425"/>
+            <ns2:ext cx="16192500" cy="476250"/>
           </ns2:xfrm>
           <ns3:prstGeom xmlns:ns3="http://schemas.openxmlformats.org/drawingml/2006/main" prst="rect">
             <ns3:avLst/>
@@ -288,7 +290,7 @@
           <ns5:lstStyle xmlns:ns5="http://schemas.openxmlformats.org/drawingml/2006/main">
             <ns5:lvl1pPr marL="0" indent="0" algn="l">
               <ns5:buNone/>
-              <ns5:defRPr sz="2000">
+              <ns5:defRPr sz="2800">
                 <ns5:solidFill>
                   <ns5:srgbClr val="FFFFFF"/>
                 </ns5:solidFill>
@@ -465,8 +467,8 @@
         </ns0:nvSpPr>
         <ns0:spPr>
           <ns2:xfrm xmlns:ns2="http://schemas.openxmlformats.org/drawingml/2006/main">
-            <ns2:off x="762000" y="1714500"/>
-            <ns2:ext cx="16764000" cy="266700"/>
+            <ns2:off x="1143000" y="2428875"/>
+            <ns2:ext cx="16002000" cy="457200"/>
           </ns2:xfrm>
           <ns3:prstGeom xmlns:ns3="http://schemas.openxmlformats.org/drawingml/2006/main" prst="rect">
             <ns3:avLst/>
@@ -477,7 +479,7 @@
           <ns5:lstStyle xmlns:ns5="http://schemas.openxmlformats.org/drawingml/2006/main">
             <ns5:lvl1pPr marL="0" indent="0" algn="l">
               <ns5:buNone/>
-              <ns5:defRPr sz="1400" b="1" cap="all" spc="110">
+              <ns5:defRPr sz="2800" b="1" cap="all" spc="140">
                 <ns5:solidFill>
                   <ns5:srgbClr val="0F6BFF"/>
                 </ns5:solidFill>
@@ -506,8 +508,8 @@
         </ns0:nvSpPr>
         <ns0:spPr>
           <ns2:xfrm xmlns:ns2="http://schemas.openxmlformats.org/drawingml/2006/main">
-            <ns2:off x="762000" y="2057400"/>
-            <ns2:ext cx="16764000" cy="1047750"/>
+            <ns2:off x="1143000" y="2933700"/>
+            <ns2:ext cx="16002000" cy="1905000"/>
           </ns2:xfrm>
           <ns3:prstGeom xmlns:ns3="http://schemas.openxmlformats.org/drawingml/2006/main" prst="rect">
             <ns3:avLst/>
@@ -517,6 +519,9 @@
           <ns4:bodyPr xmlns:ns4="http://schemas.openxmlformats.org/drawingml/2006/main" wrap="square" rtlCol="0" anchor="t" lIns="0" tIns="0" rIns="0" bIns="0"/>
           <ns5:lstStyle xmlns:ns5="http://schemas.openxmlformats.org/drawingml/2006/main">
             <ns5:lvl1pPr marL="0" indent="0" algn="l">
+              <ns5:lnSpc>
+                <ns5:spcPct val="90000"/>
+              </ns5:lnSpc>
               <ns5:buNone/>
               <ns5:defRPr sz="6400" b="1">
                 <ns5:solidFill>
@@ -543,8 +548,8 @@
         </ns0:nvSpPr>
         <ns0:spPr>
           <ns1:xfrm xmlns:ns1="http://schemas.openxmlformats.org/drawingml/2006/main">
-            <ns1:off x="762000" y="3810000"/>
-            <ns1:ext cx="5381625" cy="38100"/>
+            <ns1:off x="1143000" y="4953000"/>
+            <ns1:ext cx="4972050" cy="38100"/>
           </ns1:xfrm>
           <ns2:prstGeom xmlns:ns2="http://schemas.openxmlformats.org/drawingml/2006/main" prst="rect">
             <ns2:avLst/>
@@ -576,8 +581,8 @@
         </ns0:nvSpPr>
         <ns0:spPr>
           <ns2:xfrm xmlns:ns2="http://schemas.openxmlformats.org/drawingml/2006/main">
-            <ns2:off x="762000" y="4076700"/>
-            <ns2:ext cx="5381625" cy="342900"/>
+            <ns2:off x="1143000" y="5105400"/>
+            <ns2:ext cx="4972050" cy="342900"/>
           </ns2:xfrm>
           <ns3:prstGeom xmlns:ns3="http://schemas.openxmlformats.org/drawingml/2006/main" prst="rect">
             <ns3:avLst/>
@@ -588,7 +593,7 @@
           <ns5:lstStyle xmlns:ns5="http://schemas.openxmlformats.org/drawingml/2006/main">
             <ns5:lvl1pPr marL="0" indent="0" algn="l">
               <ns5:buNone/>
-              <ns5:defRPr sz="1600" b="1" cap="all" spc="130">
+              <ns5:defRPr sz="2000" b="1" cap="all" spc="130">
                 <ns5:solidFill>
                   <ns5:srgbClr val="0F6BFF"/>
                 </ns5:solidFill>
@@ -617,8 +622,8 @@
         </ns0:nvSpPr>
         <ns0:spPr>
           <ns2:xfrm xmlns:ns2="http://schemas.openxmlformats.org/drawingml/2006/main">
-            <ns2:off x="762000" y="4533900"/>
-            <ns2:ext cx="5381625" cy="4572000"/>
+            <ns2:off x="1143000" y="5524500"/>
+            <ns2:ext cx="4972050" cy="4572000"/>
           </ns2:xfrm>
           <ns3:prstGeom xmlns:ns3="http://schemas.openxmlformats.org/drawingml/2006/main" prst="rect">
             <ns3:avLst/>
@@ -629,7 +634,7 @@
           <ns5:lstStyle xmlns:ns5="http://schemas.openxmlformats.org/drawingml/2006/main">
             <ns5:lvl1pPr marL="0" indent="0" algn="l">
               <ns5:buNone/>
-              <ns5:defRPr sz="1800">
+              <ns5:defRPr sz="2200">
                 <ns5:solidFill>
                   <ns5:srgbClr val="000000"/>
                 </ns5:solidFill>
@@ -654,8 +659,8 @@
         </ns0:nvSpPr>
         <ns0:spPr>
           <ns1:xfrm xmlns:ns1="http://schemas.openxmlformats.org/drawingml/2006/main">
-            <ns1:off x="6448425" y="3810000"/>
-            <ns1:ext cx="5381625" cy="38100"/>
+            <ns1:off x="6648450" y="4953000"/>
+            <ns1:ext cx="4972050" cy="38100"/>
           </ns1:xfrm>
           <ns2:prstGeom xmlns:ns2="http://schemas.openxmlformats.org/drawingml/2006/main" prst="rect">
             <ns2:avLst/>
@@ -687,8 +692,8 @@
         </ns0:nvSpPr>
         <ns0:spPr>
           <ns2:xfrm xmlns:ns2="http://schemas.openxmlformats.org/drawingml/2006/main">
-            <ns2:off x="6448425" y="4076700"/>
-            <ns2:ext cx="5381625" cy="342900"/>
+            <ns2:off x="6648450" y="5105400"/>
+            <ns2:ext cx="4972050" cy="342900"/>
           </ns2:xfrm>
           <ns3:prstGeom xmlns:ns3="http://schemas.openxmlformats.org/drawingml/2006/main" prst="rect">
             <ns3:avLst/>
@@ -699,7 +704,7 @@
           <ns5:lstStyle xmlns:ns5="http://schemas.openxmlformats.org/drawingml/2006/main">
             <ns5:lvl1pPr marL="0" indent="0" algn="l">
               <ns5:buNone/>
-              <ns5:defRPr sz="1600" b="1" cap="all" spc="130">
+              <ns5:defRPr sz="2000" b="1" cap="all" spc="130">
                 <ns5:solidFill>
                   <ns5:srgbClr val="0F6BFF"/>
                 </ns5:solidFill>
@@ -728,8 +733,8 @@
         </ns0:nvSpPr>
         <ns0:spPr>
           <ns2:xfrm xmlns:ns2="http://schemas.openxmlformats.org/drawingml/2006/main">
-            <ns2:off x="6448425" y="4533900"/>
-            <ns2:ext cx="5381625" cy="4572000"/>
+            <ns2:off x="6648450" y="5524500"/>
+            <ns2:ext cx="4972050" cy="4572000"/>
           </ns2:xfrm>
           <ns3:prstGeom xmlns:ns3="http://schemas.openxmlformats.org/drawingml/2006/main" prst="rect">
             <ns3:avLst/>
@@ -740,7 +745,7 @@
           <ns5:lstStyle xmlns:ns5="http://schemas.openxmlformats.org/drawingml/2006/main">
             <ns5:lvl1pPr marL="0" indent="0" algn="l">
               <ns5:buNone/>
-              <ns5:defRPr sz="1800">
+              <ns5:defRPr sz="2200">
                 <ns5:solidFill>
                   <ns5:srgbClr val="000000"/>
                 </ns5:solidFill>
@@ -765,8 +770,8 @@
         </ns0:nvSpPr>
         <ns0:spPr>
           <ns1:xfrm xmlns:ns1="http://schemas.openxmlformats.org/drawingml/2006/main">
-            <ns1:off x="12134850" y="3810000"/>
-            <ns1:ext cx="5381625" cy="38100"/>
+            <ns1:off x="12153900" y="4953000"/>
+            <ns1:ext cx="4972050" cy="38100"/>
           </ns1:xfrm>
           <ns2:prstGeom xmlns:ns2="http://schemas.openxmlformats.org/drawingml/2006/main" prst="rect">
             <ns2:avLst/>
@@ -798,8 +803,8 @@
         </ns0:nvSpPr>
         <ns0:spPr>
           <ns2:xfrm xmlns:ns2="http://schemas.openxmlformats.org/drawingml/2006/main">
-            <ns2:off x="12134850" y="4076700"/>
-            <ns2:ext cx="5381625" cy="342900"/>
+            <ns2:off x="12153900" y="5105400"/>
+            <ns2:ext cx="4972050" cy="342900"/>
           </ns2:xfrm>
           <ns3:prstGeom xmlns:ns3="http://schemas.openxmlformats.org/drawingml/2006/main" prst="rect">
             <ns3:avLst/>
@@ -810,7 +815,7 @@
           <ns5:lstStyle xmlns:ns5="http://schemas.openxmlformats.org/drawingml/2006/main">
             <ns5:lvl1pPr marL="0" indent="0" algn="l">
               <ns5:buNone/>
-              <ns5:defRPr sz="1600" b="1" cap="all" spc="130">
+              <ns5:defRPr sz="2000" b="1" cap="all" spc="130">
                 <ns5:solidFill>
                   <ns5:srgbClr val="0F6BFF"/>
                 </ns5:solidFill>
@@ -839,8 +844,8 @@
         </ns0:nvSpPr>
         <ns0:spPr>
           <ns2:xfrm xmlns:ns2="http://schemas.openxmlformats.org/drawingml/2006/main">
-            <ns2:off x="12134850" y="4533900"/>
-            <ns2:ext cx="5381625" cy="4572000"/>
+            <ns2:off x="12153900" y="5524500"/>
+            <ns2:ext cx="4972050" cy="4572000"/>
           </ns2:xfrm>
           <ns3:prstGeom xmlns:ns3="http://schemas.openxmlformats.org/drawingml/2006/main" prst="rect">
             <ns3:avLst/>
@@ -851,7 +856,7 @@
           <ns5:lstStyle xmlns:ns5="http://schemas.openxmlformats.org/drawingml/2006/main">
             <ns5:lvl1pPr marL="0" indent="0" algn="l">
               <ns5:buNone/>
-              <ns5:defRPr sz="1800">
+              <ns5:defRPr sz="2200">
                 <ns5:solidFill>
                   <ns5:srgbClr val="000000"/>
                 </ns5:solidFill>
@@ -878,8 +883,8 @@
         </ns0:nvSpPr>
         <ns0:spPr>
           <ns2:xfrm xmlns:ns2="http://schemas.openxmlformats.org/drawingml/2006/main">
-            <ns2:off x="762000" y="9982200"/>
-            <ns2:ext cx="16764000" cy="228600"/>
+            <ns2:off x="1143000" y="9982200"/>
+            <ns2:ext cx="16002000" cy="228600"/>
           </ns2:xfrm>
           <ns3:prstGeom xmlns:ns3="http://schemas.openxmlformats.org/drawingml/2006/main" prst="rect">
             <ns3:avLst/>
@@ -952,8 +957,8 @@
         </ns0:nvSpPr>
         <ns0:spPr>
           <ns2:xfrm xmlns:ns2="http://schemas.openxmlformats.org/drawingml/2006/main">
-            <ns2:off x="762000" y="1714500"/>
-            <ns2:ext cx="16764000" cy="266700"/>
+            <ns2:off x="1143000" y="2428875"/>
+            <ns2:ext cx="16002000" cy="457200"/>
           </ns2:xfrm>
           <ns3:prstGeom xmlns:ns3="http://schemas.openxmlformats.org/drawingml/2006/main" prst="rect">
             <ns3:avLst/>
@@ -964,7 +969,7 @@
           <ns5:lstStyle xmlns:ns5="http://schemas.openxmlformats.org/drawingml/2006/main">
             <ns5:lvl1pPr marL="0" indent="0" algn="l">
               <ns5:buNone/>
-              <ns5:defRPr sz="1800" b="1" cap="all" spc="140">
+              <ns5:defRPr sz="2800" b="1" cap="all" spc="140">
                 <ns5:solidFill>
                   <ns5:srgbClr val="0F6BFF"/>
                 </ns5:solidFill>
@@ -993,8 +998,8 @@
         </ns0:nvSpPr>
         <ns0:spPr>
           <ns2:xfrm xmlns:ns2="http://schemas.openxmlformats.org/drawingml/2006/main">
-            <ns2:off x="762000" y="2057400"/>
-            <ns2:ext cx="16764000" cy="1047750"/>
+            <ns2:off x="1143000" y="2933700"/>
+            <ns2:ext cx="16002000" cy="1905000"/>
           </ns2:xfrm>
           <ns3:prstGeom xmlns:ns3="http://schemas.openxmlformats.org/drawingml/2006/main" prst="rect">
             <ns3:avLst/>
@@ -1004,6 +1009,9 @@
           <ns4:bodyPr xmlns:ns4="http://schemas.openxmlformats.org/drawingml/2006/main" wrap="square" rtlCol="0" anchor="t" lIns="0" tIns="0" rIns="0" bIns="0"/>
           <ns5:lstStyle xmlns:ns5="http://schemas.openxmlformats.org/drawingml/2006/main">
             <ns5:lvl1pPr marL="0" indent="0" algn="l">
+              <ns5:lnSpc>
+                <ns5:spcPct val="90000"/>
+              </ns5:lnSpc>
               <ns5:buNone/>
               <ns5:defRPr sz="6400" b="1">
                 <ns5:solidFill>
@@ -1034,8 +1042,8 @@
         </ns0:nvSpPr>
         <ns0:spPr>
           <ns2:xfrm xmlns:ns2="http://schemas.openxmlformats.org/drawingml/2006/main">
-            <ns2:off x="762000" y="4191000"/>
-            <ns2:ext cx="16764000" cy="5143500"/>
+            <ns2:off x="1143000" y="4953000"/>
+            <ns2:ext cx="16002000" cy="4381500"/>
           </ns2:xfrm>
           <ns3:prstGeom xmlns:ns3="http://schemas.openxmlformats.org/drawingml/2006/main" prst="rect">
             <ns3:avLst/>
@@ -1059,8 +1067,8 @@
         </ns0:nvSpPr>
         <ns0:spPr>
           <ns2:xfrm xmlns:ns2="http://schemas.openxmlformats.org/drawingml/2006/main">
-            <ns2:off x="762000" y="9982200"/>
-            <ns2:ext cx="16764000" cy="228600"/>
+            <ns2:off x="1143000" y="9982200"/>
+            <ns2:ext cx="16002000" cy="228600"/>
           </ns2:xfrm>
           <ns3:prstGeom xmlns:ns3="http://schemas.openxmlformats.org/drawingml/2006/main" prst="rect">
             <ns3:avLst/>
@@ -1133,8 +1141,8 @@
         </ns0:nvSpPr>
         <ns0:spPr>
           <ns2:xfrm xmlns:ns2="http://schemas.openxmlformats.org/drawingml/2006/main">
-            <ns2:off x="762000" y="1714500"/>
-            <ns2:ext cx="16764000" cy="266700"/>
+            <ns2:off x="1143000" y="2428875"/>
+            <ns2:ext cx="16002000" cy="457200"/>
           </ns2:xfrm>
           <ns3:prstGeom xmlns:ns3="http://schemas.openxmlformats.org/drawingml/2006/main" prst="rect">
             <ns3:avLst/>
@@ -1145,7 +1153,7 @@
           <ns5:lstStyle xmlns:ns5="http://schemas.openxmlformats.org/drawingml/2006/main">
             <ns5:lvl1pPr marL="0" indent="0" algn="l">
               <ns5:buNone/>
-              <ns5:defRPr sz="1800" b="1" cap="all" spc="140">
+              <ns5:defRPr sz="2800" b="1" cap="all" spc="140">
                 <ns5:solidFill>
                   <ns5:srgbClr val="0F6BFF"/>
                 </ns5:solidFill>
@@ -1174,8 +1182,8 @@
         </ns0:nvSpPr>
         <ns0:spPr>
           <ns2:xfrm xmlns:ns2="http://schemas.openxmlformats.org/drawingml/2006/main">
-            <ns2:off x="762000" y="2057400"/>
-            <ns2:ext cx="16764000" cy="1047750"/>
+            <ns2:off x="1143000" y="2933700"/>
+            <ns2:ext cx="16002000" cy="1905000"/>
           </ns2:xfrm>
           <ns3:prstGeom xmlns:ns3="http://schemas.openxmlformats.org/drawingml/2006/main" prst="rect">
             <ns3:avLst/>
@@ -1185,6 +1193,9 @@
           <ns4:bodyPr xmlns:ns4="http://schemas.openxmlformats.org/drawingml/2006/main" wrap="square" rtlCol="0" anchor="t" lIns="0" tIns="0" rIns="0" bIns="0"/>
           <ns5:lstStyle xmlns:ns5="http://schemas.openxmlformats.org/drawingml/2006/main">
             <ns5:lvl1pPr marL="0" indent="0" algn="l">
+              <ns5:lnSpc>
+                <ns5:spcPct val="90000"/>
+              </ns5:lnSpc>
               <ns5:buNone/>
               <ns5:defRPr sz="6400" b="1">
                 <ns5:solidFill>
@@ -1211,8 +1222,8 @@
         </ns0:nvSpPr>
         <ns0:spPr>
           <ns1:xfrm xmlns:ns1="http://schemas.openxmlformats.org/drawingml/2006/main">
-            <ns1:off x="762000" y="3810000"/>
-            <ns1:ext cx="5429250" cy="2571750"/>
+            <ns1:off x="1143000" y="4953000"/>
+            <ns1:ext cx="5181600" cy="2190750"/>
           </ns1:xfrm>
           <ns2:prstGeom xmlns:ns2="http://schemas.openxmlformats.org/drawingml/2006/main" prst="rect">
             <ns2:avLst/>
@@ -1240,8 +1251,8 @@
         </ns0:nvSpPr>
         <ns0:spPr>
           <ns1:xfrm xmlns:ns1="http://schemas.openxmlformats.org/drawingml/2006/main">
-            <ns1:off x="762000" y="3810000"/>
-            <ns1:ext cx="5429250" cy="28575"/>
+            <ns1:off x="1143000" y="4953000"/>
+            <ns1:ext cx="5181600" cy="28575"/>
           </ns1:xfrm>
           <ns2:prstGeom xmlns:ns2="http://schemas.openxmlformats.org/drawingml/2006/main" prst="rect">
             <ns2:avLst/>
@@ -1273,8 +1284,8 @@
         </ns0:nvSpPr>
         <ns0:spPr>
           <ns2:xfrm xmlns:ns2="http://schemas.openxmlformats.org/drawingml/2006/main">
-            <ns2:off x="990600" y="4648200"/>
-            <ns2:ext cx="4972050" cy="304800"/>
+            <ns2:off x="1371600" y="5791200"/>
+            <ns2:ext cx="4724400" cy="304800"/>
           </ns2:xfrm>
           <ns3:prstGeom xmlns:ns3="http://schemas.openxmlformats.org/drawingml/2006/main" prst="rect">
             <ns3:avLst/>
@@ -1314,8 +1325,8 @@
         </ns0:nvSpPr>
         <ns0:spPr>
           <ns2:xfrm xmlns:ns2="http://schemas.openxmlformats.org/drawingml/2006/main">
-            <ns2:off x="990600" y="4991100"/>
-            <ns2:ext cx="4972050" cy="1238250"/>
+            <ns2:off x="1371600" y="6134100"/>
+            <ns2:ext cx="4724400" cy="857250"/>
           </ns2:xfrm>
           <ns3:prstGeom xmlns:ns3="http://schemas.openxmlformats.org/drawingml/2006/main" prst="rect">
             <ns3:avLst/>
@@ -1326,7 +1337,7 @@
           <ns5:lstStyle xmlns:ns5="http://schemas.openxmlformats.org/drawingml/2006/main">
             <ns5:lvl1pPr marL="0" indent="0" algn="l">
               <ns5:buNone/>
-              <ns5:defRPr sz="1200">
+              <ns5:defRPr sz="1800">
                 <ns5:solidFill>
                   <ns5:srgbClr val="000000"/>
                 </ns5:solidFill>
@@ -1351,8 +1362,8 @@
         </ns0:nvSpPr>
         <ns0:spPr>
           <ns1:xfrm xmlns:ns1="http://schemas.openxmlformats.org/drawingml/2006/main">
-            <ns1:off x="6419850" y="3810000"/>
-            <ns1:ext cx="5429250" cy="2571750"/>
+            <ns1:off x="6553200" y="4953000"/>
+            <ns1:ext cx="5181600" cy="2190750"/>
           </ns1:xfrm>
           <ns2:prstGeom xmlns:ns2="http://schemas.openxmlformats.org/drawingml/2006/main" prst="rect">
             <ns2:avLst/>
@@ -1380,8 +1391,8 @@
         </ns0:nvSpPr>
         <ns0:spPr>
           <ns1:xfrm xmlns:ns1="http://schemas.openxmlformats.org/drawingml/2006/main">
-            <ns1:off x="6419850" y="3810000"/>
-            <ns1:ext cx="5429250" cy="28575"/>
+            <ns1:off x="6553200" y="4953000"/>
+            <ns1:ext cx="5181600" cy="28575"/>
           </ns1:xfrm>
           <ns2:prstGeom xmlns:ns2="http://schemas.openxmlformats.org/drawingml/2006/main" prst="rect">
             <ns2:avLst/>
@@ -1413,8 +1424,8 @@
         </ns0:nvSpPr>
         <ns0:spPr>
           <ns2:xfrm xmlns:ns2="http://schemas.openxmlformats.org/drawingml/2006/main">
-            <ns2:off x="6648450" y="4648200"/>
-            <ns2:ext cx="4972050" cy="304800"/>
+            <ns2:off x="6781800" y="5791200"/>
+            <ns2:ext cx="4724400" cy="304800"/>
           </ns2:xfrm>
           <ns3:prstGeom xmlns:ns3="http://schemas.openxmlformats.org/drawingml/2006/main" prst="rect">
             <ns3:avLst/>
@@ -1454,8 +1465,8 @@
         </ns0:nvSpPr>
         <ns0:spPr>
           <ns2:xfrm xmlns:ns2="http://schemas.openxmlformats.org/drawingml/2006/main">
-            <ns2:off x="6648450" y="4991100"/>
-            <ns2:ext cx="4972050" cy="1238250"/>
+            <ns2:off x="6781800" y="6134100"/>
+            <ns2:ext cx="4724400" cy="857250"/>
           </ns2:xfrm>
           <ns3:prstGeom xmlns:ns3="http://schemas.openxmlformats.org/drawingml/2006/main" prst="rect">
             <ns3:avLst/>
@@ -1466,7 +1477,7 @@
           <ns5:lstStyle xmlns:ns5="http://schemas.openxmlformats.org/drawingml/2006/main">
             <ns5:lvl1pPr marL="0" indent="0" algn="l">
               <ns5:buNone/>
-              <ns5:defRPr sz="1200">
+              <ns5:defRPr sz="1800">
                 <ns5:solidFill>
                   <ns5:srgbClr val="000000"/>
                 </ns5:solidFill>
@@ -1491,8 +1502,8 @@
         </ns0:nvSpPr>
         <ns0:spPr>
           <ns1:xfrm xmlns:ns1="http://schemas.openxmlformats.org/drawingml/2006/main">
-            <ns1:off x="12077700" y="3810000"/>
-            <ns1:ext cx="5429250" cy="2571750"/>
+            <ns1:off x="11963400" y="4953000"/>
+            <ns1:ext cx="5181600" cy="2190750"/>
           </ns1:xfrm>
           <ns2:prstGeom xmlns:ns2="http://schemas.openxmlformats.org/drawingml/2006/main" prst="rect">
             <ns2:avLst/>
@@ -1520,8 +1531,8 @@
         </ns0:nvSpPr>
         <ns0:spPr>
           <ns1:xfrm xmlns:ns1="http://schemas.openxmlformats.org/drawingml/2006/main">
-            <ns1:off x="12077700" y="3810000"/>
-            <ns1:ext cx="5429250" cy="28575"/>
+            <ns1:off x="11963400" y="4953000"/>
+            <ns1:ext cx="5181600" cy="28575"/>
           </ns1:xfrm>
           <ns2:prstGeom xmlns:ns2="http://schemas.openxmlformats.org/drawingml/2006/main" prst="rect">
             <ns2:avLst/>
@@ -1553,8 +1564,8 @@
         </ns0:nvSpPr>
         <ns0:spPr>
           <ns2:xfrm xmlns:ns2="http://schemas.openxmlformats.org/drawingml/2006/main">
-            <ns2:off x="12306300" y="4648200"/>
-            <ns2:ext cx="4972050" cy="304800"/>
+            <ns2:off x="12192000" y="5791200"/>
+            <ns2:ext cx="4724400" cy="304800"/>
           </ns2:xfrm>
           <ns3:prstGeom xmlns:ns3="http://schemas.openxmlformats.org/drawingml/2006/main" prst="rect">
             <ns3:avLst/>
@@ -1594,8 +1605,8 @@
         </ns0:nvSpPr>
         <ns0:spPr>
           <ns2:xfrm xmlns:ns2="http://schemas.openxmlformats.org/drawingml/2006/main">
-            <ns2:off x="12306300" y="4991100"/>
-            <ns2:ext cx="4972050" cy="1238250"/>
+            <ns2:off x="12192000" y="6134100"/>
+            <ns2:ext cx="4724400" cy="857250"/>
           </ns2:xfrm>
           <ns3:prstGeom xmlns:ns3="http://schemas.openxmlformats.org/drawingml/2006/main" prst="rect">
             <ns3:avLst/>
@@ -1606,7 +1617,7 @@
           <ns5:lstStyle xmlns:ns5="http://schemas.openxmlformats.org/drawingml/2006/main">
             <ns5:lvl1pPr marL="0" indent="0" algn="l">
               <ns5:buNone/>
-              <ns5:defRPr sz="1200">
+              <ns5:defRPr sz="1800">
                 <ns5:solidFill>
                   <ns5:srgbClr val="000000"/>
                 </ns5:solidFill>
@@ -1631,8 +1642,8 @@
         </ns0:nvSpPr>
         <ns0:spPr>
           <ns1:xfrm xmlns:ns1="http://schemas.openxmlformats.org/drawingml/2006/main">
-            <ns1:off x="762000" y="6610350"/>
-            <ns1:ext cx="5429250" cy="2571750"/>
+            <ns1:off x="1143000" y="7372350"/>
+            <ns1:ext cx="5181600" cy="2190750"/>
           </ns1:xfrm>
           <ns2:prstGeom xmlns:ns2="http://schemas.openxmlformats.org/drawingml/2006/main" prst="rect">
             <ns2:avLst/>
@@ -1660,8 +1671,8 @@
         </ns0:nvSpPr>
         <ns0:spPr>
           <ns1:xfrm xmlns:ns1="http://schemas.openxmlformats.org/drawingml/2006/main">
-            <ns1:off x="762000" y="6610350"/>
-            <ns1:ext cx="5429250" cy="28575"/>
+            <ns1:off x="1143000" y="7372350"/>
+            <ns1:ext cx="5181600" cy="28575"/>
           </ns1:xfrm>
           <ns2:prstGeom xmlns:ns2="http://schemas.openxmlformats.org/drawingml/2006/main" prst="rect">
             <ns2:avLst/>
@@ -1693,8 +1704,8 @@
         </ns0:nvSpPr>
         <ns0:spPr>
           <ns2:xfrm xmlns:ns2="http://schemas.openxmlformats.org/drawingml/2006/main">
-            <ns2:off x="990600" y="7448550"/>
-            <ns2:ext cx="4972050" cy="304800"/>
+            <ns2:off x="1371600" y="8210550"/>
+            <ns2:ext cx="4724400" cy="304800"/>
           </ns2:xfrm>
           <ns3:prstGeom xmlns:ns3="http://schemas.openxmlformats.org/drawingml/2006/main" prst="rect">
             <ns3:avLst/>
@@ -1734,8 +1745,8 @@
         </ns0:nvSpPr>
         <ns0:spPr>
           <ns2:xfrm xmlns:ns2="http://schemas.openxmlformats.org/drawingml/2006/main">
-            <ns2:off x="990600" y="7791450"/>
-            <ns2:ext cx="4972050" cy="1238250"/>
+            <ns2:off x="1371600" y="8553450"/>
+            <ns2:ext cx="4724400" cy="857250"/>
           </ns2:xfrm>
           <ns3:prstGeom xmlns:ns3="http://schemas.openxmlformats.org/drawingml/2006/main" prst="rect">
             <ns3:avLst/>
@@ -1746,7 +1757,7 @@
           <ns5:lstStyle xmlns:ns5="http://schemas.openxmlformats.org/drawingml/2006/main">
             <ns5:lvl1pPr marL="0" indent="0" algn="l">
               <ns5:buNone/>
-              <ns5:defRPr sz="1200">
+              <ns5:defRPr sz="1800">
                 <ns5:solidFill>
                   <ns5:srgbClr val="000000"/>
                 </ns5:solidFill>
@@ -1771,8 +1782,8 @@
         </ns0:nvSpPr>
         <ns0:spPr>
           <ns1:xfrm xmlns:ns1="http://schemas.openxmlformats.org/drawingml/2006/main">
-            <ns1:off x="6419850" y="6610350"/>
-            <ns1:ext cx="5429250" cy="2571750"/>
+            <ns1:off x="6553200" y="7372350"/>
+            <ns1:ext cx="5181600" cy="2190750"/>
           </ns1:xfrm>
           <ns2:prstGeom xmlns:ns2="http://schemas.openxmlformats.org/drawingml/2006/main" prst="rect">
             <ns2:avLst/>
@@ -1800,8 +1811,8 @@
         </ns0:nvSpPr>
         <ns0:spPr>
           <ns1:xfrm xmlns:ns1="http://schemas.openxmlformats.org/drawingml/2006/main">
-            <ns1:off x="6419850" y="6610350"/>
-            <ns1:ext cx="5429250" cy="28575"/>
+            <ns1:off x="6553200" y="7372350"/>
+            <ns1:ext cx="5181600" cy="28575"/>
           </ns1:xfrm>
           <ns2:prstGeom xmlns:ns2="http://schemas.openxmlformats.org/drawingml/2006/main" prst="rect">
             <ns2:avLst/>
@@ -1833,8 +1844,8 @@
         </ns0:nvSpPr>
         <ns0:spPr>
           <ns2:xfrm xmlns:ns2="http://schemas.openxmlformats.org/drawingml/2006/main">
-            <ns2:off x="6648450" y="7448550"/>
-            <ns2:ext cx="4972050" cy="304800"/>
+            <ns2:off x="6781800" y="8210550"/>
+            <ns2:ext cx="4724400" cy="304800"/>
           </ns2:xfrm>
           <ns3:prstGeom xmlns:ns3="http://schemas.openxmlformats.org/drawingml/2006/main" prst="rect">
             <ns3:avLst/>
@@ -1874,8 +1885,8 @@
         </ns0:nvSpPr>
         <ns0:spPr>
           <ns2:xfrm xmlns:ns2="http://schemas.openxmlformats.org/drawingml/2006/main">
-            <ns2:off x="6648450" y="7791450"/>
-            <ns2:ext cx="4972050" cy="1238250"/>
+            <ns2:off x="6781800" y="8553450"/>
+            <ns2:ext cx="4724400" cy="857250"/>
           </ns2:xfrm>
           <ns3:prstGeom xmlns:ns3="http://schemas.openxmlformats.org/drawingml/2006/main" prst="rect">
             <ns3:avLst/>
@@ -1886,7 +1897,7 @@
           <ns5:lstStyle xmlns:ns5="http://schemas.openxmlformats.org/drawingml/2006/main">
             <ns5:lvl1pPr marL="0" indent="0" algn="l">
               <ns5:buNone/>
-              <ns5:defRPr sz="1200">
+              <ns5:defRPr sz="1800">
                 <ns5:solidFill>
                   <ns5:srgbClr val="000000"/>
                 </ns5:solidFill>
@@ -1911,8 +1922,8 @@
         </ns0:nvSpPr>
         <ns0:spPr>
           <ns1:xfrm xmlns:ns1="http://schemas.openxmlformats.org/drawingml/2006/main">
-            <ns1:off x="12077700" y="6610350"/>
-            <ns1:ext cx="5429250" cy="2571750"/>
+            <ns1:off x="11963400" y="7372350"/>
+            <ns1:ext cx="5181600" cy="2190750"/>
           </ns1:xfrm>
           <ns2:prstGeom xmlns:ns2="http://schemas.openxmlformats.org/drawingml/2006/main" prst="rect">
             <ns2:avLst/>
@@ -1940,8 +1951,8 @@
         </ns0:nvSpPr>
         <ns0:spPr>
           <ns1:xfrm xmlns:ns1="http://schemas.openxmlformats.org/drawingml/2006/main">
-            <ns1:off x="12077700" y="6610350"/>
-            <ns1:ext cx="5429250" cy="28575"/>
+            <ns1:off x="11963400" y="7372350"/>
+            <ns1:ext cx="5181600" cy="28575"/>
           </ns1:xfrm>
           <ns2:prstGeom xmlns:ns2="http://schemas.openxmlformats.org/drawingml/2006/main" prst="rect">
             <ns2:avLst/>
@@ -1973,8 +1984,8 @@
         </ns0:nvSpPr>
         <ns0:spPr>
           <ns2:xfrm xmlns:ns2="http://schemas.openxmlformats.org/drawingml/2006/main">
-            <ns2:off x="12306300" y="7448550"/>
-            <ns2:ext cx="4972050" cy="304800"/>
+            <ns2:off x="12192000" y="8210550"/>
+            <ns2:ext cx="4724400" cy="304800"/>
           </ns2:xfrm>
           <ns3:prstGeom xmlns:ns3="http://schemas.openxmlformats.org/drawingml/2006/main" prst="rect">
             <ns3:avLst/>
@@ -2014,8 +2025,8 @@
         </ns0:nvSpPr>
         <ns0:spPr>
           <ns2:xfrm xmlns:ns2="http://schemas.openxmlformats.org/drawingml/2006/main">
-            <ns2:off x="12306300" y="7791450"/>
-            <ns2:ext cx="4972050" cy="1238250"/>
+            <ns2:off x="12192000" y="8553450"/>
+            <ns2:ext cx="4724400" cy="857250"/>
           </ns2:xfrm>
           <ns3:prstGeom xmlns:ns3="http://schemas.openxmlformats.org/drawingml/2006/main" prst="rect">
             <ns3:avLst/>
@@ -2026,7 +2037,7 @@
           <ns5:lstStyle xmlns:ns5="http://schemas.openxmlformats.org/drawingml/2006/main">
             <ns5:lvl1pPr marL="0" indent="0" algn="l">
               <ns5:buNone/>
-              <ns5:defRPr sz="1200">
+              <ns5:defRPr sz="1800">
                 <ns5:solidFill>
                   <ns5:srgbClr val="000000"/>
                 </ns5:solidFill>
@@ -2053,8 +2064,8 @@
         </ns0:nvSpPr>
         <ns0:spPr>
           <ns2:xfrm xmlns:ns2="http://schemas.openxmlformats.org/drawingml/2006/main">
-            <ns2:off x="762000" y="9982200"/>
-            <ns2:ext cx="16764000" cy="228600"/>
+            <ns2:off x="1143000" y="9982200"/>
+            <ns2:ext cx="16002000" cy="228600"/>
           </ns2:xfrm>
           <ns3:prstGeom xmlns:ns3="http://schemas.openxmlformats.org/drawingml/2006/main" prst="rect">
             <ns3:avLst/>
@@ -2127,8 +2138,8 @@
         </ns0:nvSpPr>
         <ns0:spPr>
           <ns2:xfrm xmlns:ns2="http://schemas.openxmlformats.org/drawingml/2006/main">
-            <ns2:off x="762000" y="1714500"/>
-            <ns2:ext cx="16764000" cy="266700"/>
+            <ns2:off x="1143000" y="2428875"/>
+            <ns2:ext cx="16002000" cy="457200"/>
           </ns2:xfrm>
           <ns3:prstGeom xmlns:ns3="http://schemas.openxmlformats.org/drawingml/2006/main" prst="rect">
             <ns3:avLst/>
@@ -2139,7 +2150,7 @@
           <ns5:lstStyle xmlns:ns5="http://schemas.openxmlformats.org/drawingml/2006/main">
             <ns5:lvl1pPr marL="0" indent="0" algn="l">
               <ns5:buNone/>
-              <ns5:defRPr sz="1800" b="1" cap="all" spc="140">
+              <ns5:defRPr sz="2800" b="1" cap="all" spc="140">
                 <ns5:solidFill>
                   <ns5:srgbClr val="0F6BFF"/>
                 </ns5:solidFill>
@@ -2168,8 +2179,8 @@
         </ns0:nvSpPr>
         <ns0:spPr>
           <ns2:xfrm xmlns:ns2="http://schemas.openxmlformats.org/drawingml/2006/main">
-            <ns2:off x="762000" y="2057400"/>
-            <ns2:ext cx="16764000" cy="1047750"/>
+            <ns2:off x="1143000" y="2933700"/>
+            <ns2:ext cx="16002000" cy="1905000"/>
           </ns2:xfrm>
           <ns3:prstGeom xmlns:ns3="http://schemas.openxmlformats.org/drawingml/2006/main" prst="rect">
             <ns3:avLst/>
@@ -2179,6 +2190,9 @@
           <ns4:bodyPr xmlns:ns4="http://schemas.openxmlformats.org/drawingml/2006/main" wrap="square" rtlCol="0" anchor="t" lIns="0" tIns="0" rIns="0" bIns="0"/>
           <ns5:lstStyle xmlns:ns5="http://schemas.openxmlformats.org/drawingml/2006/main">
             <ns5:lvl1pPr marL="0" indent="0" algn="l">
+              <ns5:lnSpc>
+                <ns5:spcPct val="90000"/>
+              </ns5:lnSpc>
               <ns5:buNone/>
               <ns5:defRPr sz="6400" b="1">
                 <ns5:solidFill>
@@ -2209,8 +2223,8 @@
         </ns0:nvSpPr>
         <ns0:spPr>
           <ns2:xfrm xmlns:ns2="http://schemas.openxmlformats.org/drawingml/2006/main">
-            <ns2:off x="762000" y="3810000"/>
-            <ns2:ext cx="8382000" cy="5524500"/>
+            <ns2:off x="1143000" y="4953000"/>
+            <ns2:ext cx="7810500" cy="4381500"/>
           </ns2:xfrm>
           <ns3:prstGeom xmlns:ns3="http://schemas.openxmlformats.org/drawingml/2006/main" prst="rect">
             <ns3:avLst/>
@@ -2221,7 +2235,7 @@
           <ns5:lstStyle xmlns:ns5="http://schemas.openxmlformats.org/drawingml/2006/main">
             <ns5:lvl1pPr marL="0" indent="0" algn="l">
               <ns5:buNone/>
-              <ns5:defRPr sz="1800">
+              <ns5:defRPr sz="2200">
                 <ns5:solidFill>
                   <ns5:srgbClr val="000000"/>
                 </ns5:solidFill>
@@ -2250,8 +2264,8 @@
         </ns0:nvSpPr>
         <ns0:spPr>
           <ns2:xfrm xmlns:ns2="http://schemas.openxmlformats.org/drawingml/2006/main">
-            <ns2:off x="9334500" y="3810000"/>
-            <ns2:ext cx="8382000" cy="5524500"/>
+            <ns2:off x="9334500" y="4953000"/>
+            <ns2:ext cx="7810500" cy="4381500"/>
           </ns2:xfrm>
           <ns3:prstGeom xmlns:ns3="http://schemas.openxmlformats.org/drawingml/2006/main" prst="rect">
             <ns3:avLst/>
@@ -2262,7 +2276,7 @@
           <ns5:lstStyle xmlns:ns5="http://schemas.openxmlformats.org/drawingml/2006/main">
             <ns5:lvl1pPr marL="0" indent="0" algn="l">
               <ns5:buNone/>
-              <ns5:defRPr sz="1800">
+              <ns5:defRPr sz="2200">
                 <ns5:solidFill>
                   <ns5:srgbClr val="000000"/>
                 </ns5:solidFill>
@@ -2289,8 +2303,8 @@
         </ns0:nvSpPr>
         <ns0:spPr>
           <ns2:xfrm xmlns:ns2="http://schemas.openxmlformats.org/drawingml/2006/main">
-            <ns2:off x="762000" y="9982200"/>
-            <ns2:ext cx="16764000" cy="228600"/>
+            <ns2:off x="1143000" y="9982200"/>
+            <ns2:ext cx="16002000" cy="228600"/>
           </ns2:xfrm>
           <ns3:prstGeom xmlns:ns3="http://schemas.openxmlformats.org/drawingml/2006/main" prst="rect">
             <ns3:avLst/>
@@ -2437,8 +2451,8 @@
         </ns0:nvSpPr>
         <ns0:spPr>
           <ns2:xfrm xmlns:ns2="http://schemas.openxmlformats.org/drawingml/2006/main">
-            <ns2:off x="762000" y="1714500"/>
-            <ns2:ext cx="16764000" cy="266700"/>
+            <ns2:off x="1143000" y="2428875"/>
+            <ns2:ext cx="16002000" cy="457200"/>
           </ns2:xfrm>
           <ns3:prstGeom xmlns:ns3="http://schemas.openxmlformats.org/drawingml/2006/main" prst="rect">
             <ns3:avLst/>
@@ -2449,7 +2463,7 @@
           <ns5:lstStyle xmlns:ns5="http://schemas.openxmlformats.org/drawingml/2006/main">
             <ns5:lvl1pPr marL="0" indent="0" algn="l">
               <ns5:buNone/>
-              <ns5:defRPr sz="1800" b="1" cap="all" spc="140">
+              <ns5:defRPr sz="2800" b="1" cap="all" spc="140">
                 <ns5:solidFill>
                   <ns5:srgbClr val="0F6BFF"/>
                 </ns5:solidFill>
@@ -2478,8 +2492,8 @@
         </ns0:nvSpPr>
         <ns0:spPr>
           <ns2:xfrm xmlns:ns2="http://schemas.openxmlformats.org/drawingml/2006/main">
-            <ns2:off x="762000" y="2057400"/>
-            <ns2:ext cx="16764000" cy="1047750"/>
+            <ns2:off x="1143000" y="2933700"/>
+            <ns2:ext cx="16002000" cy="1905000"/>
           </ns2:xfrm>
           <ns3:prstGeom xmlns:ns3="http://schemas.openxmlformats.org/drawingml/2006/main" prst="rect">
             <ns3:avLst/>
@@ -2489,6 +2503,9 @@
           <ns4:bodyPr xmlns:ns4="http://schemas.openxmlformats.org/drawingml/2006/main" wrap="square" rtlCol="0" anchor="t" lIns="0" tIns="0" rIns="0" bIns="0"/>
           <ns5:lstStyle xmlns:ns5="http://schemas.openxmlformats.org/drawingml/2006/main">
             <ns5:lvl1pPr marL="0" indent="0" algn="l">
+              <ns5:lnSpc>
+                <ns5:spcPct val="90000"/>
+              </ns5:lnSpc>
               <ns5:buNone/>
               <ns5:defRPr sz="6400" b="1">
                 <ns5:solidFill>
@@ -2519,8 +2536,8 @@
         </ns0:nvSpPr>
         <ns0:spPr>
           <ns2:xfrm xmlns:ns2="http://schemas.openxmlformats.org/drawingml/2006/main">
-            <ns2:off x="762000" y="3810000"/>
-            <ns2:ext cx="16764000" cy="5715000"/>
+            <ns2:off x="1143000" y="5524500"/>
+            <ns2:ext cx="16002000" cy="3810000"/>
           </ns2:xfrm>
           <ns3:prstGeom xmlns:ns3="http://schemas.openxmlformats.org/drawingml/2006/main" prst="rect">
             <ns3:avLst/>
@@ -2558,8 +2575,206 @@
         </ns0:nvSpPr>
         <ns0:spPr>
           <ns2:xfrm xmlns:ns2="http://schemas.openxmlformats.org/drawingml/2006/main">
-            <ns2:off x="762000" y="9982200"/>
-            <ns2:ext cx="16764000" cy="228600"/>
+            <ns2:off x="1143000" y="9982200"/>
+            <ns2:ext cx="16002000" cy="228600"/>
+          </ns2:xfrm>
+          <ns3:prstGeom xmlns:ns3="http://schemas.openxmlformats.org/drawingml/2006/main" prst="rect">
+            <ns3:avLst/>
+          </ns3:prstGeom>
+        </ns0:spPr>
+        <ns0:txBody>
+          <ns4:bodyPr xmlns:ns4="http://schemas.openxmlformats.org/drawingml/2006/main" wrap="square" rtlCol="0" anchor="t" lIns="0" tIns="0" rIns="0" bIns="0"/>
+          <ns5:lstStyle xmlns:ns5="http://schemas.openxmlformats.org/drawingml/2006/main">
+            <ns5:lvl1pPr marL="0" indent="0" algn="l">
+              <ns5:buNone/>
+              <ns5:defRPr sz="900" cap="all" spc="50">
+                <ns5:solidFill>
+                  <ns5:srgbClr val="6B7280"/>
+                </ns5:solidFill>
+                <ns5:latin typeface="Aptos"/>
+              </ns5:defRPr>
+            </ns5:lvl1pPr>
+          </ns5:lstStyle>
+          <ns6:p xmlns:ns6="http://schemas.openxmlformats.org/drawingml/2006/main">
+            <ns6:r>
+              <ns6:rPr lang="en-US"/>
+              <ns6:t>OPEN COMPONENT MODEL · OCM.SOFTWARE</ns6:t>
+            </ns6:r>
+            <ns6:endParaRPr lang="en-US"/>
+          </ns6:p>
+        </ns0:txBody>
+      </ns0:sp>
+    </p:spTree>
+  </p:cSld>
+  <p:clrMapOvr>
+    <a:masterClrMapping/>
+  </p:clrMapOvr>
+</p:sldLayout>
+</file>
+
+<file path=ppt/slideLayouts/slideLayout9.xml><?xml version="1.0" encoding="utf-8"?>
+<p:sldLayout xmlns:a="http://schemas.openxmlformats.org/drawingml/2006/main" xmlns:r="http://schemas.openxmlformats.org/officeDocument/2006/relationships" xmlns:p="http://schemas.openxmlformats.org/presentationml/2006/main" type="obj" preserve="1" userDrawn="1">
+  <p:cSld name="Plain / Compact">
+    <p:bg>
+      <p:bgPr>
+        <a:solidFill>
+          <a:srgbClr val="FFFFFF"/>
+        </a:solidFill>
+        <a:effectLst/>
+      </p:bgPr>
+    </p:bg>
+    <p:spTree>
+      <p:nvGrpSpPr>
+        <p:cNvPr id="1" name=""/>
+        <p:cNvGrpSpPr/>
+        <p:nvPr/>
+      </p:nvGrpSpPr>
+      <p:grpSpPr>
+        <a:xfrm>
+          <a:off x="0" y="0"/>
+          <a:ext cx="0" cy="0"/>
+          <a:chOff x="0" y="0"/>
+          <a:chExt cx="0" cy="0"/>
+        </a:xfrm>
+      </p:grpSpPr>
+      <ns0:sp xmlns:ns0="http://schemas.openxmlformats.org/presentationml/2006/main">
+        <ns0:nvSpPr>
+          <ns0:cNvPr id="10" name="Eyebrow"/>
+          <ns0:cNvSpPr>
+            <ns1:spLocks xmlns:ns1="http://schemas.openxmlformats.org/drawingml/2006/main" noGrp="1"/>
+          </ns0:cNvSpPr>
+          <ns0:nvPr>
+            <ns0:ph type="body" idx="1"/>
+          </ns0:nvPr>
+        </ns0:nvSpPr>
+        <ns0:spPr>
+          <ns2:xfrm xmlns:ns2="http://schemas.openxmlformats.org/drawingml/2006/main">
+            <ns2:off x="1143000" y="2428875"/>
+            <ns2:ext cx="16002000" cy="457200"/>
+          </ns2:xfrm>
+          <ns3:prstGeom xmlns:ns3="http://schemas.openxmlformats.org/drawingml/2006/main" prst="rect">
+            <ns3:avLst/>
+          </ns3:prstGeom>
+        </ns0:spPr>
+        <ns0:txBody>
+          <ns4:bodyPr xmlns:ns4="http://schemas.openxmlformats.org/drawingml/2006/main" wrap="square" rtlCol="0" anchor="t" lIns="0" tIns="0" rIns="0" bIns="0"/>
+          <ns5:lstStyle xmlns:ns5="http://schemas.openxmlformats.org/drawingml/2006/main">
+            <ns5:lvl1pPr marL="0" indent="0" algn="l">
+              <ns5:buNone/>
+              <ns5:defRPr sz="2800" b="1" cap="all" spc="140">
+                <ns5:solidFill>
+                  <ns5:srgbClr val="0F6BFF"/>
+                </ns5:solidFill>
+                <ns5:latin typeface="Aptos"/>
+              </ns5:defRPr>
+            </ns5:lvl1pPr>
+          </ns5:lstStyle>
+          <ns6:p xmlns:ns6="http://schemas.openxmlformats.org/drawingml/2006/main">
+            <ns6:r>
+              <ns6:rPr lang="en-US"/>
+              <ns6:t>EYEBROW</ns6:t>
+            </ns6:r>
+            <ns6:endParaRPr lang="en-US"/>
+          </ns6:p>
+        </ns0:txBody>
+      </ns0:sp>
+      <ns0:sp xmlns:ns0="http://schemas.openxmlformats.org/presentationml/2006/main">
+        <ns0:nvSpPr>
+          <ns0:cNvPr id="11" name="Title"/>
+          <ns0:cNvSpPr>
+            <ns1:spLocks xmlns:ns1="http://schemas.openxmlformats.org/drawingml/2006/main" noGrp="1"/>
+          </ns0:cNvSpPr>
+          <ns0:nvPr>
+            <ns0:ph type="title" idx="2"/>
+          </ns0:nvPr>
+        </ns0:nvSpPr>
+        <ns0:spPr>
+          <ns2:xfrm xmlns:ns2="http://schemas.openxmlformats.org/drawingml/2006/main">
+            <ns2:off x="1143000" y="2933700"/>
+            <ns2:ext cx="16002000" cy="1905000"/>
+          </ns2:xfrm>
+          <ns3:prstGeom xmlns:ns3="http://schemas.openxmlformats.org/drawingml/2006/main" prst="rect">
+            <ns3:avLst/>
+          </ns3:prstGeom>
+        </ns0:spPr>
+        <ns0:txBody>
+          <ns4:bodyPr xmlns:ns4="http://schemas.openxmlformats.org/drawingml/2006/main" wrap="square" rtlCol="0" anchor="t" lIns="0" tIns="0" rIns="0" bIns="0"/>
+          <ns5:lstStyle xmlns:ns5="http://schemas.openxmlformats.org/drawingml/2006/main">
+            <ns5:lvl1pPr marL="0" indent="0" algn="l">
+              <ns5:lnSpc>
+                <ns5:spcPct val="90000"/>
+              </ns5:lnSpc>
+              <ns5:buNone/>
+              <ns5:defRPr sz="6400" b="1">
+                <ns5:solidFill>
+                  <ns5:srgbClr val="000000"/>
+                </ns5:solidFill>
+                <ns5:latin typeface="Aptos Display"/>
+              </ns5:defRPr>
+            </ns5:lvl1pPr>
+          </ns5:lstStyle>
+          <ns6:p xmlns:ns6="http://schemas.openxmlformats.org/drawingml/2006/main">
+            <ns6:r>
+              <ns6:rPr lang="en-US"/>
+              <ns6:t>Section title goes here.</ns6:t>
+            </ns6:r>
+            <ns6:endParaRPr lang="en-US"/>
+          </ns6:p>
+        </ns0:txBody>
+      </ns0:sp>
+      <ns0:sp xmlns:ns0="http://schemas.openxmlformats.org/presentationml/2006/main">
+        <ns0:nvSpPr>
+          <ns0:cNvPr id="12" name="Body"/>
+          <ns0:cNvSpPr>
+            <ns1:spLocks xmlns:ns1="http://schemas.openxmlformats.org/drawingml/2006/main" noGrp="1"/>
+          </ns0:cNvSpPr>
+          <ns0:nvPr>
+            <ns0:ph type="body" idx="10"/>
+          </ns0:nvPr>
+        </ns0:nvSpPr>
+        <ns0:spPr>
+          <ns2:xfrm xmlns:ns2="http://schemas.openxmlformats.org/drawingml/2006/main">
+            <ns2:off x="1143000" y="4953000"/>
+            <ns2:ext cx="16002000" cy="4381500"/>
+          </ns2:xfrm>
+          <ns3:prstGeom xmlns:ns3="http://schemas.openxmlformats.org/drawingml/2006/main" prst="rect">
+            <ns3:avLst/>
+          </ns3:prstGeom>
+        </ns0:spPr>
+        <ns0:txBody>
+          <ns4:bodyPr xmlns:ns4="http://schemas.openxmlformats.org/drawingml/2006/main" wrap="square" rtlCol="0" anchor="t" lIns="0" tIns="0" rIns="0" bIns="0"/>
+          <ns5:lstStyle xmlns:ns5="http://schemas.openxmlformats.org/drawingml/2006/main">
+            <ns5:lvl1pPr marL="0" indent="0" algn="l">
+              <ns5:buNone/>
+              <ns5:defRPr sz="2200">
+                <ns5:solidFill>
+                  <ns5:srgbClr val="000000"/>
+                </ns5:solidFill>
+                <ns5:latin typeface="Aptos"/>
+              </ns5:defRPr>
+            </ns5:lvl1pPr>
+          </ns5:lstStyle>
+          <ns6:p xmlns:ns6="http://schemas.openxmlformats.org/drawingml/2006/main">
+            <ns6:r>
+              <ns6:rPr lang="en-US"/>
+              <ns6:t>Body text.</ns6:t>
+            </ns6:r>
+            <ns6:endParaRPr lang="en-US"/>
+          </ns6:p>
+        </ns0:txBody>
+      </ns0:sp>
+      <ns0:sp xmlns:ns0="http://schemas.openxmlformats.org/presentationml/2006/main">
+        <ns0:nvSpPr>
+          <ns0:cNvPr id="13" name="Footer"/>
+          <ns0:cNvSpPr>
+            <ns1:spLocks xmlns:ns1="http://schemas.openxmlformats.org/drawingml/2006/main" noGrp="1"/>
+          </ns0:cNvSpPr>
+          <ns0:nvPr/>
+        </ns0:nvSpPr>
+        <ns0:spPr>
+          <ns2:xfrm xmlns:ns2="http://schemas.openxmlformats.org/drawingml/2006/main">
+            <ns2:off x="1143000" y="9982200"/>
+            <ns2:ext cx="16002000" cy="228600"/>
           </ns2:xfrm>
           <ns3:prstGeom xmlns:ns3="http://schemas.openxmlformats.org/drawingml/2006/main" prst="rect">
             <ns3:avLst/>
@@ -2848,6 +3063,7 @@
     <p:sldLayoutId id="2147483654" r:id="rId7"/>
     <p:sldLayoutId id="2147483655" r:id="rId8"/>
     <p:sldLayoutId id="2147483656" r:id="rId9"/>
+    <p:sldLayoutId id="2147483657" r:id="rId10"/>
   </p:sldLayoutIdLst>
   <p:txStyles>
     <p:titleStyle>
@@ -3184,7 +3400,7 @@
                   <a:srgbClr val="FFFFFF"/>
                 </a:solidFill>
               </a:rPr>
-              <a:t>Sovereign </a:t>
+              <a:t/>
             </a:r>
             <a:r>
               <a:rPr>
@@ -3203,7 +3419,7 @@
                   <a:lin ang="0" scaled="1"/>
                 </a:gradFill>
               </a:rPr>
-              <a:t>Clouds</a:t>
+              <a:t>Sovereign Clouds</a:t>
             </a:r>
           </a:p>
         </p:txBody>
@@ -3328,6 +3544,773 @@
       <p:grpSpPr/>
       <p:sp>
         <p:nvSpPr>
+          <p:cNvPr id="2" name="Text Placeholder 1"/>
+          <p:cNvSpPr>
+            <a:spLocks noGrp="1"/>
+          </p:cNvSpPr>
+          <p:nvPr>
+            <p:ph type="body" idx="1"/>
+          </p:nvPr>
+        </p:nvSpPr>
+        <p:spPr/>
+        <p:txBody>
+          <a:bodyPr/>
+          <a:lstStyle/>
+          <a:p>
+            <a:r>
+              <a:t>WHAT OCM UNLOCKS</a:t>
+            </a:r>
+          </a:p>
+        </p:txBody>
+      </p:sp>
+      <p:sp>
+        <p:nvSpPr>
+          <p:cNvPr id="3" name="Title 2"/>
+          <p:cNvSpPr>
+            <a:spLocks noGrp="1"/>
+          </p:cNvSpPr>
+          <p:nvPr>
+            <p:ph type="title" idx="2"/>
+          </p:nvPr>
+        </p:nvSpPr>
+        <p:spPr/>
+        <p:txBody>
+          <a:bodyPr/>
+          <a:lstStyle/>
+          <a:p>
+            <a:r>
+              <a:t>One model unlocks all of this.</a:t>
+            </a:r>
+          </a:p>
+        </p:txBody>
+      </p:sp>
+      <p:sp>
+        <p:nvSpPr>
+          <p:cNvPr id="4" name="Text Placeholder 3"/>
+          <p:cNvSpPr>
+            <a:spLocks noGrp="1"/>
+          </p:cNvSpPr>
+          <p:nvPr>
+            <p:ph type="body" idx="20"/>
+          </p:nvPr>
+        </p:nvSpPr>
+        <p:spPr/>
+        <p:txBody>
+          <a:bodyPr/>
+          <a:lstStyle/>
+          <a:p>
+            <a:r>
+              <a:t>Code signing across stacks</a:t>
+            </a:r>
+          </a:p>
+        </p:txBody>
+      </p:sp>
+      <p:sp>
+        <p:nvSpPr>
+          <p:cNvPr id="5" name="Text Placeholder 4"/>
+          <p:cNvSpPr>
+            <a:spLocks noGrp="1"/>
+          </p:cNvSpPr>
+          <p:nvPr>
+            <p:ph type="body" idx="21"/>
+          </p:nvPr>
+        </p:nvSpPr>
+        <p:spPr/>
+        <p:txBody>
+          <a:bodyPr/>
+          <a:lstStyle/>
+          <a:p>
+            <a:r>
+              <a:t>Sign once at source; verify everywhere, with no per-stack tooling.</a:t>
+            </a:r>
+          </a:p>
+        </p:txBody>
+      </p:sp>
+      <p:sp>
+        <p:nvSpPr>
+          <p:cNvPr id="6" name="Text Placeholder 5"/>
+          <p:cNvSpPr>
+            <a:spLocks noGrp="1"/>
+          </p:cNvSpPr>
+          <p:nvPr>
+            <p:ph type="body" idx="22"/>
+          </p:nvPr>
+        </p:nvSpPr>
+        <p:spPr/>
+        <p:txBody>
+          <a:bodyPr/>
+          <a:lstStyle/>
+          <a:p>
+            <a:r>
+              <a:t>Air-gapped delivery</a:t>
+            </a:r>
+          </a:p>
+        </p:txBody>
+      </p:sp>
+      <p:sp>
+        <p:nvSpPr>
+          <p:cNvPr id="7" name="Text Placeholder 6"/>
+          <p:cNvSpPr>
+            <a:spLocks noGrp="1"/>
+          </p:cNvSpPr>
+          <p:nvPr>
+            <p:ph type="body" idx="23"/>
+          </p:nvPr>
+        </p:nvSpPr>
+        <p:spPr/>
+        <p:txBody>
+          <a:bodyPr/>
+          <a:lstStyle/>
+          <a:p>
+            <a:r>
+              <a:t>Walk a complete component across an air gap; verify at destination.</a:t>
+            </a:r>
+          </a:p>
+        </p:txBody>
+      </p:sp>
+      <p:sp>
+        <p:nvSpPr>
+          <p:cNvPr id="8" name="Text Placeholder 7"/>
+          <p:cNvSpPr>
+            <a:spLocks noGrp="1"/>
+          </p:cNvSpPr>
+          <p:nvPr>
+            <p:ph type="body" idx="24"/>
+          </p:nvPr>
+        </p:nvSpPr>
+        <p:spPr/>
+        <p:txBody>
+          <a:bodyPr/>
+          <a:lstStyle/>
+          <a:p>
+            <a:r>
+              <a:t>Kubernetes-native deployment</a:t>
+            </a:r>
+          </a:p>
+        </p:txBody>
+      </p:sp>
+      <p:sp>
+        <p:nvSpPr>
+          <p:cNvPr id="9" name="Text Placeholder 8"/>
+          <p:cNvSpPr>
+            <a:spLocks noGrp="1"/>
+          </p:cNvSpPr>
+          <p:nvPr>
+            <p:ph type="body" idx="25"/>
+          </p:nvPr>
+        </p:nvSpPr>
+        <p:spPr/>
+        <p:txBody>
+          <a:bodyPr/>
+          <a:lstStyle/>
+          <a:p>
+            <a:r>
+              <a:t>OCM controllers deploy components directly into clusters.</a:t>
+            </a:r>
+          </a:p>
+        </p:txBody>
+      </p:sp>
+      <p:sp>
+        <p:nvSpPr>
+          <p:cNvPr id="10" name="Text Placeholder 9"/>
+          <p:cNvSpPr>
+            <a:spLocks noGrp="1"/>
+          </p:cNvSpPr>
+          <p:nvPr>
+            <p:ph type="body" idx="26"/>
+          </p:nvPr>
+        </p:nvSpPr>
+        <p:spPr/>
+        <p:txBody>
+          <a:bodyPr/>
+          <a:lstStyle/>
+          <a:p>
+            <a:r>
+              <a:t>Asynchronous security scans</a:t>
+            </a:r>
+          </a:p>
+        </p:txBody>
+      </p:sp>
+      <p:sp>
+        <p:nvSpPr>
+          <p:cNvPr id="11" name="Text Placeholder 10"/>
+          <p:cNvSpPr>
+            <a:spLocks noGrp="1"/>
+          </p:cNvSpPr>
+          <p:nvPr>
+            <p:ph type="body" idx="27"/>
+          </p:nvPr>
+        </p:nvSpPr>
+        <p:spPr/>
+        <p:txBody>
+          <a:bodyPr/>
+          <a:lstStyle/>
+          <a:p>
+            <a:r>
+              <a:t>Continuous scanning, even after release; findings tied to component identity.</a:t>
+            </a:r>
+          </a:p>
+        </p:txBody>
+      </p:sp>
+      <p:sp>
+        <p:nvSpPr>
+          <p:cNvPr id="12" name="Text Placeholder 11"/>
+          <p:cNvSpPr>
+            <a:spLocks noGrp="1"/>
+          </p:cNvSpPr>
+          <p:nvPr>
+            <p:ph type="body" idx="28"/>
+          </p:nvPr>
+        </p:nvSpPr>
+        <p:spPr/>
+        <p:txBody>
+          <a:bodyPr/>
+          <a:lstStyle/>
+          <a:p>
+            <a:r>
+              <a:t>One source of truth</a:t>
+            </a:r>
+          </a:p>
+        </p:txBody>
+      </p:sp>
+      <p:sp>
+        <p:nvSpPr>
+          <p:cNvPr id="13" name="Text Placeholder 12"/>
+          <p:cNvSpPr>
+            <a:spLocks noGrp="1"/>
+          </p:cNvSpPr>
+          <p:nvPr>
+            <p:ph type="body" idx="29"/>
+          </p:nvPr>
+        </p:nvSpPr>
+        <p:spPr/>
+        <p:txBody>
+          <a:bodyPr/>
+          <a:lstStyle/>
+          <a:p>
+            <a:r>
+              <a:t>Rebuild any landscape from a single signed descriptor.</a:t>
+            </a:r>
+          </a:p>
+        </p:txBody>
+      </p:sp>
+      <p:sp>
+        <p:nvSpPr>
+          <p:cNvPr id="14" name="Text Placeholder 13"/>
+          <p:cNvSpPr>
+            <a:spLocks noGrp="1"/>
+          </p:cNvSpPr>
+          <p:nvPr>
+            <p:ph type="body" idx="30"/>
+          </p:nvPr>
+        </p:nvSpPr>
+        <p:spPr/>
+        <p:txBody>
+          <a:bodyPr/>
+          <a:lstStyle/>
+          <a:p>
+            <a:r>
+              <a:t>Automated compliance reporting</a:t>
+            </a:r>
+          </a:p>
+        </p:txBody>
+      </p:sp>
+      <p:sp>
+        <p:nvSpPr>
+          <p:cNvPr id="15" name="Text Placeholder 14"/>
+          <p:cNvSpPr>
+            <a:spLocks noGrp="1"/>
+          </p:cNvSpPr>
+          <p:nvPr>
+            <p:ph type="body" idx="31"/>
+          </p:nvPr>
+        </p:nvSpPr>
+        <p:spPr/>
+        <p:txBody>
+          <a:bodyPr/>
+          <a:lstStyle/>
+          <a:p>
+            <a:r>
+              <a:t>Reports composed from SBoD metadata — no spreadsheet drift.</a:t>
+            </a:r>
+          </a:p>
+        </p:txBody>
+      </p:sp>
+      <p:pic>
+        <p:nvPicPr>
+          <p:cNvPr id="16" name="Picture 15" descr="lock_72.png"/>
+          <p:cNvPicPr>
+            <a:picLocks noChangeAspect="1"/>
+          </p:cNvPicPr>
+          <p:nvPr/>
+        </p:nvPicPr>
+        <p:blipFill>
+          <a:blip r:embed="rId2"/>
+          <a:stretch>
+            <a:fillRect/>
+          </a:stretch>
+        </p:blipFill>
+        <p:spPr>
+          <a:xfrm>
+            <a:off x="1371600" y="5181600"/>
+            <a:ext cx="381000" cy="381000"/>
+          </a:xfrm>
+          <a:prstGeom prst="rect">
+            <a:avLst/>
+          </a:prstGeom>
+        </p:spPr>
+      </p:pic>
+      <p:pic>
+        <p:nvPicPr>
+          <p:cNvPr id="17" name="Picture 16" descr="cloud-upload_72.png"/>
+          <p:cNvPicPr>
+            <a:picLocks noChangeAspect="1"/>
+          </p:cNvPicPr>
+          <p:nvPr/>
+        </p:nvPicPr>
+        <p:blipFill>
+          <a:blip r:embed="rId3"/>
+          <a:stretch>
+            <a:fillRect/>
+          </a:stretch>
+        </p:blipFill>
+        <p:spPr>
+          <a:xfrm>
+            <a:off x="6781800" y="5181600"/>
+            <a:ext cx="381000" cy="381000"/>
+          </a:xfrm>
+          <a:prstGeom prst="rect">
+            <a:avLst/>
+          </a:prstGeom>
+        </p:spPr>
+      </p:pic>
+      <p:pic>
+        <p:nvPicPr>
+          <p:cNvPr id="18" name="Picture 17" descr="rocket_72.png"/>
+          <p:cNvPicPr>
+            <a:picLocks noChangeAspect="1"/>
+          </p:cNvPicPr>
+          <p:nvPr/>
+        </p:nvPicPr>
+        <p:blipFill>
+          <a:blip r:embed="rId4"/>
+          <a:stretch>
+            <a:fillRect/>
+          </a:stretch>
+        </p:blipFill>
+        <p:spPr>
+          <a:xfrm>
+            <a:off x="12192000" y="5181600"/>
+            <a:ext cx="381000" cy="381000"/>
+          </a:xfrm>
+          <a:prstGeom prst="rect">
+            <a:avLst/>
+          </a:prstGeom>
+        </p:spPr>
+      </p:pic>
+      <p:pic>
+        <p:nvPicPr>
+          <p:cNvPr id="19" name="Picture 18" descr="radar_72.png"/>
+          <p:cNvPicPr>
+            <a:picLocks noChangeAspect="1"/>
+          </p:cNvPicPr>
+          <p:nvPr/>
+        </p:nvPicPr>
+        <p:blipFill>
+          <a:blip r:embed="rId5"/>
+          <a:stretch>
+            <a:fillRect/>
+          </a:stretch>
+        </p:blipFill>
+        <p:spPr>
+          <a:xfrm>
+            <a:off x="1371600" y="7600950"/>
+            <a:ext cx="381000" cy="381000"/>
+          </a:xfrm>
+          <a:prstGeom prst="rect">
+            <a:avLst/>
+          </a:prstGeom>
+        </p:spPr>
+      </p:pic>
+      <p:pic>
+        <p:nvPicPr>
+          <p:cNvPr id="20" name="Picture 19" descr="source-of-truth_72.png"/>
+          <p:cNvPicPr>
+            <a:picLocks noChangeAspect="1"/>
+          </p:cNvPicPr>
+          <p:nvPr/>
+        </p:nvPicPr>
+        <p:blipFill>
+          <a:blip r:embed="rId6"/>
+          <a:stretch>
+            <a:fillRect/>
+          </a:stretch>
+        </p:blipFill>
+        <p:spPr>
+          <a:xfrm>
+            <a:off x="6781800" y="7600950"/>
+            <a:ext cx="381000" cy="381000"/>
+          </a:xfrm>
+          <a:prstGeom prst="rect">
+            <a:avLst/>
+          </a:prstGeom>
+        </p:spPr>
+      </p:pic>
+      <p:pic>
+        <p:nvPicPr>
+          <p:cNvPr id="21" name="Picture 20" descr="report-analytics_72.png"/>
+          <p:cNvPicPr>
+            <a:picLocks noChangeAspect="1"/>
+          </p:cNvPicPr>
+          <p:nvPr/>
+        </p:nvPicPr>
+        <p:blipFill>
+          <a:blip r:embed="rId7"/>
+          <a:stretch>
+            <a:fillRect/>
+          </a:stretch>
+        </p:blipFill>
+        <p:spPr>
+          <a:xfrm>
+            <a:off x="12192000" y="7600950"/>
+            <a:ext cx="381000" cy="381000"/>
+          </a:xfrm>
+          <a:prstGeom prst="rect">
+            <a:avLst/>
+          </a:prstGeom>
+        </p:spPr>
+      </p:pic>
+    </p:spTree>
+  </p:cSld>
+  <p:clrMapOvr>
+    <a:masterClrMapping/>
+  </p:clrMapOvr>
+</p:sld>
+</file>
+
+<file path=ppt/slides/slide11.xml><?xml version="1.0" encoding="utf-8"?>
+<p:sld xmlns:a="http://schemas.openxmlformats.org/drawingml/2006/main" xmlns:p="http://schemas.openxmlformats.org/presentationml/2006/main" xmlns:r="http://schemas.openxmlformats.org/officeDocument/2006/relationships">
+  <p:cSld>
+    <p:spTree>
+      <p:nvGrpSpPr>
+        <p:cNvPr id="1" name=""/>
+        <p:cNvGrpSpPr/>
+        <p:nvPr/>
+      </p:nvGrpSpPr>
+      <p:grpSpPr/>
+      <p:sp>
+        <p:nvSpPr>
+          <p:cNvPr id="2" name="Text Placeholder 1"/>
+          <p:cNvSpPr>
+            <a:spLocks noGrp="1"/>
+          </p:cNvSpPr>
+          <p:nvPr>
+            <p:ph type="body" idx="1"/>
+          </p:nvPr>
+        </p:nvSpPr>
+        <p:spPr/>
+        <p:txBody>
+          <a:bodyPr/>
+          <a:lstStyle/>
+          <a:p>
+            <a:r>
+              <a:t>TRUSTED IN PRODUCTION</a:t>
+            </a:r>
+          </a:p>
+        </p:txBody>
+      </p:sp>
+      <p:sp>
+        <p:nvSpPr>
+          <p:cNvPr id="3" name="Title 2"/>
+          <p:cNvSpPr>
+            <a:spLocks noGrp="1"/>
+          </p:cNvSpPr>
+          <p:nvPr>
+            <p:ph type="title" idx="2"/>
+          </p:nvPr>
+        </p:nvSpPr>
+        <p:spPr/>
+        <p:txBody>
+          <a:bodyPr/>
+          <a:lstStyle/>
+          <a:p>
+            <a:r>
+              <a:t>Aligned with NeoNephos.</a:t>
+            </a:r>
+          </a:p>
+        </p:txBody>
+      </p:sp>
+      <p:sp>
+        <p:nvSpPr>
+          <p:cNvPr id="4" name="TextBox 3"/>
+          <p:cNvSpPr txBox="1"/>
+          <p:nvPr/>
+        </p:nvSpPr>
+        <p:spPr>
+          <a:xfrm>
+            <a:off x="1143000" y="4857750"/>
+            <a:ext cx="16002000" cy="342900"/>
+          </a:xfrm>
+          <a:prstGeom prst="rect">
+            <a:avLst/>
+          </a:prstGeom>
+          <a:noFill/>
+        </p:spPr>
+        <p:txBody>
+          <a:bodyPr wrap="none" lIns="0" rIns="0" tIns="0" bIns="0">
+            <a:spAutoFit/>
+          </a:bodyPr>
+          <a:lstStyle/>
+          <a:p>
+            <a:r>
+              <a:rPr sz="1800" b="1" cap="all" spc="110">
+                <a:solidFill>
+                  <a:srgbClr val="0F6BFF"/>
+                </a:solidFill>
+                <a:latin typeface="Aptos"/>
+              </a:rPr>
+              <a:t>ADOPTED BY ENTERPRISES SHIPPING INTO REGULATED ENVIRONMENTS</a:t>
+            </a:r>
+          </a:p>
+        </p:txBody>
+      </p:sp>
+      <p:pic>
+        <p:nvPicPr>
+          <p:cNvPr id="5" name="Picture 4" descr="sap-horizontal-color_640.png"/>
+          <p:cNvPicPr>
+            <a:picLocks noChangeAspect="1"/>
+          </p:cNvPicPr>
+          <p:nvPr/>
+        </p:nvPicPr>
+        <p:blipFill>
+          <a:blip r:embed="rId2"/>
+          <a:stretch>
+            <a:fillRect/>
+          </a:stretch>
+        </p:blipFill>
+        <p:spPr>
+          <a:xfrm>
+            <a:off x="3293201" y="5715000"/>
+            <a:ext cx="1538422" cy="762000"/>
+          </a:xfrm>
+          <a:prstGeom prst="rect">
+            <a:avLst/>
+          </a:prstGeom>
+        </p:spPr>
+      </p:pic>
+      <p:pic>
+        <p:nvPicPr>
+          <p:cNvPr id="6" name="Picture 5" descr="bwi-horizontal-color_640.png"/>
+          <p:cNvPicPr>
+            <a:picLocks noChangeAspect="1"/>
+          </p:cNvPicPr>
+          <p:nvPr/>
+        </p:nvPicPr>
+        <p:blipFill>
+          <a:blip r:embed="rId3"/>
+          <a:stretch>
+            <a:fillRect/>
+          </a:stretch>
+        </p:blipFill>
+        <p:spPr>
+          <a:xfrm>
+            <a:off x="8467502" y="5715000"/>
+            <a:ext cx="1343471" cy="762000"/>
+          </a:xfrm>
+          <a:prstGeom prst="rect">
+            <a:avLst/>
+          </a:prstGeom>
+        </p:spPr>
+      </p:pic>
+      <p:pic>
+        <p:nvPicPr>
+          <p:cNvPr id="7" name="Picture 6" descr="sap-ns2-getlogovector.png"/>
+          <p:cNvPicPr>
+            <a:picLocks noChangeAspect="1"/>
+          </p:cNvPicPr>
+          <p:nvPr/>
+        </p:nvPicPr>
+        <p:blipFill>
+          <a:blip r:embed="rId4"/>
+          <a:stretch>
+            <a:fillRect/>
+          </a:stretch>
+        </p:blipFill>
+        <p:spPr>
+          <a:xfrm>
+            <a:off x="13530262" y="5715000"/>
+            <a:ext cx="1371600" cy="762000"/>
+          </a:xfrm>
+          <a:prstGeom prst="rect">
+            <a:avLst/>
+          </a:prstGeom>
+        </p:spPr>
+      </p:pic>
+      <p:sp>
+        <p:nvSpPr>
+          <p:cNvPr id="8" name="TextBox 7"/>
+          <p:cNvSpPr txBox="1"/>
+          <p:nvPr/>
+        </p:nvSpPr>
+        <p:spPr>
+          <a:xfrm>
+            <a:off x="1143000" y="7048500"/>
+            <a:ext cx="16002000" cy="342900"/>
+          </a:xfrm>
+          <a:prstGeom prst="rect">
+            <a:avLst/>
+          </a:prstGeom>
+          <a:noFill/>
+        </p:spPr>
+        <p:txBody>
+          <a:bodyPr wrap="none" lIns="0" rIns="0" tIns="0" bIns="0">
+            <a:spAutoFit/>
+          </a:bodyPr>
+          <a:lstStyle/>
+          <a:p>
+            <a:r>
+              <a:rPr sz="1800" b="1" cap="all" spc="110">
+                <a:solidFill>
+                  <a:srgbClr val="0F6BFF"/>
+                </a:solidFill>
+                <a:latin typeface="Aptos"/>
+              </a:rPr>
+              <a:t>BUILT INTO THE OPEN-SOURCE ECOSYSTEM</a:t>
+            </a:r>
+          </a:p>
+        </p:txBody>
+      </p:sp>
+      <p:pic>
+        <p:nvPicPr>
+          <p:cNvPr id="9" name="Picture 8" descr="gardener-horizontal-color_640.png"/>
+          <p:cNvPicPr>
+            <a:picLocks noChangeAspect="1"/>
+          </p:cNvPicPr>
+          <p:nvPr/>
+        </p:nvPicPr>
+        <p:blipFill>
+          <a:blip r:embed="rId5"/>
+          <a:stretch>
+            <a:fillRect/>
+          </a:stretch>
+        </p:blipFill>
+        <p:spPr>
+          <a:xfrm>
+            <a:off x="2729953" y="7905750"/>
+            <a:ext cx="2664918" cy="762000"/>
+          </a:xfrm>
+          <a:prstGeom prst="rect">
+            <a:avLst/>
+          </a:prstGeom>
+        </p:spPr>
+      </p:pic>
+      <p:pic>
+        <p:nvPicPr>
+          <p:cNvPr id="10" name="Picture 9" descr="konfidence-horizontal-light_640.png"/>
+          <p:cNvPicPr>
+            <a:picLocks noChangeAspect="1"/>
+          </p:cNvPicPr>
+          <p:nvPr/>
+        </p:nvPicPr>
+        <p:blipFill>
+          <a:blip r:embed="rId6"/>
+          <a:stretch>
+            <a:fillRect/>
+          </a:stretch>
+        </p:blipFill>
+        <p:spPr>
+          <a:xfrm>
+            <a:off x="7615237" y="8108156"/>
+            <a:ext cx="3048000" cy="357187"/>
+          </a:xfrm>
+          <a:prstGeom prst="rect">
+            <a:avLst/>
+          </a:prstGeom>
+        </p:spPr>
+      </p:pic>
+      <p:pic>
+        <p:nvPicPr>
+          <p:cNvPr id="11" name="Picture 10" descr="platform-mesh-horizontal-color_640.png"/>
+          <p:cNvPicPr>
+            <a:picLocks noChangeAspect="1"/>
+          </p:cNvPicPr>
+          <p:nvPr/>
+        </p:nvPicPr>
+        <p:blipFill>
+          <a:blip r:embed="rId7"/>
+          <a:stretch>
+            <a:fillRect/>
+          </a:stretch>
+        </p:blipFill>
+        <p:spPr>
+          <a:xfrm>
+            <a:off x="12692062" y="7922419"/>
+            <a:ext cx="3048000" cy="728662"/>
+          </a:xfrm>
+          <a:prstGeom prst="rect">
+            <a:avLst/>
+          </a:prstGeom>
+        </p:spPr>
+      </p:pic>
+      <p:sp>
+        <p:nvSpPr>
+          <p:cNvPr id="12" name="TextBox 11"/>
+          <p:cNvSpPr txBox="1"/>
+          <p:nvPr/>
+        </p:nvSpPr>
+        <p:spPr>
+          <a:xfrm>
+            <a:off x="1143000" y="9239250"/>
+            <a:ext cx="16002000" cy="762000"/>
+          </a:xfrm>
+          <a:prstGeom prst="rect">
+            <a:avLst/>
+          </a:prstGeom>
+          <a:noFill/>
+        </p:spPr>
+        <p:txBody>
+          <a:bodyPr wrap="none" lIns="0" rIns="0" tIns="0" bIns="0">
+            <a:spAutoFit/>
+          </a:bodyPr>
+          <a:lstStyle/>
+          <a:p>
+            <a:pPr algn="ctr">
+              <a:lnSpc>
+                <a:spcPct val="140000"/>
+              </a:lnSpc>
+            </a:pPr>
+            <a:r>
+              <a:rPr sz="1800">
+                <a:solidFill>
+                  <a:srgbClr val="0A3A99"/>
+                </a:solidFill>
+                <a:latin typeface="Aptos"/>
+              </a:rPr>
+              <a:t>An open standard, neutrally governed — your stack stays portable, your dependencies stay yours.</a:t>
+            </a:r>
+          </a:p>
+        </p:txBody>
+      </p:sp>
+    </p:spTree>
+  </p:cSld>
+  <p:clrMapOvr>
+    <a:masterClrMapping/>
+  </p:clrMapOvr>
+</p:sld>
+</file>
+
+<file path=ppt/slides/slide12.xml><?xml version="1.0" encoding="utf-8"?>
+<p:sld xmlns:a="http://schemas.openxmlformats.org/drawingml/2006/main" xmlns:p="http://schemas.openxmlformats.org/presentationml/2006/main" xmlns:r="http://schemas.openxmlformats.org/officeDocument/2006/relationships">
+  <p:cSld>
+    <p:spTree>
+      <p:nvGrpSpPr>
+        <p:cNvPr id="1" name=""/>
+        <p:cNvGrpSpPr/>
+        <p:nvPr/>
+      </p:nvGrpSpPr>
+      <p:grpSpPr/>
+      <p:sp>
+        <p:nvSpPr>
           <p:cNvPr id="2" name="Title 1"/>
           <p:cNvSpPr>
             <a:spLocks noGrp="1"/>
@@ -3368,32 +4351,56 @@
           <a:lstStyle/>
           <a:p>
             <a:r>
+              <a:rPr b="1">
+                <a:solidFill>
+                  <a:srgbClr val="5CD6FF"/>
+                </a:solidFill>
+              </a:rPr>
+              <a:t>Try it</a:t>
+            </a:r>
+            <a:r>
               <a:rPr>
                 <a:solidFill>
                   <a:srgbClr val="FFFFFF"/>
                 </a:solidFill>
               </a:rPr>
-              <a:t>Try it — ocm.software</a:t>
-            </a:r>
-          </a:p>
-          <a:p>
+              <a:t> — ocm.software</a:t>
+            </a:r>
+          </a:p>
+          <a:p>
+            <a:r>
+              <a:rPr b="1">
+                <a:solidFill>
+                  <a:srgbClr val="5CD6FF"/>
+                </a:solidFill>
+              </a:rPr>
+              <a:t>Build with us</a:t>
+            </a:r>
             <a:r>
               <a:rPr>
                 <a:solidFill>
                   <a:srgbClr val="FFFFFF"/>
                 </a:solidFill>
               </a:rPr>
-              <a:t>Build with us — github.com/open-component-model</a:t>
-            </a:r>
-          </a:p>
-          <a:p>
+              <a:t> — github.com/open-component-model</a:t>
+            </a:r>
+          </a:p>
+          <a:p>
+            <a:r>
+              <a:rPr b="1">
+                <a:solidFill>
+                  <a:srgbClr val="5CD6FF"/>
+                </a:solidFill>
+              </a:rPr>
+              <a:t>Talk to us</a:t>
+            </a:r>
             <a:r>
               <a:rPr>
                 <a:solidFill>
                   <a:srgbClr val="FFFFFF"/>
                 </a:solidFill>
               </a:rPr>
-              <a:t>Talk to us — community channels on the website</a:t>
+              <a:t> — community channels on the website</a:t>
             </a:r>
           </a:p>
         </p:txBody>
@@ -3480,7 +4487,7 @@
           <a:lstStyle/>
           <a:p>
             <a:r>
-              <a:t>WHY NOW — V1 · SOVEREIGNTY-LED</a:t>
+              <a:t>WHY NOW</a:t>
             </a:r>
           </a:p>
         </p:txBody>
@@ -3697,21 +4704,9 @@
           </a:p>
         </p:txBody>
       </p:sp>
-      <p:sp>
-        <p:nvSpPr>
-          <p:cNvPr id="4" name="Picture Placeholder 3"/>
-          <p:cNvSpPr>
-            <a:spLocks noGrp="1"/>
-          </p:cNvSpPr>
-          <p:nvPr>
-            <p:ph type="pic" idx="10"/>
-          </p:nvPr>
-        </p:nvSpPr>
-        <p:spPr/>
-      </p:sp>
       <p:pic>
         <p:nvPicPr>
-          <p:cNvPr id="5" name="Picture 4" descr="03-fragmented_1760.png"/>
+          <p:cNvPr id="4" name="Picture 3" descr="03-fragmented_1680.png"/>
           <p:cNvPicPr>
             <a:picLocks noChangeAspect="1"/>
           </p:cNvPicPr>
@@ -3725,8 +4720,8 @@
         </p:blipFill>
         <p:spPr>
           <a:xfrm>
-            <a:off x="3265714" y="4191000"/>
-            <a:ext cx="11756571" cy="5143500"/>
+            <a:off x="3483429" y="4953000"/>
+            <a:ext cx="11321142" cy="4953000"/>
           </a:xfrm>
           <a:prstGeom prst="rect">
             <a:avLst/>
@@ -3808,63 +4803,85 @@
           <a:bodyPr/>
           <a:lstStyle/>
           <a:p>
-            <a:r>
+            <a:pPr>
+              <a:spcBef>
+                <a:spcPts val="800"/>
+              </a:spcBef>
+              <a:spcAft>
+                <a:spcPts val="800"/>
+              </a:spcAft>
+            </a:pPr>
+            <a:r>
+              <a:rPr b="1">
+                <a:solidFill>
+                  <a:srgbClr val="0F6BFF"/>
+                </a:solidFill>
+              </a:rPr>
+              <a:t>▪  </a:t>
+            </a:r>
+            <a:r>
+              <a:rPr>
+                <a:solidFill>
+                  <a:srgbClr val="000000"/>
+                </a:solidFill>
+              </a:rPr>
               <a:t>An SBOM tells you what's in your software. It was built for inventory.</a:t>
             </a:r>
           </a:p>
           <a:p>
-            <a:r>
+            <a:pPr>
+              <a:spcBef>
+                <a:spcPts val="800"/>
+              </a:spcBef>
+              <a:spcAft>
+                <a:spcPts val="800"/>
+              </a:spcAft>
+            </a:pPr>
+            <a:r>
+              <a:rPr b="1">
+                <a:solidFill>
+                  <a:srgbClr val="0F6BFF"/>
+                </a:solidFill>
+              </a:rPr>
+              <a:t>▪  </a:t>
+            </a:r>
+            <a:r>
+              <a:rPr>
+                <a:solidFill>
+                  <a:srgbClr val="000000"/>
+                </a:solidFill>
+              </a:rPr>
               <a:t>A Software Bill of Delivery (SBoD) tells you what you delivered, how to verify it, how to transport it, and how to operate it. It was built for delivery.</a:t>
             </a:r>
           </a:p>
           <a:p>
-            <a:r>
+            <a:pPr>
+              <a:spcBef>
+                <a:spcPts val="800"/>
+              </a:spcBef>
+              <a:spcAft>
+                <a:spcPts val="800"/>
+              </a:spcAft>
+            </a:pPr>
+            <a:r>
+              <a:rPr b="1">
+                <a:solidFill>
+                  <a:srgbClr val="0F6BFF"/>
+                </a:solidFill>
+              </a:rPr>
+              <a:t>▪  </a:t>
+            </a:r>
+            <a:r>
+              <a:rPr>
+                <a:solidFill>
+                  <a:srgbClr val="000000"/>
+                </a:solidFill>
+              </a:rPr>
               <a:t>The SBoD contains the SBOM. OCM doesn't replace your SBOM tooling — it gives the SBOM an envelope that's compliance-native, signed once, and travels intact across any boundary.</a:t>
             </a:r>
           </a:p>
         </p:txBody>
       </p:sp>
-      <p:sp>
-        <p:nvSpPr>
-          <p:cNvPr id="5" name="Text Placeholder 4"/>
-          <p:cNvSpPr>
-            <a:spLocks noGrp="1"/>
-          </p:cNvSpPr>
-          <p:nvPr>
-            <p:ph type="body" idx="11"/>
-          </p:nvPr>
-        </p:nvSpPr>
-        <p:spPr/>
-        <p:txBody>
-          <a:bodyPr/>
-          <a:lstStyle/>
-          <a:p/>
-        </p:txBody>
-      </p:sp>
-      <p:pic>
-        <p:nvPicPr>
-          <p:cNvPr id="6" name="Picture 5" descr="04-sbom-inside-sbod_860.png"/>
-          <p:cNvPicPr>
-            <a:picLocks noChangeAspect="1"/>
-          </p:cNvPicPr>
-          <p:nvPr/>
-        </p:nvPicPr>
-        <p:blipFill>
-          <a:blip r:embed="rId2"/>
-          <a:stretch>
-            <a:fillRect/>
-          </a:stretch>
-        </p:blipFill>
-        <p:spPr>
-          <a:xfrm>
-            <a:off x="9334500" y="3810000"/>
-            <a:ext cx="8191500" cy="3686175"/>
-          </a:xfrm>
-          <a:prstGeom prst="rect">
-            <a:avLst/>
-          </a:prstGeom>
-        </p:spPr>
-      </p:pic>
     </p:spTree>
   </p:cSld>
   <p:clrMapOvr>
@@ -3899,7 +4916,7 @@
           <a:lstStyle/>
           <a:p>
             <a:r>
-              <a:t>OCM IN ONE PICTURE</a:t>
+              <a:t>THE SHIFT — SBOM INSIDE SBoD</a:t>
             </a:r>
           </a:p>
         </p:txBody>
@@ -3920,26 +4937,14 @@
           <a:lstStyle/>
           <a:p>
             <a:r>
-              <a:t>Pack · Sign · Transport · Deploy</a:t>
+              <a:t>An envelope, not a list.</a:t>
             </a:r>
           </a:p>
         </p:txBody>
-      </p:sp>
-      <p:sp>
-        <p:nvSpPr>
-          <p:cNvPr id="4" name="Picture Placeholder 3"/>
-          <p:cNvSpPr>
-            <a:spLocks noGrp="1"/>
-          </p:cNvSpPr>
-          <p:nvPr>
-            <p:ph type="pic" idx="10"/>
-          </p:nvPr>
-        </p:nvSpPr>
-        <p:spPr/>
       </p:sp>
       <p:pic>
         <p:nvPicPr>
-          <p:cNvPr id="5" name="Picture 4" descr="05-pack-sign-transport-deploy-v2_1760.png"/>
+          <p:cNvPr id="4" name="Picture 3" descr="04-sbom-inside-sbod_1680.png"/>
           <p:cNvPicPr>
             <a:picLocks noChangeAspect="1"/>
           </p:cNvPicPr>
@@ -3953,8 +4958,8 @@
         </p:blipFill>
         <p:spPr>
           <a:xfrm>
-            <a:off x="762000" y="4191000"/>
-            <a:ext cx="16764000" cy="4714875"/>
+            <a:off x="3640667" y="4953000"/>
+            <a:ext cx="11006666" cy="4953000"/>
           </a:xfrm>
           <a:prstGeom prst="rect">
             <a:avLst/>
@@ -3995,7 +5000,7 @@
           <a:lstStyle/>
           <a:p>
             <a:r>
-              <a:t>SOVEREIGN-READY</a:t>
+              <a:t>OCM IN ONE PICTURE</a:t>
             </a:r>
           </a:p>
         </p:txBody>
@@ -4016,67 +5021,14 @@
           <a:lstStyle/>
           <a:p>
             <a:r>
-              <a:t>Trust, but verify.</a:t>
-            </a:r>
-          </a:p>
-        </p:txBody>
-      </p:sp>
-      <p:sp>
-        <p:nvSpPr>
-          <p:cNvPr id="4" name="Text Placeholder 3"/>
-          <p:cNvSpPr>
-            <a:spLocks noGrp="1"/>
-          </p:cNvSpPr>
-          <p:nvPr>
-            <p:ph type="body" idx="10"/>
-          </p:nvPr>
-        </p:nvSpPr>
-        <p:spPr/>
-        <p:txBody>
-          <a:bodyPr/>
-          <a:lstStyle/>
-          <a:p>
-            <a:r>
-              <a:t>• Identity is location-independent. A component carries its name regardless of which registry it lives in.</a:t>
-            </a:r>
-          </a:p>
-          <a:p>
-            <a:r>
-              <a:t>• Signatures are location-independent. Sign once at source; verify at the destination, or at any hop in between, with no callback upstream.</a:t>
-            </a:r>
-          </a:p>
-          <a:p>
-            <a:r>
-              <a:t>• Day-2 ops happen inside the boundary. Subscribe to the component and pull upgrades on your schedule, scale across regions, all without reaching back upstream.</a:t>
-            </a:r>
-          </a:p>
-          <a:p>
-            <a:r>
-              <a:t>• On transfer into a sovereign environment, a component can carry every artifact it needs along with it. The destination needs nothing more.</a:t>
-            </a:r>
-          </a:p>
-        </p:txBody>
-      </p:sp>
-      <p:sp>
-        <p:nvSpPr>
-          <p:cNvPr id="5" name="Text Placeholder 4"/>
-          <p:cNvSpPr>
-            <a:spLocks noGrp="1"/>
-          </p:cNvSpPr>
-          <p:nvPr>
-            <p:ph type="body" idx="11"/>
-          </p:nvPr>
-        </p:nvSpPr>
-        <p:spPr/>
-        <p:txBody>
-          <a:bodyPr/>
-          <a:lstStyle/>
-          <a:p/>
+              <a:t>Pack · Sign · Transport · Deploy</a:t>
+            </a:r>
+          </a:p>
         </p:txBody>
       </p:sp>
       <p:pic>
         <p:nvPicPr>
-          <p:cNvPr id="6" name="Picture 5" descr="06-sovereign-airgap_860.png"/>
+          <p:cNvPr id="4" name="Picture 3" descr="05-pack-sign-transport-deploy-v2_1680.png"/>
           <p:cNvPicPr>
             <a:picLocks noChangeAspect="1"/>
           </p:cNvPicPr>
@@ -4090,8 +5042,8 @@
         </p:blipFill>
         <p:spPr>
           <a:xfrm>
-            <a:off x="9334500" y="3810000"/>
-            <a:ext cx="8191500" cy="3590925"/>
+            <a:off x="1143000" y="4953000"/>
+            <a:ext cx="16002000" cy="4505325"/>
           </a:xfrm>
           <a:prstGeom prst="rect">
             <a:avLst/>
@@ -4132,7 +5084,7 @@
           <a:lstStyle/>
           <a:p>
             <a:r>
-              <a:t>SCAN — COMPLIANCE-NATIVE WITH OPEN DELIVERY GEAR</a:t>
+              <a:t>SOVEREIGN-READY</a:t>
             </a:r>
           </a:p>
         </p:txBody>
@@ -4153,12 +5105,7 @@
           <a:lstStyle/>
           <a:p>
             <a:r>
-              <a:t>Compliance as a system property —</a:t>
-            </a:r>
-          </a:p>
-          <a:p>
-            <a:r>
-              <a:t>not a quarterly project.</a:t>
+              <a:t>Trust, but verify.</a:t>
             </a:r>
           </a:p>
         </p:txBody>
@@ -4178,28 +5125,107 @@
           <a:bodyPr/>
           <a:lstStyle/>
           <a:p>
-            <a:r>
-              <a:t>• Open Delivery Gear (ODG) is OCM's compliance automation engine.</a:t>
-            </a:r>
-          </a:p>
-          <a:p>
-            <a:r>
-              <a:t>• The Compliance Dashboard is your entry point: every component, every finding, every signature in one view.</a:t>
-            </a:r>
-          </a:p>
-          <a:p>
-            <a:r>
-              <a:t>• Continuous scans run asynchronously — even after release.</a:t>
-            </a:r>
-          </a:p>
-          <a:p>
-            <a:r>
-              <a:t>• Findings get rescored against contextual risk, so your team patches what actually matters.</a:t>
-            </a:r>
-          </a:p>
-          <a:p>
-            <a:r>
-              <a:t>• Every compliance signal correlates by component identity. Auditors get evidence, not spreadsheets.</a:t>
+            <a:pPr>
+              <a:spcBef>
+                <a:spcPts val="800"/>
+              </a:spcBef>
+              <a:spcAft>
+                <a:spcPts val="800"/>
+              </a:spcAft>
+            </a:pPr>
+            <a:r>
+              <a:rPr b="1">
+                <a:solidFill>
+                  <a:srgbClr val="0F6BFF"/>
+                </a:solidFill>
+              </a:rPr>
+              <a:t>▪  </a:t>
+            </a:r>
+            <a:r>
+              <a:rPr>
+                <a:solidFill>
+                  <a:srgbClr val="000000"/>
+                </a:solidFill>
+              </a:rPr>
+              <a:t>Identity is location-independent. A component carries its name regardless of which registry it lives in.</a:t>
+            </a:r>
+          </a:p>
+          <a:p>
+            <a:pPr>
+              <a:spcBef>
+                <a:spcPts val="800"/>
+              </a:spcBef>
+              <a:spcAft>
+                <a:spcPts val="800"/>
+              </a:spcAft>
+            </a:pPr>
+            <a:r>
+              <a:rPr b="1">
+                <a:solidFill>
+                  <a:srgbClr val="0F6BFF"/>
+                </a:solidFill>
+              </a:rPr>
+              <a:t>▪  </a:t>
+            </a:r>
+            <a:r>
+              <a:rPr>
+                <a:solidFill>
+                  <a:srgbClr val="000000"/>
+                </a:solidFill>
+              </a:rPr>
+              <a:t>Signatures are location-independent. Sign once at source; verify at the destination, or at any hop in between, with no callback upstream.</a:t>
+            </a:r>
+          </a:p>
+          <a:p>
+            <a:pPr>
+              <a:spcBef>
+                <a:spcPts val="800"/>
+              </a:spcBef>
+              <a:spcAft>
+                <a:spcPts val="800"/>
+              </a:spcAft>
+            </a:pPr>
+            <a:r>
+              <a:rPr b="1">
+                <a:solidFill>
+                  <a:srgbClr val="0F6BFF"/>
+                </a:solidFill>
+              </a:rPr>
+              <a:t>▪  </a:t>
+            </a:r>
+            <a:r>
+              <a:rPr>
+                <a:solidFill>
+                  <a:srgbClr val="000000"/>
+                </a:solidFill>
+              </a:rPr>
+              <a:t>Day-2 ops happen inside the boundary. Subscribe to the component and pull upgrades on your schedule, scale across regions, all without reaching back upstream.</a:t>
+            </a:r>
+          </a:p>
+          <a:p>
+            <a:pPr>
+              <a:spcBef>
+                <a:spcPts val="800"/>
+              </a:spcBef>
+              <a:spcAft>
+                <a:spcPts val="800"/>
+              </a:spcAft>
+            </a:pPr>
+            <a:r>
+              <a:rPr b="1">
+                <a:solidFill>
+                  <a:srgbClr val="0F6BFF"/>
+                </a:solidFill>
+              </a:rPr>
+              <a:t>▪  </a:t>
+            </a:r>
+            <a:r>
+              <a:rPr>
+                <a:solidFill>
+                  <a:srgbClr val="000000"/>
+                </a:solidFill>
+              </a:rPr>
+              <a:t>On transfer into a sovereign environment, a component can carry every artifact it needs along with it. The destination needs nothing more.</a:t>
             </a:r>
           </a:p>
         </p:txBody>
@@ -4238,7 +5264,7 @@
           <a:lstStyle/>
           <a:p>
             <a:r>
-              <a:t>WHAT OCM UNLOCKS</a:t>
+              <a:t>SOVEREIGN-READY — AIR-GAP</a:t>
             </a:r>
           </a:p>
         </p:txBody>
@@ -4259,266 +5285,14 @@
           <a:lstStyle/>
           <a:p>
             <a:r>
-              <a:t>One model unlocks all of this.</a:t>
-            </a:r>
-          </a:p>
-        </p:txBody>
-      </p:sp>
-      <p:sp>
-        <p:nvSpPr>
-          <p:cNvPr id="4" name="Text Placeholder 3"/>
-          <p:cNvSpPr>
-            <a:spLocks noGrp="1"/>
-          </p:cNvSpPr>
-          <p:nvPr>
-            <p:ph type="body" idx="20"/>
-          </p:nvPr>
-        </p:nvSpPr>
-        <p:spPr/>
-        <p:txBody>
-          <a:bodyPr/>
-          <a:lstStyle/>
-          <a:p>
-            <a:r>
-              <a:t>Code signing across stacks</a:t>
-            </a:r>
-          </a:p>
-        </p:txBody>
-      </p:sp>
-      <p:sp>
-        <p:nvSpPr>
-          <p:cNvPr id="5" name="Text Placeholder 4"/>
-          <p:cNvSpPr>
-            <a:spLocks noGrp="1"/>
-          </p:cNvSpPr>
-          <p:nvPr>
-            <p:ph type="body" idx="21"/>
-          </p:nvPr>
-        </p:nvSpPr>
-        <p:spPr/>
-        <p:txBody>
-          <a:bodyPr/>
-          <a:lstStyle/>
-          <a:p>
-            <a:r>
-              <a:t>Sign once at source; verify everywhere, with no per-stack tooling.</a:t>
-            </a:r>
-          </a:p>
-        </p:txBody>
-      </p:sp>
-      <p:sp>
-        <p:nvSpPr>
-          <p:cNvPr id="6" name="Text Placeholder 5"/>
-          <p:cNvSpPr>
-            <a:spLocks noGrp="1"/>
-          </p:cNvSpPr>
-          <p:nvPr>
-            <p:ph type="body" idx="22"/>
-          </p:nvPr>
-        </p:nvSpPr>
-        <p:spPr/>
-        <p:txBody>
-          <a:bodyPr/>
-          <a:lstStyle/>
-          <a:p>
-            <a:r>
-              <a:t>Air-gapped delivery</a:t>
-            </a:r>
-          </a:p>
-        </p:txBody>
-      </p:sp>
-      <p:sp>
-        <p:nvSpPr>
-          <p:cNvPr id="7" name="Text Placeholder 6"/>
-          <p:cNvSpPr>
-            <a:spLocks noGrp="1"/>
-          </p:cNvSpPr>
-          <p:nvPr>
-            <p:ph type="body" idx="23"/>
-          </p:nvPr>
-        </p:nvSpPr>
-        <p:spPr/>
-        <p:txBody>
-          <a:bodyPr/>
-          <a:lstStyle/>
-          <a:p>
-            <a:r>
-              <a:t>Walk a complete component across an air gap; verify at destination.</a:t>
-            </a:r>
-          </a:p>
-        </p:txBody>
-      </p:sp>
-      <p:sp>
-        <p:nvSpPr>
-          <p:cNvPr id="8" name="Text Placeholder 7"/>
-          <p:cNvSpPr>
-            <a:spLocks noGrp="1"/>
-          </p:cNvSpPr>
-          <p:nvPr>
-            <p:ph type="body" idx="24"/>
-          </p:nvPr>
-        </p:nvSpPr>
-        <p:spPr/>
-        <p:txBody>
-          <a:bodyPr/>
-          <a:lstStyle/>
-          <a:p>
-            <a:r>
-              <a:t>Kubernetes-native deployment</a:t>
-            </a:r>
-          </a:p>
-        </p:txBody>
-      </p:sp>
-      <p:sp>
-        <p:nvSpPr>
-          <p:cNvPr id="9" name="Text Placeholder 8"/>
-          <p:cNvSpPr>
-            <a:spLocks noGrp="1"/>
-          </p:cNvSpPr>
-          <p:nvPr>
-            <p:ph type="body" idx="25"/>
-          </p:nvPr>
-        </p:nvSpPr>
-        <p:spPr/>
-        <p:txBody>
-          <a:bodyPr/>
-          <a:lstStyle/>
-          <a:p>
-            <a:r>
-              <a:t>OCM controllers deploy components directly into clusters.</a:t>
-            </a:r>
-          </a:p>
-        </p:txBody>
-      </p:sp>
-      <p:sp>
-        <p:nvSpPr>
-          <p:cNvPr id="10" name="Text Placeholder 9"/>
-          <p:cNvSpPr>
-            <a:spLocks noGrp="1"/>
-          </p:cNvSpPr>
-          <p:nvPr>
-            <p:ph type="body" idx="26"/>
-          </p:nvPr>
-        </p:nvSpPr>
-        <p:spPr/>
-        <p:txBody>
-          <a:bodyPr/>
-          <a:lstStyle/>
-          <a:p>
-            <a:r>
-              <a:t>Asynchronous security scans</a:t>
-            </a:r>
-          </a:p>
-        </p:txBody>
-      </p:sp>
-      <p:sp>
-        <p:nvSpPr>
-          <p:cNvPr id="11" name="Text Placeholder 10"/>
-          <p:cNvSpPr>
-            <a:spLocks noGrp="1"/>
-          </p:cNvSpPr>
-          <p:nvPr>
-            <p:ph type="body" idx="27"/>
-          </p:nvPr>
-        </p:nvSpPr>
-        <p:spPr/>
-        <p:txBody>
-          <a:bodyPr/>
-          <a:lstStyle/>
-          <a:p>
-            <a:r>
-              <a:t>Continuous scanning, even after release; findings tied to component identity.</a:t>
-            </a:r>
-          </a:p>
-        </p:txBody>
-      </p:sp>
-      <p:sp>
-        <p:nvSpPr>
-          <p:cNvPr id="12" name="Text Placeholder 11"/>
-          <p:cNvSpPr>
-            <a:spLocks noGrp="1"/>
-          </p:cNvSpPr>
-          <p:nvPr>
-            <p:ph type="body" idx="28"/>
-          </p:nvPr>
-        </p:nvSpPr>
-        <p:spPr/>
-        <p:txBody>
-          <a:bodyPr/>
-          <a:lstStyle/>
-          <a:p>
-            <a:r>
-              <a:t>One source of truth</a:t>
-            </a:r>
-          </a:p>
-        </p:txBody>
-      </p:sp>
-      <p:sp>
-        <p:nvSpPr>
-          <p:cNvPr id="13" name="Text Placeholder 12"/>
-          <p:cNvSpPr>
-            <a:spLocks noGrp="1"/>
-          </p:cNvSpPr>
-          <p:nvPr>
-            <p:ph type="body" idx="29"/>
-          </p:nvPr>
-        </p:nvSpPr>
-        <p:spPr/>
-        <p:txBody>
-          <a:bodyPr/>
-          <a:lstStyle/>
-          <a:p>
-            <a:r>
-              <a:t>Rebuild any landscape from a single signed descriptor.</a:t>
-            </a:r>
-          </a:p>
-        </p:txBody>
-      </p:sp>
-      <p:sp>
-        <p:nvSpPr>
-          <p:cNvPr id="14" name="Text Placeholder 13"/>
-          <p:cNvSpPr>
-            <a:spLocks noGrp="1"/>
-          </p:cNvSpPr>
-          <p:nvPr>
-            <p:ph type="body" idx="30"/>
-          </p:nvPr>
-        </p:nvSpPr>
-        <p:spPr/>
-        <p:txBody>
-          <a:bodyPr/>
-          <a:lstStyle/>
-          <a:p>
-            <a:r>
-              <a:t>Automated compliance reporting</a:t>
-            </a:r>
-          </a:p>
-        </p:txBody>
-      </p:sp>
-      <p:sp>
-        <p:nvSpPr>
-          <p:cNvPr id="15" name="Text Placeholder 14"/>
-          <p:cNvSpPr>
-            <a:spLocks noGrp="1"/>
-          </p:cNvSpPr>
-          <p:nvPr>
-            <p:ph type="body" idx="31"/>
-          </p:nvPr>
-        </p:nvSpPr>
-        <p:spPr/>
-        <p:txBody>
-          <a:bodyPr/>
-          <a:lstStyle/>
-          <a:p>
-            <a:r>
-              <a:t>Reports composed from SBoD metadata — no spreadsheet drift.</a:t>
+              <a:t>Trust travels with the component.</a:t>
             </a:r>
           </a:p>
         </p:txBody>
       </p:sp>
       <p:pic>
         <p:nvPicPr>
-          <p:cNvPr id="16" name="Picture 15" descr="lock_72.png"/>
+          <p:cNvPr id="4" name="Picture 3" descr="06-sovereign-airgap_1680.png"/>
           <p:cNvPicPr>
             <a:picLocks noChangeAspect="1"/>
           </p:cNvPicPr>
@@ -4532,128 +5306,8 @@
         </p:blipFill>
         <p:spPr>
           <a:xfrm>
-            <a:off x="990600" y="4038600"/>
-            <a:ext cx="381000" cy="381000"/>
-          </a:xfrm>
-          <a:prstGeom prst="rect">
-            <a:avLst/>
-          </a:prstGeom>
-        </p:spPr>
-      </p:pic>
-      <p:pic>
-        <p:nvPicPr>
-          <p:cNvPr id="17" name="Picture 16" descr="cloud-upload_72.png"/>
-          <p:cNvPicPr>
-            <a:picLocks noChangeAspect="1"/>
-          </p:cNvPicPr>
-          <p:nvPr/>
-        </p:nvPicPr>
-        <p:blipFill>
-          <a:blip r:embed="rId3"/>
-          <a:stretch>
-            <a:fillRect/>
-          </a:stretch>
-        </p:blipFill>
-        <p:spPr>
-          <a:xfrm>
-            <a:off x="6648450" y="4038600"/>
-            <a:ext cx="381000" cy="381000"/>
-          </a:xfrm>
-          <a:prstGeom prst="rect">
-            <a:avLst/>
-          </a:prstGeom>
-        </p:spPr>
-      </p:pic>
-      <p:pic>
-        <p:nvPicPr>
-          <p:cNvPr id="18" name="Picture 17" descr="rocket_72.png"/>
-          <p:cNvPicPr>
-            <a:picLocks noChangeAspect="1"/>
-          </p:cNvPicPr>
-          <p:nvPr/>
-        </p:nvPicPr>
-        <p:blipFill>
-          <a:blip r:embed="rId4"/>
-          <a:stretch>
-            <a:fillRect/>
-          </a:stretch>
-        </p:blipFill>
-        <p:spPr>
-          <a:xfrm>
-            <a:off x="12306300" y="4038600"/>
-            <a:ext cx="381000" cy="381000"/>
-          </a:xfrm>
-          <a:prstGeom prst="rect">
-            <a:avLst/>
-          </a:prstGeom>
-        </p:spPr>
-      </p:pic>
-      <p:pic>
-        <p:nvPicPr>
-          <p:cNvPr id="19" name="Picture 18" descr="radar_72.png"/>
-          <p:cNvPicPr>
-            <a:picLocks noChangeAspect="1"/>
-          </p:cNvPicPr>
-          <p:nvPr/>
-        </p:nvPicPr>
-        <p:blipFill>
-          <a:blip r:embed="rId5"/>
-          <a:stretch>
-            <a:fillRect/>
-          </a:stretch>
-        </p:blipFill>
-        <p:spPr>
-          <a:xfrm>
-            <a:off x="990600" y="6838950"/>
-            <a:ext cx="381000" cy="381000"/>
-          </a:xfrm>
-          <a:prstGeom prst="rect">
-            <a:avLst/>
-          </a:prstGeom>
-        </p:spPr>
-      </p:pic>
-      <p:pic>
-        <p:nvPicPr>
-          <p:cNvPr id="20" name="Picture 19" descr="source-of-truth_72.png"/>
-          <p:cNvPicPr>
-            <a:picLocks noChangeAspect="1"/>
-          </p:cNvPicPr>
-          <p:nvPr/>
-        </p:nvPicPr>
-        <p:blipFill>
-          <a:blip r:embed="rId6"/>
-          <a:stretch>
-            <a:fillRect/>
-          </a:stretch>
-        </p:blipFill>
-        <p:spPr>
-          <a:xfrm>
-            <a:off x="6648450" y="6838950"/>
-            <a:ext cx="381000" cy="381000"/>
-          </a:xfrm>
-          <a:prstGeom prst="rect">
-            <a:avLst/>
-          </a:prstGeom>
-        </p:spPr>
-      </p:pic>
-      <p:pic>
-        <p:nvPicPr>
-          <p:cNvPr id="21" name="Picture 20" descr="report-analytics_72.png"/>
-          <p:cNvPicPr>
-            <a:picLocks noChangeAspect="1"/>
-          </p:cNvPicPr>
-          <p:nvPr/>
-        </p:nvPicPr>
-        <p:blipFill>
-          <a:blip r:embed="rId7"/>
-          <a:stretch>
-            <a:fillRect/>
-          </a:stretch>
-        </p:blipFill>
-        <p:spPr>
-          <a:xfrm>
-            <a:off x="12306300" y="6838950"/>
-            <a:ext cx="381000" cy="381000"/>
+            <a:off x="3483429" y="4953000"/>
+            <a:ext cx="11321142" cy="4953000"/>
           </a:xfrm>
           <a:prstGeom prst="rect">
             <a:avLst/>
@@ -4694,7 +5348,7 @@
           <a:lstStyle/>
           <a:p>
             <a:r>
-              <a:t>TRUSTED IN PRODUCTION</a:t>
+              <a:t>SCAN — COMPLIANCE-NATIVE WITH OPEN DELIVERY GEAR</a:t>
             </a:r>
           </a:p>
         </p:txBody>
@@ -4715,7 +5369,12 @@
           <a:lstStyle/>
           <a:p>
             <a:r>
-              <a:t>Aligned with NeoNephos.</a:t>
+              <a:t>Compliance as a system property —</a:t>
+            </a:r>
+          </a:p>
+          <a:p>
+            <a:r>
+              <a:t>not a quarterly project.</a:t>
             </a:r>
           </a:p>
         </p:txBody>
@@ -4735,259 +5394,133 @@
           <a:bodyPr/>
           <a:lstStyle/>
           <a:p>
-            <a:r>
-              <a:t/>
-            </a:r>
-          </a:p>
-        </p:txBody>
-      </p:sp>
-      <p:sp>
-        <p:nvSpPr>
-          <p:cNvPr id="5" name="TextBox 4"/>
-          <p:cNvSpPr txBox="1"/>
-          <p:nvPr/>
-        </p:nvSpPr>
-        <p:spPr>
-          <a:xfrm>
-            <a:off x="762000" y="3619500"/>
-            <a:ext cx="16764000" cy="266700"/>
-          </a:xfrm>
-          <a:prstGeom prst="rect">
-            <a:avLst/>
-          </a:prstGeom>
-          <a:noFill/>
-        </p:spPr>
-        <p:txBody>
-          <a:bodyPr wrap="none" lIns="0" rIns="0" tIns="0" bIns="0">
-            <a:spAutoFit/>
-          </a:bodyPr>
-          <a:lstStyle/>
-          <a:p>
-            <a:r>
-              <a:rPr sz="1400" b="1" cap="all" spc="110">
+            <a:pPr>
+              <a:spcBef>
+                <a:spcPts val="800"/>
+              </a:spcBef>
+              <a:spcAft>
+                <a:spcPts val="800"/>
+              </a:spcAft>
+            </a:pPr>
+            <a:r>
+              <a:rPr b="1">
                 <a:solidFill>
                   <a:srgbClr val="0F6BFF"/>
                 </a:solidFill>
-                <a:latin typeface="Aptos"/>
               </a:rPr>
-              <a:t>ADOPTED BY ENTERPRISES SHIPPING INTO REGULATED ENVIRONMENTS</a:t>
-            </a:r>
-          </a:p>
-        </p:txBody>
-      </p:sp>
-      <p:pic>
-        <p:nvPicPr>
-          <p:cNvPr id="6" name="Picture 5" descr="sap-horizontal-color_640.png"/>
-          <p:cNvPicPr>
-            <a:picLocks noChangeAspect="1"/>
-          </p:cNvPicPr>
-          <p:nvPr/>
-        </p:nvPicPr>
-        <p:blipFill>
-          <a:blip r:embed="rId2"/>
-          <a:stretch>
-            <a:fillRect/>
-          </a:stretch>
-        </p:blipFill>
-        <p:spPr>
-          <a:xfrm>
-            <a:off x="3100898" y="4095750"/>
-            <a:ext cx="1923029" cy="952500"/>
-          </a:xfrm>
-          <a:prstGeom prst="rect">
-            <a:avLst/>
-          </a:prstGeom>
-        </p:spPr>
-      </p:pic>
-      <p:pic>
-        <p:nvPicPr>
-          <p:cNvPr id="7" name="Picture 6" descr="bwi-horizontal-color_640.png"/>
-          <p:cNvPicPr>
-            <a:picLocks noChangeAspect="1"/>
-          </p:cNvPicPr>
-          <p:nvPr/>
-        </p:nvPicPr>
-        <p:blipFill>
-          <a:blip r:embed="rId3"/>
-          <a:stretch>
-            <a:fillRect/>
-          </a:stretch>
-        </p:blipFill>
-        <p:spPr>
-          <a:xfrm>
-            <a:off x="8299568" y="4095750"/>
-            <a:ext cx="1679338" cy="952500"/>
-          </a:xfrm>
-          <a:prstGeom prst="rect">
-            <a:avLst/>
-          </a:prstGeom>
-        </p:spPr>
-      </p:pic>
-      <p:pic>
-        <p:nvPicPr>
-          <p:cNvPr id="8" name="Picture 7" descr="sap-ns2-getlogovector.png"/>
-          <p:cNvPicPr>
-            <a:picLocks noChangeAspect="1"/>
-          </p:cNvPicPr>
-          <p:nvPr/>
-        </p:nvPicPr>
-        <p:blipFill>
-          <a:blip r:embed="rId4"/>
-          <a:stretch>
-            <a:fillRect/>
-          </a:stretch>
-        </p:blipFill>
-        <p:spPr>
-          <a:xfrm>
-            <a:off x="13358812" y="4095750"/>
-            <a:ext cx="1714500" cy="952500"/>
-          </a:xfrm>
-          <a:prstGeom prst="rect">
-            <a:avLst/>
-          </a:prstGeom>
-        </p:spPr>
-      </p:pic>
-      <p:sp>
-        <p:nvSpPr>
-          <p:cNvPr id="9" name="TextBox 8"/>
-          <p:cNvSpPr txBox="1"/>
-          <p:nvPr/>
-        </p:nvSpPr>
-        <p:spPr>
-          <a:xfrm>
-            <a:off x="762000" y="5905500"/>
-            <a:ext cx="16764000" cy="266700"/>
-          </a:xfrm>
-          <a:prstGeom prst="rect">
-            <a:avLst/>
-          </a:prstGeom>
-          <a:noFill/>
-        </p:spPr>
-        <p:txBody>
-          <a:bodyPr wrap="none" lIns="0" rIns="0" tIns="0" bIns="0">
-            <a:spAutoFit/>
-          </a:bodyPr>
-          <a:lstStyle/>
-          <a:p>
-            <a:r>
-              <a:rPr sz="1400" b="1" cap="all" spc="110">
+              <a:t>▪  </a:t>
+            </a:r>
+            <a:r>
+              <a:rPr>
+                <a:solidFill>
+                  <a:srgbClr val="000000"/>
+                </a:solidFill>
+              </a:rPr>
+              <a:t>Open Delivery Gear (ODG) is OCM's compliance automation engine.</a:t>
+            </a:r>
+          </a:p>
+          <a:p>
+            <a:pPr>
+              <a:spcBef>
+                <a:spcPts val="800"/>
+              </a:spcBef>
+              <a:spcAft>
+                <a:spcPts val="800"/>
+              </a:spcAft>
+            </a:pPr>
+            <a:r>
+              <a:rPr b="1">
                 <a:solidFill>
                   <a:srgbClr val="0F6BFF"/>
                 </a:solidFill>
-                <a:latin typeface="Aptos"/>
               </a:rPr>
-              <a:t>BUILT INTO THE OPEN-SOURCE ECOSYSTEM</a:t>
-            </a:r>
-          </a:p>
-        </p:txBody>
-      </p:sp>
-      <p:pic>
-        <p:nvPicPr>
-          <p:cNvPr id="10" name="Picture 9" descr="gardener-horizontal-color_640.png"/>
-          <p:cNvPicPr>
-            <a:picLocks noChangeAspect="1"/>
-          </p:cNvPicPr>
-          <p:nvPr/>
-        </p:nvPicPr>
-        <p:blipFill>
-          <a:blip r:embed="rId5"/>
-          <a:stretch>
-            <a:fillRect/>
-          </a:stretch>
-        </p:blipFill>
-        <p:spPr>
-          <a:xfrm>
-            <a:off x="2538412" y="6422231"/>
-            <a:ext cx="3048000" cy="871538"/>
-          </a:xfrm>
-          <a:prstGeom prst="rect">
-            <a:avLst/>
-          </a:prstGeom>
-        </p:spPr>
-      </p:pic>
-      <p:pic>
-        <p:nvPicPr>
-          <p:cNvPr id="11" name="Picture 10" descr="konfidence-horizontal-light_640.png"/>
-          <p:cNvPicPr>
-            <a:picLocks noChangeAspect="1"/>
-          </p:cNvPicPr>
-          <p:nvPr/>
-        </p:nvPicPr>
-        <p:blipFill>
-          <a:blip r:embed="rId6"/>
-          <a:stretch>
-            <a:fillRect/>
-          </a:stretch>
-        </p:blipFill>
-        <p:spPr>
-          <a:xfrm>
-            <a:off x="7615237" y="6679406"/>
-            <a:ext cx="3048000" cy="357188"/>
-          </a:xfrm>
-          <a:prstGeom prst="rect">
-            <a:avLst/>
-          </a:prstGeom>
-        </p:spPr>
-      </p:pic>
-      <p:pic>
-        <p:nvPicPr>
-          <p:cNvPr id="12" name="Picture 11" descr="platform-mesh-horizontal-color_640.png"/>
-          <p:cNvPicPr>
-            <a:picLocks noChangeAspect="1"/>
-          </p:cNvPicPr>
-          <p:nvPr/>
-        </p:nvPicPr>
-        <p:blipFill>
-          <a:blip r:embed="rId7"/>
-          <a:stretch>
-            <a:fillRect/>
-          </a:stretch>
-        </p:blipFill>
-        <p:spPr>
-          <a:xfrm>
-            <a:off x="12692062" y="6493669"/>
-            <a:ext cx="3048000" cy="728662"/>
-          </a:xfrm>
-          <a:prstGeom prst="rect">
-            <a:avLst/>
-          </a:prstGeom>
-        </p:spPr>
-      </p:pic>
-      <p:sp>
-        <p:nvSpPr>
-          <p:cNvPr id="13" name="TextBox 12"/>
-          <p:cNvSpPr txBox="1"/>
-          <p:nvPr/>
-        </p:nvSpPr>
-        <p:spPr>
-          <a:xfrm>
-            <a:off x="762000" y="8191500"/>
-            <a:ext cx="16764000" cy="762000"/>
-          </a:xfrm>
-          <a:prstGeom prst="rect">
-            <a:avLst/>
-          </a:prstGeom>
-          <a:noFill/>
-        </p:spPr>
-        <p:txBody>
-          <a:bodyPr wrap="none" lIns="0" rIns="0" tIns="0" bIns="0">
-            <a:spAutoFit/>
-          </a:bodyPr>
-          <a:lstStyle/>
-          <a:p>
-            <a:pPr algn="ctr">
-              <a:lnSpc>
-                <a:spcPct val="140000"/>
-              </a:lnSpc>
+              <a:t>▪  </a:t>
+            </a:r>
+            <a:r>
+              <a:rPr>
+                <a:solidFill>
+                  <a:srgbClr val="000000"/>
+                </a:solidFill>
+              </a:rPr>
+              <a:t>The Compliance Dashboard is your entry point: every component, every finding, every signature in one view.</a:t>
+            </a:r>
+          </a:p>
+          <a:p>
+            <a:pPr>
+              <a:spcBef>
+                <a:spcPts val="800"/>
+              </a:spcBef>
+              <a:spcAft>
+                <a:spcPts val="800"/>
+              </a:spcAft>
             </a:pPr>
             <a:r>
-              <a:rPr sz="1800">
+              <a:rPr b="1">
                 <a:solidFill>
-                  <a:srgbClr val="0A3A99"/>
+                  <a:srgbClr val="0F6BFF"/>
                 </a:solidFill>
-                <a:latin typeface="Aptos"/>
               </a:rPr>
-              <a:t>An open standard, neutrally governed — your stack stays portable, your dependencies stay yours.</a:t>
+              <a:t>▪  </a:t>
+            </a:r>
+            <a:r>
+              <a:rPr>
+                <a:solidFill>
+                  <a:srgbClr val="000000"/>
+                </a:solidFill>
+              </a:rPr>
+              <a:t>Continuous scans run asynchronously — even after release.</a:t>
+            </a:r>
+          </a:p>
+          <a:p>
+            <a:pPr>
+              <a:spcBef>
+                <a:spcPts val="800"/>
+              </a:spcBef>
+              <a:spcAft>
+                <a:spcPts val="800"/>
+              </a:spcAft>
+            </a:pPr>
+            <a:r>
+              <a:rPr b="1">
+                <a:solidFill>
+                  <a:srgbClr val="0F6BFF"/>
+                </a:solidFill>
+              </a:rPr>
+              <a:t>▪  </a:t>
+            </a:r>
+            <a:r>
+              <a:rPr>
+                <a:solidFill>
+                  <a:srgbClr val="000000"/>
+                </a:solidFill>
+              </a:rPr>
+              <a:t>Findings get rescored against contextual risk, so your team patches what actually matters.</a:t>
+            </a:r>
+          </a:p>
+          <a:p>
+            <a:pPr>
+              <a:spcBef>
+                <a:spcPts val="800"/>
+              </a:spcBef>
+              <a:spcAft>
+                <a:spcPts val="800"/>
+              </a:spcAft>
+            </a:pPr>
+            <a:r>
+              <a:rPr b="1">
+                <a:solidFill>
+                  <a:srgbClr val="0F6BFF"/>
+                </a:solidFill>
+              </a:rPr>
+              <a:t>▪  </a:t>
+            </a:r>
+            <a:r>
+              <a:rPr>
+                <a:solidFill>
+                  <a:srgbClr val="000000"/>
+                </a:solidFill>
+              </a:rPr>
+              <a:t>Every compliance signal correlates by component identity. Auditors get evidence, not spreadsheets.</a:t>
             </a:r>
           </a:p>
         </p:txBody>

--- a/docs/community/marketing/decks/exec-phase1/OCM-Sovereign-Delivery-Exec.pptx
+++ b/docs/community/marketing/decks/exec-phase1/OCM-Sovereign-Delivery-Exec.pptx
@@ -17,6 +17,7 @@
     <p:sldId id="265" r:id="rId16"/>
     <p:sldId id="266" r:id="rId17"/>
     <p:sldId id="267" r:id="rId18"/>
+    <p:sldId id="268" r:id="rId19"/>
   </p:sldIdLst>
   <p:sldSz cx="18288000" cy="10287000"/>
   <p:notesSz cx="6858000" cy="9144000"/>
@@ -155,7 +156,7 @@
         </ns0:nvSpPr>
         <ns0:spPr>
           <ns2:xfrm xmlns:ns2="http://schemas.openxmlformats.org/drawingml/2006/main">
-            <ns2:off x="914400" y="1590675"/>
+            <ns2:off x="914400" y="1524000"/>
             <ns2:ext cx="16192500" cy="1905000"/>
           </ns2:xfrm>
           <ns3:prstGeom xmlns:ns3="http://schemas.openxmlformats.org/drawingml/2006/main" prst="rect">
@@ -163,7 +164,9 @@
           </ns3:prstGeom>
         </ns0:spPr>
         <ns0:txBody>
-          <ns4:bodyPr xmlns:ns4="http://schemas.openxmlformats.org/drawingml/2006/main" wrap="square" rtlCol="0" anchor="t" lIns="0" tIns="0" rIns="0" bIns="0"/>
+          <ns4:bodyPr xmlns:ns4="http://schemas.openxmlformats.org/drawingml/2006/main" wrap="square" rtlCol="0" anchor="t" lIns="0" tIns="0" rIns="0" bIns="0">
+            <ns4:noAutofit/>
+          </ns4:bodyPr>
           <ns5:lstStyle xmlns:ns5="http://schemas.openxmlformats.org/drawingml/2006/main">
             <ns5:lvl1pPr marL="0" indent="0" algn="l">
               <ns5:buNone/>
@@ -196,15 +199,17 @@
         </ns0:nvSpPr>
         <ns0:spPr>
           <ns2:xfrm xmlns:ns2="http://schemas.openxmlformats.org/drawingml/2006/main">
-            <ns2:off x="914400" y="3067050"/>
-            <ns2:ext cx="16192500" cy="1905000"/>
+            <ns2:off x="914400" y="3619500"/>
+            <ns2:ext cx="16192500" cy="1524000"/>
           </ns2:xfrm>
           <ns3:prstGeom xmlns:ns3="http://schemas.openxmlformats.org/drawingml/2006/main" prst="rect">
             <ns3:avLst/>
           </ns3:prstGeom>
         </ns0:spPr>
         <ns0:txBody>
-          <ns4:bodyPr xmlns:ns4="http://schemas.openxmlformats.org/drawingml/2006/main" wrap="square" rtlCol="0" anchor="t" lIns="0" tIns="0" rIns="0" bIns="0"/>
+          <ns4:bodyPr xmlns:ns4="http://schemas.openxmlformats.org/drawingml/2006/main" wrap="square" rtlCol="0" anchor="t" lIns="0" tIns="0" rIns="0" bIns="0">
+            <ns4:noAutofit/>
+          </ns4:bodyPr>
           <ns5:lstStyle xmlns:ns5="http://schemas.openxmlformats.org/drawingml/2006/main">
             <ns5:lvl1pPr marL="0" indent="0" algn="l">
               <ns5:buNone/>
@@ -237,19 +242,24 @@
         </ns0:nvSpPr>
         <ns0:spPr>
           <ns2:xfrm xmlns:ns2="http://schemas.openxmlformats.org/drawingml/2006/main">
-            <ns2:off x="914400" y="5257800"/>
-            <ns2:ext cx="16192500" cy="571500"/>
+            <ns2:off x="914400" y="5715000"/>
+            <ns2:ext cx="16192500" cy="1143000"/>
           </ns2:xfrm>
           <ns3:prstGeom xmlns:ns3="http://schemas.openxmlformats.org/drawingml/2006/main" prst="rect">
             <ns3:avLst/>
           </ns3:prstGeom>
         </ns0:spPr>
         <ns0:txBody>
-          <ns4:bodyPr xmlns:ns4="http://schemas.openxmlformats.org/drawingml/2006/main" wrap="square" rtlCol="0" anchor="t" lIns="0" tIns="0" rIns="0" bIns="0"/>
+          <ns4:bodyPr xmlns:ns4="http://schemas.openxmlformats.org/drawingml/2006/main" wrap="square" rtlCol="0" anchor="t" lIns="0" tIns="0" rIns="0" bIns="0">
+            <ns4:noAutofit/>
+          </ns4:bodyPr>
           <ns5:lstStyle xmlns:ns5="http://schemas.openxmlformats.org/drawingml/2006/main">
             <ns5:lvl1pPr marL="0" indent="0" algn="l">
+              <ns5:lnSpc>
+                <ns5:spcPct val="114999"/>
+              </ns5:lnSpc>
               <ns5:buNone/>
-              <ns5:defRPr sz="3600">
+              <ns5:defRPr sz="3000">
                 <ns5:solidFill>
                   <ns5:srgbClr val="5CD6FF"/>
                 </ns5:solidFill>
@@ -278,19 +288,21 @@
         </ns0:nvSpPr>
         <ns0:spPr>
           <ns2:xfrm xmlns:ns2="http://schemas.openxmlformats.org/drawingml/2006/main">
-            <ns2:off x="914400" y="6067425"/>
-            <ns2:ext cx="16192500" cy="476250"/>
+            <ns2:off x="914400" y="8191500"/>
+            <ns2:ext cx="16192500" cy="571500"/>
           </ns2:xfrm>
           <ns3:prstGeom xmlns:ns3="http://schemas.openxmlformats.org/drawingml/2006/main" prst="rect">
             <ns3:avLst/>
           </ns3:prstGeom>
         </ns0:spPr>
         <ns0:txBody>
-          <ns4:bodyPr xmlns:ns4="http://schemas.openxmlformats.org/drawingml/2006/main" wrap="square" rtlCol="0" anchor="t" lIns="0" tIns="0" rIns="0" bIns="0"/>
+          <ns4:bodyPr xmlns:ns4="http://schemas.openxmlformats.org/drawingml/2006/main" wrap="square" rtlCol="0" anchor="t" lIns="0" tIns="0" rIns="0" bIns="0">
+            <ns4:noAutofit/>
+          </ns4:bodyPr>
           <ns5:lstStyle xmlns:ns5="http://schemas.openxmlformats.org/drawingml/2006/main">
             <ns5:lvl1pPr marL="0" indent="0" algn="l">
               <ns5:buNone/>
-              <ns5:defRPr sz="2800">
+              <ns5:defRPr sz="2400">
                 <ns5:solidFill>
                   <ns5:srgbClr val="FFFFFF"/>
                 </ns5:solidFill>
@@ -315,7 +327,456 @@
 </p:sldLayout>
 </file>
 
+<file path=ppt/slideLayouts/slideLayout10.xml><?xml version="1.0" encoding="utf-8"?>
+<p:sldLayout xmlns:a="http://schemas.openxmlformats.org/drawingml/2006/main" xmlns:r="http://schemas.openxmlformats.org/officeDocument/2006/relationships" xmlns:p="http://schemas.openxmlformats.org/presentationml/2006/main" type="obj" preserve="1" userDrawn="1">
+  <p:cSld name="Plain / Compact">
+    <p:bg>
+      <p:bgPr>
+        <a:solidFill>
+          <a:srgbClr val="FFFFFF"/>
+        </a:solidFill>
+        <a:effectLst/>
+      </p:bgPr>
+    </p:bg>
+    <p:spTree>
+      <p:nvGrpSpPr>
+        <p:cNvPr id="1" name=""/>
+        <p:cNvGrpSpPr/>
+        <p:nvPr/>
+      </p:nvGrpSpPr>
+      <p:grpSpPr>
+        <a:xfrm>
+          <a:off x="0" y="0"/>
+          <a:ext cx="0" cy="0"/>
+          <a:chOff x="0" y="0"/>
+          <a:chExt cx="0" cy="0"/>
+        </a:xfrm>
+      </p:grpSpPr>
+      <ns0:sp xmlns:ns0="http://schemas.openxmlformats.org/presentationml/2006/main">
+        <ns0:nvSpPr>
+          <ns0:cNvPr id="10" name="Eyebrow"/>
+          <ns0:cNvSpPr>
+            <ns1:spLocks xmlns:ns1="http://schemas.openxmlformats.org/drawingml/2006/main" noGrp="1"/>
+          </ns0:cNvSpPr>
+          <ns0:nvPr>
+            <ns0:ph type="body" idx="1"/>
+          </ns0:nvPr>
+        </ns0:nvSpPr>
+        <ns0:spPr>
+          <ns2:xfrm xmlns:ns2="http://schemas.openxmlformats.org/drawingml/2006/main">
+            <ns2:off x="1143000" y="2428875"/>
+            <ns2:ext cx="16002000" cy="457200"/>
+          </ns2:xfrm>
+          <ns3:prstGeom xmlns:ns3="http://schemas.openxmlformats.org/drawingml/2006/main" prst="rect">
+            <ns3:avLst/>
+          </ns3:prstGeom>
+        </ns0:spPr>
+        <ns0:txBody>
+          <ns4:bodyPr xmlns:ns4="http://schemas.openxmlformats.org/drawingml/2006/main" wrap="square" rtlCol="0" anchor="t" lIns="0" tIns="0" rIns="0" bIns="0"/>
+          <ns5:lstStyle xmlns:ns5="http://schemas.openxmlformats.org/drawingml/2006/main">
+            <ns5:lvl1pPr marL="0" indent="0" algn="l">
+              <ns5:buNone/>
+              <ns5:defRPr sz="2800" b="1" cap="all" spc="140">
+                <ns5:solidFill>
+                  <ns5:srgbClr val="0F6BFF"/>
+                </ns5:solidFill>
+                <ns5:latin typeface="Aptos"/>
+              </ns5:defRPr>
+            </ns5:lvl1pPr>
+          </ns5:lstStyle>
+          <ns6:p xmlns:ns6="http://schemas.openxmlformats.org/drawingml/2006/main">
+            <ns6:r>
+              <ns6:rPr lang="en-US"/>
+              <ns6:t>EYEBROW</ns6:t>
+            </ns6:r>
+            <ns6:endParaRPr lang="en-US"/>
+          </ns6:p>
+        </ns0:txBody>
+      </ns0:sp>
+      <ns0:sp xmlns:ns0="http://schemas.openxmlformats.org/presentationml/2006/main">
+        <ns0:nvSpPr>
+          <ns0:cNvPr id="11" name="Title"/>
+          <ns0:cNvSpPr>
+            <ns1:spLocks xmlns:ns1="http://schemas.openxmlformats.org/drawingml/2006/main" noGrp="1"/>
+          </ns0:cNvSpPr>
+          <ns0:nvPr>
+            <ns0:ph type="title" idx="2"/>
+          </ns0:nvPr>
+        </ns0:nvSpPr>
+        <ns0:spPr>
+          <ns2:xfrm xmlns:ns2="http://schemas.openxmlformats.org/drawingml/2006/main">
+            <ns2:off x="1143000" y="2933700"/>
+            <ns2:ext cx="16002000" cy="1905000"/>
+          </ns2:xfrm>
+          <ns3:prstGeom xmlns:ns3="http://schemas.openxmlformats.org/drawingml/2006/main" prst="rect">
+            <ns3:avLst/>
+          </ns3:prstGeom>
+        </ns0:spPr>
+        <ns0:txBody>
+          <ns4:bodyPr xmlns:ns4="http://schemas.openxmlformats.org/drawingml/2006/main" wrap="square" rtlCol="0" anchor="t" lIns="0" tIns="0" rIns="0" bIns="0"/>
+          <ns5:lstStyle xmlns:ns5="http://schemas.openxmlformats.org/drawingml/2006/main">
+            <ns5:lvl1pPr marL="0" indent="0" algn="l">
+              <ns5:lnSpc>
+                <ns5:spcPct val="90000"/>
+              </ns5:lnSpc>
+              <ns5:buNone/>
+              <ns5:defRPr sz="6400" b="1">
+                <ns5:solidFill>
+                  <ns5:srgbClr val="000000"/>
+                </ns5:solidFill>
+                <ns5:latin typeface="Aptos Display"/>
+              </ns5:defRPr>
+            </ns5:lvl1pPr>
+          </ns5:lstStyle>
+          <ns6:p xmlns:ns6="http://schemas.openxmlformats.org/drawingml/2006/main">
+            <ns6:r>
+              <ns6:rPr lang="en-US"/>
+              <ns6:t>Section title goes here.</ns6:t>
+            </ns6:r>
+            <ns6:endParaRPr lang="en-US"/>
+          </ns6:p>
+        </ns0:txBody>
+      </ns0:sp>
+      <ns0:sp xmlns:ns0="http://schemas.openxmlformats.org/presentationml/2006/main">
+        <ns0:nvSpPr>
+          <ns0:cNvPr id="12" name="Body"/>
+          <ns0:cNvSpPr>
+            <ns1:spLocks xmlns:ns1="http://schemas.openxmlformats.org/drawingml/2006/main" noGrp="1"/>
+          </ns0:cNvSpPr>
+          <ns0:nvPr>
+            <ns0:ph type="body" idx="10"/>
+          </ns0:nvPr>
+        </ns0:nvSpPr>
+        <ns0:spPr>
+          <ns2:xfrm xmlns:ns2="http://schemas.openxmlformats.org/drawingml/2006/main">
+            <ns2:off x="1143000" y="4953000"/>
+            <ns2:ext cx="16002000" cy="4381500"/>
+          </ns2:xfrm>
+          <ns3:prstGeom xmlns:ns3="http://schemas.openxmlformats.org/drawingml/2006/main" prst="rect">
+            <ns3:avLst/>
+          </ns3:prstGeom>
+        </ns0:spPr>
+        <ns0:txBody>
+          <ns4:bodyPr xmlns:ns4="http://schemas.openxmlformats.org/drawingml/2006/main" wrap="square" rtlCol="0" anchor="t" lIns="0" tIns="0" rIns="0" bIns="0"/>
+          <ns5:lstStyle xmlns:ns5="http://schemas.openxmlformats.org/drawingml/2006/main">
+            <ns5:lvl1pPr marL="0" indent="0" algn="l">
+              <ns5:buNone/>
+              <ns5:defRPr sz="2200">
+                <ns5:solidFill>
+                  <ns5:srgbClr val="000000"/>
+                </ns5:solidFill>
+                <ns5:latin typeface="Aptos"/>
+              </ns5:defRPr>
+            </ns5:lvl1pPr>
+          </ns5:lstStyle>
+          <ns6:p xmlns:ns6="http://schemas.openxmlformats.org/drawingml/2006/main">
+            <ns6:r>
+              <ns6:rPr lang="en-US"/>
+              <ns6:t>Body text.</ns6:t>
+            </ns6:r>
+            <ns6:endParaRPr lang="en-US"/>
+          </ns6:p>
+        </ns0:txBody>
+      </ns0:sp>
+      <ns0:sp xmlns:ns0="http://schemas.openxmlformats.org/presentationml/2006/main">
+        <ns0:nvSpPr>
+          <ns0:cNvPr id="13" name="Footer"/>
+          <ns0:cNvSpPr>
+            <ns1:spLocks xmlns:ns1="http://schemas.openxmlformats.org/drawingml/2006/main" noGrp="1"/>
+          </ns0:cNvSpPr>
+          <ns0:nvPr/>
+        </ns0:nvSpPr>
+        <ns0:spPr>
+          <ns2:xfrm xmlns:ns2="http://schemas.openxmlformats.org/drawingml/2006/main">
+            <ns2:off x="1143000" y="9982200"/>
+            <ns2:ext cx="16002000" cy="228600"/>
+          </ns2:xfrm>
+          <ns3:prstGeom xmlns:ns3="http://schemas.openxmlformats.org/drawingml/2006/main" prst="rect">
+            <ns3:avLst/>
+          </ns3:prstGeom>
+        </ns0:spPr>
+        <ns0:txBody>
+          <ns4:bodyPr xmlns:ns4="http://schemas.openxmlformats.org/drawingml/2006/main" wrap="square" rtlCol="0" anchor="t" lIns="0" tIns="0" rIns="0" bIns="0"/>
+          <ns5:lstStyle xmlns:ns5="http://schemas.openxmlformats.org/drawingml/2006/main">
+            <ns5:lvl1pPr marL="0" indent="0" algn="l">
+              <ns5:buNone/>
+              <ns5:defRPr sz="900" cap="all" spc="50">
+                <ns5:solidFill>
+                  <ns5:srgbClr val="6B7280"/>
+                </ns5:solidFill>
+                <ns5:latin typeface="Aptos"/>
+              </ns5:defRPr>
+            </ns5:lvl1pPr>
+          </ns5:lstStyle>
+          <ns6:p xmlns:ns6="http://schemas.openxmlformats.org/drawingml/2006/main">
+            <ns6:r>
+              <ns6:rPr lang="en-US"/>
+              <ns6:t>OPEN COMPONENT MODEL · OCM.SOFTWARE</ns6:t>
+            </ns6:r>
+            <ns6:endParaRPr lang="en-US"/>
+          </ns6:p>
+        </ns0:txBody>
+      </ns0:sp>
+    </p:spTree>
+  </p:cSld>
+  <p:clrMapOvr>
+    <a:masterClrMapping/>
+  </p:clrMapOvr>
+</p:sldLayout>
+</file>
+
 <file path=ppt/slideLayouts/slideLayout2.xml><?xml version="1.0" encoding="utf-8"?>
+<p:sldLayout xmlns:a="http://schemas.openxmlformats.org/drawingml/2006/main" xmlns:r="http://schemas.openxmlformats.org/officeDocument/2006/relationships" xmlns:p="http://schemas.openxmlformats.org/presentationml/2006/main" type="title" preserve="1" userDrawn="1">
+  <p:cSld name="Hero / 3-Line">
+    <p:bg>
+      <p:bgPr>
+        <a:solidFill>
+          <a:srgbClr val="0A1530"/>
+        </a:solidFill>
+        <a:effectLst/>
+      </p:bgPr>
+    </p:bg>
+    <p:spTree>
+      <p:nvGrpSpPr>
+        <p:cNvPr id="1" name=""/>
+        <p:cNvGrpSpPr/>
+        <p:nvPr/>
+      </p:nvGrpSpPr>
+      <p:grpSpPr>
+        <a:xfrm>
+          <a:off x="0" y="0"/>
+          <a:ext cx="0" cy="0"/>
+          <a:chOff x="0" y="0"/>
+          <a:chExt cx="0" cy="0"/>
+        </a:xfrm>
+      </p:grpSpPr>
+      <ns0:sp xmlns:ns0="http://schemas.openxmlformats.org/presentationml/2006/main">
+        <ns0:nvSpPr>
+          <ns0:cNvPr id="10" name="Hero Title Line 1"/>
+          <ns0:cNvSpPr>
+            <ns1:spLocks xmlns:ns1="http://schemas.openxmlformats.org/drawingml/2006/main" noGrp="1"/>
+          </ns0:cNvSpPr>
+          <ns0:nvPr>
+            <ns0:ph type="title" idx="1"/>
+          </ns0:nvPr>
+        </ns0:nvSpPr>
+        <ns0:spPr>
+          <ns2:xfrm xmlns:ns2="http://schemas.openxmlformats.org/drawingml/2006/main">
+            <ns2:off x="914400" y="1143000"/>
+            <ns2:ext cx="16192500" cy="1333500"/>
+          </ns2:xfrm>
+          <ns3:prstGeom xmlns:ns3="http://schemas.openxmlformats.org/drawingml/2006/main" prst="rect">
+            <ns3:avLst/>
+          </ns3:prstGeom>
+        </ns0:spPr>
+        <ns0:txBody>
+          <ns4:bodyPr xmlns:ns4="http://schemas.openxmlformats.org/drawingml/2006/main" wrap="square" rtlCol="0" anchor="t" lIns="0" tIns="0" rIns="0" bIns="0">
+            <ns4:noAutofit/>
+          </ns4:bodyPr>
+          <ns5:lstStyle xmlns:ns5="http://schemas.openxmlformats.org/drawingml/2006/main">
+            <ns5:lvl1pPr marL="0" indent="0" algn="l">
+              <ns5:buNone/>
+              <ns5:defRPr sz="11500" b="1">
+                <ns5:solidFill>
+                  <ns5:srgbClr val="FFFFFF"/>
+                </ns5:solidFill>
+                <ns5:latin typeface="Aptos Display"/>
+              </ns5:defRPr>
+            </ns5:lvl1pPr>
+          </ns5:lstStyle>
+          <ns6:p xmlns:ns6="http://schemas.openxmlformats.org/drawingml/2006/main">
+            <ns6:r>
+              <ns6:rPr lang="en-US"/>
+              <ns6:t>Three minutes from now,</ns6:t>
+            </ns6:r>
+            <ns6:endParaRPr lang="en-US"/>
+          </ns6:p>
+        </ns0:txBody>
+      </ns0:sp>
+      <ns0:sp xmlns:ns0="http://schemas.openxmlformats.org/presentationml/2006/main">
+        <ns0:nvSpPr>
+          <ns0:cNvPr id="11" name="Hero Title Line 2"/>
+          <ns0:cNvSpPr>
+            <ns1:spLocks xmlns:ns1="http://schemas.openxmlformats.org/drawingml/2006/main" noGrp="1"/>
+          </ns0:cNvSpPr>
+          <ns0:nvPr>
+            <ns0:ph type="body" idx="2"/>
+          </ns0:nvPr>
+        </ns0:nvSpPr>
+        <ns0:spPr>
+          <ns2:xfrm xmlns:ns2="http://schemas.openxmlformats.org/drawingml/2006/main">
+            <ns2:off x="914400" y="2571750"/>
+            <ns2:ext cx="16192500" cy="1333500"/>
+          </ns2:xfrm>
+          <ns3:prstGeom xmlns:ns3="http://schemas.openxmlformats.org/drawingml/2006/main" prst="rect">
+            <ns3:avLst/>
+          </ns3:prstGeom>
+        </ns0:spPr>
+        <ns0:txBody>
+          <ns4:bodyPr xmlns:ns4="http://schemas.openxmlformats.org/drawingml/2006/main" wrap="square" rtlCol="0" anchor="t" lIns="0" tIns="0" rIns="0" bIns="0">
+            <ns4:noAutofit/>
+          </ns4:bodyPr>
+          <ns5:lstStyle xmlns:ns5="http://schemas.openxmlformats.org/drawingml/2006/main">
+            <ns5:lvl1pPr marL="0" indent="0" algn="l">
+              <ns5:buNone/>
+              <ns5:defRPr sz="11500" b="1">
+                <ns5:solidFill>
+                  <ns5:srgbClr val="FFFFFF"/>
+                </ns5:solidFill>
+                <ns5:latin typeface="Aptos Display"/>
+              </ns5:defRPr>
+            </ns5:lvl1pPr>
+          </ns5:lstStyle>
+          <ns6:p xmlns:ns6="http://schemas.openxmlformats.org/drawingml/2006/main">
+            <ns6:r>
+              <ns6:rPr lang="en-US"/>
+              <ns6:t>you'll know what your</ns6:t>
+            </ns6:r>
+            <ns6:endParaRPr lang="en-US"/>
+          </ns6:p>
+        </ns0:txBody>
+      </ns0:sp>
+      <ns0:sp xmlns:ns0="http://schemas.openxmlformats.org/presentationml/2006/main">
+        <ns0:nvSpPr>
+          <ns0:cNvPr id="12" name="Hero Title Line 3 (Gradient)"/>
+          <ns0:cNvSpPr>
+            <ns1:spLocks xmlns:ns1="http://schemas.openxmlformats.org/drawingml/2006/main" noGrp="1"/>
+          </ns0:cNvSpPr>
+          <ns0:nvPr>
+            <ns0:ph type="body" idx="3"/>
+          </ns0:nvPr>
+        </ns0:nvSpPr>
+        <ns0:spPr>
+          <ns2:xfrm xmlns:ns2="http://schemas.openxmlformats.org/drawingml/2006/main">
+            <ns2:off x="914400" y="4000500"/>
+            <ns2:ext cx="16192500" cy="1333500"/>
+          </ns2:xfrm>
+          <ns3:prstGeom xmlns:ns3="http://schemas.openxmlformats.org/drawingml/2006/main" prst="rect">
+            <ns3:avLst/>
+          </ns3:prstGeom>
+        </ns0:spPr>
+        <ns0:txBody>
+          <ns4:bodyPr xmlns:ns4="http://schemas.openxmlformats.org/drawingml/2006/main" wrap="square" rtlCol="0" anchor="t" lIns="0" tIns="0" rIns="0" bIns="0">
+            <ns4:noAutofit/>
+          </ns4:bodyPr>
+          <ns5:lstStyle xmlns:ns5="http://schemas.openxmlformats.org/drawingml/2006/main">
+            <ns5:lvl1pPr marL="0" indent="0" algn="l">
+              <ns5:buNone/>
+              <ns5:defRPr sz="11500" b="1">
+                <ns5:solidFill>
+                  <ns5:srgbClr val="5CD6FF"/>
+                </ns5:solidFill>
+                <ns5:latin typeface="Aptos Display"/>
+              </ns5:defRPr>
+            </ns5:lvl1pPr>
+          </ns5:lstStyle>
+          <ns6:p xmlns:ns6="http://schemas.openxmlformats.org/drawingml/2006/main">
+            <ns6:r>
+              <ns6:rPr lang="en-US"/>
+              <ns6:t>supply chain doesn't</ns6:t>
+            </ns6:r>
+            <ns6:endParaRPr lang="en-US"/>
+          </ns6:p>
+        </ns0:txBody>
+      </ns0:sp>
+      <ns0:sp xmlns:ns0="http://schemas.openxmlformats.org/presentationml/2006/main">
+        <ns0:nvSpPr>
+          <ns0:cNvPr id="13" name="Hero Subtitle"/>
+          <ns0:cNvSpPr>
+            <ns1:spLocks xmlns:ns1="http://schemas.openxmlformats.org/drawingml/2006/main" noGrp="1"/>
+          </ns0:cNvSpPr>
+          <ns0:nvPr>
+            <ns0:ph type="body" idx="4"/>
+          </ns0:nvPr>
+        </ns0:nvSpPr>
+        <ns0:spPr>
+          <ns2:xfrm xmlns:ns2="http://schemas.openxmlformats.org/drawingml/2006/main">
+            <ns2:off x="914400" y="5905500"/>
+            <ns2:ext cx="16192500" cy="1143000"/>
+          </ns2:xfrm>
+          <ns3:prstGeom xmlns:ns3="http://schemas.openxmlformats.org/drawingml/2006/main" prst="rect">
+            <ns3:avLst/>
+          </ns3:prstGeom>
+        </ns0:spPr>
+        <ns0:txBody>
+          <ns4:bodyPr xmlns:ns4="http://schemas.openxmlformats.org/drawingml/2006/main" wrap="square" rtlCol="0" anchor="t" lIns="0" tIns="0" rIns="0" bIns="0">
+            <ns4:noAutofit/>
+          </ns4:bodyPr>
+          <ns5:lstStyle xmlns:ns5="http://schemas.openxmlformats.org/drawingml/2006/main">
+            <ns5:lvl1pPr marL="0" indent="0" algn="l">
+              <ns5:lnSpc>
+                <ns5:spcPct val="114999"/>
+              </ns5:lnSpc>
+              <ns5:buNone/>
+              <ns5:defRPr sz="3000">
+                <ns5:solidFill>
+                  <ns5:srgbClr val="5CD6FF"/>
+                </ns5:solidFill>
+                <ns5:latin typeface="Aptos"/>
+              </ns5:defRPr>
+            </ns5:lvl1pPr>
+          </ns5:lstStyle>
+          <ns6:p xmlns:ns6="http://schemas.openxmlformats.org/drawingml/2006/main">
+            <ns6:r>
+              <ns6:rPr lang="en-US"/>
+              <ns6:t>Subtitle — one sentence describing the deck.</ns6:t>
+            </ns6:r>
+            <ns6:endParaRPr lang="en-US"/>
+          </ns6:p>
+        </ns0:txBody>
+      </ns0:sp>
+      <ns0:sp xmlns:ns0="http://schemas.openxmlformats.org/presentationml/2006/main">
+        <ns0:nvSpPr>
+          <ns0:cNvPr id="14" name="Hero Org Line"/>
+          <ns0:cNvSpPr>
+            <ns1:spLocks xmlns:ns1="http://schemas.openxmlformats.org/drawingml/2006/main" noGrp="1"/>
+          </ns0:cNvSpPr>
+          <ns0:nvPr>
+            <ns0:ph type="body" idx="5"/>
+          </ns0:nvPr>
+        </ns0:nvSpPr>
+        <ns0:spPr>
+          <ns2:xfrm xmlns:ns2="http://schemas.openxmlformats.org/drawingml/2006/main">
+            <ns2:off x="914400" y="8191500"/>
+            <ns2:ext cx="16192500" cy="571500"/>
+          </ns2:xfrm>
+          <ns3:prstGeom xmlns:ns3="http://schemas.openxmlformats.org/drawingml/2006/main" prst="rect">
+            <ns3:avLst/>
+          </ns3:prstGeom>
+        </ns0:spPr>
+        <ns0:txBody>
+          <ns4:bodyPr xmlns:ns4="http://schemas.openxmlformats.org/drawingml/2006/main" wrap="square" rtlCol="0" anchor="t" lIns="0" tIns="0" rIns="0" bIns="0">
+            <ns4:noAutofit/>
+          </ns4:bodyPr>
+          <ns5:lstStyle xmlns:ns5="http://schemas.openxmlformats.org/drawingml/2006/main">
+            <ns5:lvl1pPr marL="0" indent="0" algn="l">
+              <ns5:buNone/>
+              <ns5:defRPr sz="2400">
+                <ns5:solidFill>
+                  <ns5:srgbClr val="FFFFFF"/>
+                </ns5:solidFill>
+                <ns5:latin typeface="Aptos"/>
+              </ns5:defRPr>
+            </ns5:lvl1pPr>
+          </ns5:lstStyle>
+          <ns6:p xmlns:ns6="http://schemas.openxmlformats.org/drawingml/2006/main">
+            <ns6:r>
+              <ns6:rPr lang="en-US"/>
+              <ns6:t>Open Component Model — open source, NeoNephos Foundation.</ns6:t>
+            </ns6:r>
+            <ns6:endParaRPr lang="en-US"/>
+          </ns6:p>
+        </ns0:txBody>
+      </ns0:sp>
+    </p:spTree>
+  </p:cSld>
+  <p:clrMapOvr>
+    <a:masterClrMapping/>
+  </p:clrMapOvr>
+</p:sldLayout>
+</file>
+
+<file path=ppt/slideLayouts/slideLayout3.xml><?xml version="1.0" encoding="utf-8"?>
 <p:sldLayout xmlns:a="http://schemas.openxmlformats.org/drawingml/2006/main" xmlns:r="http://schemas.openxmlformats.org/officeDocument/2006/relationships" xmlns:p="http://schemas.openxmlformats.org/presentationml/2006/main" type="obj" preserve="1" userDrawn="1">
   <p:cSld name="CTA">
     <p:bg>
@@ -430,7 +891,7 @@
 </p:sldLayout>
 </file>
 
-<file path=ppt/slideLayouts/slideLayout3.xml><?xml version="1.0" encoding="utf-8"?>
+<file path=ppt/slideLayouts/slideLayout4.xml><?xml version="1.0" encoding="utf-8"?>
 <p:sldLayout xmlns:a="http://schemas.openxmlformats.org/drawingml/2006/main" xmlns:r="http://schemas.openxmlformats.org/officeDocument/2006/relationships" xmlns:p="http://schemas.openxmlformats.org/presentationml/2006/main" type="obj" preserve="1" userDrawn="1">
   <p:cSld name="Content / 3-Column">
     <p:bg>
@@ -582,14 +1043,16 @@
         <ns0:spPr>
           <ns2:xfrm xmlns:ns2="http://schemas.openxmlformats.org/drawingml/2006/main">
             <ns2:off x="1143000" y="5105400"/>
-            <ns2:ext cx="4972050" cy="342900"/>
+            <ns2:ext cx="4972050" cy="533400"/>
           </ns2:xfrm>
           <ns3:prstGeom xmlns:ns3="http://schemas.openxmlformats.org/drawingml/2006/main" prst="rect">
             <ns3:avLst/>
           </ns3:prstGeom>
         </ns0:spPr>
         <ns0:txBody>
-          <ns4:bodyPr xmlns:ns4="http://schemas.openxmlformats.org/drawingml/2006/main" wrap="square" rtlCol="0" anchor="t" lIns="0" tIns="0" rIns="0" bIns="0"/>
+          <ns4:bodyPr xmlns:ns4="http://schemas.openxmlformats.org/drawingml/2006/main" wrap="square" rtlCol="0" anchor="t" lIns="0" tIns="0" rIns="0" bIns="0">
+            <ns4:noAutofit/>
+          </ns4:bodyPr>
           <ns5:lstStyle xmlns:ns5="http://schemas.openxmlformats.org/drawingml/2006/main">
             <ns5:lvl1pPr marL="0" indent="0" algn="l">
               <ns5:buNone/>
@@ -622,8 +1085,8 @@
         </ns0:nvSpPr>
         <ns0:spPr>
           <ns2:xfrm xmlns:ns2="http://schemas.openxmlformats.org/drawingml/2006/main">
-            <ns2:off x="1143000" y="5524500"/>
-            <ns2:ext cx="4972050" cy="4572000"/>
+            <ns2:off x="1143000" y="5753100"/>
+            <ns2:ext cx="4972050" cy="4381500"/>
           </ns2:xfrm>
           <ns3:prstGeom xmlns:ns3="http://schemas.openxmlformats.org/drawingml/2006/main" prst="rect">
             <ns3:avLst/>
@@ -693,14 +1156,16 @@
         <ns0:spPr>
           <ns2:xfrm xmlns:ns2="http://schemas.openxmlformats.org/drawingml/2006/main">
             <ns2:off x="6648450" y="5105400"/>
-            <ns2:ext cx="4972050" cy="342900"/>
+            <ns2:ext cx="4972050" cy="533400"/>
           </ns2:xfrm>
           <ns3:prstGeom xmlns:ns3="http://schemas.openxmlformats.org/drawingml/2006/main" prst="rect">
             <ns3:avLst/>
           </ns3:prstGeom>
         </ns0:spPr>
         <ns0:txBody>
-          <ns4:bodyPr xmlns:ns4="http://schemas.openxmlformats.org/drawingml/2006/main" wrap="square" rtlCol="0" anchor="t" lIns="0" tIns="0" rIns="0" bIns="0"/>
+          <ns4:bodyPr xmlns:ns4="http://schemas.openxmlformats.org/drawingml/2006/main" wrap="square" rtlCol="0" anchor="t" lIns="0" tIns="0" rIns="0" bIns="0">
+            <ns4:noAutofit/>
+          </ns4:bodyPr>
           <ns5:lstStyle xmlns:ns5="http://schemas.openxmlformats.org/drawingml/2006/main">
             <ns5:lvl1pPr marL="0" indent="0" algn="l">
               <ns5:buNone/>
@@ -733,8 +1198,8 @@
         </ns0:nvSpPr>
         <ns0:spPr>
           <ns2:xfrm xmlns:ns2="http://schemas.openxmlformats.org/drawingml/2006/main">
-            <ns2:off x="6648450" y="5524500"/>
-            <ns2:ext cx="4972050" cy="4572000"/>
+            <ns2:off x="6648450" y="5753100"/>
+            <ns2:ext cx="4972050" cy="4381500"/>
           </ns2:xfrm>
           <ns3:prstGeom xmlns:ns3="http://schemas.openxmlformats.org/drawingml/2006/main" prst="rect">
             <ns3:avLst/>
@@ -804,14 +1269,16 @@
         <ns0:spPr>
           <ns2:xfrm xmlns:ns2="http://schemas.openxmlformats.org/drawingml/2006/main">
             <ns2:off x="12153900" y="5105400"/>
-            <ns2:ext cx="4972050" cy="342900"/>
+            <ns2:ext cx="4972050" cy="533400"/>
           </ns2:xfrm>
           <ns3:prstGeom xmlns:ns3="http://schemas.openxmlformats.org/drawingml/2006/main" prst="rect">
             <ns3:avLst/>
           </ns3:prstGeom>
         </ns0:spPr>
         <ns0:txBody>
-          <ns4:bodyPr xmlns:ns4="http://schemas.openxmlformats.org/drawingml/2006/main" wrap="square" rtlCol="0" anchor="t" lIns="0" tIns="0" rIns="0" bIns="0"/>
+          <ns4:bodyPr xmlns:ns4="http://schemas.openxmlformats.org/drawingml/2006/main" wrap="square" rtlCol="0" anchor="t" lIns="0" tIns="0" rIns="0" bIns="0">
+            <ns4:noAutofit/>
+          </ns4:bodyPr>
           <ns5:lstStyle xmlns:ns5="http://schemas.openxmlformats.org/drawingml/2006/main">
             <ns5:lvl1pPr marL="0" indent="0" algn="l">
               <ns5:buNone/>
@@ -844,8 +1311,8 @@
         </ns0:nvSpPr>
         <ns0:spPr>
           <ns2:xfrm xmlns:ns2="http://schemas.openxmlformats.org/drawingml/2006/main">
-            <ns2:off x="12153900" y="5524500"/>
-            <ns2:ext cx="4972050" cy="4572000"/>
+            <ns2:off x="12153900" y="5753100"/>
+            <ns2:ext cx="4972050" cy="4381500"/>
           </ns2:xfrm>
           <ns3:prstGeom xmlns:ns3="http://schemas.openxmlformats.org/drawingml/2006/main" prst="rect">
             <ns3:avLst/>
@@ -920,7 +1387,7 @@
 </p:sldLayout>
 </file>
 
-<file path=ppt/slideLayouts/slideLayout4.xml><?xml version="1.0" encoding="utf-8"?>
+<file path=ppt/slideLayouts/slideLayout5.xml><?xml version="1.0" encoding="utf-8"?>
 <p:sldLayout xmlns:a="http://schemas.openxmlformats.org/drawingml/2006/main" xmlns:r="http://schemas.openxmlformats.org/officeDocument/2006/relationships" xmlns:p="http://schemas.openxmlformats.org/presentationml/2006/main" type="obj" preserve="1" userDrawn="1">
   <p:cSld name="Content / Diagram">
     <p:bg>
@@ -999,7 +1466,7 @@
         <ns0:spPr>
           <ns2:xfrm xmlns:ns2="http://schemas.openxmlformats.org/drawingml/2006/main">
             <ns2:off x="1143000" y="2933700"/>
-            <ns2:ext cx="16002000" cy="1905000"/>
+            <ns2:ext cx="16002000" cy="1143000"/>
           </ns2:xfrm>
           <ns3:prstGeom xmlns:ns3="http://schemas.openxmlformats.org/drawingml/2006/main" prst="rect">
             <ns3:avLst/>
@@ -1042,8 +1509,8 @@
         </ns0:nvSpPr>
         <ns0:spPr>
           <ns2:xfrm xmlns:ns2="http://schemas.openxmlformats.org/drawingml/2006/main">
-            <ns2:off x="1143000" y="4953000"/>
-            <ns2:ext cx="16002000" cy="4381500"/>
+            <ns2:off x="762000" y="4381500"/>
+            <ns2:ext cx="16764000" cy="5334000"/>
           </ns2:xfrm>
           <ns3:prstGeom xmlns:ns3="http://schemas.openxmlformats.org/drawingml/2006/main" prst="rect">
             <ns3:avLst/>
@@ -1104,7 +1571,7 @@
 </p:sldLayout>
 </file>
 
-<file path=ppt/slideLayouts/slideLayout5.xml><?xml version="1.0" encoding="utf-8"?>
+<file path=ppt/slideLayouts/slideLayout6.xml><?xml version="1.0" encoding="utf-8"?>
 <p:sldLayout xmlns:a="http://schemas.openxmlformats.org/drawingml/2006/main" xmlns:r="http://schemas.openxmlformats.org/officeDocument/2006/relationships" xmlns:p="http://schemas.openxmlformats.org/presentationml/2006/main" type="obj" preserve="1" userDrawn="1">
   <p:cSld name="Content / Tiles">
     <p:bg>
@@ -2101,7 +2568,7 @@
 </p:sldLayout>
 </file>
 
-<file path=ppt/slideLayouts/slideLayout6.xml><?xml version="1.0" encoding="utf-8"?>
+<file path=ppt/slideLayouts/slideLayout7.xml><?xml version="1.0" encoding="utf-8"?>
 <p:sldLayout xmlns:a="http://schemas.openxmlformats.org/drawingml/2006/main" xmlns:r="http://schemas.openxmlformats.org/officeDocument/2006/relationships" xmlns:p="http://schemas.openxmlformats.org/presentationml/2006/main" type="twoObj" preserve="1" userDrawn="1">
   <p:cSld name="Content / 2-Column">
     <p:bg>
@@ -2340,7 +2807,7 @@
 </p:sldLayout>
 </file>
 
-<file path=ppt/slideLayouts/slideLayout7.xml><?xml version="1.0" encoding="utf-8"?>
+<file path=ppt/slideLayouts/slideLayout8.xml><?xml version="1.0" encoding="utf-8"?>
 <p:sldLayout xmlns:a="http://schemas.openxmlformats.org/drawingml/2006/main" xmlns:r="http://schemas.openxmlformats.org/officeDocument/2006/relationships" xmlns:p="http://schemas.openxmlformats.org/presentationml/2006/main" type="secHead" preserve="1" userDrawn="1">
   <p:cSld name="Section Divider">
     <p:bg>
@@ -2414,7 +2881,7 @@
 </p:sldLayout>
 </file>
 
-<file path=ppt/slideLayouts/slideLayout8.xml><?xml version="1.0" encoding="utf-8"?>
+<file path=ppt/slideLayouts/slideLayout9.xml><?xml version="1.0" encoding="utf-8"?>
 <p:sldLayout xmlns:a="http://schemas.openxmlformats.org/drawingml/2006/main" xmlns:r="http://schemas.openxmlformats.org/officeDocument/2006/relationships" xmlns:p="http://schemas.openxmlformats.org/presentationml/2006/main" type="obj" preserve="1" userDrawn="1">
   <p:cSld name="Plain">
     <p:bg>
@@ -2538,204 +3005,6 @@
           <ns2:xfrm xmlns:ns2="http://schemas.openxmlformats.org/drawingml/2006/main">
             <ns2:off x="1143000" y="5524500"/>
             <ns2:ext cx="16002000" cy="3810000"/>
-          </ns2:xfrm>
-          <ns3:prstGeom xmlns:ns3="http://schemas.openxmlformats.org/drawingml/2006/main" prst="rect">
-            <ns3:avLst/>
-          </ns3:prstGeom>
-        </ns0:spPr>
-        <ns0:txBody>
-          <ns4:bodyPr xmlns:ns4="http://schemas.openxmlformats.org/drawingml/2006/main" wrap="square" rtlCol="0" anchor="t" lIns="0" tIns="0" rIns="0" bIns="0"/>
-          <ns5:lstStyle xmlns:ns5="http://schemas.openxmlformats.org/drawingml/2006/main">
-            <ns5:lvl1pPr marL="0" indent="0" algn="l">
-              <ns5:buNone/>
-              <ns5:defRPr sz="2200">
-                <ns5:solidFill>
-                  <ns5:srgbClr val="000000"/>
-                </ns5:solidFill>
-                <ns5:latin typeface="Aptos"/>
-              </ns5:defRPr>
-            </ns5:lvl1pPr>
-          </ns5:lstStyle>
-          <ns6:p xmlns:ns6="http://schemas.openxmlformats.org/drawingml/2006/main">
-            <ns6:r>
-              <ns6:rPr lang="en-US"/>
-              <ns6:t>Body text.</ns6:t>
-            </ns6:r>
-            <ns6:endParaRPr lang="en-US"/>
-          </ns6:p>
-        </ns0:txBody>
-      </ns0:sp>
-      <ns0:sp xmlns:ns0="http://schemas.openxmlformats.org/presentationml/2006/main">
-        <ns0:nvSpPr>
-          <ns0:cNvPr id="13" name="Footer"/>
-          <ns0:cNvSpPr>
-            <ns1:spLocks xmlns:ns1="http://schemas.openxmlformats.org/drawingml/2006/main" noGrp="1"/>
-          </ns0:cNvSpPr>
-          <ns0:nvPr/>
-        </ns0:nvSpPr>
-        <ns0:spPr>
-          <ns2:xfrm xmlns:ns2="http://schemas.openxmlformats.org/drawingml/2006/main">
-            <ns2:off x="1143000" y="9982200"/>
-            <ns2:ext cx="16002000" cy="228600"/>
-          </ns2:xfrm>
-          <ns3:prstGeom xmlns:ns3="http://schemas.openxmlformats.org/drawingml/2006/main" prst="rect">
-            <ns3:avLst/>
-          </ns3:prstGeom>
-        </ns0:spPr>
-        <ns0:txBody>
-          <ns4:bodyPr xmlns:ns4="http://schemas.openxmlformats.org/drawingml/2006/main" wrap="square" rtlCol="0" anchor="t" lIns="0" tIns="0" rIns="0" bIns="0"/>
-          <ns5:lstStyle xmlns:ns5="http://schemas.openxmlformats.org/drawingml/2006/main">
-            <ns5:lvl1pPr marL="0" indent="0" algn="l">
-              <ns5:buNone/>
-              <ns5:defRPr sz="900" cap="all" spc="50">
-                <ns5:solidFill>
-                  <ns5:srgbClr val="6B7280"/>
-                </ns5:solidFill>
-                <ns5:latin typeface="Aptos"/>
-              </ns5:defRPr>
-            </ns5:lvl1pPr>
-          </ns5:lstStyle>
-          <ns6:p xmlns:ns6="http://schemas.openxmlformats.org/drawingml/2006/main">
-            <ns6:r>
-              <ns6:rPr lang="en-US"/>
-              <ns6:t>OPEN COMPONENT MODEL · OCM.SOFTWARE</ns6:t>
-            </ns6:r>
-            <ns6:endParaRPr lang="en-US"/>
-          </ns6:p>
-        </ns0:txBody>
-      </ns0:sp>
-    </p:spTree>
-  </p:cSld>
-  <p:clrMapOvr>
-    <a:masterClrMapping/>
-  </p:clrMapOvr>
-</p:sldLayout>
-</file>
-
-<file path=ppt/slideLayouts/slideLayout9.xml><?xml version="1.0" encoding="utf-8"?>
-<p:sldLayout xmlns:a="http://schemas.openxmlformats.org/drawingml/2006/main" xmlns:r="http://schemas.openxmlformats.org/officeDocument/2006/relationships" xmlns:p="http://schemas.openxmlformats.org/presentationml/2006/main" type="obj" preserve="1" userDrawn="1">
-  <p:cSld name="Plain / Compact">
-    <p:bg>
-      <p:bgPr>
-        <a:solidFill>
-          <a:srgbClr val="FFFFFF"/>
-        </a:solidFill>
-        <a:effectLst/>
-      </p:bgPr>
-    </p:bg>
-    <p:spTree>
-      <p:nvGrpSpPr>
-        <p:cNvPr id="1" name=""/>
-        <p:cNvGrpSpPr/>
-        <p:nvPr/>
-      </p:nvGrpSpPr>
-      <p:grpSpPr>
-        <a:xfrm>
-          <a:off x="0" y="0"/>
-          <a:ext cx="0" cy="0"/>
-          <a:chOff x="0" y="0"/>
-          <a:chExt cx="0" cy="0"/>
-        </a:xfrm>
-      </p:grpSpPr>
-      <ns0:sp xmlns:ns0="http://schemas.openxmlformats.org/presentationml/2006/main">
-        <ns0:nvSpPr>
-          <ns0:cNvPr id="10" name="Eyebrow"/>
-          <ns0:cNvSpPr>
-            <ns1:spLocks xmlns:ns1="http://schemas.openxmlformats.org/drawingml/2006/main" noGrp="1"/>
-          </ns0:cNvSpPr>
-          <ns0:nvPr>
-            <ns0:ph type="body" idx="1"/>
-          </ns0:nvPr>
-        </ns0:nvSpPr>
-        <ns0:spPr>
-          <ns2:xfrm xmlns:ns2="http://schemas.openxmlformats.org/drawingml/2006/main">
-            <ns2:off x="1143000" y="2428875"/>
-            <ns2:ext cx="16002000" cy="457200"/>
-          </ns2:xfrm>
-          <ns3:prstGeom xmlns:ns3="http://schemas.openxmlformats.org/drawingml/2006/main" prst="rect">
-            <ns3:avLst/>
-          </ns3:prstGeom>
-        </ns0:spPr>
-        <ns0:txBody>
-          <ns4:bodyPr xmlns:ns4="http://schemas.openxmlformats.org/drawingml/2006/main" wrap="square" rtlCol="0" anchor="t" lIns="0" tIns="0" rIns="0" bIns="0"/>
-          <ns5:lstStyle xmlns:ns5="http://schemas.openxmlformats.org/drawingml/2006/main">
-            <ns5:lvl1pPr marL="0" indent="0" algn="l">
-              <ns5:buNone/>
-              <ns5:defRPr sz="2800" b="1" cap="all" spc="140">
-                <ns5:solidFill>
-                  <ns5:srgbClr val="0F6BFF"/>
-                </ns5:solidFill>
-                <ns5:latin typeface="Aptos"/>
-              </ns5:defRPr>
-            </ns5:lvl1pPr>
-          </ns5:lstStyle>
-          <ns6:p xmlns:ns6="http://schemas.openxmlformats.org/drawingml/2006/main">
-            <ns6:r>
-              <ns6:rPr lang="en-US"/>
-              <ns6:t>EYEBROW</ns6:t>
-            </ns6:r>
-            <ns6:endParaRPr lang="en-US"/>
-          </ns6:p>
-        </ns0:txBody>
-      </ns0:sp>
-      <ns0:sp xmlns:ns0="http://schemas.openxmlformats.org/presentationml/2006/main">
-        <ns0:nvSpPr>
-          <ns0:cNvPr id="11" name="Title"/>
-          <ns0:cNvSpPr>
-            <ns1:spLocks xmlns:ns1="http://schemas.openxmlformats.org/drawingml/2006/main" noGrp="1"/>
-          </ns0:cNvSpPr>
-          <ns0:nvPr>
-            <ns0:ph type="title" idx="2"/>
-          </ns0:nvPr>
-        </ns0:nvSpPr>
-        <ns0:spPr>
-          <ns2:xfrm xmlns:ns2="http://schemas.openxmlformats.org/drawingml/2006/main">
-            <ns2:off x="1143000" y="2933700"/>
-            <ns2:ext cx="16002000" cy="1905000"/>
-          </ns2:xfrm>
-          <ns3:prstGeom xmlns:ns3="http://schemas.openxmlformats.org/drawingml/2006/main" prst="rect">
-            <ns3:avLst/>
-          </ns3:prstGeom>
-        </ns0:spPr>
-        <ns0:txBody>
-          <ns4:bodyPr xmlns:ns4="http://schemas.openxmlformats.org/drawingml/2006/main" wrap="square" rtlCol="0" anchor="t" lIns="0" tIns="0" rIns="0" bIns="0"/>
-          <ns5:lstStyle xmlns:ns5="http://schemas.openxmlformats.org/drawingml/2006/main">
-            <ns5:lvl1pPr marL="0" indent="0" algn="l">
-              <ns5:lnSpc>
-                <ns5:spcPct val="90000"/>
-              </ns5:lnSpc>
-              <ns5:buNone/>
-              <ns5:defRPr sz="6400" b="1">
-                <ns5:solidFill>
-                  <ns5:srgbClr val="000000"/>
-                </ns5:solidFill>
-                <ns5:latin typeface="Aptos Display"/>
-              </ns5:defRPr>
-            </ns5:lvl1pPr>
-          </ns5:lstStyle>
-          <ns6:p xmlns:ns6="http://schemas.openxmlformats.org/drawingml/2006/main">
-            <ns6:r>
-              <ns6:rPr lang="en-US"/>
-              <ns6:t>Section title goes here.</ns6:t>
-            </ns6:r>
-            <ns6:endParaRPr lang="en-US"/>
-          </ns6:p>
-        </ns0:txBody>
-      </ns0:sp>
-      <ns0:sp xmlns:ns0="http://schemas.openxmlformats.org/presentationml/2006/main">
-        <ns0:nvSpPr>
-          <ns0:cNvPr id="12" name="Body"/>
-          <ns0:cNvSpPr>
-            <ns1:spLocks xmlns:ns1="http://schemas.openxmlformats.org/drawingml/2006/main" noGrp="1"/>
-          </ns0:cNvSpPr>
-          <ns0:nvPr>
-            <ns0:ph type="body" idx="10"/>
-          </ns0:nvPr>
-        </ns0:nvSpPr>
-        <ns0:spPr>
-          <ns2:xfrm xmlns:ns2="http://schemas.openxmlformats.org/drawingml/2006/main">
-            <ns2:off x="1143000" y="4953000"/>
-            <ns2:ext cx="16002000" cy="4381500"/>
           </ns2:xfrm>
           <ns3:prstGeom xmlns:ns3="http://schemas.openxmlformats.org/drawingml/2006/main" prst="rect">
             <ns3:avLst/>
@@ -3064,6 +3333,7 @@
     <p:sldLayoutId id="2147483655" r:id="rId8"/>
     <p:sldLayoutId id="2147483656" r:id="rId9"/>
     <p:sldLayoutId id="2147483657" r:id="rId10"/>
+    <p:sldLayoutId id="2147483658" r:id="rId11"/>
   </p:sldLayoutIdLst>
   <p:txStyles>
     <p:titleStyle>
@@ -3330,7 +3600,7 @@
       <p:grpSpPr/>
       <p:pic>
         <p:nvPicPr>
-          <p:cNvPr id="6" name="Picture 5" descr="OCM-Banner.png"/>
+          <p:cNvPr id="7" name="Picture 6" descr="OCM-Banner.png"/>
           <p:cNvPicPr>
             <a:picLocks noChangeAspect="1"/>
           </p:cNvPicPr>
@@ -3373,7 +3643,7 @@
                   <a:srgbClr val="FFFFFF"/>
                 </a:solidFill>
               </a:rPr>
-              <a:t>Secure Delivery for</a:t>
+              <a:t>Three minutes from now,</a:t>
             </a:r>
           </a:p>
         </p:txBody>
@@ -3386,6 +3656,32 @@
           </p:cNvSpPr>
           <p:nvPr>
             <p:ph type="body" idx="2"/>
+          </p:nvPr>
+        </p:nvSpPr>
+        <p:spPr/>
+        <p:txBody>
+          <a:bodyPr/>
+          <a:lstStyle/>
+          <a:p>
+            <a:r>
+              <a:rPr>
+                <a:solidFill>
+                  <a:srgbClr val="FFFFFF"/>
+                </a:solidFill>
+              </a:rPr>
+              <a:t>you'll know what your</a:t>
+            </a:r>
+          </a:p>
+        </p:txBody>
+      </p:sp>
+      <p:sp>
+        <p:nvSpPr>
+          <p:cNvPr id="4" name="Text Placeholder 3"/>
+          <p:cNvSpPr>
+            <a:spLocks noGrp="1"/>
+          </p:cNvSpPr>
+          <p:nvPr>
+            <p:ph type="body" idx="3"/>
           </p:nvPr>
         </p:nvSpPr>
         <p:spPr/>
@@ -3419,33 +3715,7 @@
                   <a:lin ang="0" scaled="1"/>
                 </a:gradFill>
               </a:rPr>
-              <a:t>Sovereign Clouds</a:t>
-            </a:r>
-          </a:p>
-        </p:txBody>
-      </p:sp>
-      <p:sp>
-        <p:nvSpPr>
-          <p:cNvPr id="4" name="Text Placeholder 3"/>
-          <p:cNvSpPr>
-            <a:spLocks noGrp="1"/>
-          </p:cNvSpPr>
-          <p:nvPr>
-            <p:ph type="body" idx="3"/>
-          </p:nvPr>
-        </p:nvSpPr>
-        <p:spPr/>
-        <p:txBody>
-          <a:bodyPr/>
-          <a:lstStyle/>
-          <a:p>
-            <a:r>
-              <a:rPr>
-                <a:solidFill>
-                  <a:srgbClr val="5CD6FF"/>
-                </a:solidFill>
-              </a:rPr>
-              <a:t>Deliver and deploy your software securely. Anywhere, at any scale.</a:t>
+              <a:t>supply chain doesn't</a:t>
             </a:r>
           </a:p>
         </p:txBody>
@@ -3468,6 +3738,32 @@
             <a:r>
               <a:rPr>
                 <a:solidFill>
+                  <a:srgbClr val="5CD6FF"/>
+                </a:solidFill>
+              </a:rPr>
+              <a:t>A new model for delivering software the auditor can verify, the operator can run, and the regulator already requires.</a:t>
+            </a:r>
+          </a:p>
+        </p:txBody>
+      </p:sp>
+      <p:sp>
+        <p:nvSpPr>
+          <p:cNvPr id="6" name="Text Placeholder 5"/>
+          <p:cNvSpPr>
+            <a:spLocks noGrp="1"/>
+          </p:cNvSpPr>
+          <p:nvPr>
+            <p:ph type="body" idx="5"/>
+          </p:nvPr>
+        </p:nvSpPr>
+        <p:spPr/>
+        <p:txBody>
+          <a:bodyPr/>
+          <a:lstStyle/>
+          <a:p>
+            <a:r>
+              <a:rPr>
+                <a:solidFill>
                   <a:srgbClr val="FFFFFF"/>
                 </a:solidFill>
               </a:rPr>
@@ -3478,7 +3774,7 @@
       </p:sp>
       <p:pic>
         <p:nvPicPr>
-          <p:cNvPr id="7" name="Picture 6" descr="ocm-horizontal-white_400.png"/>
+          <p:cNvPr id="8" name="Picture 7" descr="ocm-horizontal-white_400.png"/>
           <p:cNvPicPr>
             <a:picLocks noChangeAspect="1"/>
           </p:cNvPicPr>
@@ -3502,7 +3798,7 @@
       </p:pic>
       <p:pic>
         <p:nvPicPr>
-          <p:cNvPr id="8" name="Picture 7" descr="neonephos-foundation-horizontal-white_400.png"/>
+          <p:cNvPr id="9" name="Picture 8" descr="neonephos-foundation-horizontal-white_400.png"/>
           <p:cNvPicPr>
             <a:picLocks noChangeAspect="1"/>
           </p:cNvPicPr>
@@ -3533,6 +3829,217 @@
 </file>
 
 <file path=ppt/slides/slide10.xml><?xml version="1.0" encoding="utf-8"?>
+<p:sld xmlns:a="http://schemas.openxmlformats.org/drawingml/2006/main" xmlns:p="http://schemas.openxmlformats.org/presentationml/2006/main" xmlns:r="http://schemas.openxmlformats.org/officeDocument/2006/relationships">
+  <p:cSld>
+    <p:spTree>
+      <p:nvGrpSpPr>
+        <p:cNvPr id="1" name=""/>
+        <p:cNvGrpSpPr/>
+        <p:nvPr/>
+      </p:nvGrpSpPr>
+      <p:grpSpPr/>
+      <p:sp>
+        <p:nvSpPr>
+          <p:cNvPr id="2" name="Text Placeholder 1"/>
+          <p:cNvSpPr>
+            <a:spLocks noGrp="1"/>
+          </p:cNvSpPr>
+          <p:nvPr>
+            <p:ph type="body" idx="1"/>
+          </p:nvPr>
+        </p:nvSpPr>
+        <p:spPr/>
+        <p:txBody>
+          <a:bodyPr/>
+          <a:lstStyle/>
+          <a:p>
+            <a:r>
+              <a:t>SCAN — COMPLIANCE-NATIVE WITH OPEN DELIVERY GEAR</a:t>
+            </a:r>
+          </a:p>
+        </p:txBody>
+      </p:sp>
+      <p:sp>
+        <p:nvSpPr>
+          <p:cNvPr id="3" name="Title 2"/>
+          <p:cNvSpPr>
+            <a:spLocks noGrp="1"/>
+          </p:cNvSpPr>
+          <p:nvPr>
+            <p:ph type="title" idx="2"/>
+          </p:nvPr>
+        </p:nvSpPr>
+        <p:spPr/>
+        <p:txBody>
+          <a:bodyPr/>
+          <a:lstStyle/>
+          <a:p>
+            <a:r>
+              <a:t>Compliance as a system property —</a:t>
+            </a:r>
+          </a:p>
+          <a:p>
+            <a:r>
+              <a:t>not a quarterly retrofit.</a:t>
+            </a:r>
+          </a:p>
+        </p:txBody>
+      </p:sp>
+      <p:sp>
+        <p:nvSpPr>
+          <p:cNvPr id="4" name="Text Placeholder 3"/>
+          <p:cNvSpPr>
+            <a:spLocks noGrp="1"/>
+          </p:cNvSpPr>
+          <p:nvPr>
+            <p:ph type="body" idx="10"/>
+          </p:nvPr>
+        </p:nvSpPr>
+        <p:spPr/>
+        <p:txBody>
+          <a:bodyPr/>
+          <a:lstStyle/>
+          <a:p>
+            <a:pPr>
+              <a:spcBef>
+                <a:spcPts val="800"/>
+              </a:spcBef>
+              <a:spcAft>
+                <a:spcPts val="800"/>
+              </a:spcAft>
+            </a:pPr>
+            <a:r>
+              <a:rPr b="1">
+                <a:solidFill>
+                  <a:srgbClr val="0F6BFF"/>
+                </a:solidFill>
+              </a:rPr>
+              <a:t>▪  </a:t>
+            </a:r>
+            <a:r>
+              <a:rPr>
+                <a:solidFill>
+                  <a:srgbClr val="000000"/>
+                </a:solidFill>
+              </a:rPr>
+              <a:t>Open Delivery Gear (ODG) is OCM's compliance automation engine.</a:t>
+            </a:r>
+          </a:p>
+          <a:p>
+            <a:pPr>
+              <a:spcBef>
+                <a:spcPts val="800"/>
+              </a:spcBef>
+              <a:spcAft>
+                <a:spcPts val="800"/>
+              </a:spcAft>
+            </a:pPr>
+            <a:r>
+              <a:rPr b="1">
+                <a:solidFill>
+                  <a:srgbClr val="0F6BFF"/>
+                </a:solidFill>
+              </a:rPr>
+              <a:t>▪  </a:t>
+            </a:r>
+            <a:r>
+              <a:rPr>
+                <a:solidFill>
+                  <a:srgbClr val="000000"/>
+                </a:solidFill>
+              </a:rPr>
+              <a:t>The Compliance Dashboard is your entry point: every component, every finding, every signature in one view.</a:t>
+            </a:r>
+          </a:p>
+          <a:p>
+            <a:pPr>
+              <a:spcBef>
+                <a:spcPts val="800"/>
+              </a:spcBef>
+              <a:spcAft>
+                <a:spcPts val="800"/>
+              </a:spcAft>
+            </a:pPr>
+            <a:r>
+              <a:rPr b="1">
+                <a:solidFill>
+                  <a:srgbClr val="0F6BFF"/>
+                </a:solidFill>
+              </a:rPr>
+              <a:t>▪  </a:t>
+            </a:r>
+            <a:r>
+              <a:rPr>
+                <a:solidFill>
+                  <a:srgbClr val="000000"/>
+                </a:solidFill>
+              </a:rPr>
+              <a:t>Continuous scans run asynchronously — even after release.</a:t>
+            </a:r>
+          </a:p>
+          <a:p>
+            <a:pPr>
+              <a:spcBef>
+                <a:spcPts val="800"/>
+              </a:spcBef>
+              <a:spcAft>
+                <a:spcPts val="800"/>
+              </a:spcAft>
+            </a:pPr>
+            <a:r>
+              <a:rPr b="1">
+                <a:solidFill>
+                  <a:srgbClr val="0F6BFF"/>
+                </a:solidFill>
+              </a:rPr>
+              <a:t>▪  </a:t>
+            </a:r>
+            <a:r>
+              <a:rPr>
+                <a:solidFill>
+                  <a:srgbClr val="000000"/>
+                </a:solidFill>
+              </a:rPr>
+              <a:t>Findings get rescored against contextual risk, so your team patches what actually matters.</a:t>
+            </a:r>
+          </a:p>
+          <a:p>
+            <a:pPr>
+              <a:spcBef>
+                <a:spcPts val="800"/>
+              </a:spcBef>
+              <a:spcAft>
+                <a:spcPts val="800"/>
+              </a:spcAft>
+            </a:pPr>
+            <a:r>
+              <a:rPr b="1">
+                <a:solidFill>
+                  <a:srgbClr val="0F6BFF"/>
+                </a:solidFill>
+              </a:rPr>
+              <a:t>▪  </a:t>
+            </a:r>
+            <a:r>
+              <a:rPr>
+                <a:solidFill>
+                  <a:srgbClr val="000000"/>
+                </a:solidFill>
+              </a:rPr>
+              <a:t>Every compliance signal correlates by component identity. Auditors get evidence, not spreadsheets.</a:t>
+            </a:r>
+          </a:p>
+        </p:txBody>
+      </p:sp>
+    </p:spTree>
+  </p:cSld>
+  <p:clrMapOvr>
+    <a:masterClrMapping/>
+  </p:clrMapOvr>
+</p:sld>
+</file>
+
+<file path=ppt/slides/slide11.xml><?xml version="1.0" encoding="utf-8"?>
 <p:sld xmlns:a="http://schemas.openxmlformats.org/drawingml/2006/main" xmlns:p="http://schemas.openxmlformats.org/presentationml/2006/main" xmlns:r="http://schemas.openxmlformats.org/officeDocument/2006/relationships">
   <p:cSld>
     <p:spTree>
@@ -3988,7 +4495,7 @@
 </p:sld>
 </file>
 
-<file path=ppt/slides/slide11.xml><?xml version="1.0" encoding="utf-8"?>
+<file path=ppt/slides/slide12.xml><?xml version="1.0" encoding="utf-8"?>
 <p:sld xmlns:a="http://schemas.openxmlformats.org/drawingml/2006/main" xmlns:p="http://schemas.openxmlformats.org/presentationml/2006/main" xmlns:r="http://schemas.openxmlformats.org/officeDocument/2006/relationships">
   <p:cSld>
     <p:spTree>
@@ -4076,7 +4583,7 @@
       </p:sp>
       <p:pic>
         <p:nvPicPr>
-          <p:cNvPr id="5" name="Picture 4" descr="sap-horizontal-color_640.png"/>
+          <p:cNvPr id="5" name="Picture 4" descr="sap-horizontal-color_640_crop.png"/>
           <p:cNvPicPr>
             <a:picLocks noChangeAspect="1"/>
           </p:cNvPicPr>
@@ -4100,7 +4607,7 @@
       </p:pic>
       <p:pic>
         <p:nvPicPr>
-          <p:cNvPr id="6" name="Picture 5" descr="bwi-horizontal-color_640.png"/>
+          <p:cNvPr id="6" name="Picture 5" descr="bwi-horizontal-color_640_crop.png"/>
           <p:cNvPicPr>
             <a:picLocks noChangeAspect="1"/>
           </p:cNvPicPr>
@@ -4114,8 +4621,8 @@
         </p:blipFill>
         <p:spPr>
           <a:xfrm>
-            <a:off x="8467502" y="5715000"/>
-            <a:ext cx="1343471" cy="762000"/>
+            <a:off x="8317603" y="5715000"/>
+            <a:ext cx="1643269" cy="762000"/>
           </a:xfrm>
           <a:prstGeom prst="rect">
             <a:avLst/>
@@ -4124,7 +4631,7 @@
       </p:pic>
       <p:pic>
         <p:nvPicPr>
-          <p:cNvPr id="7" name="Picture 6" descr="sap-ns2-getlogovector.png"/>
+          <p:cNvPr id="7" name="Picture 6" descr="sap-ns2-getlogovector_crop.png"/>
           <p:cNvPicPr>
             <a:picLocks noChangeAspect="1"/>
           </p:cNvPicPr>
@@ -4138,8 +4645,8 @@
         </p:blipFill>
         <p:spPr>
           <a:xfrm>
-            <a:off x="13530262" y="5715000"/>
-            <a:ext cx="1371600" cy="762000"/>
+            <a:off x="12936673" y="5715000"/>
+            <a:ext cx="2558778" cy="762000"/>
           </a:xfrm>
           <a:prstGeom prst="rect">
             <a:avLst/>
@@ -4182,7 +4689,7 @@
       </p:sp>
       <p:pic>
         <p:nvPicPr>
-          <p:cNvPr id="9" name="Picture 8" descr="gardener-horizontal-color_640.png"/>
+          <p:cNvPr id="9" name="Picture 8" descr="gardener-horizontal-color_640_crop.png"/>
           <p:cNvPicPr>
             <a:picLocks noChangeAspect="1"/>
           </p:cNvPicPr>
@@ -4196,8 +4703,8 @@
         </p:blipFill>
         <p:spPr>
           <a:xfrm>
-            <a:off x="2729953" y="7905750"/>
-            <a:ext cx="2664918" cy="762000"/>
+            <a:off x="2538412" y="7955322"/>
+            <a:ext cx="3048000" cy="662855"/>
           </a:xfrm>
           <a:prstGeom prst="rect">
             <a:avLst/>
@@ -4206,7 +4713,7 @@
       </p:pic>
       <p:pic>
         <p:nvPicPr>
-          <p:cNvPr id="10" name="Picture 9" descr="konfidence-horizontal-light_640.png"/>
+          <p:cNvPr id="10" name="Picture 9" descr="konfidence-horizontal-light_640_crop.png"/>
           <p:cNvPicPr>
             <a:picLocks noChangeAspect="1"/>
           </p:cNvPicPr>
@@ -4220,8 +4727,8 @@
         </p:blipFill>
         <p:spPr>
           <a:xfrm>
-            <a:off x="7615237" y="8108156"/>
-            <a:ext cx="3048000" cy="357187"/>
+            <a:off x="7615237" y="8134848"/>
+            <a:ext cx="3048000" cy="303803"/>
           </a:xfrm>
           <a:prstGeom prst="rect">
             <a:avLst/>
@@ -4230,7 +4737,7 @@
       </p:pic>
       <p:pic>
         <p:nvPicPr>
-          <p:cNvPr id="11" name="Picture 10" descr="platform-mesh-horizontal-color_640.png"/>
+          <p:cNvPr id="11" name="Picture 10" descr="platform-mesh-horizontal-color_640_crop.png"/>
           <p:cNvPicPr>
             <a:picLocks noChangeAspect="1"/>
           </p:cNvPicPr>
@@ -4299,7 +4806,7 @@
 </p:sld>
 </file>
 
-<file path=ppt/slides/slide12.xml><?xml version="1.0" encoding="utf-8"?>
+<file path=ppt/slides/slide13.xml><?xml version="1.0" encoding="utf-8"?>
 <p:sld xmlns:a="http://schemas.openxmlformats.org/drawingml/2006/main" xmlns:p="http://schemas.openxmlformats.org/presentationml/2006/main" xmlns:r="http://schemas.openxmlformats.org/officeDocument/2006/relationships">
   <p:cSld>
     <p:spTree>
@@ -4592,7 +5099,7 @@
           <a:lstStyle/>
           <a:p>
             <a:r>
-              <a:t>EU DORA · NIS2 · GDPR. Provable supply-chain control, not best effort.</a:t>
+              <a:t>EU DORA · NIS2 · CRA. Provable supply-chain control, not best effort.</a:t>
             </a:r>
           </a:p>
         </p:txBody>
@@ -4673,7 +5180,7 @@
           <a:lstStyle/>
           <a:p>
             <a:r>
-              <a:t>THE PAIN</a:t>
+              <a:t>THE ANSWER</a:t>
             </a:r>
           </a:p>
         </p:txBody>
@@ -4694,19 +5201,14 @@
           <a:lstStyle/>
           <a:p>
             <a:r>
-              <a:t>Software delivery is fragmented.</a:t>
-            </a:r>
-          </a:p>
-          <a:p>
-            <a:r>
-              <a:t>Compliance retrofits don't scale.</a:t>
+              <a:t>Meet OCM. One identity, every boundary.</a:t>
             </a:r>
           </a:p>
         </p:txBody>
       </p:sp>
       <p:pic>
         <p:nvPicPr>
-          <p:cNvPr id="4" name="Picture 3" descr="03-fragmented_1680.png"/>
+          <p:cNvPr id="4" name="Picture 3" descr="03-meet-ocm-hub-and-spoke_1760.png"/>
           <p:cNvPicPr>
             <a:picLocks noChangeAspect="1"/>
           </p:cNvPicPr>
@@ -4720,8 +5222,8 @@
         </p:blipFill>
         <p:spPr>
           <a:xfrm>
-            <a:off x="3483429" y="4953000"/>
-            <a:ext cx="11321142" cy="4953000"/>
+            <a:off x="762000" y="4381500"/>
+            <a:ext cx="16764000" cy="5143500"/>
           </a:xfrm>
           <a:prstGeom prst="rect">
             <a:avLst/>
@@ -4944,7 +5446,7 @@
       </p:sp>
       <p:pic>
         <p:nvPicPr>
-          <p:cNvPr id="4" name="Picture 3" descr="04-sbom-inside-sbod_1680.png"/>
+          <p:cNvPr id="4" name="Picture 3" descr="04-sbom-inside-sbod_1760.png"/>
           <p:cNvPicPr>
             <a:picLocks noChangeAspect="1"/>
           </p:cNvPicPr>
@@ -4958,8 +5460,8 @@
         </p:blipFill>
         <p:spPr>
           <a:xfrm>
-            <a:off x="3640667" y="4953000"/>
-            <a:ext cx="11006666" cy="4953000"/>
+            <a:off x="3217333" y="4381500"/>
+            <a:ext cx="11853333" cy="5334000"/>
           </a:xfrm>
           <a:prstGeom prst="rect">
             <a:avLst/>
@@ -5000,7 +5502,7 @@
           <a:lstStyle/>
           <a:p>
             <a:r>
-              <a:t>OCM IN ONE PICTURE</a:t>
+              <a:t>HOW OCM COMPOSES</a:t>
             </a:r>
           </a:p>
         </p:txBody>
@@ -5021,35 +5523,137 @@
           <a:lstStyle/>
           <a:p>
             <a:r>
-              <a:t>Pack · Sign · Transport · Deploy</a:t>
-            </a:r>
-          </a:p>
-        </p:txBody>
-      </p:sp>
-      <p:pic>
-        <p:nvPicPr>
-          <p:cNvPr id="4" name="Picture 3" descr="05-pack-sign-transport-deploy-v2_1680.png"/>
-          <p:cNvPicPr>
-            <a:picLocks noChangeAspect="1"/>
-          </p:cNvPicPr>
-          <p:nvPr/>
-        </p:nvPicPr>
-        <p:blipFill>
-          <a:blip r:embed="rId2"/>
-          <a:stretch>
-            <a:fillRect/>
-          </a:stretch>
-        </p:blipFill>
-        <p:spPr>
-          <a:xfrm>
-            <a:off x="1143000" y="4953000"/>
-            <a:ext cx="16002000" cy="4505325"/>
-          </a:xfrm>
-          <a:prstGeom prst="rect">
-            <a:avLst/>
-          </a:prstGeom>
-        </p:spPr>
-      </p:pic>
+              <a:t>OCM doesn't replace your tools. It gives them something to sign together.</a:t>
+            </a:r>
+          </a:p>
+        </p:txBody>
+      </p:sp>
+      <p:sp>
+        <p:nvSpPr>
+          <p:cNvPr id="4" name="Text Placeholder 3"/>
+          <p:cNvSpPr>
+            <a:spLocks noGrp="1"/>
+          </p:cNvSpPr>
+          <p:nvPr>
+            <p:ph type="body" idx="10"/>
+          </p:nvPr>
+        </p:nvSpPr>
+        <p:spPr/>
+        <p:txBody>
+          <a:bodyPr/>
+          <a:lstStyle/>
+          <a:p>
+            <a:r>
+              <a:t>KEYLESS (SIGSTORE) / KEY-BASED (YOUR PKI)</a:t>
+            </a:r>
+          </a:p>
+        </p:txBody>
+      </p:sp>
+      <p:sp>
+        <p:nvSpPr>
+          <p:cNvPr id="5" name="Text Placeholder 4"/>
+          <p:cNvSpPr>
+            <a:spLocks noGrp="1"/>
+          </p:cNvSpPr>
+          <p:nvPr>
+            <p:ph type="body" idx="11"/>
+          </p:nvPr>
+        </p:nvSpPr>
+        <p:spPr/>
+        <p:txBody>
+          <a:bodyPr/>
+          <a:lstStyle/>
+          <a:p>
+            <a:r>
+              <a:t>Only signs one artifact. OCM gives them the complete SBoD to sign. One signature, covering every artifact in the delivery, by digest. Your existing keys still work.</a:t>
+            </a:r>
+          </a:p>
+        </p:txBody>
+      </p:sp>
+      <p:sp>
+        <p:nvSpPr>
+          <p:cNvPr id="6" name="Text Placeholder 5"/>
+          <p:cNvSpPr>
+            <a:spLocks noGrp="1"/>
+          </p:cNvSpPr>
+          <p:nvPr>
+            <p:ph type="body" idx="12"/>
+          </p:nvPr>
+        </p:nvSpPr>
+        <p:spPr/>
+        <p:txBody>
+          <a:bodyPr/>
+          <a:lstStyle/>
+          <a:p>
+            <a:r>
+              <a:t>YOUR SBOM TOOL OR FORMAT (SYFT, CYCLONEDX, SPDX)</a:t>
+            </a:r>
+          </a:p>
+        </p:txBody>
+      </p:sp>
+      <p:sp>
+        <p:nvSpPr>
+          <p:cNvPr id="7" name="Text Placeholder 6"/>
+          <p:cNvSpPr>
+            <a:spLocks noGrp="1"/>
+          </p:cNvSpPr>
+          <p:nvPr>
+            <p:ph type="body" idx="13"/>
+          </p:nvPr>
+        </p:nvSpPr>
+        <p:spPr/>
+        <p:txBody>
+          <a:bodyPr/>
+          <a:lstStyle/>
+          <a:p>
+            <a:r>
+              <a:t>Lists what's in your software. The SBoD contains or references it. Your SBOM tool is unchanged; the SBOM now travels with the signature.</a:t>
+            </a:r>
+          </a:p>
+        </p:txBody>
+      </p:sp>
+      <p:sp>
+        <p:nvSpPr>
+          <p:cNvPr id="8" name="Text Placeholder 7"/>
+          <p:cNvSpPr>
+            <a:spLocks noGrp="1"/>
+          </p:cNvSpPr>
+          <p:nvPr>
+            <p:ph type="body" idx="14"/>
+          </p:nvPr>
+        </p:nvSpPr>
+        <p:spPr/>
+        <p:txBody>
+          <a:bodyPr/>
+          <a:lstStyle/>
+          <a:p>
+            <a:r>
+              <a:t>A BIT OF OCI + SIGSTORE + YOUR OWN SCRIPTS</a:t>
+            </a:r>
+          </a:p>
+        </p:txBody>
+      </p:sp>
+      <p:sp>
+        <p:nvSpPr>
+          <p:cNvPr id="9" name="Text Placeholder 8"/>
+          <p:cNvSpPr>
+            <a:spLocks noGrp="1"/>
+          </p:cNvSpPr>
+          <p:nvPr>
+            <p:ph type="body" idx="15"/>
+          </p:nvPr>
+        </p:nvSpPr>
+        <p:spPr/>
+        <p:txBody>
+          <a:bodyPr/>
+          <a:lstStyle/>
+          <a:p>
+            <a:r>
+              <a:t>Can almost get you there, in pieces. OCM is the standardised version, openly governed, with conformance tests and the SBoD vocabulary your auditors are starting to expect.</a:t>
+            </a:r>
+          </a:p>
+        </p:txBody>
+      </p:sp>
     </p:spTree>
   </p:cSld>
   <p:clrMapOvr>
@@ -5084,7 +5688,7 @@
           <a:lstStyle/>
           <a:p>
             <a:r>
-              <a:t>SOVEREIGN-READY</a:t>
+              <a:t>OCM IN ONE PICTURE</a:t>
             </a:r>
           </a:p>
         </p:txBody>
@@ -5105,131 +5709,35 @@
           <a:lstStyle/>
           <a:p>
             <a:r>
-              <a:t>Trust, but verify.</a:t>
-            </a:r>
-          </a:p>
-        </p:txBody>
-      </p:sp>
-      <p:sp>
-        <p:nvSpPr>
-          <p:cNvPr id="4" name="Text Placeholder 3"/>
-          <p:cNvSpPr>
-            <a:spLocks noGrp="1"/>
-          </p:cNvSpPr>
-          <p:nvPr>
-            <p:ph type="body" idx="10"/>
-          </p:nvPr>
-        </p:nvSpPr>
-        <p:spPr/>
-        <p:txBody>
-          <a:bodyPr/>
-          <a:lstStyle/>
-          <a:p>
-            <a:pPr>
-              <a:spcBef>
-                <a:spcPts val="800"/>
-              </a:spcBef>
-              <a:spcAft>
-                <a:spcPts val="800"/>
-              </a:spcAft>
-            </a:pPr>
-            <a:r>
-              <a:rPr b="1">
-                <a:solidFill>
-                  <a:srgbClr val="0F6BFF"/>
-                </a:solidFill>
-              </a:rPr>
-              <a:t>▪  </a:t>
-            </a:r>
-            <a:r>
-              <a:rPr>
-                <a:solidFill>
-                  <a:srgbClr val="000000"/>
-                </a:solidFill>
-              </a:rPr>
-              <a:t>Identity is location-independent. A component carries its name regardless of which registry it lives in.</a:t>
-            </a:r>
-          </a:p>
-          <a:p>
-            <a:pPr>
-              <a:spcBef>
-                <a:spcPts val="800"/>
-              </a:spcBef>
-              <a:spcAft>
-                <a:spcPts val="800"/>
-              </a:spcAft>
-            </a:pPr>
-            <a:r>
-              <a:rPr b="1">
-                <a:solidFill>
-                  <a:srgbClr val="0F6BFF"/>
-                </a:solidFill>
-              </a:rPr>
-              <a:t>▪  </a:t>
-            </a:r>
-            <a:r>
-              <a:rPr>
-                <a:solidFill>
-                  <a:srgbClr val="000000"/>
-                </a:solidFill>
-              </a:rPr>
-              <a:t>Signatures are location-independent. Sign once at source; verify at the destination, or at any hop in between, with no callback upstream.</a:t>
-            </a:r>
-          </a:p>
-          <a:p>
-            <a:pPr>
-              <a:spcBef>
-                <a:spcPts val="800"/>
-              </a:spcBef>
-              <a:spcAft>
-                <a:spcPts val="800"/>
-              </a:spcAft>
-            </a:pPr>
-            <a:r>
-              <a:rPr b="1">
-                <a:solidFill>
-                  <a:srgbClr val="0F6BFF"/>
-                </a:solidFill>
-              </a:rPr>
-              <a:t>▪  </a:t>
-            </a:r>
-            <a:r>
-              <a:rPr>
-                <a:solidFill>
-                  <a:srgbClr val="000000"/>
-                </a:solidFill>
-              </a:rPr>
-              <a:t>Day-2 ops happen inside the boundary. Subscribe to the component and pull upgrades on your schedule, scale across regions, all without reaching back upstream.</a:t>
-            </a:r>
-          </a:p>
-          <a:p>
-            <a:pPr>
-              <a:spcBef>
-                <a:spcPts val="800"/>
-              </a:spcBef>
-              <a:spcAft>
-                <a:spcPts val="800"/>
-              </a:spcAft>
-            </a:pPr>
-            <a:r>
-              <a:rPr b="1">
-                <a:solidFill>
-                  <a:srgbClr val="0F6BFF"/>
-                </a:solidFill>
-              </a:rPr>
-              <a:t>▪  </a:t>
-            </a:r>
-            <a:r>
-              <a:rPr>
-                <a:solidFill>
-                  <a:srgbClr val="000000"/>
-                </a:solidFill>
-              </a:rPr>
-              <a:t>On transfer into a sovereign environment, a component can carry every artifact it needs along with it. The destination needs nothing more.</a:t>
-            </a:r>
-          </a:p>
-        </p:txBody>
-      </p:sp>
+              <a:t>Pack · Sign · Transport · Deploy</a:t>
+            </a:r>
+          </a:p>
+        </p:txBody>
+      </p:sp>
+      <p:pic>
+        <p:nvPicPr>
+          <p:cNvPr id="4" name="Picture 3" descr="05-pack-sign-transport-deploy-v2_1760.png"/>
+          <p:cNvPicPr>
+            <a:picLocks noChangeAspect="1"/>
+          </p:cNvPicPr>
+          <p:nvPr/>
+        </p:nvPicPr>
+        <p:blipFill>
+          <a:blip r:embed="rId2"/>
+          <a:stretch>
+            <a:fillRect/>
+          </a:stretch>
+        </p:blipFill>
+        <p:spPr>
+          <a:xfrm>
+            <a:off x="762000" y="4381500"/>
+            <a:ext cx="16764000" cy="4714875"/>
+          </a:xfrm>
+          <a:prstGeom prst="rect">
+            <a:avLst/>
+          </a:prstGeom>
+        </p:spPr>
+      </p:pic>
     </p:spTree>
   </p:cSld>
   <p:clrMapOvr>
@@ -5264,7 +5772,7 @@
           <a:lstStyle/>
           <a:p>
             <a:r>
-              <a:t>SOVEREIGN-READY — AIR-GAP</a:t>
+              <a:t>SOVEREIGN-READY</a:t>
             </a:r>
           </a:p>
         </p:txBody>
@@ -5285,35 +5793,131 @@
           <a:lstStyle/>
           <a:p>
             <a:r>
-              <a:t>Trust travels with the component.</a:t>
-            </a:r>
-          </a:p>
-        </p:txBody>
-      </p:sp>
-      <p:pic>
-        <p:nvPicPr>
-          <p:cNvPr id="4" name="Picture 3" descr="06-sovereign-airgap_1680.png"/>
-          <p:cNvPicPr>
-            <a:picLocks noChangeAspect="1"/>
-          </p:cNvPicPr>
-          <p:nvPr/>
-        </p:nvPicPr>
-        <p:blipFill>
-          <a:blip r:embed="rId2"/>
-          <a:stretch>
-            <a:fillRect/>
-          </a:stretch>
-        </p:blipFill>
-        <p:spPr>
-          <a:xfrm>
-            <a:off x="3483429" y="4953000"/>
-            <a:ext cx="11321142" cy="4953000"/>
-          </a:xfrm>
-          <a:prstGeom prst="rect">
-            <a:avLst/>
-          </a:prstGeom>
-        </p:spPr>
-      </p:pic>
+              <a:t>Trust, but verify.</a:t>
+            </a:r>
+          </a:p>
+        </p:txBody>
+      </p:sp>
+      <p:sp>
+        <p:nvSpPr>
+          <p:cNvPr id="4" name="Text Placeholder 3"/>
+          <p:cNvSpPr>
+            <a:spLocks noGrp="1"/>
+          </p:cNvSpPr>
+          <p:nvPr>
+            <p:ph type="body" idx="10"/>
+          </p:nvPr>
+        </p:nvSpPr>
+        <p:spPr/>
+        <p:txBody>
+          <a:bodyPr/>
+          <a:lstStyle/>
+          <a:p>
+            <a:pPr>
+              <a:spcBef>
+                <a:spcPts val="800"/>
+              </a:spcBef>
+              <a:spcAft>
+                <a:spcPts val="800"/>
+              </a:spcAft>
+            </a:pPr>
+            <a:r>
+              <a:rPr b="1">
+                <a:solidFill>
+                  <a:srgbClr val="0F6BFF"/>
+                </a:solidFill>
+              </a:rPr>
+              <a:t>▪  </a:t>
+            </a:r>
+            <a:r>
+              <a:rPr>
+                <a:solidFill>
+                  <a:srgbClr val="000000"/>
+                </a:solidFill>
+              </a:rPr>
+              <a:t>Identity is location-independent. A component carries its name regardless of which registry it lives in.</a:t>
+            </a:r>
+          </a:p>
+          <a:p>
+            <a:pPr>
+              <a:spcBef>
+                <a:spcPts val="800"/>
+              </a:spcBef>
+              <a:spcAft>
+                <a:spcPts val="800"/>
+              </a:spcAft>
+            </a:pPr>
+            <a:r>
+              <a:rPr b="1">
+                <a:solidFill>
+                  <a:srgbClr val="0F6BFF"/>
+                </a:solidFill>
+              </a:rPr>
+              <a:t>▪  </a:t>
+            </a:r>
+            <a:r>
+              <a:rPr>
+                <a:solidFill>
+                  <a:srgbClr val="000000"/>
+                </a:solidFill>
+              </a:rPr>
+              <a:t>Signatures are location-independent. Sign once at source; verify at the destination, or at any hop in between, with no callback upstream.</a:t>
+            </a:r>
+          </a:p>
+          <a:p>
+            <a:pPr>
+              <a:spcBef>
+                <a:spcPts val="800"/>
+              </a:spcBef>
+              <a:spcAft>
+                <a:spcPts val="800"/>
+              </a:spcAft>
+            </a:pPr>
+            <a:r>
+              <a:rPr b="1">
+                <a:solidFill>
+                  <a:srgbClr val="0F6BFF"/>
+                </a:solidFill>
+              </a:rPr>
+              <a:t>▪  </a:t>
+            </a:r>
+            <a:r>
+              <a:rPr>
+                <a:solidFill>
+                  <a:srgbClr val="000000"/>
+                </a:solidFill>
+              </a:rPr>
+              <a:t>Day-2 ops happen inside the boundary. Subscribe to the component and pull upgrades on your schedule, scale across regions, all without reaching back upstream.</a:t>
+            </a:r>
+          </a:p>
+          <a:p>
+            <a:pPr>
+              <a:spcBef>
+                <a:spcPts val="800"/>
+              </a:spcBef>
+              <a:spcAft>
+                <a:spcPts val="800"/>
+              </a:spcAft>
+            </a:pPr>
+            <a:r>
+              <a:rPr b="1">
+                <a:solidFill>
+                  <a:srgbClr val="0F6BFF"/>
+                </a:solidFill>
+              </a:rPr>
+              <a:t>▪  </a:t>
+            </a:r>
+            <a:r>
+              <a:rPr>
+                <a:solidFill>
+                  <a:srgbClr val="000000"/>
+                </a:solidFill>
+              </a:rPr>
+              <a:t>On transfer into a sovereign environment, a component can carry every artifact it needs along with it. The destination needs nothing more.</a:t>
+            </a:r>
+          </a:p>
+        </p:txBody>
+      </p:sp>
     </p:spTree>
   </p:cSld>
   <p:clrMapOvr>
@@ -5348,7 +5952,7 @@
           <a:lstStyle/>
           <a:p>
             <a:r>
-              <a:t>SCAN — COMPLIANCE-NATIVE WITH OPEN DELIVERY GEAR</a:t>
+              <a:t>SOVEREIGN-READY — AIR-GAP</a:t>
             </a:r>
           </a:p>
         </p:txBody>
@@ -5369,162 +5973,35 @@
           <a:lstStyle/>
           <a:p>
             <a:r>
-              <a:t>Compliance as a system property —</a:t>
-            </a:r>
-          </a:p>
-          <a:p>
-            <a:r>
-              <a:t>not a quarterly project.</a:t>
-            </a:r>
-          </a:p>
-        </p:txBody>
-      </p:sp>
-      <p:sp>
-        <p:nvSpPr>
-          <p:cNvPr id="4" name="Text Placeholder 3"/>
-          <p:cNvSpPr>
-            <a:spLocks noGrp="1"/>
-          </p:cNvSpPr>
-          <p:nvPr>
-            <p:ph type="body" idx="10"/>
-          </p:nvPr>
-        </p:nvSpPr>
-        <p:spPr/>
-        <p:txBody>
-          <a:bodyPr/>
-          <a:lstStyle/>
-          <a:p>
-            <a:pPr>
-              <a:spcBef>
-                <a:spcPts val="800"/>
-              </a:spcBef>
-              <a:spcAft>
-                <a:spcPts val="800"/>
-              </a:spcAft>
-            </a:pPr>
-            <a:r>
-              <a:rPr b="1">
-                <a:solidFill>
-                  <a:srgbClr val="0F6BFF"/>
-                </a:solidFill>
-              </a:rPr>
-              <a:t>▪  </a:t>
-            </a:r>
-            <a:r>
-              <a:rPr>
-                <a:solidFill>
-                  <a:srgbClr val="000000"/>
-                </a:solidFill>
-              </a:rPr>
-              <a:t>Open Delivery Gear (ODG) is OCM's compliance automation engine.</a:t>
-            </a:r>
-          </a:p>
-          <a:p>
-            <a:pPr>
-              <a:spcBef>
-                <a:spcPts val="800"/>
-              </a:spcBef>
-              <a:spcAft>
-                <a:spcPts val="800"/>
-              </a:spcAft>
-            </a:pPr>
-            <a:r>
-              <a:rPr b="1">
-                <a:solidFill>
-                  <a:srgbClr val="0F6BFF"/>
-                </a:solidFill>
-              </a:rPr>
-              <a:t>▪  </a:t>
-            </a:r>
-            <a:r>
-              <a:rPr>
-                <a:solidFill>
-                  <a:srgbClr val="000000"/>
-                </a:solidFill>
-              </a:rPr>
-              <a:t>The Compliance Dashboard is your entry point: every component, every finding, every signature in one view.</a:t>
-            </a:r>
-          </a:p>
-          <a:p>
-            <a:pPr>
-              <a:spcBef>
-                <a:spcPts val="800"/>
-              </a:spcBef>
-              <a:spcAft>
-                <a:spcPts val="800"/>
-              </a:spcAft>
-            </a:pPr>
-            <a:r>
-              <a:rPr b="1">
-                <a:solidFill>
-                  <a:srgbClr val="0F6BFF"/>
-                </a:solidFill>
-              </a:rPr>
-              <a:t>▪  </a:t>
-            </a:r>
-            <a:r>
-              <a:rPr>
-                <a:solidFill>
-                  <a:srgbClr val="000000"/>
-                </a:solidFill>
-              </a:rPr>
-              <a:t>Continuous scans run asynchronously — even after release.</a:t>
-            </a:r>
-          </a:p>
-          <a:p>
-            <a:pPr>
-              <a:spcBef>
-                <a:spcPts val="800"/>
-              </a:spcBef>
-              <a:spcAft>
-                <a:spcPts val="800"/>
-              </a:spcAft>
-            </a:pPr>
-            <a:r>
-              <a:rPr b="1">
-                <a:solidFill>
-                  <a:srgbClr val="0F6BFF"/>
-                </a:solidFill>
-              </a:rPr>
-              <a:t>▪  </a:t>
-            </a:r>
-            <a:r>
-              <a:rPr>
-                <a:solidFill>
-                  <a:srgbClr val="000000"/>
-                </a:solidFill>
-              </a:rPr>
-              <a:t>Findings get rescored against contextual risk, so your team patches what actually matters.</a:t>
-            </a:r>
-          </a:p>
-          <a:p>
-            <a:pPr>
-              <a:spcBef>
-                <a:spcPts val="800"/>
-              </a:spcBef>
-              <a:spcAft>
-                <a:spcPts val="800"/>
-              </a:spcAft>
-            </a:pPr>
-            <a:r>
-              <a:rPr b="1">
-                <a:solidFill>
-                  <a:srgbClr val="0F6BFF"/>
-                </a:solidFill>
-              </a:rPr>
-              <a:t>▪  </a:t>
-            </a:r>
-            <a:r>
-              <a:rPr>
-                <a:solidFill>
-                  <a:srgbClr val="000000"/>
-                </a:solidFill>
-              </a:rPr>
-              <a:t>Every compliance signal correlates by component identity. Auditors get evidence, not spreadsheets.</a:t>
-            </a:r>
-          </a:p>
-        </p:txBody>
-      </p:sp>
+              <a:t>Trust travels with the component.</a:t>
+            </a:r>
+          </a:p>
+        </p:txBody>
+      </p:sp>
+      <p:pic>
+        <p:nvPicPr>
+          <p:cNvPr id="4" name="Picture 3" descr="06-sovereign-airgap_1760.png"/>
+          <p:cNvPicPr>
+            <a:picLocks noChangeAspect="1"/>
+          </p:cNvPicPr>
+          <p:nvPr/>
+        </p:nvPicPr>
+        <p:blipFill>
+          <a:blip r:embed="rId2"/>
+          <a:stretch>
+            <a:fillRect/>
+          </a:stretch>
+        </p:blipFill>
+        <p:spPr>
+          <a:xfrm>
+            <a:off x="3048000" y="4381500"/>
+            <a:ext cx="12192000" cy="5334000"/>
+          </a:xfrm>
+          <a:prstGeom prst="rect">
+            <a:avLst/>
+          </a:prstGeom>
+        </p:spPr>
+      </p:pic>
     </p:spTree>
   </p:cSld>
   <p:clrMapOvr>

--- a/docs/community/marketing/decks/exec-phase1/OCM-Sovereign-Delivery-Exec.pptx
+++ b/docs/community/marketing/decks/exec-phase1/OCM-Sovereign-Delivery-Exec.pptx
@@ -1085,8 +1085,8 @@
         </ns0:nvSpPr>
         <ns0:spPr>
           <ns2:xfrm xmlns:ns2="http://schemas.openxmlformats.org/drawingml/2006/main">
-            <ns2:off x="1143000" y="5753100"/>
-            <ns2:ext cx="4972050" cy="4381500"/>
+            <ns2:off x="1143000" y="5905500"/>
+            <ns2:ext cx="4972050" cy="4229100"/>
           </ns2:xfrm>
           <ns3:prstGeom xmlns:ns3="http://schemas.openxmlformats.org/drawingml/2006/main" prst="rect">
             <ns3:avLst/>
@@ -1198,8 +1198,8 @@
         </ns0:nvSpPr>
         <ns0:spPr>
           <ns2:xfrm xmlns:ns2="http://schemas.openxmlformats.org/drawingml/2006/main">
-            <ns2:off x="6648450" y="5753100"/>
-            <ns2:ext cx="4972050" cy="4381500"/>
+            <ns2:off x="6648450" y="5905500"/>
+            <ns2:ext cx="4972050" cy="4229100"/>
           </ns2:xfrm>
           <ns3:prstGeom xmlns:ns3="http://schemas.openxmlformats.org/drawingml/2006/main" prst="rect">
             <ns3:avLst/>
@@ -1311,8 +1311,8 @@
         </ns0:nvSpPr>
         <ns0:spPr>
           <ns2:xfrm xmlns:ns2="http://schemas.openxmlformats.org/drawingml/2006/main">
-            <ns2:off x="12153900" y="5753100"/>
-            <ns2:ext cx="4972050" cy="4381500"/>
+            <ns2:off x="12153900" y="5905500"/>
+            <ns2:ext cx="4972050" cy="4229100"/>
           </ns2:xfrm>
           <ns3:prstGeom xmlns:ns3="http://schemas.openxmlformats.org/drawingml/2006/main" prst="rect">
             <ns3:avLst/>
@@ -1509,8 +1509,8 @@
         </ns0:nvSpPr>
         <ns0:spPr>
           <ns2:xfrm xmlns:ns2="http://schemas.openxmlformats.org/drawingml/2006/main">
-            <ns2:off x="762000" y="4381500"/>
-            <ns2:ext cx="16764000" cy="5334000"/>
+            <ns2:off x="571500" y="4381500"/>
+            <ns2:ext cx="17145000" cy="5715000"/>
           </ns2:xfrm>
           <ns3:prstGeom xmlns:ns3="http://schemas.openxmlformats.org/drawingml/2006/main" prst="rect">
             <ns3:avLst/>

--- a/docs/community/marketing/decks/exec-phase1/OCM-Sovereign-Delivery-Exec.pptx
+++ b/docs/community/marketing/decks/exec-phase1/OCM-Sovereign-Delivery-Exec.pptx
@@ -5446,7 +5446,7 @@
       </p:sp>
       <p:pic>
         <p:nvPicPr>
-          <p:cNvPr id="4" name="Picture 3" descr="04-sbom-inside-sbod_1760.png"/>
+          <p:cNvPr id="4" name="Picture 3" descr="04-sbom-inside-sbod_1478.png"/>
           <p:cNvPicPr>
             <a:picLocks noChangeAspect="1"/>
           </p:cNvPicPr>
@@ -5460,8 +5460,8 @@
         </p:blipFill>
         <p:spPr>
           <a:xfrm>
-            <a:off x="3217333" y="4381500"/>
-            <a:ext cx="11853333" cy="5334000"/>
+            <a:off x="1867944" y="3952875"/>
+            <a:ext cx="14056811" cy="6334125"/>
           </a:xfrm>
           <a:prstGeom prst="rect">
             <a:avLst/>

--- a/docs/community/marketing/decks/exec-phase1/OCM-Sovereign-Delivery-Exec.pptx
+++ b/docs/community/marketing/decks/exec-phase1/OCM-Sovereign-Delivery-Exec.pptx
@@ -156,8 +156,8 @@
         </ns0:nvSpPr>
         <ns0:spPr>
           <ns2:xfrm xmlns:ns2="http://schemas.openxmlformats.org/drawingml/2006/main">
-            <ns2:off x="914400" y="1524000"/>
-            <ns2:ext cx="16192500" cy="1905000"/>
+            <ns2:off x="914400" y="1905000"/>
+            <ns2:ext cx="16192500" cy="1333500"/>
           </ns2:xfrm>
           <ns3:prstGeom xmlns:ns3="http://schemas.openxmlformats.org/drawingml/2006/main" prst="rect">
             <ns3:avLst/>
@@ -199,8 +199,8 @@
         </ns0:nvSpPr>
         <ns0:spPr>
           <ns2:xfrm xmlns:ns2="http://schemas.openxmlformats.org/drawingml/2006/main">
-            <ns2:off x="914400" y="3619500"/>
-            <ns2:ext cx="16192500" cy="1524000"/>
+            <ns2:off x="914400" y="3333750"/>
+            <ns2:ext cx="16192500" cy="1333500"/>
           </ns2:xfrm>
           <ns3:prstGeom xmlns:ns3="http://schemas.openxmlformats.org/drawingml/2006/main" prst="rect">
             <ns3:avLst/>
@@ -242,8 +242,8 @@
         </ns0:nvSpPr>
         <ns0:spPr>
           <ns2:xfrm xmlns:ns2="http://schemas.openxmlformats.org/drawingml/2006/main">
-            <ns2:off x="914400" y="5715000"/>
-            <ns2:ext cx="16192500" cy="1143000"/>
+            <ns2:off x="914400" y="5048250"/>
+            <ns2:ext cx="16192500" cy="857250"/>
           </ns2:xfrm>
           <ns3:prstGeom xmlns:ns3="http://schemas.openxmlformats.org/drawingml/2006/main" prst="rect">
             <ns3:avLst/>
@@ -288,7 +288,7 @@
         </ns0:nvSpPr>
         <ns0:spPr>
           <ns2:xfrm xmlns:ns2="http://schemas.openxmlformats.org/drawingml/2006/main">
-            <ns2:off x="914400" y="8191500"/>
+            <ns2:off x="914400" y="6286500"/>
             <ns2:ext cx="16192500" cy="571500"/>
           </ns2:xfrm>
           <ns3:prstGeom xmlns:ns3="http://schemas.openxmlformats.org/drawingml/2006/main" prst="rect">
@@ -327,7 +327,2310 @@
 </p:sldLayout>
 </file>
 
-<file path=ppt/slideLayouts/slideLayout10.xml><?xml version="1.0" encoding="utf-8"?>
+<file path=ppt/slideLayouts/slideLayout2.xml><?xml version="1.0" encoding="utf-8"?>
+<p:sldLayout xmlns:a="http://schemas.openxmlformats.org/drawingml/2006/main" xmlns:r="http://schemas.openxmlformats.org/officeDocument/2006/relationships" xmlns:p="http://schemas.openxmlformats.org/presentationml/2006/main" type="obj" preserve="1" userDrawn="1">
+  <p:cSld name="CTA">
+    <p:bg>
+      <p:bgPr>
+        <a:solidFill>
+          <a:srgbClr val="0A1530"/>
+        </a:solidFill>
+        <a:effectLst/>
+      </p:bgPr>
+    </p:bg>
+    <p:spTree>
+      <p:nvGrpSpPr>
+        <p:cNvPr id="1" name=""/>
+        <p:cNvGrpSpPr/>
+        <p:nvPr/>
+      </p:nvGrpSpPr>
+      <p:grpSpPr>
+        <a:xfrm>
+          <a:off x="0" y="0"/>
+          <a:ext cx="0" cy="0"/>
+          <a:chOff x="0" y="0"/>
+          <a:chExt cx="0" cy="0"/>
+        </a:xfrm>
+      </p:grpSpPr>
+      <ns0:sp xmlns:ns0="http://schemas.openxmlformats.org/presentationml/2006/main">
+        <ns0:nvSpPr>
+          <ns0:cNvPr id="10" name="CTA Title"/>
+          <ns0:cNvSpPr>
+            <ns1:spLocks xmlns:ns1="http://schemas.openxmlformats.org/drawingml/2006/main" noGrp="1"/>
+          </ns0:cNvSpPr>
+          <ns0:nvPr>
+            <ns0:ph type="title" idx="1"/>
+          </ns0:nvPr>
+        </ns0:nvSpPr>
+        <ns0:spPr>
+          <ns2:xfrm xmlns:ns2="http://schemas.openxmlformats.org/drawingml/2006/main">
+            <ns2:off x="914400" y="3048000"/>
+            <ns2:ext cx="16192500" cy="952500"/>
+          </ns2:xfrm>
+          <ns3:prstGeom xmlns:ns3="http://schemas.openxmlformats.org/drawingml/2006/main" prst="rect">
+            <ns3:avLst/>
+          </ns3:prstGeom>
+        </ns0:spPr>
+        <ns0:txBody>
+          <ns4:bodyPr xmlns:ns4="http://schemas.openxmlformats.org/drawingml/2006/main" wrap="square" rtlCol="0" anchor="t" lIns="0" tIns="0" rIns="0" bIns="0"/>
+          <ns5:lstStyle xmlns:ns5="http://schemas.openxmlformats.org/drawingml/2006/main">
+            <ns5:lvl1pPr marL="0" indent="0" algn="l">
+              <ns5:buNone/>
+              <ns5:defRPr sz="5600" b="1">
+                <ns5:solidFill>
+                  <ns5:srgbClr val="FFFFFF"/>
+                </ns5:solidFill>
+                <ns5:latin typeface="Aptos Display"/>
+              </ns5:defRPr>
+            </ns5:lvl1pPr>
+          </ns5:lstStyle>
+          <ns6:p xmlns:ns6="http://schemas.openxmlformats.org/drawingml/2006/main">
+            <ns6:r>
+              <ns6:rPr lang="en-US"/>
+              <ns6:t>Call to action</ns6:t>
+            </ns6:r>
+            <ns6:endParaRPr lang="en-US"/>
+          </ns6:p>
+        </ns0:txBody>
+      </ns0:sp>
+      <ns0:sp xmlns:ns0="http://schemas.openxmlformats.org/presentationml/2006/main">
+        <ns0:nvSpPr>
+          <ns0:cNvPr id="11" name="CTA Body"/>
+          <ns0:cNvSpPr>
+            <ns1:spLocks xmlns:ns1="http://schemas.openxmlformats.org/drawingml/2006/main" noGrp="1"/>
+          </ns0:cNvSpPr>
+          <ns0:nvPr>
+            <ns0:ph type="body" idx="2"/>
+          </ns0:nvPr>
+        </ns0:nvSpPr>
+        <ns0:spPr>
+          <ns2:xfrm xmlns:ns2="http://schemas.openxmlformats.org/drawingml/2006/main">
+            <ns2:off x="914400" y="4381500"/>
+            <ns2:ext cx="16192500" cy="3810000"/>
+          </ns2:xfrm>
+          <ns3:prstGeom xmlns:ns3="http://schemas.openxmlformats.org/drawingml/2006/main" prst="rect">
+            <ns3:avLst/>
+          </ns3:prstGeom>
+        </ns0:spPr>
+        <ns0:txBody>
+          <ns4:bodyPr xmlns:ns4="http://schemas.openxmlformats.org/drawingml/2006/main" wrap="square" rtlCol="0" anchor="t" lIns="0" tIns="0" rIns="0" bIns="0"/>
+          <ns5:lstStyle xmlns:ns5="http://schemas.openxmlformats.org/drawingml/2006/main">
+            <ns5:lvl1pPr marL="0" indent="0" algn="l">
+              <ns5:buNone/>
+              <ns5:defRPr sz="2200">
+                <ns5:solidFill>
+                  <ns5:srgbClr val="FFFFFF"/>
+                </ns5:solidFill>
+                <ns5:latin typeface="Aptos"/>
+              </ns5:defRPr>
+            </ns5:lvl1pPr>
+          </ns5:lstStyle>
+          <ns6:p xmlns:ns6="http://schemas.openxmlformats.org/drawingml/2006/main">
+            <ns6:r>
+              <ns6:rPr lang="en-US"/>
+              <ns6:t>Three-line CTA bullets go here.</ns6:t>
+            </ns6:r>
+            <ns6:endParaRPr lang="en-US"/>
+          </ns6:p>
+        </ns0:txBody>
+      </ns0:sp>
+    </p:spTree>
+  </p:cSld>
+  <p:clrMapOvr>
+    <a:masterClrMapping/>
+  </p:clrMapOvr>
+</p:sldLayout>
+</file>
+
+<file path=ppt/slideLayouts/slideLayout3.xml><?xml version="1.0" encoding="utf-8"?>
+<p:sldLayout xmlns:a="http://schemas.openxmlformats.org/drawingml/2006/main" xmlns:r="http://schemas.openxmlformats.org/officeDocument/2006/relationships" xmlns:p="http://schemas.openxmlformats.org/presentationml/2006/main" type="obj" preserve="1" userDrawn="1">
+  <p:cSld name="Content / 3-Column">
+    <p:bg>
+      <p:bgPr>
+        <a:solidFill>
+          <a:srgbClr val="FFFFFF"/>
+        </a:solidFill>
+        <a:effectLst/>
+      </p:bgPr>
+    </p:bg>
+    <p:spTree>
+      <p:nvGrpSpPr>
+        <p:cNvPr id="1" name=""/>
+        <p:cNvGrpSpPr/>
+        <p:nvPr/>
+      </p:nvGrpSpPr>
+      <p:grpSpPr>
+        <a:xfrm>
+          <a:off x="0" y="0"/>
+          <a:ext cx="0" cy="0"/>
+          <a:chOff x="0" y="0"/>
+          <a:chExt cx="0" cy="0"/>
+        </a:xfrm>
+      </p:grpSpPr>
+      <ns0:sp xmlns:ns0="http://schemas.openxmlformats.org/presentationml/2006/main">
+        <ns0:nvSpPr>
+          <ns0:cNvPr id="10" name="Eyebrow"/>
+          <ns0:cNvSpPr>
+            <ns1:spLocks xmlns:ns1="http://schemas.openxmlformats.org/drawingml/2006/main" noGrp="1"/>
+          </ns0:cNvSpPr>
+          <ns0:nvPr>
+            <ns0:ph type="body" idx="1"/>
+          </ns0:nvPr>
+        </ns0:nvSpPr>
+        <ns0:spPr>
+          <ns2:xfrm xmlns:ns2="http://schemas.openxmlformats.org/drawingml/2006/main">
+            <ns2:off x="1143000" y="2428875"/>
+            <ns2:ext cx="16002000" cy="457200"/>
+          </ns2:xfrm>
+          <ns3:prstGeom xmlns:ns3="http://schemas.openxmlformats.org/drawingml/2006/main" prst="rect">
+            <ns3:avLst/>
+          </ns3:prstGeom>
+        </ns0:spPr>
+        <ns0:txBody>
+          <ns4:bodyPr xmlns:ns4="http://schemas.openxmlformats.org/drawingml/2006/main" wrap="square" rtlCol="0" anchor="t" lIns="0" tIns="0" rIns="0" bIns="0"/>
+          <ns5:lstStyle xmlns:ns5="http://schemas.openxmlformats.org/drawingml/2006/main">
+            <ns5:lvl1pPr marL="0" indent="0" algn="l">
+              <ns5:buNone/>
+              <ns5:defRPr sz="2800" b="1" cap="all" spc="140">
+                <ns5:solidFill>
+                  <ns5:srgbClr val="0F6BFF"/>
+                </ns5:solidFill>
+                <ns5:latin typeface="Aptos"/>
+              </ns5:defRPr>
+            </ns5:lvl1pPr>
+          </ns5:lstStyle>
+          <ns6:p xmlns:ns6="http://schemas.openxmlformats.org/drawingml/2006/main">
+            <ns6:r>
+              <ns6:rPr lang="en-US"/>
+              <ns6:t>EYEBROW</ns6:t>
+            </ns6:r>
+            <ns6:endParaRPr lang="en-US"/>
+          </ns6:p>
+        </ns0:txBody>
+      </ns0:sp>
+      <ns0:sp xmlns:ns0="http://schemas.openxmlformats.org/presentationml/2006/main">
+        <ns0:nvSpPr>
+          <ns0:cNvPr id="11" name="Title"/>
+          <ns0:cNvSpPr>
+            <ns1:spLocks xmlns:ns1="http://schemas.openxmlformats.org/drawingml/2006/main" noGrp="1"/>
+          </ns0:cNvSpPr>
+          <ns0:nvPr>
+            <ns0:ph type="title" idx="2"/>
+          </ns0:nvPr>
+        </ns0:nvSpPr>
+        <ns0:spPr>
+          <ns2:xfrm xmlns:ns2="http://schemas.openxmlformats.org/drawingml/2006/main">
+            <ns2:off x="1143000" y="2933700"/>
+            <ns2:ext cx="16002000" cy="1905000"/>
+          </ns2:xfrm>
+          <ns3:prstGeom xmlns:ns3="http://schemas.openxmlformats.org/drawingml/2006/main" prst="rect">
+            <ns3:avLst/>
+          </ns3:prstGeom>
+        </ns0:spPr>
+        <ns0:txBody>
+          <ns4:bodyPr xmlns:ns4="http://schemas.openxmlformats.org/drawingml/2006/main" wrap="square" rtlCol="0" anchor="t" lIns="0" tIns="0" rIns="0" bIns="0"/>
+          <ns5:lstStyle xmlns:ns5="http://schemas.openxmlformats.org/drawingml/2006/main">
+            <ns5:lvl1pPr marL="0" indent="0" algn="l">
+              <ns5:lnSpc>
+                <ns5:spcPct val="90000"/>
+              </ns5:lnSpc>
+              <ns5:buNone/>
+              <ns5:defRPr sz="6400" b="1">
+                <ns5:solidFill>
+                  <ns5:srgbClr val="000000"/>
+                </ns5:solidFill>
+                <ns5:latin typeface="Aptos Display"/>
+              </ns5:defRPr>
+            </ns5:lvl1pPr>
+          </ns5:lstStyle>
+          <ns6:p xmlns:ns6="http://schemas.openxmlformats.org/drawingml/2006/main">
+            <ns6:r>
+              <ns6:rPr lang="en-US"/>
+              <ns6:t>Section title goes here.</ns6:t>
+            </ns6:r>
+            <ns6:endParaRPr lang="en-US"/>
+          </ns6:p>
+        </ns0:txBody>
+      </ns0:sp>
+      <ns0:sp xmlns:ns0="http://schemas.openxmlformats.org/presentationml/2006/main">
+        <ns0:nvSpPr>
+          <ns0:cNvPr id="12" name="Col1 Rule"/>
+          <ns0:cNvSpPr/>
+          <ns0:nvPr/>
+        </ns0:nvSpPr>
+        <ns0:spPr>
+          <ns1:xfrm xmlns:ns1="http://schemas.openxmlformats.org/drawingml/2006/main">
+            <ns1:off x="1143000" y="4953000"/>
+            <ns1:ext cx="4972050" cy="38100"/>
+          </ns1:xfrm>
+          <ns2:prstGeom xmlns:ns2="http://schemas.openxmlformats.org/drawingml/2006/main" prst="rect">
+            <ns2:avLst/>
+          </ns2:prstGeom>
+          <ns3:solidFill xmlns:ns3="http://schemas.openxmlformats.org/drawingml/2006/main">
+            <ns3:srgbClr val="0F6BFF"/>
+          </ns3:solidFill>
+          <ns4:ln xmlns:ns4="http://schemas.openxmlformats.org/drawingml/2006/main">
+            <ns4:noFill/>
+          </ns4:ln>
+        </ns0:spPr>
+        <ns0:txBody>
+          <ns5:bodyPr xmlns:ns5="http://schemas.openxmlformats.org/drawingml/2006/main" rtlCol="0" anchor="ctr"/>
+          <ns6:lstStyle xmlns:ns6="http://schemas.openxmlformats.org/drawingml/2006/main"/>
+          <ns7:p xmlns:ns7="http://schemas.openxmlformats.org/drawingml/2006/main">
+            <ns7:endParaRPr lang="en-US"/>
+          </ns7:p>
+        </ns0:txBody>
+      </ns0:sp>
+      <ns0:sp xmlns:ns0="http://schemas.openxmlformats.org/presentationml/2006/main">
+        <ns0:nvSpPr>
+          <ns0:cNvPr id="13" name="Col1 Header"/>
+          <ns0:cNvSpPr>
+            <ns1:spLocks xmlns:ns1="http://schemas.openxmlformats.org/drawingml/2006/main" noGrp="1"/>
+          </ns0:cNvSpPr>
+          <ns0:nvPr>
+            <ns0:ph type="body" idx="10"/>
+          </ns0:nvPr>
+        </ns0:nvSpPr>
+        <ns0:spPr>
+          <ns2:xfrm xmlns:ns2="http://schemas.openxmlformats.org/drawingml/2006/main">
+            <ns2:off x="1143000" y="5105400"/>
+            <ns2:ext cx="4972050" cy="533400"/>
+          </ns2:xfrm>
+          <ns3:prstGeom xmlns:ns3="http://schemas.openxmlformats.org/drawingml/2006/main" prst="rect">
+            <ns3:avLst/>
+          </ns3:prstGeom>
+        </ns0:spPr>
+        <ns0:txBody>
+          <ns4:bodyPr xmlns:ns4="http://schemas.openxmlformats.org/drawingml/2006/main" wrap="square" rtlCol="0" anchor="t" lIns="0" tIns="0" rIns="0" bIns="0">
+            <ns4:noAutofit/>
+          </ns4:bodyPr>
+          <ns5:lstStyle xmlns:ns5="http://schemas.openxmlformats.org/drawingml/2006/main">
+            <ns5:lvl1pPr marL="0" indent="0" algn="l">
+              <ns5:buNone/>
+              <ns5:defRPr sz="2000" b="1" cap="all" spc="130">
+                <ns5:solidFill>
+                  <ns5:srgbClr val="0F6BFF"/>
+                </ns5:solidFill>
+                <ns5:latin typeface="Aptos"/>
+              </ns5:defRPr>
+            </ns5:lvl1pPr>
+          </ns5:lstStyle>
+          <ns6:p xmlns:ns6="http://schemas.openxmlformats.org/drawingml/2006/main">
+            <ns6:r>
+              <ns6:rPr lang="en-US"/>
+              <ns6:t>COLUMN 1 HEADER</ns6:t>
+            </ns6:r>
+            <ns6:endParaRPr lang="en-US"/>
+          </ns6:p>
+        </ns0:txBody>
+      </ns0:sp>
+      <ns0:sp xmlns:ns0="http://schemas.openxmlformats.org/presentationml/2006/main">
+        <ns0:nvSpPr>
+          <ns0:cNvPr id="14" name="Col1 Body"/>
+          <ns0:cNvSpPr>
+            <ns1:spLocks xmlns:ns1="http://schemas.openxmlformats.org/drawingml/2006/main" noGrp="1"/>
+          </ns0:cNvSpPr>
+          <ns0:nvPr>
+            <ns0:ph type="body" idx="11"/>
+          </ns0:nvPr>
+        </ns0:nvSpPr>
+        <ns0:spPr>
+          <ns2:xfrm xmlns:ns2="http://schemas.openxmlformats.org/drawingml/2006/main">
+            <ns2:off x="1143000" y="5753100"/>
+            <ns2:ext cx="4972050" cy="4381500"/>
+          </ns2:xfrm>
+          <ns3:prstGeom xmlns:ns3="http://schemas.openxmlformats.org/drawingml/2006/main" prst="rect">
+            <ns3:avLst/>
+          </ns3:prstGeom>
+        </ns0:spPr>
+        <ns0:txBody>
+          <ns4:bodyPr xmlns:ns4="http://schemas.openxmlformats.org/drawingml/2006/main" wrap="square" rtlCol="0" anchor="t" lIns="0" tIns="0" rIns="0" bIns="0"/>
+          <ns5:lstStyle xmlns:ns5="http://schemas.openxmlformats.org/drawingml/2006/main">
+            <ns5:lvl1pPr marL="0" indent="0" algn="l">
+              <ns5:buNone/>
+              <ns5:defRPr sz="2200">
+                <ns5:solidFill>
+                  <ns5:srgbClr val="000000"/>
+                </ns5:solidFill>
+                <ns5:latin typeface="Aptos"/>
+              </ns5:defRPr>
+            </ns5:lvl1pPr>
+          </ns5:lstStyle>
+          <ns6:p xmlns:ns6="http://schemas.openxmlformats.org/drawingml/2006/main">
+            <ns6:r>
+              <ns6:rPr lang="en-US"/>
+              <ns6:t>Column 1 body. Replace with one or two short sentences.</ns6:t>
+            </ns6:r>
+            <ns6:endParaRPr lang="en-US"/>
+          </ns6:p>
+        </ns0:txBody>
+      </ns0:sp>
+      <ns0:sp xmlns:ns0="http://schemas.openxmlformats.org/presentationml/2006/main">
+        <ns0:nvSpPr>
+          <ns0:cNvPr id="15" name="Col2 Rule"/>
+          <ns0:cNvSpPr/>
+          <ns0:nvPr/>
+        </ns0:nvSpPr>
+        <ns0:spPr>
+          <ns1:xfrm xmlns:ns1="http://schemas.openxmlformats.org/drawingml/2006/main">
+            <ns1:off x="6648450" y="4953000"/>
+            <ns1:ext cx="4972050" cy="38100"/>
+          </ns1:xfrm>
+          <ns2:prstGeom xmlns:ns2="http://schemas.openxmlformats.org/drawingml/2006/main" prst="rect">
+            <ns2:avLst/>
+          </ns2:prstGeom>
+          <ns3:solidFill xmlns:ns3="http://schemas.openxmlformats.org/drawingml/2006/main">
+            <ns3:srgbClr val="0F6BFF"/>
+          </ns3:solidFill>
+          <ns4:ln xmlns:ns4="http://schemas.openxmlformats.org/drawingml/2006/main">
+            <ns4:noFill/>
+          </ns4:ln>
+        </ns0:spPr>
+        <ns0:txBody>
+          <ns5:bodyPr xmlns:ns5="http://schemas.openxmlformats.org/drawingml/2006/main" rtlCol="0" anchor="ctr"/>
+          <ns6:lstStyle xmlns:ns6="http://schemas.openxmlformats.org/drawingml/2006/main"/>
+          <ns7:p xmlns:ns7="http://schemas.openxmlformats.org/drawingml/2006/main">
+            <ns7:endParaRPr lang="en-US"/>
+          </ns7:p>
+        </ns0:txBody>
+      </ns0:sp>
+      <ns0:sp xmlns:ns0="http://schemas.openxmlformats.org/presentationml/2006/main">
+        <ns0:nvSpPr>
+          <ns0:cNvPr id="16" name="Col2 Header"/>
+          <ns0:cNvSpPr>
+            <ns1:spLocks xmlns:ns1="http://schemas.openxmlformats.org/drawingml/2006/main" noGrp="1"/>
+          </ns0:cNvSpPr>
+          <ns0:nvPr>
+            <ns0:ph type="body" idx="12"/>
+          </ns0:nvPr>
+        </ns0:nvSpPr>
+        <ns0:spPr>
+          <ns2:xfrm xmlns:ns2="http://schemas.openxmlformats.org/drawingml/2006/main">
+            <ns2:off x="6648450" y="5105400"/>
+            <ns2:ext cx="4972050" cy="533400"/>
+          </ns2:xfrm>
+          <ns3:prstGeom xmlns:ns3="http://schemas.openxmlformats.org/drawingml/2006/main" prst="rect">
+            <ns3:avLst/>
+          </ns3:prstGeom>
+        </ns0:spPr>
+        <ns0:txBody>
+          <ns4:bodyPr xmlns:ns4="http://schemas.openxmlformats.org/drawingml/2006/main" wrap="square" rtlCol="0" anchor="t" lIns="0" tIns="0" rIns="0" bIns="0">
+            <ns4:noAutofit/>
+          </ns4:bodyPr>
+          <ns5:lstStyle xmlns:ns5="http://schemas.openxmlformats.org/drawingml/2006/main">
+            <ns5:lvl1pPr marL="0" indent="0" algn="l">
+              <ns5:buNone/>
+              <ns5:defRPr sz="2000" b="1" cap="all" spc="130">
+                <ns5:solidFill>
+                  <ns5:srgbClr val="0F6BFF"/>
+                </ns5:solidFill>
+                <ns5:latin typeface="Aptos"/>
+              </ns5:defRPr>
+            </ns5:lvl1pPr>
+          </ns5:lstStyle>
+          <ns6:p xmlns:ns6="http://schemas.openxmlformats.org/drawingml/2006/main">
+            <ns6:r>
+              <ns6:rPr lang="en-US"/>
+              <ns6:t>COLUMN 2 HEADER</ns6:t>
+            </ns6:r>
+            <ns6:endParaRPr lang="en-US"/>
+          </ns6:p>
+        </ns0:txBody>
+      </ns0:sp>
+      <ns0:sp xmlns:ns0="http://schemas.openxmlformats.org/presentationml/2006/main">
+        <ns0:nvSpPr>
+          <ns0:cNvPr id="17" name="Col2 Body"/>
+          <ns0:cNvSpPr>
+            <ns1:spLocks xmlns:ns1="http://schemas.openxmlformats.org/drawingml/2006/main" noGrp="1"/>
+          </ns0:cNvSpPr>
+          <ns0:nvPr>
+            <ns0:ph type="body" idx="13"/>
+          </ns0:nvPr>
+        </ns0:nvSpPr>
+        <ns0:spPr>
+          <ns2:xfrm xmlns:ns2="http://schemas.openxmlformats.org/drawingml/2006/main">
+            <ns2:off x="6648450" y="5753100"/>
+            <ns2:ext cx="4972050" cy="4381500"/>
+          </ns2:xfrm>
+          <ns3:prstGeom xmlns:ns3="http://schemas.openxmlformats.org/drawingml/2006/main" prst="rect">
+            <ns3:avLst/>
+          </ns3:prstGeom>
+        </ns0:spPr>
+        <ns0:txBody>
+          <ns4:bodyPr xmlns:ns4="http://schemas.openxmlformats.org/drawingml/2006/main" wrap="square" rtlCol="0" anchor="t" lIns="0" tIns="0" rIns="0" bIns="0"/>
+          <ns5:lstStyle xmlns:ns5="http://schemas.openxmlformats.org/drawingml/2006/main">
+            <ns5:lvl1pPr marL="0" indent="0" algn="l">
+              <ns5:buNone/>
+              <ns5:defRPr sz="2200">
+                <ns5:solidFill>
+                  <ns5:srgbClr val="000000"/>
+                </ns5:solidFill>
+                <ns5:latin typeface="Aptos"/>
+              </ns5:defRPr>
+            </ns5:lvl1pPr>
+          </ns5:lstStyle>
+          <ns6:p xmlns:ns6="http://schemas.openxmlformats.org/drawingml/2006/main">
+            <ns6:r>
+              <ns6:rPr lang="en-US"/>
+              <ns6:t>Column 2 body. Replace with one or two short sentences.</ns6:t>
+            </ns6:r>
+            <ns6:endParaRPr lang="en-US"/>
+          </ns6:p>
+        </ns0:txBody>
+      </ns0:sp>
+      <ns0:sp xmlns:ns0="http://schemas.openxmlformats.org/presentationml/2006/main">
+        <ns0:nvSpPr>
+          <ns0:cNvPr id="18" name="Col3 Rule"/>
+          <ns0:cNvSpPr/>
+          <ns0:nvPr/>
+        </ns0:nvSpPr>
+        <ns0:spPr>
+          <ns1:xfrm xmlns:ns1="http://schemas.openxmlformats.org/drawingml/2006/main">
+            <ns1:off x="12153900" y="4953000"/>
+            <ns1:ext cx="4972050" cy="38100"/>
+          </ns1:xfrm>
+          <ns2:prstGeom xmlns:ns2="http://schemas.openxmlformats.org/drawingml/2006/main" prst="rect">
+            <ns2:avLst/>
+          </ns2:prstGeom>
+          <ns3:solidFill xmlns:ns3="http://schemas.openxmlformats.org/drawingml/2006/main">
+            <ns3:srgbClr val="0F6BFF"/>
+          </ns3:solidFill>
+          <ns4:ln xmlns:ns4="http://schemas.openxmlformats.org/drawingml/2006/main">
+            <ns4:noFill/>
+          </ns4:ln>
+        </ns0:spPr>
+        <ns0:txBody>
+          <ns5:bodyPr xmlns:ns5="http://schemas.openxmlformats.org/drawingml/2006/main" rtlCol="0" anchor="ctr"/>
+          <ns6:lstStyle xmlns:ns6="http://schemas.openxmlformats.org/drawingml/2006/main"/>
+          <ns7:p xmlns:ns7="http://schemas.openxmlformats.org/drawingml/2006/main">
+            <ns7:endParaRPr lang="en-US"/>
+          </ns7:p>
+        </ns0:txBody>
+      </ns0:sp>
+      <ns0:sp xmlns:ns0="http://schemas.openxmlformats.org/presentationml/2006/main">
+        <ns0:nvSpPr>
+          <ns0:cNvPr id="19" name="Col3 Header"/>
+          <ns0:cNvSpPr>
+            <ns1:spLocks xmlns:ns1="http://schemas.openxmlformats.org/drawingml/2006/main" noGrp="1"/>
+          </ns0:cNvSpPr>
+          <ns0:nvPr>
+            <ns0:ph type="body" idx="14"/>
+          </ns0:nvPr>
+        </ns0:nvSpPr>
+        <ns0:spPr>
+          <ns2:xfrm xmlns:ns2="http://schemas.openxmlformats.org/drawingml/2006/main">
+            <ns2:off x="12153900" y="5105400"/>
+            <ns2:ext cx="4972050" cy="533400"/>
+          </ns2:xfrm>
+          <ns3:prstGeom xmlns:ns3="http://schemas.openxmlformats.org/drawingml/2006/main" prst="rect">
+            <ns3:avLst/>
+          </ns3:prstGeom>
+        </ns0:spPr>
+        <ns0:txBody>
+          <ns4:bodyPr xmlns:ns4="http://schemas.openxmlformats.org/drawingml/2006/main" wrap="square" rtlCol="0" anchor="t" lIns="0" tIns="0" rIns="0" bIns="0">
+            <ns4:noAutofit/>
+          </ns4:bodyPr>
+          <ns5:lstStyle xmlns:ns5="http://schemas.openxmlformats.org/drawingml/2006/main">
+            <ns5:lvl1pPr marL="0" indent="0" algn="l">
+              <ns5:buNone/>
+              <ns5:defRPr sz="2000" b="1" cap="all" spc="130">
+                <ns5:solidFill>
+                  <ns5:srgbClr val="0F6BFF"/>
+                </ns5:solidFill>
+                <ns5:latin typeface="Aptos"/>
+              </ns5:defRPr>
+            </ns5:lvl1pPr>
+          </ns5:lstStyle>
+          <ns6:p xmlns:ns6="http://schemas.openxmlformats.org/drawingml/2006/main">
+            <ns6:r>
+              <ns6:rPr lang="en-US"/>
+              <ns6:t>COLUMN 3 HEADER</ns6:t>
+            </ns6:r>
+            <ns6:endParaRPr lang="en-US"/>
+          </ns6:p>
+        </ns0:txBody>
+      </ns0:sp>
+      <ns0:sp xmlns:ns0="http://schemas.openxmlformats.org/presentationml/2006/main">
+        <ns0:nvSpPr>
+          <ns0:cNvPr id="20" name="Col3 Body"/>
+          <ns0:cNvSpPr>
+            <ns1:spLocks xmlns:ns1="http://schemas.openxmlformats.org/drawingml/2006/main" noGrp="1"/>
+          </ns0:cNvSpPr>
+          <ns0:nvPr>
+            <ns0:ph type="body" idx="15"/>
+          </ns0:nvPr>
+        </ns0:nvSpPr>
+        <ns0:spPr>
+          <ns2:xfrm xmlns:ns2="http://schemas.openxmlformats.org/drawingml/2006/main">
+            <ns2:off x="12153900" y="5753100"/>
+            <ns2:ext cx="4972050" cy="4381500"/>
+          </ns2:xfrm>
+          <ns3:prstGeom xmlns:ns3="http://schemas.openxmlformats.org/drawingml/2006/main" prst="rect">
+            <ns3:avLst/>
+          </ns3:prstGeom>
+        </ns0:spPr>
+        <ns0:txBody>
+          <ns4:bodyPr xmlns:ns4="http://schemas.openxmlformats.org/drawingml/2006/main" wrap="square" rtlCol="0" anchor="t" lIns="0" tIns="0" rIns="0" bIns="0"/>
+          <ns5:lstStyle xmlns:ns5="http://schemas.openxmlformats.org/drawingml/2006/main">
+            <ns5:lvl1pPr marL="0" indent="0" algn="l">
+              <ns5:buNone/>
+              <ns5:defRPr sz="2200">
+                <ns5:solidFill>
+                  <ns5:srgbClr val="000000"/>
+                </ns5:solidFill>
+                <ns5:latin typeface="Aptos"/>
+              </ns5:defRPr>
+            </ns5:lvl1pPr>
+          </ns5:lstStyle>
+          <ns6:p xmlns:ns6="http://schemas.openxmlformats.org/drawingml/2006/main">
+            <ns6:r>
+              <ns6:rPr lang="en-US"/>
+              <ns6:t>Column 3 body. Replace with one or two short sentences.</ns6:t>
+            </ns6:r>
+            <ns6:endParaRPr lang="en-US"/>
+          </ns6:p>
+        </ns0:txBody>
+      </ns0:sp>
+      <ns0:sp xmlns:ns0="http://schemas.openxmlformats.org/presentationml/2006/main">
+        <ns0:nvSpPr>
+          <ns0:cNvPr id="21" name="Footer"/>
+          <ns0:cNvSpPr>
+            <ns1:spLocks xmlns:ns1="http://schemas.openxmlformats.org/drawingml/2006/main" noGrp="1"/>
+          </ns0:cNvSpPr>
+          <ns0:nvPr/>
+        </ns0:nvSpPr>
+        <ns0:spPr>
+          <ns2:xfrm xmlns:ns2="http://schemas.openxmlformats.org/drawingml/2006/main">
+            <ns2:off x="1143000" y="9982200"/>
+            <ns2:ext cx="16002000" cy="228600"/>
+          </ns2:xfrm>
+          <ns3:prstGeom xmlns:ns3="http://schemas.openxmlformats.org/drawingml/2006/main" prst="rect">
+            <ns3:avLst/>
+          </ns3:prstGeom>
+        </ns0:spPr>
+        <ns0:txBody>
+          <ns4:bodyPr xmlns:ns4="http://schemas.openxmlformats.org/drawingml/2006/main" wrap="square" rtlCol="0" anchor="t" lIns="0" tIns="0" rIns="0" bIns="0"/>
+          <ns5:lstStyle xmlns:ns5="http://schemas.openxmlformats.org/drawingml/2006/main">
+            <ns5:lvl1pPr marL="0" indent="0" algn="l">
+              <ns5:buNone/>
+              <ns5:defRPr sz="900" cap="all" spc="50">
+                <ns5:solidFill>
+                  <ns5:srgbClr val="6B7280"/>
+                </ns5:solidFill>
+                <ns5:latin typeface="Aptos"/>
+              </ns5:defRPr>
+            </ns5:lvl1pPr>
+          </ns5:lstStyle>
+          <ns6:p xmlns:ns6="http://schemas.openxmlformats.org/drawingml/2006/main">
+            <ns6:r>
+              <ns6:rPr lang="en-US"/>
+              <ns6:t>OPEN COMPONENT MODEL · OCM.SOFTWARE</ns6:t>
+            </ns6:r>
+            <ns6:endParaRPr lang="en-US"/>
+          </ns6:p>
+        </ns0:txBody>
+      </ns0:sp>
+    </p:spTree>
+  </p:cSld>
+  <p:clrMapOvr>
+    <a:masterClrMapping/>
+  </p:clrMapOvr>
+</p:sldLayout>
+</file>
+
+<file path=ppt/slideLayouts/slideLayout4.xml><?xml version="1.0" encoding="utf-8"?>
+<p:sldLayout xmlns:a="http://schemas.openxmlformats.org/drawingml/2006/main" xmlns:r="http://schemas.openxmlformats.org/officeDocument/2006/relationships" xmlns:p="http://schemas.openxmlformats.org/presentationml/2006/main" type="obj" preserve="1" userDrawn="1">
+  <p:cSld name="Content / Diagram">
+    <p:bg>
+      <p:bgPr>
+        <a:solidFill>
+          <a:srgbClr val="FFFFFF"/>
+        </a:solidFill>
+        <a:effectLst/>
+      </p:bgPr>
+    </p:bg>
+    <p:spTree>
+      <p:nvGrpSpPr>
+        <p:cNvPr id="1" name=""/>
+        <p:cNvGrpSpPr/>
+        <p:nvPr/>
+      </p:nvGrpSpPr>
+      <p:grpSpPr>
+        <a:xfrm>
+          <a:off x="0" y="0"/>
+          <a:ext cx="0" cy="0"/>
+          <a:chOff x="0" y="0"/>
+          <a:chExt cx="0" cy="0"/>
+        </a:xfrm>
+      </p:grpSpPr>
+      <ns0:sp xmlns:ns0="http://schemas.openxmlformats.org/presentationml/2006/main">
+        <ns0:nvSpPr>
+          <ns0:cNvPr id="10" name="Eyebrow"/>
+          <ns0:cNvSpPr>
+            <ns1:spLocks xmlns:ns1="http://schemas.openxmlformats.org/drawingml/2006/main" noGrp="1"/>
+          </ns0:cNvSpPr>
+          <ns0:nvPr>
+            <ns0:ph type="body" idx="1"/>
+          </ns0:nvPr>
+        </ns0:nvSpPr>
+        <ns0:spPr>
+          <ns2:xfrm xmlns:ns2="http://schemas.openxmlformats.org/drawingml/2006/main">
+            <ns2:off x="1143000" y="2428875"/>
+            <ns2:ext cx="16002000" cy="457200"/>
+          </ns2:xfrm>
+          <ns3:prstGeom xmlns:ns3="http://schemas.openxmlformats.org/drawingml/2006/main" prst="rect">
+            <ns3:avLst/>
+          </ns3:prstGeom>
+        </ns0:spPr>
+        <ns0:txBody>
+          <ns4:bodyPr xmlns:ns4="http://schemas.openxmlformats.org/drawingml/2006/main" wrap="square" rtlCol="0" anchor="t" lIns="0" tIns="0" rIns="0" bIns="0"/>
+          <ns5:lstStyle xmlns:ns5="http://schemas.openxmlformats.org/drawingml/2006/main">
+            <ns5:lvl1pPr marL="0" indent="0" algn="l">
+              <ns5:buNone/>
+              <ns5:defRPr sz="2800" b="1" cap="all" spc="140">
+                <ns5:solidFill>
+                  <ns5:srgbClr val="0F6BFF"/>
+                </ns5:solidFill>
+                <ns5:latin typeface="Aptos"/>
+              </ns5:defRPr>
+            </ns5:lvl1pPr>
+          </ns5:lstStyle>
+          <ns6:p xmlns:ns6="http://schemas.openxmlformats.org/drawingml/2006/main">
+            <ns6:r>
+              <ns6:rPr lang="en-US"/>
+              <ns6:t>EYEBROW</ns6:t>
+            </ns6:r>
+            <ns6:endParaRPr lang="en-US"/>
+          </ns6:p>
+        </ns0:txBody>
+      </ns0:sp>
+      <ns0:sp xmlns:ns0="http://schemas.openxmlformats.org/presentationml/2006/main">
+        <ns0:nvSpPr>
+          <ns0:cNvPr id="11" name="Title"/>
+          <ns0:cNvSpPr>
+            <ns1:spLocks xmlns:ns1="http://schemas.openxmlformats.org/drawingml/2006/main" noGrp="1"/>
+          </ns0:cNvSpPr>
+          <ns0:nvPr>
+            <ns0:ph type="title" idx="2"/>
+          </ns0:nvPr>
+        </ns0:nvSpPr>
+        <ns0:spPr>
+          <ns2:xfrm xmlns:ns2="http://schemas.openxmlformats.org/drawingml/2006/main">
+            <ns2:off x="1143000" y="2933700"/>
+            <ns2:ext cx="16002000" cy="1143000"/>
+          </ns2:xfrm>
+          <ns3:prstGeom xmlns:ns3="http://schemas.openxmlformats.org/drawingml/2006/main" prst="rect">
+            <ns3:avLst/>
+          </ns3:prstGeom>
+        </ns0:spPr>
+        <ns0:txBody>
+          <ns4:bodyPr xmlns:ns4="http://schemas.openxmlformats.org/drawingml/2006/main" wrap="square" rtlCol="0" anchor="t" lIns="0" tIns="0" rIns="0" bIns="0"/>
+          <ns5:lstStyle xmlns:ns5="http://schemas.openxmlformats.org/drawingml/2006/main">
+            <ns5:lvl1pPr marL="0" indent="0" algn="l">
+              <ns5:lnSpc>
+                <ns5:spcPct val="90000"/>
+              </ns5:lnSpc>
+              <ns5:buNone/>
+              <ns5:defRPr sz="6400" b="1">
+                <ns5:solidFill>
+                  <ns5:srgbClr val="000000"/>
+                </ns5:solidFill>
+                <ns5:latin typeface="Aptos Display"/>
+              </ns5:defRPr>
+            </ns5:lvl1pPr>
+          </ns5:lstStyle>
+          <ns6:p xmlns:ns6="http://schemas.openxmlformats.org/drawingml/2006/main">
+            <ns6:r>
+              <ns6:rPr lang="en-US"/>
+              <ns6:t>Section title goes here.</ns6:t>
+            </ns6:r>
+            <ns6:endParaRPr lang="en-US"/>
+          </ns6:p>
+        </ns0:txBody>
+      </ns0:sp>
+      <ns0:sp xmlns:ns0="http://schemas.openxmlformats.org/presentationml/2006/main">
+        <ns0:nvSpPr>
+          <ns0:cNvPr id="12" name="Diagram"/>
+          <ns0:cNvSpPr>
+            <ns1:spLocks xmlns:ns1="http://schemas.openxmlformats.org/drawingml/2006/main" noGrp="1"/>
+          </ns0:cNvSpPr>
+          <ns0:nvPr>
+            <ns0:ph type="pic" idx="10"/>
+          </ns0:nvPr>
+        </ns0:nvSpPr>
+        <ns0:spPr>
+          <ns2:xfrm xmlns:ns2="http://schemas.openxmlformats.org/drawingml/2006/main">
+            <ns2:off x="571500" y="4381500"/>
+            <ns2:ext cx="17145000" cy="5715000"/>
+          </ns2:xfrm>
+          <ns3:prstGeom xmlns:ns3="http://schemas.openxmlformats.org/drawingml/2006/main" prst="rect">
+            <ns3:avLst/>
+          </ns3:prstGeom>
+        </ns0:spPr>
+        <ns0:txBody>
+          <ns4:bodyPr xmlns:ns4="http://schemas.openxmlformats.org/drawingml/2006/main" rtlCol="0" anchor="ctr"/>
+          <ns5:lstStyle xmlns:ns5="http://schemas.openxmlformats.org/drawingml/2006/main"/>
+          <ns6:p xmlns:ns6="http://schemas.openxmlformats.org/drawingml/2006/main">
+            <ns6:endParaRPr lang="en-US"/>
+          </ns6:p>
+        </ns0:txBody>
+      </ns0:sp>
+      <ns0:sp xmlns:ns0="http://schemas.openxmlformats.org/presentationml/2006/main">
+        <ns0:nvSpPr>
+          <ns0:cNvPr id="13" name="Footer"/>
+          <ns0:cNvSpPr>
+            <ns1:spLocks xmlns:ns1="http://schemas.openxmlformats.org/drawingml/2006/main" noGrp="1"/>
+          </ns0:cNvSpPr>
+          <ns0:nvPr/>
+        </ns0:nvSpPr>
+        <ns0:spPr>
+          <ns2:xfrm xmlns:ns2="http://schemas.openxmlformats.org/drawingml/2006/main">
+            <ns2:off x="1143000" y="9982200"/>
+            <ns2:ext cx="16002000" cy="228600"/>
+          </ns2:xfrm>
+          <ns3:prstGeom xmlns:ns3="http://schemas.openxmlformats.org/drawingml/2006/main" prst="rect">
+            <ns3:avLst/>
+          </ns3:prstGeom>
+        </ns0:spPr>
+        <ns0:txBody>
+          <ns4:bodyPr xmlns:ns4="http://schemas.openxmlformats.org/drawingml/2006/main" wrap="square" rtlCol="0" anchor="t" lIns="0" tIns="0" rIns="0" bIns="0"/>
+          <ns5:lstStyle xmlns:ns5="http://schemas.openxmlformats.org/drawingml/2006/main">
+            <ns5:lvl1pPr marL="0" indent="0" algn="l">
+              <ns5:buNone/>
+              <ns5:defRPr sz="900" cap="all" spc="50">
+                <ns5:solidFill>
+                  <ns5:srgbClr val="6B7280"/>
+                </ns5:solidFill>
+                <ns5:latin typeface="Aptos"/>
+              </ns5:defRPr>
+            </ns5:lvl1pPr>
+          </ns5:lstStyle>
+          <ns6:p xmlns:ns6="http://schemas.openxmlformats.org/drawingml/2006/main">
+            <ns6:r>
+              <ns6:rPr lang="en-US"/>
+              <ns6:t>OPEN COMPONENT MODEL · OCM.SOFTWARE</ns6:t>
+            </ns6:r>
+            <ns6:endParaRPr lang="en-US"/>
+          </ns6:p>
+        </ns0:txBody>
+      </ns0:sp>
+    </p:spTree>
+  </p:cSld>
+  <p:clrMapOvr>
+    <a:masterClrMapping/>
+  </p:clrMapOvr>
+</p:sldLayout>
+</file>
+
+<file path=ppt/slideLayouts/slideLayout5.xml><?xml version="1.0" encoding="utf-8"?>
+<p:sldLayout xmlns:a="http://schemas.openxmlformats.org/drawingml/2006/main" xmlns:r="http://schemas.openxmlformats.org/officeDocument/2006/relationships" xmlns:p="http://schemas.openxmlformats.org/presentationml/2006/main" type="obj" preserve="1" userDrawn="1">
+  <p:cSld name="Content / Tiles">
+    <p:bg>
+      <p:bgPr>
+        <a:solidFill>
+          <a:srgbClr val="FFFFFF"/>
+        </a:solidFill>
+        <a:effectLst/>
+      </p:bgPr>
+    </p:bg>
+    <p:spTree>
+      <p:nvGrpSpPr>
+        <p:cNvPr id="1" name=""/>
+        <p:cNvGrpSpPr/>
+        <p:nvPr/>
+      </p:nvGrpSpPr>
+      <p:grpSpPr>
+        <a:xfrm>
+          <a:off x="0" y="0"/>
+          <a:ext cx="0" cy="0"/>
+          <a:chOff x="0" y="0"/>
+          <a:chExt cx="0" cy="0"/>
+        </a:xfrm>
+      </p:grpSpPr>
+      <ns0:sp xmlns:ns0="http://schemas.openxmlformats.org/presentationml/2006/main">
+        <ns0:nvSpPr>
+          <ns0:cNvPr id="10" name="Eyebrow"/>
+          <ns0:cNvSpPr>
+            <ns1:spLocks xmlns:ns1="http://schemas.openxmlformats.org/drawingml/2006/main" noGrp="1"/>
+          </ns0:cNvSpPr>
+          <ns0:nvPr>
+            <ns0:ph type="body" idx="1"/>
+          </ns0:nvPr>
+        </ns0:nvSpPr>
+        <ns0:spPr>
+          <ns2:xfrm xmlns:ns2="http://schemas.openxmlformats.org/drawingml/2006/main">
+            <ns2:off x="1143000" y="2428875"/>
+            <ns2:ext cx="16002000" cy="457200"/>
+          </ns2:xfrm>
+          <ns3:prstGeom xmlns:ns3="http://schemas.openxmlformats.org/drawingml/2006/main" prst="rect">
+            <ns3:avLst/>
+          </ns3:prstGeom>
+        </ns0:spPr>
+        <ns0:txBody>
+          <ns4:bodyPr xmlns:ns4="http://schemas.openxmlformats.org/drawingml/2006/main" wrap="square" rtlCol="0" anchor="t" lIns="0" tIns="0" rIns="0" bIns="0"/>
+          <ns5:lstStyle xmlns:ns5="http://schemas.openxmlformats.org/drawingml/2006/main">
+            <ns5:lvl1pPr marL="0" indent="0" algn="l">
+              <ns5:buNone/>
+              <ns5:defRPr sz="2800" b="1" cap="all" spc="140">
+                <ns5:solidFill>
+                  <ns5:srgbClr val="0F6BFF"/>
+                </ns5:solidFill>
+                <ns5:latin typeface="Aptos"/>
+              </ns5:defRPr>
+            </ns5:lvl1pPr>
+          </ns5:lstStyle>
+          <ns6:p xmlns:ns6="http://schemas.openxmlformats.org/drawingml/2006/main">
+            <ns6:r>
+              <ns6:rPr lang="en-US"/>
+              <ns6:t>EYEBROW</ns6:t>
+            </ns6:r>
+            <ns6:endParaRPr lang="en-US"/>
+          </ns6:p>
+        </ns0:txBody>
+      </ns0:sp>
+      <ns0:sp xmlns:ns0="http://schemas.openxmlformats.org/presentationml/2006/main">
+        <ns0:nvSpPr>
+          <ns0:cNvPr id="11" name="Title"/>
+          <ns0:cNvSpPr>
+            <ns1:spLocks xmlns:ns1="http://schemas.openxmlformats.org/drawingml/2006/main" noGrp="1"/>
+          </ns0:cNvSpPr>
+          <ns0:nvPr>
+            <ns0:ph type="title" idx="2"/>
+          </ns0:nvPr>
+        </ns0:nvSpPr>
+        <ns0:spPr>
+          <ns2:xfrm xmlns:ns2="http://schemas.openxmlformats.org/drawingml/2006/main">
+            <ns2:off x="1143000" y="2933700"/>
+            <ns2:ext cx="16002000" cy="1905000"/>
+          </ns2:xfrm>
+          <ns3:prstGeom xmlns:ns3="http://schemas.openxmlformats.org/drawingml/2006/main" prst="rect">
+            <ns3:avLst/>
+          </ns3:prstGeom>
+        </ns0:spPr>
+        <ns0:txBody>
+          <ns4:bodyPr xmlns:ns4="http://schemas.openxmlformats.org/drawingml/2006/main" wrap="square" rtlCol="0" anchor="t" lIns="0" tIns="0" rIns="0" bIns="0"/>
+          <ns5:lstStyle xmlns:ns5="http://schemas.openxmlformats.org/drawingml/2006/main">
+            <ns5:lvl1pPr marL="0" indent="0" algn="l">
+              <ns5:lnSpc>
+                <ns5:spcPct val="90000"/>
+              </ns5:lnSpc>
+              <ns5:buNone/>
+              <ns5:defRPr sz="6400" b="1">
+                <ns5:solidFill>
+                  <ns5:srgbClr val="000000"/>
+                </ns5:solidFill>
+                <ns5:latin typeface="Aptos Display"/>
+              </ns5:defRPr>
+            </ns5:lvl1pPr>
+          </ns5:lstStyle>
+          <ns6:p xmlns:ns6="http://schemas.openxmlformats.org/drawingml/2006/main">
+            <ns6:r>
+              <ns6:rPr lang="en-US"/>
+              <ns6:t>Section title goes here.</ns6:t>
+            </ns6:r>
+            <ns6:endParaRPr lang="en-US"/>
+          </ns6:p>
+        </ns0:txBody>
+      </ns0:sp>
+      <ns0:sp xmlns:ns0="http://schemas.openxmlformats.org/presentationml/2006/main">
+        <ns0:nvSpPr>
+          <ns0:cNvPr id="12" name="Tile1 Bg"/>
+          <ns0:cNvSpPr/>
+          <ns0:nvPr/>
+        </ns0:nvSpPr>
+        <ns0:spPr>
+          <ns1:xfrm xmlns:ns1="http://schemas.openxmlformats.org/drawingml/2006/main">
+            <ns1:off x="1143000" y="4953000"/>
+            <ns1:ext cx="5181600" cy="2190750"/>
+          </ns1:xfrm>
+          <ns2:prstGeom xmlns:ns2="http://schemas.openxmlformats.org/drawingml/2006/main" prst="rect">
+            <ns2:avLst/>
+          </ns2:prstGeom>
+          <ns3:solidFill xmlns:ns3="http://schemas.openxmlformats.org/drawingml/2006/main">
+            <ns3:srgbClr val="F3F4F6"/>
+          </ns3:solidFill>
+          <ns4:ln xmlns:ns4="http://schemas.openxmlformats.org/drawingml/2006/main">
+            <ns4:noFill/>
+          </ns4:ln>
+        </ns0:spPr>
+        <ns0:txBody>
+          <ns5:bodyPr xmlns:ns5="http://schemas.openxmlformats.org/drawingml/2006/main" rtlCol="0" anchor="ctr"/>
+          <ns6:lstStyle xmlns:ns6="http://schemas.openxmlformats.org/drawingml/2006/main"/>
+          <ns7:p xmlns:ns7="http://schemas.openxmlformats.org/drawingml/2006/main">
+            <ns7:endParaRPr lang="en-US"/>
+          </ns7:p>
+        </ns0:txBody>
+      </ns0:sp>
+      <ns0:sp xmlns:ns0="http://schemas.openxmlformats.org/presentationml/2006/main">
+        <ns0:nvSpPr>
+          <ns0:cNvPr id="13" name="Tile1 Rule"/>
+          <ns0:cNvSpPr/>
+          <ns0:nvPr/>
+        </ns0:nvSpPr>
+        <ns0:spPr>
+          <ns1:xfrm xmlns:ns1="http://schemas.openxmlformats.org/drawingml/2006/main">
+            <ns1:off x="1143000" y="4953000"/>
+            <ns1:ext cx="5181600" cy="28575"/>
+          </ns1:xfrm>
+          <ns2:prstGeom xmlns:ns2="http://schemas.openxmlformats.org/drawingml/2006/main" prst="rect">
+            <ns2:avLst/>
+          </ns2:prstGeom>
+          <ns3:solidFill xmlns:ns3="http://schemas.openxmlformats.org/drawingml/2006/main">
+            <ns3:srgbClr val="0F6BFF"/>
+          </ns3:solidFill>
+          <ns4:ln xmlns:ns4="http://schemas.openxmlformats.org/drawingml/2006/main">
+            <ns4:noFill/>
+          </ns4:ln>
+        </ns0:spPr>
+        <ns0:txBody>
+          <ns5:bodyPr xmlns:ns5="http://schemas.openxmlformats.org/drawingml/2006/main" rtlCol="0" anchor="ctr"/>
+          <ns6:lstStyle xmlns:ns6="http://schemas.openxmlformats.org/drawingml/2006/main"/>
+          <ns7:p xmlns:ns7="http://schemas.openxmlformats.org/drawingml/2006/main">
+            <ns7:endParaRPr lang="en-US"/>
+          </ns7:p>
+        </ns0:txBody>
+      </ns0:sp>
+      <ns0:sp xmlns:ns0="http://schemas.openxmlformats.org/presentationml/2006/main">
+        <ns0:nvSpPr>
+          <ns0:cNvPr id="14" name="Tile1 Label"/>
+          <ns0:cNvSpPr>
+            <ns1:spLocks xmlns:ns1="http://schemas.openxmlformats.org/drawingml/2006/main" noGrp="1"/>
+          </ns0:cNvSpPr>
+          <ns0:nvPr>
+            <ns0:ph type="body" idx="20"/>
+          </ns0:nvPr>
+        </ns0:nvSpPr>
+        <ns0:spPr>
+          <ns2:xfrm xmlns:ns2="http://schemas.openxmlformats.org/drawingml/2006/main">
+            <ns2:off x="1371600" y="5791200"/>
+            <ns2:ext cx="4724400" cy="304800"/>
+          </ns2:xfrm>
+          <ns3:prstGeom xmlns:ns3="http://schemas.openxmlformats.org/drawingml/2006/main" prst="rect">
+            <ns3:avLst/>
+          </ns3:prstGeom>
+        </ns0:spPr>
+        <ns0:txBody>
+          <ns4:bodyPr xmlns:ns4="http://schemas.openxmlformats.org/drawingml/2006/main" wrap="square" rtlCol="0" anchor="t" lIns="0" tIns="0" rIns="0" bIns="0"/>
+          <ns5:lstStyle xmlns:ns5="http://schemas.openxmlformats.org/drawingml/2006/main">
+            <ns5:lvl1pPr marL="0" indent="0" algn="l">
+              <ns5:buNone/>
+              <ns5:defRPr sz="1600" b="1">
+                <ns5:solidFill>
+                  <ns5:srgbClr val="0F6BFF"/>
+                </ns5:solidFill>
+                <ns5:latin typeface="Aptos"/>
+              </ns5:defRPr>
+            </ns5:lvl1pPr>
+          </ns5:lstStyle>
+          <ns6:p xmlns:ns6="http://schemas.openxmlformats.org/drawingml/2006/main">
+            <ns6:r>
+              <ns6:rPr lang="en-US"/>
+              <ns6:t>Tile 1 label</ns6:t>
+            </ns6:r>
+            <ns6:endParaRPr lang="en-US"/>
+          </ns6:p>
+        </ns0:txBody>
+      </ns0:sp>
+      <ns0:sp xmlns:ns0="http://schemas.openxmlformats.org/presentationml/2006/main">
+        <ns0:nvSpPr>
+          <ns0:cNvPr id="15" name="Tile1 Body"/>
+          <ns0:cNvSpPr>
+            <ns1:spLocks xmlns:ns1="http://schemas.openxmlformats.org/drawingml/2006/main" noGrp="1"/>
+          </ns0:cNvSpPr>
+          <ns0:nvPr>
+            <ns0:ph type="body" idx="21"/>
+          </ns0:nvPr>
+        </ns0:nvSpPr>
+        <ns0:spPr>
+          <ns2:xfrm xmlns:ns2="http://schemas.openxmlformats.org/drawingml/2006/main">
+            <ns2:off x="1371600" y="6134100"/>
+            <ns2:ext cx="4724400" cy="857250"/>
+          </ns2:xfrm>
+          <ns3:prstGeom xmlns:ns3="http://schemas.openxmlformats.org/drawingml/2006/main" prst="rect">
+            <ns3:avLst/>
+          </ns3:prstGeom>
+        </ns0:spPr>
+        <ns0:txBody>
+          <ns4:bodyPr xmlns:ns4="http://schemas.openxmlformats.org/drawingml/2006/main" wrap="square" rtlCol="0" anchor="t" lIns="0" tIns="0" rIns="0" bIns="0"/>
+          <ns5:lstStyle xmlns:ns5="http://schemas.openxmlformats.org/drawingml/2006/main">
+            <ns5:lvl1pPr marL="0" indent="0" algn="l">
+              <ns5:buNone/>
+              <ns5:defRPr sz="1800">
+                <ns5:solidFill>
+                  <ns5:srgbClr val="000000"/>
+                </ns5:solidFill>
+                <ns5:latin typeface="Aptos"/>
+              </ns5:defRPr>
+            </ns5:lvl1pPr>
+          </ns5:lstStyle>
+          <ns6:p xmlns:ns6="http://schemas.openxmlformats.org/drawingml/2006/main">
+            <ns6:r>
+              <ns6:rPr lang="en-US"/>
+              <ns6:t>One short sentence describing this tile.</ns6:t>
+            </ns6:r>
+            <ns6:endParaRPr lang="en-US"/>
+          </ns6:p>
+        </ns0:txBody>
+      </ns0:sp>
+      <ns0:sp xmlns:ns0="http://schemas.openxmlformats.org/presentationml/2006/main">
+        <ns0:nvSpPr>
+          <ns0:cNvPr id="16" name="Tile2 Bg"/>
+          <ns0:cNvSpPr/>
+          <ns0:nvPr/>
+        </ns0:nvSpPr>
+        <ns0:spPr>
+          <ns1:xfrm xmlns:ns1="http://schemas.openxmlformats.org/drawingml/2006/main">
+            <ns1:off x="6553200" y="4953000"/>
+            <ns1:ext cx="5181600" cy="2190750"/>
+          </ns1:xfrm>
+          <ns2:prstGeom xmlns:ns2="http://schemas.openxmlformats.org/drawingml/2006/main" prst="rect">
+            <ns2:avLst/>
+          </ns2:prstGeom>
+          <ns3:solidFill xmlns:ns3="http://schemas.openxmlformats.org/drawingml/2006/main">
+            <ns3:srgbClr val="F3F4F6"/>
+          </ns3:solidFill>
+          <ns4:ln xmlns:ns4="http://schemas.openxmlformats.org/drawingml/2006/main">
+            <ns4:noFill/>
+          </ns4:ln>
+        </ns0:spPr>
+        <ns0:txBody>
+          <ns5:bodyPr xmlns:ns5="http://schemas.openxmlformats.org/drawingml/2006/main" rtlCol="0" anchor="ctr"/>
+          <ns6:lstStyle xmlns:ns6="http://schemas.openxmlformats.org/drawingml/2006/main"/>
+          <ns7:p xmlns:ns7="http://schemas.openxmlformats.org/drawingml/2006/main">
+            <ns7:endParaRPr lang="en-US"/>
+          </ns7:p>
+        </ns0:txBody>
+      </ns0:sp>
+      <ns0:sp xmlns:ns0="http://schemas.openxmlformats.org/presentationml/2006/main">
+        <ns0:nvSpPr>
+          <ns0:cNvPr id="17" name="Tile2 Rule"/>
+          <ns0:cNvSpPr/>
+          <ns0:nvPr/>
+        </ns0:nvSpPr>
+        <ns0:spPr>
+          <ns1:xfrm xmlns:ns1="http://schemas.openxmlformats.org/drawingml/2006/main">
+            <ns1:off x="6553200" y="4953000"/>
+            <ns1:ext cx="5181600" cy="28575"/>
+          </ns1:xfrm>
+          <ns2:prstGeom xmlns:ns2="http://schemas.openxmlformats.org/drawingml/2006/main" prst="rect">
+            <ns2:avLst/>
+          </ns2:prstGeom>
+          <ns3:solidFill xmlns:ns3="http://schemas.openxmlformats.org/drawingml/2006/main">
+            <ns3:srgbClr val="0F6BFF"/>
+          </ns3:solidFill>
+          <ns4:ln xmlns:ns4="http://schemas.openxmlformats.org/drawingml/2006/main">
+            <ns4:noFill/>
+          </ns4:ln>
+        </ns0:spPr>
+        <ns0:txBody>
+          <ns5:bodyPr xmlns:ns5="http://schemas.openxmlformats.org/drawingml/2006/main" rtlCol="0" anchor="ctr"/>
+          <ns6:lstStyle xmlns:ns6="http://schemas.openxmlformats.org/drawingml/2006/main"/>
+          <ns7:p xmlns:ns7="http://schemas.openxmlformats.org/drawingml/2006/main">
+            <ns7:endParaRPr lang="en-US"/>
+          </ns7:p>
+        </ns0:txBody>
+      </ns0:sp>
+      <ns0:sp xmlns:ns0="http://schemas.openxmlformats.org/presentationml/2006/main">
+        <ns0:nvSpPr>
+          <ns0:cNvPr id="18" name="Tile2 Label"/>
+          <ns0:cNvSpPr>
+            <ns1:spLocks xmlns:ns1="http://schemas.openxmlformats.org/drawingml/2006/main" noGrp="1"/>
+          </ns0:cNvSpPr>
+          <ns0:nvPr>
+            <ns0:ph type="body" idx="22"/>
+          </ns0:nvPr>
+        </ns0:nvSpPr>
+        <ns0:spPr>
+          <ns2:xfrm xmlns:ns2="http://schemas.openxmlformats.org/drawingml/2006/main">
+            <ns2:off x="6781800" y="5791200"/>
+            <ns2:ext cx="4724400" cy="304800"/>
+          </ns2:xfrm>
+          <ns3:prstGeom xmlns:ns3="http://schemas.openxmlformats.org/drawingml/2006/main" prst="rect">
+            <ns3:avLst/>
+          </ns3:prstGeom>
+        </ns0:spPr>
+        <ns0:txBody>
+          <ns4:bodyPr xmlns:ns4="http://schemas.openxmlformats.org/drawingml/2006/main" wrap="square" rtlCol="0" anchor="t" lIns="0" tIns="0" rIns="0" bIns="0"/>
+          <ns5:lstStyle xmlns:ns5="http://schemas.openxmlformats.org/drawingml/2006/main">
+            <ns5:lvl1pPr marL="0" indent="0" algn="l">
+              <ns5:buNone/>
+              <ns5:defRPr sz="1600" b="1">
+                <ns5:solidFill>
+                  <ns5:srgbClr val="0F6BFF"/>
+                </ns5:solidFill>
+                <ns5:latin typeface="Aptos"/>
+              </ns5:defRPr>
+            </ns5:lvl1pPr>
+          </ns5:lstStyle>
+          <ns6:p xmlns:ns6="http://schemas.openxmlformats.org/drawingml/2006/main">
+            <ns6:r>
+              <ns6:rPr lang="en-US"/>
+              <ns6:t>Tile 2 label</ns6:t>
+            </ns6:r>
+            <ns6:endParaRPr lang="en-US"/>
+          </ns6:p>
+        </ns0:txBody>
+      </ns0:sp>
+      <ns0:sp xmlns:ns0="http://schemas.openxmlformats.org/presentationml/2006/main">
+        <ns0:nvSpPr>
+          <ns0:cNvPr id="19" name="Tile2 Body"/>
+          <ns0:cNvSpPr>
+            <ns1:spLocks xmlns:ns1="http://schemas.openxmlformats.org/drawingml/2006/main" noGrp="1"/>
+          </ns0:cNvSpPr>
+          <ns0:nvPr>
+            <ns0:ph type="body" idx="23"/>
+          </ns0:nvPr>
+        </ns0:nvSpPr>
+        <ns0:spPr>
+          <ns2:xfrm xmlns:ns2="http://schemas.openxmlformats.org/drawingml/2006/main">
+            <ns2:off x="6781800" y="6134100"/>
+            <ns2:ext cx="4724400" cy="857250"/>
+          </ns2:xfrm>
+          <ns3:prstGeom xmlns:ns3="http://schemas.openxmlformats.org/drawingml/2006/main" prst="rect">
+            <ns3:avLst/>
+          </ns3:prstGeom>
+        </ns0:spPr>
+        <ns0:txBody>
+          <ns4:bodyPr xmlns:ns4="http://schemas.openxmlformats.org/drawingml/2006/main" wrap="square" rtlCol="0" anchor="t" lIns="0" tIns="0" rIns="0" bIns="0"/>
+          <ns5:lstStyle xmlns:ns5="http://schemas.openxmlformats.org/drawingml/2006/main">
+            <ns5:lvl1pPr marL="0" indent="0" algn="l">
+              <ns5:buNone/>
+              <ns5:defRPr sz="1800">
+                <ns5:solidFill>
+                  <ns5:srgbClr val="000000"/>
+                </ns5:solidFill>
+                <ns5:latin typeface="Aptos"/>
+              </ns5:defRPr>
+            </ns5:lvl1pPr>
+          </ns5:lstStyle>
+          <ns6:p xmlns:ns6="http://schemas.openxmlformats.org/drawingml/2006/main">
+            <ns6:r>
+              <ns6:rPr lang="en-US"/>
+              <ns6:t>One short sentence describing this tile.</ns6:t>
+            </ns6:r>
+            <ns6:endParaRPr lang="en-US"/>
+          </ns6:p>
+        </ns0:txBody>
+      </ns0:sp>
+      <ns0:sp xmlns:ns0="http://schemas.openxmlformats.org/presentationml/2006/main">
+        <ns0:nvSpPr>
+          <ns0:cNvPr id="20" name="Tile3 Bg"/>
+          <ns0:cNvSpPr/>
+          <ns0:nvPr/>
+        </ns0:nvSpPr>
+        <ns0:spPr>
+          <ns1:xfrm xmlns:ns1="http://schemas.openxmlformats.org/drawingml/2006/main">
+            <ns1:off x="11963400" y="4953000"/>
+            <ns1:ext cx="5181600" cy="2190750"/>
+          </ns1:xfrm>
+          <ns2:prstGeom xmlns:ns2="http://schemas.openxmlformats.org/drawingml/2006/main" prst="rect">
+            <ns2:avLst/>
+          </ns2:prstGeom>
+          <ns3:solidFill xmlns:ns3="http://schemas.openxmlformats.org/drawingml/2006/main">
+            <ns3:srgbClr val="F3F4F6"/>
+          </ns3:solidFill>
+          <ns4:ln xmlns:ns4="http://schemas.openxmlformats.org/drawingml/2006/main">
+            <ns4:noFill/>
+          </ns4:ln>
+        </ns0:spPr>
+        <ns0:txBody>
+          <ns5:bodyPr xmlns:ns5="http://schemas.openxmlformats.org/drawingml/2006/main" rtlCol="0" anchor="ctr"/>
+          <ns6:lstStyle xmlns:ns6="http://schemas.openxmlformats.org/drawingml/2006/main"/>
+          <ns7:p xmlns:ns7="http://schemas.openxmlformats.org/drawingml/2006/main">
+            <ns7:endParaRPr lang="en-US"/>
+          </ns7:p>
+        </ns0:txBody>
+      </ns0:sp>
+      <ns0:sp xmlns:ns0="http://schemas.openxmlformats.org/presentationml/2006/main">
+        <ns0:nvSpPr>
+          <ns0:cNvPr id="21" name="Tile3 Rule"/>
+          <ns0:cNvSpPr/>
+          <ns0:nvPr/>
+        </ns0:nvSpPr>
+        <ns0:spPr>
+          <ns1:xfrm xmlns:ns1="http://schemas.openxmlformats.org/drawingml/2006/main">
+            <ns1:off x="11963400" y="4953000"/>
+            <ns1:ext cx="5181600" cy="28575"/>
+          </ns1:xfrm>
+          <ns2:prstGeom xmlns:ns2="http://schemas.openxmlformats.org/drawingml/2006/main" prst="rect">
+            <ns2:avLst/>
+          </ns2:prstGeom>
+          <ns3:solidFill xmlns:ns3="http://schemas.openxmlformats.org/drawingml/2006/main">
+            <ns3:srgbClr val="0F6BFF"/>
+          </ns3:solidFill>
+          <ns4:ln xmlns:ns4="http://schemas.openxmlformats.org/drawingml/2006/main">
+            <ns4:noFill/>
+          </ns4:ln>
+        </ns0:spPr>
+        <ns0:txBody>
+          <ns5:bodyPr xmlns:ns5="http://schemas.openxmlformats.org/drawingml/2006/main" rtlCol="0" anchor="ctr"/>
+          <ns6:lstStyle xmlns:ns6="http://schemas.openxmlformats.org/drawingml/2006/main"/>
+          <ns7:p xmlns:ns7="http://schemas.openxmlformats.org/drawingml/2006/main">
+            <ns7:endParaRPr lang="en-US"/>
+          </ns7:p>
+        </ns0:txBody>
+      </ns0:sp>
+      <ns0:sp xmlns:ns0="http://schemas.openxmlformats.org/presentationml/2006/main">
+        <ns0:nvSpPr>
+          <ns0:cNvPr id="22" name="Tile3 Label"/>
+          <ns0:cNvSpPr>
+            <ns1:spLocks xmlns:ns1="http://schemas.openxmlformats.org/drawingml/2006/main" noGrp="1"/>
+          </ns0:cNvSpPr>
+          <ns0:nvPr>
+            <ns0:ph type="body" idx="24"/>
+          </ns0:nvPr>
+        </ns0:nvSpPr>
+        <ns0:spPr>
+          <ns2:xfrm xmlns:ns2="http://schemas.openxmlformats.org/drawingml/2006/main">
+            <ns2:off x="12192000" y="5791200"/>
+            <ns2:ext cx="4724400" cy="304800"/>
+          </ns2:xfrm>
+          <ns3:prstGeom xmlns:ns3="http://schemas.openxmlformats.org/drawingml/2006/main" prst="rect">
+            <ns3:avLst/>
+          </ns3:prstGeom>
+        </ns0:spPr>
+        <ns0:txBody>
+          <ns4:bodyPr xmlns:ns4="http://schemas.openxmlformats.org/drawingml/2006/main" wrap="square" rtlCol="0" anchor="t" lIns="0" tIns="0" rIns="0" bIns="0"/>
+          <ns5:lstStyle xmlns:ns5="http://schemas.openxmlformats.org/drawingml/2006/main">
+            <ns5:lvl1pPr marL="0" indent="0" algn="l">
+              <ns5:buNone/>
+              <ns5:defRPr sz="1600" b="1">
+                <ns5:solidFill>
+                  <ns5:srgbClr val="0F6BFF"/>
+                </ns5:solidFill>
+                <ns5:latin typeface="Aptos"/>
+              </ns5:defRPr>
+            </ns5:lvl1pPr>
+          </ns5:lstStyle>
+          <ns6:p xmlns:ns6="http://schemas.openxmlformats.org/drawingml/2006/main">
+            <ns6:r>
+              <ns6:rPr lang="en-US"/>
+              <ns6:t>Tile 3 label</ns6:t>
+            </ns6:r>
+            <ns6:endParaRPr lang="en-US"/>
+          </ns6:p>
+        </ns0:txBody>
+      </ns0:sp>
+      <ns0:sp xmlns:ns0="http://schemas.openxmlformats.org/presentationml/2006/main">
+        <ns0:nvSpPr>
+          <ns0:cNvPr id="23" name="Tile3 Body"/>
+          <ns0:cNvSpPr>
+            <ns1:spLocks xmlns:ns1="http://schemas.openxmlformats.org/drawingml/2006/main" noGrp="1"/>
+          </ns0:cNvSpPr>
+          <ns0:nvPr>
+            <ns0:ph type="body" idx="25"/>
+          </ns0:nvPr>
+        </ns0:nvSpPr>
+        <ns0:spPr>
+          <ns2:xfrm xmlns:ns2="http://schemas.openxmlformats.org/drawingml/2006/main">
+            <ns2:off x="12192000" y="6134100"/>
+            <ns2:ext cx="4724400" cy="857250"/>
+          </ns2:xfrm>
+          <ns3:prstGeom xmlns:ns3="http://schemas.openxmlformats.org/drawingml/2006/main" prst="rect">
+            <ns3:avLst/>
+          </ns3:prstGeom>
+        </ns0:spPr>
+        <ns0:txBody>
+          <ns4:bodyPr xmlns:ns4="http://schemas.openxmlformats.org/drawingml/2006/main" wrap="square" rtlCol="0" anchor="t" lIns="0" tIns="0" rIns="0" bIns="0"/>
+          <ns5:lstStyle xmlns:ns5="http://schemas.openxmlformats.org/drawingml/2006/main">
+            <ns5:lvl1pPr marL="0" indent="0" algn="l">
+              <ns5:buNone/>
+              <ns5:defRPr sz="1800">
+                <ns5:solidFill>
+                  <ns5:srgbClr val="000000"/>
+                </ns5:solidFill>
+                <ns5:latin typeface="Aptos"/>
+              </ns5:defRPr>
+            </ns5:lvl1pPr>
+          </ns5:lstStyle>
+          <ns6:p xmlns:ns6="http://schemas.openxmlformats.org/drawingml/2006/main">
+            <ns6:r>
+              <ns6:rPr lang="en-US"/>
+              <ns6:t>One short sentence describing this tile.</ns6:t>
+            </ns6:r>
+            <ns6:endParaRPr lang="en-US"/>
+          </ns6:p>
+        </ns0:txBody>
+      </ns0:sp>
+      <ns0:sp xmlns:ns0="http://schemas.openxmlformats.org/presentationml/2006/main">
+        <ns0:nvSpPr>
+          <ns0:cNvPr id="24" name="Tile4 Bg"/>
+          <ns0:cNvSpPr/>
+          <ns0:nvPr/>
+        </ns0:nvSpPr>
+        <ns0:spPr>
+          <ns1:xfrm xmlns:ns1="http://schemas.openxmlformats.org/drawingml/2006/main">
+            <ns1:off x="1143000" y="7372350"/>
+            <ns1:ext cx="5181600" cy="2190750"/>
+          </ns1:xfrm>
+          <ns2:prstGeom xmlns:ns2="http://schemas.openxmlformats.org/drawingml/2006/main" prst="rect">
+            <ns2:avLst/>
+          </ns2:prstGeom>
+          <ns3:solidFill xmlns:ns3="http://schemas.openxmlformats.org/drawingml/2006/main">
+            <ns3:srgbClr val="F3F4F6"/>
+          </ns3:solidFill>
+          <ns4:ln xmlns:ns4="http://schemas.openxmlformats.org/drawingml/2006/main">
+            <ns4:noFill/>
+          </ns4:ln>
+        </ns0:spPr>
+        <ns0:txBody>
+          <ns5:bodyPr xmlns:ns5="http://schemas.openxmlformats.org/drawingml/2006/main" rtlCol="0" anchor="ctr"/>
+          <ns6:lstStyle xmlns:ns6="http://schemas.openxmlformats.org/drawingml/2006/main"/>
+          <ns7:p xmlns:ns7="http://schemas.openxmlformats.org/drawingml/2006/main">
+            <ns7:endParaRPr lang="en-US"/>
+          </ns7:p>
+        </ns0:txBody>
+      </ns0:sp>
+      <ns0:sp xmlns:ns0="http://schemas.openxmlformats.org/presentationml/2006/main">
+        <ns0:nvSpPr>
+          <ns0:cNvPr id="25" name="Tile4 Rule"/>
+          <ns0:cNvSpPr/>
+          <ns0:nvPr/>
+        </ns0:nvSpPr>
+        <ns0:spPr>
+          <ns1:xfrm xmlns:ns1="http://schemas.openxmlformats.org/drawingml/2006/main">
+            <ns1:off x="1143000" y="7372350"/>
+            <ns1:ext cx="5181600" cy="28575"/>
+          </ns1:xfrm>
+          <ns2:prstGeom xmlns:ns2="http://schemas.openxmlformats.org/drawingml/2006/main" prst="rect">
+            <ns2:avLst/>
+          </ns2:prstGeom>
+          <ns3:solidFill xmlns:ns3="http://schemas.openxmlformats.org/drawingml/2006/main">
+            <ns3:srgbClr val="0F6BFF"/>
+          </ns3:solidFill>
+          <ns4:ln xmlns:ns4="http://schemas.openxmlformats.org/drawingml/2006/main">
+            <ns4:noFill/>
+          </ns4:ln>
+        </ns0:spPr>
+        <ns0:txBody>
+          <ns5:bodyPr xmlns:ns5="http://schemas.openxmlformats.org/drawingml/2006/main" rtlCol="0" anchor="ctr"/>
+          <ns6:lstStyle xmlns:ns6="http://schemas.openxmlformats.org/drawingml/2006/main"/>
+          <ns7:p xmlns:ns7="http://schemas.openxmlformats.org/drawingml/2006/main">
+            <ns7:endParaRPr lang="en-US"/>
+          </ns7:p>
+        </ns0:txBody>
+      </ns0:sp>
+      <ns0:sp xmlns:ns0="http://schemas.openxmlformats.org/presentationml/2006/main">
+        <ns0:nvSpPr>
+          <ns0:cNvPr id="26" name="Tile4 Label"/>
+          <ns0:cNvSpPr>
+            <ns1:spLocks xmlns:ns1="http://schemas.openxmlformats.org/drawingml/2006/main" noGrp="1"/>
+          </ns0:cNvSpPr>
+          <ns0:nvPr>
+            <ns0:ph type="body" idx="26"/>
+          </ns0:nvPr>
+        </ns0:nvSpPr>
+        <ns0:spPr>
+          <ns2:xfrm xmlns:ns2="http://schemas.openxmlformats.org/drawingml/2006/main">
+            <ns2:off x="1371600" y="8210550"/>
+            <ns2:ext cx="4724400" cy="304800"/>
+          </ns2:xfrm>
+          <ns3:prstGeom xmlns:ns3="http://schemas.openxmlformats.org/drawingml/2006/main" prst="rect">
+            <ns3:avLst/>
+          </ns3:prstGeom>
+        </ns0:spPr>
+        <ns0:txBody>
+          <ns4:bodyPr xmlns:ns4="http://schemas.openxmlformats.org/drawingml/2006/main" wrap="square" rtlCol="0" anchor="t" lIns="0" tIns="0" rIns="0" bIns="0"/>
+          <ns5:lstStyle xmlns:ns5="http://schemas.openxmlformats.org/drawingml/2006/main">
+            <ns5:lvl1pPr marL="0" indent="0" algn="l">
+              <ns5:buNone/>
+              <ns5:defRPr sz="1600" b="1">
+                <ns5:solidFill>
+                  <ns5:srgbClr val="0F6BFF"/>
+                </ns5:solidFill>
+                <ns5:latin typeface="Aptos"/>
+              </ns5:defRPr>
+            </ns5:lvl1pPr>
+          </ns5:lstStyle>
+          <ns6:p xmlns:ns6="http://schemas.openxmlformats.org/drawingml/2006/main">
+            <ns6:r>
+              <ns6:rPr lang="en-US"/>
+              <ns6:t>Tile 4 label</ns6:t>
+            </ns6:r>
+            <ns6:endParaRPr lang="en-US"/>
+          </ns6:p>
+        </ns0:txBody>
+      </ns0:sp>
+      <ns0:sp xmlns:ns0="http://schemas.openxmlformats.org/presentationml/2006/main">
+        <ns0:nvSpPr>
+          <ns0:cNvPr id="27" name="Tile4 Body"/>
+          <ns0:cNvSpPr>
+            <ns1:spLocks xmlns:ns1="http://schemas.openxmlformats.org/drawingml/2006/main" noGrp="1"/>
+          </ns0:cNvSpPr>
+          <ns0:nvPr>
+            <ns0:ph type="body" idx="27"/>
+          </ns0:nvPr>
+        </ns0:nvSpPr>
+        <ns0:spPr>
+          <ns2:xfrm xmlns:ns2="http://schemas.openxmlformats.org/drawingml/2006/main">
+            <ns2:off x="1371600" y="8553450"/>
+            <ns2:ext cx="4724400" cy="857250"/>
+          </ns2:xfrm>
+          <ns3:prstGeom xmlns:ns3="http://schemas.openxmlformats.org/drawingml/2006/main" prst="rect">
+            <ns3:avLst/>
+          </ns3:prstGeom>
+        </ns0:spPr>
+        <ns0:txBody>
+          <ns4:bodyPr xmlns:ns4="http://schemas.openxmlformats.org/drawingml/2006/main" wrap="square" rtlCol="0" anchor="t" lIns="0" tIns="0" rIns="0" bIns="0"/>
+          <ns5:lstStyle xmlns:ns5="http://schemas.openxmlformats.org/drawingml/2006/main">
+            <ns5:lvl1pPr marL="0" indent="0" algn="l">
+              <ns5:buNone/>
+              <ns5:defRPr sz="1800">
+                <ns5:solidFill>
+                  <ns5:srgbClr val="000000"/>
+                </ns5:solidFill>
+                <ns5:latin typeface="Aptos"/>
+              </ns5:defRPr>
+            </ns5:lvl1pPr>
+          </ns5:lstStyle>
+          <ns6:p xmlns:ns6="http://schemas.openxmlformats.org/drawingml/2006/main">
+            <ns6:r>
+              <ns6:rPr lang="en-US"/>
+              <ns6:t>One short sentence describing this tile.</ns6:t>
+            </ns6:r>
+            <ns6:endParaRPr lang="en-US"/>
+          </ns6:p>
+        </ns0:txBody>
+      </ns0:sp>
+      <ns0:sp xmlns:ns0="http://schemas.openxmlformats.org/presentationml/2006/main">
+        <ns0:nvSpPr>
+          <ns0:cNvPr id="28" name="Tile5 Bg"/>
+          <ns0:cNvSpPr/>
+          <ns0:nvPr/>
+        </ns0:nvSpPr>
+        <ns0:spPr>
+          <ns1:xfrm xmlns:ns1="http://schemas.openxmlformats.org/drawingml/2006/main">
+            <ns1:off x="6553200" y="7372350"/>
+            <ns1:ext cx="5181600" cy="2190750"/>
+          </ns1:xfrm>
+          <ns2:prstGeom xmlns:ns2="http://schemas.openxmlformats.org/drawingml/2006/main" prst="rect">
+            <ns2:avLst/>
+          </ns2:prstGeom>
+          <ns3:solidFill xmlns:ns3="http://schemas.openxmlformats.org/drawingml/2006/main">
+            <ns3:srgbClr val="F3F4F6"/>
+          </ns3:solidFill>
+          <ns4:ln xmlns:ns4="http://schemas.openxmlformats.org/drawingml/2006/main">
+            <ns4:noFill/>
+          </ns4:ln>
+        </ns0:spPr>
+        <ns0:txBody>
+          <ns5:bodyPr xmlns:ns5="http://schemas.openxmlformats.org/drawingml/2006/main" rtlCol="0" anchor="ctr"/>
+          <ns6:lstStyle xmlns:ns6="http://schemas.openxmlformats.org/drawingml/2006/main"/>
+          <ns7:p xmlns:ns7="http://schemas.openxmlformats.org/drawingml/2006/main">
+            <ns7:endParaRPr lang="en-US"/>
+          </ns7:p>
+        </ns0:txBody>
+      </ns0:sp>
+      <ns0:sp xmlns:ns0="http://schemas.openxmlformats.org/presentationml/2006/main">
+        <ns0:nvSpPr>
+          <ns0:cNvPr id="29" name="Tile5 Rule"/>
+          <ns0:cNvSpPr/>
+          <ns0:nvPr/>
+        </ns0:nvSpPr>
+        <ns0:spPr>
+          <ns1:xfrm xmlns:ns1="http://schemas.openxmlformats.org/drawingml/2006/main">
+            <ns1:off x="6553200" y="7372350"/>
+            <ns1:ext cx="5181600" cy="28575"/>
+          </ns1:xfrm>
+          <ns2:prstGeom xmlns:ns2="http://schemas.openxmlformats.org/drawingml/2006/main" prst="rect">
+            <ns2:avLst/>
+          </ns2:prstGeom>
+          <ns3:solidFill xmlns:ns3="http://schemas.openxmlformats.org/drawingml/2006/main">
+            <ns3:srgbClr val="0F6BFF"/>
+          </ns3:solidFill>
+          <ns4:ln xmlns:ns4="http://schemas.openxmlformats.org/drawingml/2006/main">
+            <ns4:noFill/>
+          </ns4:ln>
+        </ns0:spPr>
+        <ns0:txBody>
+          <ns5:bodyPr xmlns:ns5="http://schemas.openxmlformats.org/drawingml/2006/main" rtlCol="0" anchor="ctr"/>
+          <ns6:lstStyle xmlns:ns6="http://schemas.openxmlformats.org/drawingml/2006/main"/>
+          <ns7:p xmlns:ns7="http://schemas.openxmlformats.org/drawingml/2006/main">
+            <ns7:endParaRPr lang="en-US"/>
+          </ns7:p>
+        </ns0:txBody>
+      </ns0:sp>
+      <ns0:sp xmlns:ns0="http://schemas.openxmlformats.org/presentationml/2006/main">
+        <ns0:nvSpPr>
+          <ns0:cNvPr id="30" name="Tile5 Label"/>
+          <ns0:cNvSpPr>
+            <ns1:spLocks xmlns:ns1="http://schemas.openxmlformats.org/drawingml/2006/main" noGrp="1"/>
+          </ns0:cNvSpPr>
+          <ns0:nvPr>
+            <ns0:ph type="body" idx="28"/>
+          </ns0:nvPr>
+        </ns0:nvSpPr>
+        <ns0:spPr>
+          <ns2:xfrm xmlns:ns2="http://schemas.openxmlformats.org/drawingml/2006/main">
+            <ns2:off x="6781800" y="8210550"/>
+            <ns2:ext cx="4724400" cy="304800"/>
+          </ns2:xfrm>
+          <ns3:prstGeom xmlns:ns3="http://schemas.openxmlformats.org/drawingml/2006/main" prst="rect">
+            <ns3:avLst/>
+          </ns3:prstGeom>
+        </ns0:spPr>
+        <ns0:txBody>
+          <ns4:bodyPr xmlns:ns4="http://schemas.openxmlformats.org/drawingml/2006/main" wrap="square" rtlCol="0" anchor="t" lIns="0" tIns="0" rIns="0" bIns="0"/>
+          <ns5:lstStyle xmlns:ns5="http://schemas.openxmlformats.org/drawingml/2006/main">
+            <ns5:lvl1pPr marL="0" indent="0" algn="l">
+              <ns5:buNone/>
+              <ns5:defRPr sz="1600" b="1">
+                <ns5:solidFill>
+                  <ns5:srgbClr val="0F6BFF"/>
+                </ns5:solidFill>
+                <ns5:latin typeface="Aptos"/>
+              </ns5:defRPr>
+            </ns5:lvl1pPr>
+          </ns5:lstStyle>
+          <ns6:p xmlns:ns6="http://schemas.openxmlformats.org/drawingml/2006/main">
+            <ns6:r>
+              <ns6:rPr lang="en-US"/>
+              <ns6:t>Tile 5 label</ns6:t>
+            </ns6:r>
+            <ns6:endParaRPr lang="en-US"/>
+          </ns6:p>
+        </ns0:txBody>
+      </ns0:sp>
+      <ns0:sp xmlns:ns0="http://schemas.openxmlformats.org/presentationml/2006/main">
+        <ns0:nvSpPr>
+          <ns0:cNvPr id="31" name="Tile5 Body"/>
+          <ns0:cNvSpPr>
+            <ns1:spLocks xmlns:ns1="http://schemas.openxmlformats.org/drawingml/2006/main" noGrp="1"/>
+          </ns0:cNvSpPr>
+          <ns0:nvPr>
+            <ns0:ph type="body" idx="29"/>
+          </ns0:nvPr>
+        </ns0:nvSpPr>
+        <ns0:spPr>
+          <ns2:xfrm xmlns:ns2="http://schemas.openxmlformats.org/drawingml/2006/main">
+            <ns2:off x="6781800" y="8553450"/>
+            <ns2:ext cx="4724400" cy="857250"/>
+          </ns2:xfrm>
+          <ns3:prstGeom xmlns:ns3="http://schemas.openxmlformats.org/drawingml/2006/main" prst="rect">
+            <ns3:avLst/>
+          </ns3:prstGeom>
+        </ns0:spPr>
+        <ns0:txBody>
+          <ns4:bodyPr xmlns:ns4="http://schemas.openxmlformats.org/drawingml/2006/main" wrap="square" rtlCol="0" anchor="t" lIns="0" tIns="0" rIns="0" bIns="0"/>
+          <ns5:lstStyle xmlns:ns5="http://schemas.openxmlformats.org/drawingml/2006/main">
+            <ns5:lvl1pPr marL="0" indent="0" algn="l">
+              <ns5:buNone/>
+              <ns5:defRPr sz="1800">
+                <ns5:solidFill>
+                  <ns5:srgbClr val="000000"/>
+                </ns5:solidFill>
+                <ns5:latin typeface="Aptos"/>
+              </ns5:defRPr>
+            </ns5:lvl1pPr>
+          </ns5:lstStyle>
+          <ns6:p xmlns:ns6="http://schemas.openxmlformats.org/drawingml/2006/main">
+            <ns6:r>
+              <ns6:rPr lang="en-US"/>
+              <ns6:t>One short sentence describing this tile.</ns6:t>
+            </ns6:r>
+            <ns6:endParaRPr lang="en-US"/>
+          </ns6:p>
+        </ns0:txBody>
+      </ns0:sp>
+      <ns0:sp xmlns:ns0="http://schemas.openxmlformats.org/presentationml/2006/main">
+        <ns0:nvSpPr>
+          <ns0:cNvPr id="32" name="Tile6 Bg"/>
+          <ns0:cNvSpPr/>
+          <ns0:nvPr/>
+        </ns0:nvSpPr>
+        <ns0:spPr>
+          <ns1:xfrm xmlns:ns1="http://schemas.openxmlformats.org/drawingml/2006/main">
+            <ns1:off x="11963400" y="7372350"/>
+            <ns1:ext cx="5181600" cy="2190750"/>
+          </ns1:xfrm>
+          <ns2:prstGeom xmlns:ns2="http://schemas.openxmlformats.org/drawingml/2006/main" prst="rect">
+            <ns2:avLst/>
+          </ns2:prstGeom>
+          <ns3:solidFill xmlns:ns3="http://schemas.openxmlformats.org/drawingml/2006/main">
+            <ns3:srgbClr val="F3F4F6"/>
+          </ns3:solidFill>
+          <ns4:ln xmlns:ns4="http://schemas.openxmlformats.org/drawingml/2006/main">
+            <ns4:noFill/>
+          </ns4:ln>
+        </ns0:spPr>
+        <ns0:txBody>
+          <ns5:bodyPr xmlns:ns5="http://schemas.openxmlformats.org/drawingml/2006/main" rtlCol="0" anchor="ctr"/>
+          <ns6:lstStyle xmlns:ns6="http://schemas.openxmlformats.org/drawingml/2006/main"/>
+          <ns7:p xmlns:ns7="http://schemas.openxmlformats.org/drawingml/2006/main">
+            <ns7:endParaRPr lang="en-US"/>
+          </ns7:p>
+        </ns0:txBody>
+      </ns0:sp>
+      <ns0:sp xmlns:ns0="http://schemas.openxmlformats.org/presentationml/2006/main">
+        <ns0:nvSpPr>
+          <ns0:cNvPr id="33" name="Tile6 Rule"/>
+          <ns0:cNvSpPr/>
+          <ns0:nvPr/>
+        </ns0:nvSpPr>
+        <ns0:spPr>
+          <ns1:xfrm xmlns:ns1="http://schemas.openxmlformats.org/drawingml/2006/main">
+            <ns1:off x="11963400" y="7372350"/>
+            <ns1:ext cx="5181600" cy="28575"/>
+          </ns1:xfrm>
+          <ns2:prstGeom xmlns:ns2="http://schemas.openxmlformats.org/drawingml/2006/main" prst="rect">
+            <ns2:avLst/>
+          </ns2:prstGeom>
+          <ns3:solidFill xmlns:ns3="http://schemas.openxmlformats.org/drawingml/2006/main">
+            <ns3:srgbClr val="0F6BFF"/>
+          </ns3:solidFill>
+          <ns4:ln xmlns:ns4="http://schemas.openxmlformats.org/drawingml/2006/main">
+            <ns4:noFill/>
+          </ns4:ln>
+        </ns0:spPr>
+        <ns0:txBody>
+          <ns5:bodyPr xmlns:ns5="http://schemas.openxmlformats.org/drawingml/2006/main" rtlCol="0" anchor="ctr"/>
+          <ns6:lstStyle xmlns:ns6="http://schemas.openxmlformats.org/drawingml/2006/main"/>
+          <ns7:p xmlns:ns7="http://schemas.openxmlformats.org/drawingml/2006/main">
+            <ns7:endParaRPr lang="en-US"/>
+          </ns7:p>
+        </ns0:txBody>
+      </ns0:sp>
+      <ns0:sp xmlns:ns0="http://schemas.openxmlformats.org/presentationml/2006/main">
+        <ns0:nvSpPr>
+          <ns0:cNvPr id="34" name="Tile6 Label"/>
+          <ns0:cNvSpPr>
+            <ns1:spLocks xmlns:ns1="http://schemas.openxmlformats.org/drawingml/2006/main" noGrp="1"/>
+          </ns0:cNvSpPr>
+          <ns0:nvPr>
+            <ns0:ph type="body" idx="30"/>
+          </ns0:nvPr>
+        </ns0:nvSpPr>
+        <ns0:spPr>
+          <ns2:xfrm xmlns:ns2="http://schemas.openxmlformats.org/drawingml/2006/main">
+            <ns2:off x="12192000" y="8210550"/>
+            <ns2:ext cx="4724400" cy="304800"/>
+          </ns2:xfrm>
+          <ns3:prstGeom xmlns:ns3="http://schemas.openxmlformats.org/drawingml/2006/main" prst="rect">
+            <ns3:avLst/>
+          </ns3:prstGeom>
+        </ns0:spPr>
+        <ns0:txBody>
+          <ns4:bodyPr xmlns:ns4="http://schemas.openxmlformats.org/drawingml/2006/main" wrap="square" rtlCol="0" anchor="t" lIns="0" tIns="0" rIns="0" bIns="0"/>
+          <ns5:lstStyle xmlns:ns5="http://schemas.openxmlformats.org/drawingml/2006/main">
+            <ns5:lvl1pPr marL="0" indent="0" algn="l">
+              <ns5:buNone/>
+              <ns5:defRPr sz="1600" b="1">
+                <ns5:solidFill>
+                  <ns5:srgbClr val="0F6BFF"/>
+                </ns5:solidFill>
+                <ns5:latin typeface="Aptos"/>
+              </ns5:defRPr>
+            </ns5:lvl1pPr>
+          </ns5:lstStyle>
+          <ns6:p xmlns:ns6="http://schemas.openxmlformats.org/drawingml/2006/main">
+            <ns6:r>
+              <ns6:rPr lang="en-US"/>
+              <ns6:t>Tile 6 label</ns6:t>
+            </ns6:r>
+            <ns6:endParaRPr lang="en-US"/>
+          </ns6:p>
+        </ns0:txBody>
+      </ns0:sp>
+      <ns0:sp xmlns:ns0="http://schemas.openxmlformats.org/presentationml/2006/main">
+        <ns0:nvSpPr>
+          <ns0:cNvPr id="35" name="Tile6 Body"/>
+          <ns0:cNvSpPr>
+            <ns1:spLocks xmlns:ns1="http://schemas.openxmlformats.org/drawingml/2006/main" noGrp="1"/>
+          </ns0:cNvSpPr>
+          <ns0:nvPr>
+            <ns0:ph type="body" idx="31"/>
+          </ns0:nvPr>
+        </ns0:nvSpPr>
+        <ns0:spPr>
+          <ns2:xfrm xmlns:ns2="http://schemas.openxmlformats.org/drawingml/2006/main">
+            <ns2:off x="12192000" y="8553450"/>
+            <ns2:ext cx="4724400" cy="857250"/>
+          </ns2:xfrm>
+          <ns3:prstGeom xmlns:ns3="http://schemas.openxmlformats.org/drawingml/2006/main" prst="rect">
+            <ns3:avLst/>
+          </ns3:prstGeom>
+        </ns0:spPr>
+        <ns0:txBody>
+          <ns4:bodyPr xmlns:ns4="http://schemas.openxmlformats.org/drawingml/2006/main" wrap="square" rtlCol="0" anchor="t" lIns="0" tIns="0" rIns="0" bIns="0"/>
+          <ns5:lstStyle xmlns:ns5="http://schemas.openxmlformats.org/drawingml/2006/main">
+            <ns5:lvl1pPr marL="0" indent="0" algn="l">
+              <ns5:buNone/>
+              <ns5:defRPr sz="1800">
+                <ns5:solidFill>
+                  <ns5:srgbClr val="000000"/>
+                </ns5:solidFill>
+                <ns5:latin typeface="Aptos"/>
+              </ns5:defRPr>
+            </ns5:lvl1pPr>
+          </ns5:lstStyle>
+          <ns6:p xmlns:ns6="http://schemas.openxmlformats.org/drawingml/2006/main">
+            <ns6:r>
+              <ns6:rPr lang="en-US"/>
+              <ns6:t>One short sentence describing this tile.</ns6:t>
+            </ns6:r>
+            <ns6:endParaRPr lang="en-US"/>
+          </ns6:p>
+        </ns0:txBody>
+      </ns0:sp>
+      <ns0:sp xmlns:ns0="http://schemas.openxmlformats.org/presentationml/2006/main">
+        <ns0:nvSpPr>
+          <ns0:cNvPr id="36" name="Footer"/>
+          <ns0:cNvSpPr>
+            <ns1:spLocks xmlns:ns1="http://schemas.openxmlformats.org/drawingml/2006/main" noGrp="1"/>
+          </ns0:cNvSpPr>
+          <ns0:nvPr/>
+        </ns0:nvSpPr>
+        <ns0:spPr>
+          <ns2:xfrm xmlns:ns2="http://schemas.openxmlformats.org/drawingml/2006/main">
+            <ns2:off x="1143000" y="9982200"/>
+            <ns2:ext cx="16002000" cy="228600"/>
+          </ns2:xfrm>
+          <ns3:prstGeom xmlns:ns3="http://schemas.openxmlformats.org/drawingml/2006/main" prst="rect">
+            <ns3:avLst/>
+          </ns3:prstGeom>
+        </ns0:spPr>
+        <ns0:txBody>
+          <ns4:bodyPr xmlns:ns4="http://schemas.openxmlformats.org/drawingml/2006/main" wrap="square" rtlCol="0" anchor="t" lIns="0" tIns="0" rIns="0" bIns="0"/>
+          <ns5:lstStyle xmlns:ns5="http://schemas.openxmlformats.org/drawingml/2006/main">
+            <ns5:lvl1pPr marL="0" indent="0" algn="l">
+              <ns5:buNone/>
+              <ns5:defRPr sz="900" cap="all" spc="50">
+                <ns5:solidFill>
+                  <ns5:srgbClr val="6B7280"/>
+                </ns5:solidFill>
+                <ns5:latin typeface="Aptos"/>
+              </ns5:defRPr>
+            </ns5:lvl1pPr>
+          </ns5:lstStyle>
+          <ns6:p xmlns:ns6="http://schemas.openxmlformats.org/drawingml/2006/main">
+            <ns6:r>
+              <ns6:rPr lang="en-US"/>
+              <ns6:t>OPEN COMPONENT MODEL · OCM.SOFTWARE</ns6:t>
+            </ns6:r>
+            <ns6:endParaRPr lang="en-US"/>
+          </ns6:p>
+        </ns0:txBody>
+      </ns0:sp>
+    </p:spTree>
+  </p:cSld>
+  <p:clrMapOvr>
+    <a:masterClrMapping/>
+  </p:clrMapOvr>
+</p:sldLayout>
+</file>
+
+<file path=ppt/slideLayouts/slideLayout6.xml><?xml version="1.0" encoding="utf-8"?>
+<p:sldLayout xmlns:a="http://schemas.openxmlformats.org/drawingml/2006/main" xmlns:r="http://schemas.openxmlformats.org/officeDocument/2006/relationships" xmlns:p="http://schemas.openxmlformats.org/presentationml/2006/main" type="twoObj" preserve="1" userDrawn="1">
+  <p:cSld name="Content / 2-Column">
+    <p:bg>
+      <p:bgPr>
+        <a:solidFill>
+          <a:srgbClr val="FFFFFF"/>
+        </a:solidFill>
+        <a:effectLst/>
+      </p:bgPr>
+    </p:bg>
+    <p:spTree>
+      <p:nvGrpSpPr>
+        <p:cNvPr id="1" name=""/>
+        <p:cNvGrpSpPr/>
+        <p:nvPr/>
+      </p:nvGrpSpPr>
+      <p:grpSpPr>
+        <a:xfrm>
+          <a:off x="0" y="0"/>
+          <a:ext cx="0" cy="0"/>
+          <a:chOff x="0" y="0"/>
+          <a:chExt cx="0" cy="0"/>
+        </a:xfrm>
+      </p:grpSpPr>
+      <ns0:sp xmlns:ns0="http://schemas.openxmlformats.org/presentationml/2006/main">
+        <ns0:nvSpPr>
+          <ns0:cNvPr id="10" name="Eyebrow"/>
+          <ns0:cNvSpPr>
+            <ns1:spLocks xmlns:ns1="http://schemas.openxmlformats.org/drawingml/2006/main" noGrp="1"/>
+          </ns0:cNvSpPr>
+          <ns0:nvPr>
+            <ns0:ph type="body" idx="1"/>
+          </ns0:nvPr>
+        </ns0:nvSpPr>
+        <ns0:spPr>
+          <ns2:xfrm xmlns:ns2="http://schemas.openxmlformats.org/drawingml/2006/main">
+            <ns2:off x="1143000" y="2428875"/>
+            <ns2:ext cx="16002000" cy="457200"/>
+          </ns2:xfrm>
+          <ns3:prstGeom xmlns:ns3="http://schemas.openxmlformats.org/drawingml/2006/main" prst="rect">
+            <ns3:avLst/>
+          </ns3:prstGeom>
+        </ns0:spPr>
+        <ns0:txBody>
+          <ns4:bodyPr xmlns:ns4="http://schemas.openxmlformats.org/drawingml/2006/main" wrap="square" rtlCol="0" anchor="t" lIns="0" tIns="0" rIns="0" bIns="0"/>
+          <ns5:lstStyle xmlns:ns5="http://schemas.openxmlformats.org/drawingml/2006/main">
+            <ns5:lvl1pPr marL="0" indent="0" algn="l">
+              <ns5:buNone/>
+              <ns5:defRPr sz="2800" b="1" cap="all" spc="140">
+                <ns5:solidFill>
+                  <ns5:srgbClr val="0F6BFF"/>
+                </ns5:solidFill>
+                <ns5:latin typeface="Aptos"/>
+              </ns5:defRPr>
+            </ns5:lvl1pPr>
+          </ns5:lstStyle>
+          <ns6:p xmlns:ns6="http://schemas.openxmlformats.org/drawingml/2006/main">
+            <ns6:r>
+              <ns6:rPr lang="en-US"/>
+              <ns6:t>EYEBROW</ns6:t>
+            </ns6:r>
+            <ns6:endParaRPr lang="en-US"/>
+          </ns6:p>
+        </ns0:txBody>
+      </ns0:sp>
+      <ns0:sp xmlns:ns0="http://schemas.openxmlformats.org/presentationml/2006/main">
+        <ns0:nvSpPr>
+          <ns0:cNvPr id="11" name="Title"/>
+          <ns0:cNvSpPr>
+            <ns1:spLocks xmlns:ns1="http://schemas.openxmlformats.org/drawingml/2006/main" noGrp="1"/>
+          </ns0:cNvSpPr>
+          <ns0:nvPr>
+            <ns0:ph type="title" idx="2"/>
+          </ns0:nvPr>
+        </ns0:nvSpPr>
+        <ns0:spPr>
+          <ns2:xfrm xmlns:ns2="http://schemas.openxmlformats.org/drawingml/2006/main">
+            <ns2:off x="1143000" y="2933700"/>
+            <ns2:ext cx="16002000" cy="1905000"/>
+          </ns2:xfrm>
+          <ns3:prstGeom xmlns:ns3="http://schemas.openxmlformats.org/drawingml/2006/main" prst="rect">
+            <ns3:avLst/>
+          </ns3:prstGeom>
+        </ns0:spPr>
+        <ns0:txBody>
+          <ns4:bodyPr xmlns:ns4="http://schemas.openxmlformats.org/drawingml/2006/main" wrap="square" rtlCol="0" anchor="t" lIns="0" tIns="0" rIns="0" bIns="0"/>
+          <ns5:lstStyle xmlns:ns5="http://schemas.openxmlformats.org/drawingml/2006/main">
+            <ns5:lvl1pPr marL="0" indent="0" algn="l">
+              <ns5:lnSpc>
+                <ns5:spcPct val="90000"/>
+              </ns5:lnSpc>
+              <ns5:buNone/>
+              <ns5:defRPr sz="6400" b="1">
+                <ns5:solidFill>
+                  <ns5:srgbClr val="000000"/>
+                </ns5:solidFill>
+                <ns5:latin typeface="Aptos Display"/>
+              </ns5:defRPr>
+            </ns5:lvl1pPr>
+          </ns5:lstStyle>
+          <ns6:p xmlns:ns6="http://schemas.openxmlformats.org/drawingml/2006/main">
+            <ns6:r>
+              <ns6:rPr lang="en-US"/>
+              <ns6:t>Section title goes here.</ns6:t>
+            </ns6:r>
+            <ns6:endParaRPr lang="en-US"/>
+          </ns6:p>
+        </ns0:txBody>
+      </ns0:sp>
+      <ns0:sp xmlns:ns0="http://schemas.openxmlformats.org/presentationml/2006/main">
+        <ns0:nvSpPr>
+          <ns0:cNvPr id="12" name="Left Body"/>
+          <ns0:cNvSpPr>
+            <ns1:spLocks xmlns:ns1="http://schemas.openxmlformats.org/drawingml/2006/main" noGrp="1"/>
+          </ns0:cNvSpPr>
+          <ns0:nvPr>
+            <ns0:ph type="body" idx="10"/>
+          </ns0:nvPr>
+        </ns0:nvSpPr>
+        <ns0:spPr>
+          <ns2:xfrm xmlns:ns2="http://schemas.openxmlformats.org/drawingml/2006/main">
+            <ns2:off x="1143000" y="4953000"/>
+            <ns2:ext cx="7810500" cy="4381500"/>
+          </ns2:xfrm>
+          <ns3:prstGeom xmlns:ns3="http://schemas.openxmlformats.org/drawingml/2006/main" prst="rect">
+            <ns3:avLst/>
+          </ns3:prstGeom>
+        </ns0:spPr>
+        <ns0:txBody>
+          <ns4:bodyPr xmlns:ns4="http://schemas.openxmlformats.org/drawingml/2006/main" wrap="square" rtlCol="0" anchor="t" lIns="0" tIns="0" rIns="0" bIns="0"/>
+          <ns5:lstStyle xmlns:ns5="http://schemas.openxmlformats.org/drawingml/2006/main">
+            <ns5:lvl1pPr marL="0" indent="0" algn="l">
+              <ns5:buNone/>
+              <ns5:defRPr sz="2200">
+                <ns5:solidFill>
+                  <ns5:srgbClr val="000000"/>
+                </ns5:solidFill>
+                <ns5:latin typeface="Aptos"/>
+              </ns5:defRPr>
+            </ns5:lvl1pPr>
+          </ns5:lstStyle>
+          <ns6:p xmlns:ns6="http://schemas.openxmlformats.org/drawingml/2006/main">
+            <ns6:r>
+              <ns6:rPr lang="en-US"/>
+              <ns6:t>Left column body.</ns6:t>
+            </ns6:r>
+            <ns6:endParaRPr lang="en-US"/>
+          </ns6:p>
+        </ns0:txBody>
+      </ns0:sp>
+      <ns0:sp xmlns:ns0="http://schemas.openxmlformats.org/presentationml/2006/main">
+        <ns0:nvSpPr>
+          <ns0:cNvPr id="13" name="Right Body"/>
+          <ns0:cNvSpPr>
+            <ns1:spLocks xmlns:ns1="http://schemas.openxmlformats.org/drawingml/2006/main" noGrp="1"/>
+          </ns0:cNvSpPr>
+          <ns0:nvPr>
+            <ns0:ph type="body" idx="11"/>
+          </ns0:nvPr>
+        </ns0:nvSpPr>
+        <ns0:spPr>
+          <ns2:xfrm xmlns:ns2="http://schemas.openxmlformats.org/drawingml/2006/main">
+            <ns2:off x="9334500" y="4953000"/>
+            <ns2:ext cx="7810500" cy="4381500"/>
+          </ns2:xfrm>
+          <ns3:prstGeom xmlns:ns3="http://schemas.openxmlformats.org/drawingml/2006/main" prst="rect">
+            <ns3:avLst/>
+          </ns3:prstGeom>
+        </ns0:spPr>
+        <ns0:txBody>
+          <ns4:bodyPr xmlns:ns4="http://schemas.openxmlformats.org/drawingml/2006/main" wrap="square" rtlCol="0" anchor="t" lIns="0" tIns="0" rIns="0" bIns="0"/>
+          <ns5:lstStyle xmlns:ns5="http://schemas.openxmlformats.org/drawingml/2006/main">
+            <ns5:lvl1pPr marL="0" indent="0" algn="l">
+              <ns5:buNone/>
+              <ns5:defRPr sz="2200">
+                <ns5:solidFill>
+                  <ns5:srgbClr val="000000"/>
+                </ns5:solidFill>
+                <ns5:latin typeface="Aptos"/>
+              </ns5:defRPr>
+            </ns5:lvl1pPr>
+          </ns5:lstStyle>
+          <ns6:p xmlns:ns6="http://schemas.openxmlformats.org/drawingml/2006/main">
+            <ns6:r>
+              <ns6:rPr lang="en-US"/>
+              <ns6:t>Right column body.</ns6:t>
+            </ns6:r>
+            <ns6:endParaRPr lang="en-US"/>
+          </ns6:p>
+        </ns0:txBody>
+      </ns0:sp>
+      <ns0:sp xmlns:ns0="http://schemas.openxmlformats.org/presentationml/2006/main">
+        <ns0:nvSpPr>
+          <ns0:cNvPr id="14" name="Footer"/>
+          <ns0:cNvSpPr>
+            <ns1:spLocks xmlns:ns1="http://schemas.openxmlformats.org/drawingml/2006/main" noGrp="1"/>
+          </ns0:cNvSpPr>
+          <ns0:nvPr/>
+        </ns0:nvSpPr>
+        <ns0:spPr>
+          <ns2:xfrm xmlns:ns2="http://schemas.openxmlformats.org/drawingml/2006/main">
+            <ns2:off x="1143000" y="9982200"/>
+            <ns2:ext cx="16002000" cy="228600"/>
+          </ns2:xfrm>
+          <ns3:prstGeom xmlns:ns3="http://schemas.openxmlformats.org/drawingml/2006/main" prst="rect">
+            <ns3:avLst/>
+          </ns3:prstGeom>
+        </ns0:spPr>
+        <ns0:txBody>
+          <ns4:bodyPr xmlns:ns4="http://schemas.openxmlformats.org/drawingml/2006/main" wrap="square" rtlCol="0" anchor="t" lIns="0" tIns="0" rIns="0" bIns="0"/>
+          <ns5:lstStyle xmlns:ns5="http://schemas.openxmlformats.org/drawingml/2006/main">
+            <ns5:lvl1pPr marL="0" indent="0" algn="l">
+              <ns5:buNone/>
+              <ns5:defRPr sz="900" cap="all" spc="50">
+                <ns5:solidFill>
+                  <ns5:srgbClr val="6B7280"/>
+                </ns5:solidFill>
+                <ns5:latin typeface="Aptos"/>
+              </ns5:defRPr>
+            </ns5:lvl1pPr>
+          </ns5:lstStyle>
+          <ns6:p xmlns:ns6="http://schemas.openxmlformats.org/drawingml/2006/main">
+            <ns6:r>
+              <ns6:rPr lang="en-US"/>
+              <ns6:t>OPEN COMPONENT MODEL · OCM.SOFTWARE</ns6:t>
+            </ns6:r>
+            <ns6:endParaRPr lang="en-US"/>
+          </ns6:p>
+        </ns0:txBody>
+      </ns0:sp>
+    </p:spTree>
+  </p:cSld>
+  <p:clrMapOvr>
+    <a:masterClrMapping/>
+  </p:clrMapOvr>
+</p:sldLayout>
+</file>
+
+<file path=ppt/slideLayouts/slideLayout7.xml><?xml version="1.0" encoding="utf-8"?>
+<p:sldLayout xmlns:a="http://schemas.openxmlformats.org/drawingml/2006/main" xmlns:r="http://schemas.openxmlformats.org/officeDocument/2006/relationships" xmlns:p="http://schemas.openxmlformats.org/presentationml/2006/main" type="secHead" preserve="1" userDrawn="1">
+  <p:cSld name="Section Divider">
+    <p:bg>
+      <p:bgPr>
+        <a:solidFill>
+          <a:srgbClr val="0F6BFF"/>
+        </a:solidFill>
+        <a:effectLst/>
+      </p:bgPr>
+    </p:bg>
+    <p:spTree>
+      <p:nvGrpSpPr>
+        <p:cNvPr id="1" name=""/>
+        <p:cNvGrpSpPr/>
+        <p:nvPr/>
+      </p:nvGrpSpPr>
+      <p:grpSpPr>
+        <a:xfrm>
+          <a:off x="0" y="0"/>
+          <a:ext cx="0" cy="0"/>
+          <a:chOff x="0" y="0"/>
+          <a:chExt cx="0" cy="0"/>
+        </a:xfrm>
+      </p:grpSpPr>
+      <ns0:sp xmlns:ns0="http://schemas.openxmlformats.org/presentationml/2006/main">
+        <ns0:nvSpPr>
+          <ns0:cNvPr id="10" name="Section Title"/>
+          <ns0:cNvSpPr>
+            <ns1:spLocks xmlns:ns1="http://schemas.openxmlformats.org/drawingml/2006/main" noGrp="1"/>
+          </ns0:cNvSpPr>
+          <ns0:nvPr>
+            <ns0:ph type="title" idx="1"/>
+          </ns0:nvPr>
+        </ns0:nvSpPr>
+        <ns0:spPr>
+          <ns2:xfrm xmlns:ns2="http://schemas.openxmlformats.org/drawingml/2006/main">
+            <ns2:off x="762000" y="4381500"/>
+            <ns2:ext cx="16764000" cy="1905000"/>
+          </ns2:xfrm>
+          <ns3:prstGeom xmlns:ns3="http://schemas.openxmlformats.org/drawingml/2006/main" prst="rect">
+            <ns3:avLst/>
+          </ns3:prstGeom>
+        </ns0:spPr>
+        <ns0:txBody>
+          <ns4:bodyPr xmlns:ns4="http://schemas.openxmlformats.org/drawingml/2006/main" wrap="square" rtlCol="0" anchor="ctr" lIns="0" tIns="0" rIns="0" bIns="0"/>
+          <ns5:lstStyle xmlns:ns5="http://schemas.openxmlformats.org/drawingml/2006/main">
+            <ns5:lvl1pPr marL="0" indent="0" algn="ctr">
+              <ns5:buNone/>
+              <ns5:defRPr sz="7200" b="1">
+                <ns5:solidFill>
+                  <ns5:srgbClr val="FFFFFF"/>
+                </ns5:solidFill>
+                <ns5:latin typeface="Aptos Display"/>
+              </ns5:defRPr>
+            </ns5:lvl1pPr>
+          </ns5:lstStyle>
+          <ns6:p xmlns:ns6="http://schemas.openxmlformats.org/drawingml/2006/main">
+            <ns6:r>
+              <ns6:rPr lang="en-US"/>
+              <ns6:t>Section</ns6:t>
+            </ns6:r>
+            <ns6:endParaRPr lang="en-US"/>
+          </ns6:p>
+        </ns0:txBody>
+      </ns0:sp>
+    </p:spTree>
+  </p:cSld>
+  <p:clrMapOvr>
+    <a:masterClrMapping/>
+  </p:clrMapOvr>
+</p:sldLayout>
+</file>
+
+<file path=ppt/slideLayouts/slideLayout8.xml><?xml version="1.0" encoding="utf-8"?>
+<p:sldLayout xmlns:a="http://schemas.openxmlformats.org/drawingml/2006/main" xmlns:r="http://schemas.openxmlformats.org/officeDocument/2006/relationships" xmlns:p="http://schemas.openxmlformats.org/presentationml/2006/main" type="obj" preserve="1" userDrawn="1">
+  <p:cSld name="Plain">
+    <p:bg>
+      <p:bgPr>
+        <a:solidFill>
+          <a:srgbClr val="FFFFFF"/>
+        </a:solidFill>
+        <a:effectLst/>
+      </p:bgPr>
+    </p:bg>
+    <p:spTree>
+      <p:nvGrpSpPr>
+        <p:cNvPr id="1" name=""/>
+        <p:cNvGrpSpPr/>
+        <p:nvPr/>
+      </p:nvGrpSpPr>
+      <p:grpSpPr>
+        <a:xfrm>
+          <a:off x="0" y="0"/>
+          <a:ext cx="0" cy="0"/>
+          <a:chOff x="0" y="0"/>
+          <a:chExt cx="0" cy="0"/>
+        </a:xfrm>
+      </p:grpSpPr>
+      <ns0:sp xmlns:ns0="http://schemas.openxmlformats.org/presentationml/2006/main">
+        <ns0:nvSpPr>
+          <ns0:cNvPr id="10" name="Eyebrow"/>
+          <ns0:cNvSpPr>
+            <ns1:spLocks xmlns:ns1="http://schemas.openxmlformats.org/drawingml/2006/main" noGrp="1"/>
+          </ns0:cNvSpPr>
+          <ns0:nvPr>
+            <ns0:ph type="body" idx="1"/>
+          </ns0:nvPr>
+        </ns0:nvSpPr>
+        <ns0:spPr>
+          <ns2:xfrm xmlns:ns2="http://schemas.openxmlformats.org/drawingml/2006/main">
+            <ns2:off x="1143000" y="2428875"/>
+            <ns2:ext cx="16002000" cy="457200"/>
+          </ns2:xfrm>
+          <ns3:prstGeom xmlns:ns3="http://schemas.openxmlformats.org/drawingml/2006/main" prst="rect">
+            <ns3:avLst/>
+          </ns3:prstGeom>
+        </ns0:spPr>
+        <ns0:txBody>
+          <ns4:bodyPr xmlns:ns4="http://schemas.openxmlformats.org/drawingml/2006/main" wrap="square" rtlCol="0" anchor="t" lIns="0" tIns="0" rIns="0" bIns="0"/>
+          <ns5:lstStyle xmlns:ns5="http://schemas.openxmlformats.org/drawingml/2006/main">
+            <ns5:lvl1pPr marL="0" indent="0" algn="l">
+              <ns5:buNone/>
+              <ns5:defRPr sz="2800" b="1" cap="all" spc="140">
+                <ns5:solidFill>
+                  <ns5:srgbClr val="0F6BFF"/>
+                </ns5:solidFill>
+                <ns5:latin typeface="Aptos"/>
+              </ns5:defRPr>
+            </ns5:lvl1pPr>
+          </ns5:lstStyle>
+          <ns6:p xmlns:ns6="http://schemas.openxmlformats.org/drawingml/2006/main">
+            <ns6:r>
+              <ns6:rPr lang="en-US"/>
+              <ns6:t>EYEBROW</ns6:t>
+            </ns6:r>
+            <ns6:endParaRPr lang="en-US"/>
+          </ns6:p>
+        </ns0:txBody>
+      </ns0:sp>
+      <ns0:sp xmlns:ns0="http://schemas.openxmlformats.org/presentationml/2006/main">
+        <ns0:nvSpPr>
+          <ns0:cNvPr id="11" name="Title"/>
+          <ns0:cNvSpPr>
+            <ns1:spLocks xmlns:ns1="http://schemas.openxmlformats.org/drawingml/2006/main" noGrp="1"/>
+          </ns0:cNvSpPr>
+          <ns0:nvPr>
+            <ns0:ph type="title" idx="2"/>
+          </ns0:nvPr>
+        </ns0:nvSpPr>
+        <ns0:spPr>
+          <ns2:xfrm xmlns:ns2="http://schemas.openxmlformats.org/drawingml/2006/main">
+            <ns2:off x="1143000" y="2933700"/>
+            <ns2:ext cx="16002000" cy="1905000"/>
+          </ns2:xfrm>
+          <ns3:prstGeom xmlns:ns3="http://schemas.openxmlformats.org/drawingml/2006/main" prst="rect">
+            <ns3:avLst/>
+          </ns3:prstGeom>
+        </ns0:spPr>
+        <ns0:txBody>
+          <ns4:bodyPr xmlns:ns4="http://schemas.openxmlformats.org/drawingml/2006/main" wrap="square" rtlCol="0" anchor="t" lIns="0" tIns="0" rIns="0" bIns="0"/>
+          <ns5:lstStyle xmlns:ns5="http://schemas.openxmlformats.org/drawingml/2006/main">
+            <ns5:lvl1pPr marL="0" indent="0" algn="l">
+              <ns5:lnSpc>
+                <ns5:spcPct val="90000"/>
+              </ns5:lnSpc>
+              <ns5:buNone/>
+              <ns5:defRPr sz="6400" b="1">
+                <ns5:solidFill>
+                  <ns5:srgbClr val="000000"/>
+                </ns5:solidFill>
+                <ns5:latin typeface="Aptos Display"/>
+              </ns5:defRPr>
+            </ns5:lvl1pPr>
+          </ns5:lstStyle>
+          <ns6:p xmlns:ns6="http://schemas.openxmlformats.org/drawingml/2006/main">
+            <ns6:r>
+              <ns6:rPr lang="en-US"/>
+              <ns6:t>Section title goes here.</ns6:t>
+            </ns6:r>
+            <ns6:endParaRPr lang="en-US"/>
+          </ns6:p>
+        </ns0:txBody>
+      </ns0:sp>
+      <ns0:sp xmlns:ns0="http://schemas.openxmlformats.org/presentationml/2006/main">
+        <ns0:nvSpPr>
+          <ns0:cNvPr id="12" name="Body"/>
+          <ns0:cNvSpPr>
+            <ns1:spLocks xmlns:ns1="http://schemas.openxmlformats.org/drawingml/2006/main" noGrp="1"/>
+          </ns0:cNvSpPr>
+          <ns0:nvPr>
+            <ns0:ph type="body" idx="10"/>
+          </ns0:nvPr>
+        </ns0:nvSpPr>
+        <ns0:spPr>
+          <ns2:xfrm xmlns:ns2="http://schemas.openxmlformats.org/drawingml/2006/main">
+            <ns2:off x="1143000" y="5524500"/>
+            <ns2:ext cx="16002000" cy="3810000"/>
+          </ns2:xfrm>
+          <ns3:prstGeom xmlns:ns3="http://schemas.openxmlformats.org/drawingml/2006/main" prst="rect">
+            <ns3:avLst/>
+          </ns3:prstGeom>
+        </ns0:spPr>
+        <ns0:txBody>
+          <ns4:bodyPr xmlns:ns4="http://schemas.openxmlformats.org/drawingml/2006/main" wrap="square" rtlCol="0" anchor="t" lIns="0" tIns="0" rIns="0" bIns="0"/>
+          <ns5:lstStyle xmlns:ns5="http://schemas.openxmlformats.org/drawingml/2006/main">
+            <ns5:lvl1pPr marL="0" indent="0" algn="l">
+              <ns5:buNone/>
+              <ns5:defRPr sz="2200">
+                <ns5:solidFill>
+                  <ns5:srgbClr val="000000"/>
+                </ns5:solidFill>
+                <ns5:latin typeface="Aptos"/>
+              </ns5:defRPr>
+            </ns5:lvl1pPr>
+          </ns5:lstStyle>
+          <ns6:p xmlns:ns6="http://schemas.openxmlformats.org/drawingml/2006/main">
+            <ns6:r>
+              <ns6:rPr lang="en-US"/>
+              <ns6:t>Body text.</ns6:t>
+            </ns6:r>
+            <ns6:endParaRPr lang="en-US"/>
+          </ns6:p>
+        </ns0:txBody>
+      </ns0:sp>
+      <ns0:sp xmlns:ns0="http://schemas.openxmlformats.org/presentationml/2006/main">
+        <ns0:nvSpPr>
+          <ns0:cNvPr id="13" name="Footer"/>
+          <ns0:cNvSpPr>
+            <ns1:spLocks xmlns:ns1="http://schemas.openxmlformats.org/drawingml/2006/main" noGrp="1"/>
+          </ns0:cNvSpPr>
+          <ns0:nvPr/>
+        </ns0:nvSpPr>
+        <ns0:spPr>
+          <ns2:xfrm xmlns:ns2="http://schemas.openxmlformats.org/drawingml/2006/main">
+            <ns2:off x="1143000" y="9982200"/>
+            <ns2:ext cx="16002000" cy="228600"/>
+          </ns2:xfrm>
+          <ns3:prstGeom xmlns:ns3="http://schemas.openxmlformats.org/drawingml/2006/main" prst="rect">
+            <ns3:avLst/>
+          </ns3:prstGeom>
+        </ns0:spPr>
+        <ns0:txBody>
+          <ns4:bodyPr xmlns:ns4="http://schemas.openxmlformats.org/drawingml/2006/main" wrap="square" rtlCol="0" anchor="t" lIns="0" tIns="0" rIns="0" bIns="0"/>
+          <ns5:lstStyle xmlns:ns5="http://schemas.openxmlformats.org/drawingml/2006/main">
+            <ns5:lvl1pPr marL="0" indent="0" algn="l">
+              <ns5:buNone/>
+              <ns5:defRPr sz="900" cap="all" spc="50">
+                <ns5:solidFill>
+                  <ns5:srgbClr val="6B7280"/>
+                </ns5:solidFill>
+                <ns5:latin typeface="Aptos"/>
+              </ns5:defRPr>
+            </ns5:lvl1pPr>
+          </ns5:lstStyle>
+          <ns6:p xmlns:ns6="http://schemas.openxmlformats.org/drawingml/2006/main">
+            <ns6:r>
+              <ns6:rPr lang="en-US"/>
+              <ns6:t>OPEN COMPONENT MODEL · OCM.SOFTWARE</ns6:t>
+            </ns6:r>
+            <ns6:endParaRPr lang="en-US"/>
+          </ns6:p>
+        </ns0:txBody>
+      </ns0:sp>
+    </p:spTree>
+  </p:cSld>
+  <p:clrMapOvr>
+    <a:masterClrMapping/>
+  </p:clrMapOvr>
+</p:sldLayout>
+</file>
+
+<file path=ppt/slideLayouts/slideLayout9.xml><?xml version="1.0" encoding="utf-8"?>
 <p:sldLayout xmlns:a="http://schemas.openxmlformats.org/drawingml/2006/main" xmlns:r="http://schemas.openxmlformats.org/officeDocument/2006/relationships" xmlns:p="http://schemas.openxmlformats.org/presentationml/2006/main" type="obj" preserve="1" userDrawn="1">
   <p:cSld name="Plain / Compact">
     <p:bg>
@@ -451,2560 +2754,6 @@
           <ns2:xfrm xmlns:ns2="http://schemas.openxmlformats.org/drawingml/2006/main">
             <ns2:off x="1143000" y="4953000"/>
             <ns2:ext cx="16002000" cy="4381500"/>
-          </ns2:xfrm>
-          <ns3:prstGeom xmlns:ns3="http://schemas.openxmlformats.org/drawingml/2006/main" prst="rect">
-            <ns3:avLst/>
-          </ns3:prstGeom>
-        </ns0:spPr>
-        <ns0:txBody>
-          <ns4:bodyPr xmlns:ns4="http://schemas.openxmlformats.org/drawingml/2006/main" wrap="square" rtlCol="0" anchor="t" lIns="0" tIns="0" rIns="0" bIns="0"/>
-          <ns5:lstStyle xmlns:ns5="http://schemas.openxmlformats.org/drawingml/2006/main">
-            <ns5:lvl1pPr marL="0" indent="0" algn="l">
-              <ns5:buNone/>
-              <ns5:defRPr sz="2200">
-                <ns5:solidFill>
-                  <ns5:srgbClr val="000000"/>
-                </ns5:solidFill>
-                <ns5:latin typeface="Aptos"/>
-              </ns5:defRPr>
-            </ns5:lvl1pPr>
-          </ns5:lstStyle>
-          <ns6:p xmlns:ns6="http://schemas.openxmlformats.org/drawingml/2006/main">
-            <ns6:r>
-              <ns6:rPr lang="en-US"/>
-              <ns6:t>Body text.</ns6:t>
-            </ns6:r>
-            <ns6:endParaRPr lang="en-US"/>
-          </ns6:p>
-        </ns0:txBody>
-      </ns0:sp>
-      <ns0:sp xmlns:ns0="http://schemas.openxmlformats.org/presentationml/2006/main">
-        <ns0:nvSpPr>
-          <ns0:cNvPr id="13" name="Footer"/>
-          <ns0:cNvSpPr>
-            <ns1:spLocks xmlns:ns1="http://schemas.openxmlformats.org/drawingml/2006/main" noGrp="1"/>
-          </ns0:cNvSpPr>
-          <ns0:nvPr/>
-        </ns0:nvSpPr>
-        <ns0:spPr>
-          <ns2:xfrm xmlns:ns2="http://schemas.openxmlformats.org/drawingml/2006/main">
-            <ns2:off x="1143000" y="9982200"/>
-            <ns2:ext cx="16002000" cy="228600"/>
-          </ns2:xfrm>
-          <ns3:prstGeom xmlns:ns3="http://schemas.openxmlformats.org/drawingml/2006/main" prst="rect">
-            <ns3:avLst/>
-          </ns3:prstGeom>
-        </ns0:spPr>
-        <ns0:txBody>
-          <ns4:bodyPr xmlns:ns4="http://schemas.openxmlformats.org/drawingml/2006/main" wrap="square" rtlCol="0" anchor="t" lIns="0" tIns="0" rIns="0" bIns="0"/>
-          <ns5:lstStyle xmlns:ns5="http://schemas.openxmlformats.org/drawingml/2006/main">
-            <ns5:lvl1pPr marL="0" indent="0" algn="l">
-              <ns5:buNone/>
-              <ns5:defRPr sz="900" cap="all" spc="50">
-                <ns5:solidFill>
-                  <ns5:srgbClr val="6B7280"/>
-                </ns5:solidFill>
-                <ns5:latin typeface="Aptos"/>
-              </ns5:defRPr>
-            </ns5:lvl1pPr>
-          </ns5:lstStyle>
-          <ns6:p xmlns:ns6="http://schemas.openxmlformats.org/drawingml/2006/main">
-            <ns6:r>
-              <ns6:rPr lang="en-US"/>
-              <ns6:t>OPEN COMPONENT MODEL · OCM.SOFTWARE</ns6:t>
-            </ns6:r>
-            <ns6:endParaRPr lang="en-US"/>
-          </ns6:p>
-        </ns0:txBody>
-      </ns0:sp>
-    </p:spTree>
-  </p:cSld>
-  <p:clrMapOvr>
-    <a:masterClrMapping/>
-  </p:clrMapOvr>
-</p:sldLayout>
-</file>
-
-<file path=ppt/slideLayouts/slideLayout2.xml><?xml version="1.0" encoding="utf-8"?>
-<p:sldLayout xmlns:a="http://schemas.openxmlformats.org/drawingml/2006/main" xmlns:r="http://schemas.openxmlformats.org/officeDocument/2006/relationships" xmlns:p="http://schemas.openxmlformats.org/presentationml/2006/main" type="title" preserve="1" userDrawn="1">
-  <p:cSld name="Hero / 3-Line">
-    <p:bg>
-      <p:bgPr>
-        <a:solidFill>
-          <a:srgbClr val="0A1530"/>
-        </a:solidFill>
-        <a:effectLst/>
-      </p:bgPr>
-    </p:bg>
-    <p:spTree>
-      <p:nvGrpSpPr>
-        <p:cNvPr id="1" name=""/>
-        <p:cNvGrpSpPr/>
-        <p:nvPr/>
-      </p:nvGrpSpPr>
-      <p:grpSpPr>
-        <a:xfrm>
-          <a:off x="0" y="0"/>
-          <a:ext cx="0" cy="0"/>
-          <a:chOff x="0" y="0"/>
-          <a:chExt cx="0" cy="0"/>
-        </a:xfrm>
-      </p:grpSpPr>
-      <ns0:sp xmlns:ns0="http://schemas.openxmlformats.org/presentationml/2006/main">
-        <ns0:nvSpPr>
-          <ns0:cNvPr id="10" name="Hero Title Line 1"/>
-          <ns0:cNvSpPr>
-            <ns1:spLocks xmlns:ns1="http://schemas.openxmlformats.org/drawingml/2006/main" noGrp="1"/>
-          </ns0:cNvSpPr>
-          <ns0:nvPr>
-            <ns0:ph type="title" idx="1"/>
-          </ns0:nvPr>
-        </ns0:nvSpPr>
-        <ns0:spPr>
-          <ns2:xfrm xmlns:ns2="http://schemas.openxmlformats.org/drawingml/2006/main">
-            <ns2:off x="914400" y="1143000"/>
-            <ns2:ext cx="16192500" cy="1333500"/>
-          </ns2:xfrm>
-          <ns3:prstGeom xmlns:ns3="http://schemas.openxmlformats.org/drawingml/2006/main" prst="rect">
-            <ns3:avLst/>
-          </ns3:prstGeom>
-        </ns0:spPr>
-        <ns0:txBody>
-          <ns4:bodyPr xmlns:ns4="http://schemas.openxmlformats.org/drawingml/2006/main" wrap="square" rtlCol="0" anchor="t" lIns="0" tIns="0" rIns="0" bIns="0">
-            <ns4:noAutofit/>
-          </ns4:bodyPr>
-          <ns5:lstStyle xmlns:ns5="http://schemas.openxmlformats.org/drawingml/2006/main">
-            <ns5:lvl1pPr marL="0" indent="0" algn="l">
-              <ns5:buNone/>
-              <ns5:defRPr sz="11500" b="1">
-                <ns5:solidFill>
-                  <ns5:srgbClr val="FFFFFF"/>
-                </ns5:solidFill>
-                <ns5:latin typeface="Aptos Display"/>
-              </ns5:defRPr>
-            </ns5:lvl1pPr>
-          </ns5:lstStyle>
-          <ns6:p xmlns:ns6="http://schemas.openxmlformats.org/drawingml/2006/main">
-            <ns6:r>
-              <ns6:rPr lang="en-US"/>
-              <ns6:t>Three minutes from now,</ns6:t>
-            </ns6:r>
-            <ns6:endParaRPr lang="en-US"/>
-          </ns6:p>
-        </ns0:txBody>
-      </ns0:sp>
-      <ns0:sp xmlns:ns0="http://schemas.openxmlformats.org/presentationml/2006/main">
-        <ns0:nvSpPr>
-          <ns0:cNvPr id="11" name="Hero Title Line 2"/>
-          <ns0:cNvSpPr>
-            <ns1:spLocks xmlns:ns1="http://schemas.openxmlformats.org/drawingml/2006/main" noGrp="1"/>
-          </ns0:cNvSpPr>
-          <ns0:nvPr>
-            <ns0:ph type="body" idx="2"/>
-          </ns0:nvPr>
-        </ns0:nvSpPr>
-        <ns0:spPr>
-          <ns2:xfrm xmlns:ns2="http://schemas.openxmlformats.org/drawingml/2006/main">
-            <ns2:off x="914400" y="2571750"/>
-            <ns2:ext cx="16192500" cy="1333500"/>
-          </ns2:xfrm>
-          <ns3:prstGeom xmlns:ns3="http://schemas.openxmlformats.org/drawingml/2006/main" prst="rect">
-            <ns3:avLst/>
-          </ns3:prstGeom>
-        </ns0:spPr>
-        <ns0:txBody>
-          <ns4:bodyPr xmlns:ns4="http://schemas.openxmlformats.org/drawingml/2006/main" wrap="square" rtlCol="0" anchor="t" lIns="0" tIns="0" rIns="0" bIns="0">
-            <ns4:noAutofit/>
-          </ns4:bodyPr>
-          <ns5:lstStyle xmlns:ns5="http://schemas.openxmlformats.org/drawingml/2006/main">
-            <ns5:lvl1pPr marL="0" indent="0" algn="l">
-              <ns5:buNone/>
-              <ns5:defRPr sz="11500" b="1">
-                <ns5:solidFill>
-                  <ns5:srgbClr val="FFFFFF"/>
-                </ns5:solidFill>
-                <ns5:latin typeface="Aptos Display"/>
-              </ns5:defRPr>
-            </ns5:lvl1pPr>
-          </ns5:lstStyle>
-          <ns6:p xmlns:ns6="http://schemas.openxmlformats.org/drawingml/2006/main">
-            <ns6:r>
-              <ns6:rPr lang="en-US"/>
-              <ns6:t>you'll know what your</ns6:t>
-            </ns6:r>
-            <ns6:endParaRPr lang="en-US"/>
-          </ns6:p>
-        </ns0:txBody>
-      </ns0:sp>
-      <ns0:sp xmlns:ns0="http://schemas.openxmlformats.org/presentationml/2006/main">
-        <ns0:nvSpPr>
-          <ns0:cNvPr id="12" name="Hero Title Line 3 (Gradient)"/>
-          <ns0:cNvSpPr>
-            <ns1:spLocks xmlns:ns1="http://schemas.openxmlformats.org/drawingml/2006/main" noGrp="1"/>
-          </ns0:cNvSpPr>
-          <ns0:nvPr>
-            <ns0:ph type="body" idx="3"/>
-          </ns0:nvPr>
-        </ns0:nvSpPr>
-        <ns0:spPr>
-          <ns2:xfrm xmlns:ns2="http://schemas.openxmlformats.org/drawingml/2006/main">
-            <ns2:off x="914400" y="4000500"/>
-            <ns2:ext cx="16192500" cy="1333500"/>
-          </ns2:xfrm>
-          <ns3:prstGeom xmlns:ns3="http://schemas.openxmlformats.org/drawingml/2006/main" prst="rect">
-            <ns3:avLst/>
-          </ns3:prstGeom>
-        </ns0:spPr>
-        <ns0:txBody>
-          <ns4:bodyPr xmlns:ns4="http://schemas.openxmlformats.org/drawingml/2006/main" wrap="square" rtlCol="0" anchor="t" lIns="0" tIns="0" rIns="0" bIns="0">
-            <ns4:noAutofit/>
-          </ns4:bodyPr>
-          <ns5:lstStyle xmlns:ns5="http://schemas.openxmlformats.org/drawingml/2006/main">
-            <ns5:lvl1pPr marL="0" indent="0" algn="l">
-              <ns5:buNone/>
-              <ns5:defRPr sz="11500" b="1">
-                <ns5:solidFill>
-                  <ns5:srgbClr val="5CD6FF"/>
-                </ns5:solidFill>
-                <ns5:latin typeface="Aptos Display"/>
-              </ns5:defRPr>
-            </ns5:lvl1pPr>
-          </ns5:lstStyle>
-          <ns6:p xmlns:ns6="http://schemas.openxmlformats.org/drawingml/2006/main">
-            <ns6:r>
-              <ns6:rPr lang="en-US"/>
-              <ns6:t>supply chain doesn't</ns6:t>
-            </ns6:r>
-            <ns6:endParaRPr lang="en-US"/>
-          </ns6:p>
-        </ns0:txBody>
-      </ns0:sp>
-      <ns0:sp xmlns:ns0="http://schemas.openxmlformats.org/presentationml/2006/main">
-        <ns0:nvSpPr>
-          <ns0:cNvPr id="13" name="Hero Subtitle"/>
-          <ns0:cNvSpPr>
-            <ns1:spLocks xmlns:ns1="http://schemas.openxmlformats.org/drawingml/2006/main" noGrp="1"/>
-          </ns0:cNvSpPr>
-          <ns0:nvPr>
-            <ns0:ph type="body" idx="4"/>
-          </ns0:nvPr>
-        </ns0:nvSpPr>
-        <ns0:spPr>
-          <ns2:xfrm xmlns:ns2="http://schemas.openxmlformats.org/drawingml/2006/main">
-            <ns2:off x="914400" y="5905500"/>
-            <ns2:ext cx="16192500" cy="1143000"/>
-          </ns2:xfrm>
-          <ns3:prstGeom xmlns:ns3="http://schemas.openxmlformats.org/drawingml/2006/main" prst="rect">
-            <ns3:avLst/>
-          </ns3:prstGeom>
-        </ns0:spPr>
-        <ns0:txBody>
-          <ns4:bodyPr xmlns:ns4="http://schemas.openxmlformats.org/drawingml/2006/main" wrap="square" rtlCol="0" anchor="t" lIns="0" tIns="0" rIns="0" bIns="0">
-            <ns4:noAutofit/>
-          </ns4:bodyPr>
-          <ns5:lstStyle xmlns:ns5="http://schemas.openxmlformats.org/drawingml/2006/main">
-            <ns5:lvl1pPr marL="0" indent="0" algn="l">
-              <ns5:lnSpc>
-                <ns5:spcPct val="114999"/>
-              </ns5:lnSpc>
-              <ns5:buNone/>
-              <ns5:defRPr sz="3000">
-                <ns5:solidFill>
-                  <ns5:srgbClr val="5CD6FF"/>
-                </ns5:solidFill>
-                <ns5:latin typeface="Aptos"/>
-              </ns5:defRPr>
-            </ns5:lvl1pPr>
-          </ns5:lstStyle>
-          <ns6:p xmlns:ns6="http://schemas.openxmlformats.org/drawingml/2006/main">
-            <ns6:r>
-              <ns6:rPr lang="en-US"/>
-              <ns6:t>Subtitle — one sentence describing the deck.</ns6:t>
-            </ns6:r>
-            <ns6:endParaRPr lang="en-US"/>
-          </ns6:p>
-        </ns0:txBody>
-      </ns0:sp>
-      <ns0:sp xmlns:ns0="http://schemas.openxmlformats.org/presentationml/2006/main">
-        <ns0:nvSpPr>
-          <ns0:cNvPr id="14" name="Hero Org Line"/>
-          <ns0:cNvSpPr>
-            <ns1:spLocks xmlns:ns1="http://schemas.openxmlformats.org/drawingml/2006/main" noGrp="1"/>
-          </ns0:cNvSpPr>
-          <ns0:nvPr>
-            <ns0:ph type="body" idx="5"/>
-          </ns0:nvPr>
-        </ns0:nvSpPr>
-        <ns0:spPr>
-          <ns2:xfrm xmlns:ns2="http://schemas.openxmlformats.org/drawingml/2006/main">
-            <ns2:off x="914400" y="8191500"/>
-            <ns2:ext cx="16192500" cy="571500"/>
-          </ns2:xfrm>
-          <ns3:prstGeom xmlns:ns3="http://schemas.openxmlformats.org/drawingml/2006/main" prst="rect">
-            <ns3:avLst/>
-          </ns3:prstGeom>
-        </ns0:spPr>
-        <ns0:txBody>
-          <ns4:bodyPr xmlns:ns4="http://schemas.openxmlformats.org/drawingml/2006/main" wrap="square" rtlCol="0" anchor="t" lIns="0" tIns="0" rIns="0" bIns="0">
-            <ns4:noAutofit/>
-          </ns4:bodyPr>
-          <ns5:lstStyle xmlns:ns5="http://schemas.openxmlformats.org/drawingml/2006/main">
-            <ns5:lvl1pPr marL="0" indent="0" algn="l">
-              <ns5:buNone/>
-              <ns5:defRPr sz="2400">
-                <ns5:solidFill>
-                  <ns5:srgbClr val="FFFFFF"/>
-                </ns5:solidFill>
-                <ns5:latin typeface="Aptos"/>
-              </ns5:defRPr>
-            </ns5:lvl1pPr>
-          </ns5:lstStyle>
-          <ns6:p xmlns:ns6="http://schemas.openxmlformats.org/drawingml/2006/main">
-            <ns6:r>
-              <ns6:rPr lang="en-US"/>
-              <ns6:t>Open Component Model — open source, NeoNephos Foundation.</ns6:t>
-            </ns6:r>
-            <ns6:endParaRPr lang="en-US"/>
-          </ns6:p>
-        </ns0:txBody>
-      </ns0:sp>
-    </p:spTree>
-  </p:cSld>
-  <p:clrMapOvr>
-    <a:masterClrMapping/>
-  </p:clrMapOvr>
-</p:sldLayout>
-</file>
-
-<file path=ppt/slideLayouts/slideLayout3.xml><?xml version="1.0" encoding="utf-8"?>
-<p:sldLayout xmlns:a="http://schemas.openxmlformats.org/drawingml/2006/main" xmlns:r="http://schemas.openxmlformats.org/officeDocument/2006/relationships" xmlns:p="http://schemas.openxmlformats.org/presentationml/2006/main" type="obj" preserve="1" userDrawn="1">
-  <p:cSld name="CTA">
-    <p:bg>
-      <p:bgPr>
-        <a:solidFill>
-          <a:srgbClr val="0A1530"/>
-        </a:solidFill>
-        <a:effectLst/>
-      </p:bgPr>
-    </p:bg>
-    <p:spTree>
-      <p:nvGrpSpPr>
-        <p:cNvPr id="1" name=""/>
-        <p:cNvGrpSpPr/>
-        <p:nvPr/>
-      </p:nvGrpSpPr>
-      <p:grpSpPr>
-        <a:xfrm>
-          <a:off x="0" y="0"/>
-          <a:ext cx="0" cy="0"/>
-          <a:chOff x="0" y="0"/>
-          <a:chExt cx="0" cy="0"/>
-        </a:xfrm>
-      </p:grpSpPr>
-      <ns0:sp xmlns:ns0="http://schemas.openxmlformats.org/presentationml/2006/main">
-        <ns0:nvSpPr>
-          <ns0:cNvPr id="10" name="CTA Title"/>
-          <ns0:cNvSpPr>
-            <ns1:spLocks xmlns:ns1="http://schemas.openxmlformats.org/drawingml/2006/main" noGrp="1"/>
-          </ns0:cNvSpPr>
-          <ns0:nvPr>
-            <ns0:ph type="title" idx="1"/>
-          </ns0:nvPr>
-        </ns0:nvSpPr>
-        <ns0:spPr>
-          <ns2:xfrm xmlns:ns2="http://schemas.openxmlformats.org/drawingml/2006/main">
-            <ns2:off x="914400" y="3048000"/>
-            <ns2:ext cx="16192500" cy="952500"/>
-          </ns2:xfrm>
-          <ns3:prstGeom xmlns:ns3="http://schemas.openxmlformats.org/drawingml/2006/main" prst="rect">
-            <ns3:avLst/>
-          </ns3:prstGeom>
-        </ns0:spPr>
-        <ns0:txBody>
-          <ns4:bodyPr xmlns:ns4="http://schemas.openxmlformats.org/drawingml/2006/main" wrap="square" rtlCol="0" anchor="t" lIns="0" tIns="0" rIns="0" bIns="0"/>
-          <ns5:lstStyle xmlns:ns5="http://schemas.openxmlformats.org/drawingml/2006/main">
-            <ns5:lvl1pPr marL="0" indent="0" algn="l">
-              <ns5:buNone/>
-              <ns5:defRPr sz="5600" b="1">
-                <ns5:solidFill>
-                  <ns5:srgbClr val="FFFFFF"/>
-                </ns5:solidFill>
-                <ns5:latin typeface="Aptos Display"/>
-              </ns5:defRPr>
-            </ns5:lvl1pPr>
-          </ns5:lstStyle>
-          <ns6:p xmlns:ns6="http://schemas.openxmlformats.org/drawingml/2006/main">
-            <ns6:r>
-              <ns6:rPr lang="en-US"/>
-              <ns6:t>Call to action</ns6:t>
-            </ns6:r>
-            <ns6:endParaRPr lang="en-US"/>
-          </ns6:p>
-        </ns0:txBody>
-      </ns0:sp>
-      <ns0:sp xmlns:ns0="http://schemas.openxmlformats.org/presentationml/2006/main">
-        <ns0:nvSpPr>
-          <ns0:cNvPr id="11" name="CTA Body"/>
-          <ns0:cNvSpPr>
-            <ns1:spLocks xmlns:ns1="http://schemas.openxmlformats.org/drawingml/2006/main" noGrp="1"/>
-          </ns0:cNvSpPr>
-          <ns0:nvPr>
-            <ns0:ph type="body" idx="2"/>
-          </ns0:nvPr>
-        </ns0:nvSpPr>
-        <ns0:spPr>
-          <ns2:xfrm xmlns:ns2="http://schemas.openxmlformats.org/drawingml/2006/main">
-            <ns2:off x="914400" y="4381500"/>
-            <ns2:ext cx="16192500" cy="3810000"/>
-          </ns2:xfrm>
-          <ns3:prstGeom xmlns:ns3="http://schemas.openxmlformats.org/drawingml/2006/main" prst="rect">
-            <ns3:avLst/>
-          </ns3:prstGeom>
-        </ns0:spPr>
-        <ns0:txBody>
-          <ns4:bodyPr xmlns:ns4="http://schemas.openxmlformats.org/drawingml/2006/main" wrap="square" rtlCol="0" anchor="t" lIns="0" tIns="0" rIns="0" bIns="0"/>
-          <ns5:lstStyle xmlns:ns5="http://schemas.openxmlformats.org/drawingml/2006/main">
-            <ns5:lvl1pPr marL="0" indent="0" algn="l">
-              <ns5:buNone/>
-              <ns5:defRPr sz="2200">
-                <ns5:solidFill>
-                  <ns5:srgbClr val="FFFFFF"/>
-                </ns5:solidFill>
-                <ns5:latin typeface="Aptos"/>
-              </ns5:defRPr>
-            </ns5:lvl1pPr>
-          </ns5:lstStyle>
-          <ns6:p xmlns:ns6="http://schemas.openxmlformats.org/drawingml/2006/main">
-            <ns6:r>
-              <ns6:rPr lang="en-US"/>
-              <ns6:t>Three-line CTA bullets go here.</ns6:t>
-            </ns6:r>
-            <ns6:endParaRPr lang="en-US"/>
-          </ns6:p>
-        </ns0:txBody>
-      </ns0:sp>
-    </p:spTree>
-  </p:cSld>
-  <p:clrMapOvr>
-    <a:masterClrMapping/>
-  </p:clrMapOvr>
-</p:sldLayout>
-</file>
-
-<file path=ppt/slideLayouts/slideLayout4.xml><?xml version="1.0" encoding="utf-8"?>
-<p:sldLayout xmlns:a="http://schemas.openxmlformats.org/drawingml/2006/main" xmlns:r="http://schemas.openxmlformats.org/officeDocument/2006/relationships" xmlns:p="http://schemas.openxmlformats.org/presentationml/2006/main" type="obj" preserve="1" userDrawn="1">
-  <p:cSld name="Content / 3-Column">
-    <p:bg>
-      <p:bgPr>
-        <a:solidFill>
-          <a:srgbClr val="FFFFFF"/>
-        </a:solidFill>
-        <a:effectLst/>
-      </p:bgPr>
-    </p:bg>
-    <p:spTree>
-      <p:nvGrpSpPr>
-        <p:cNvPr id="1" name=""/>
-        <p:cNvGrpSpPr/>
-        <p:nvPr/>
-      </p:nvGrpSpPr>
-      <p:grpSpPr>
-        <a:xfrm>
-          <a:off x="0" y="0"/>
-          <a:ext cx="0" cy="0"/>
-          <a:chOff x="0" y="0"/>
-          <a:chExt cx="0" cy="0"/>
-        </a:xfrm>
-      </p:grpSpPr>
-      <ns0:sp xmlns:ns0="http://schemas.openxmlformats.org/presentationml/2006/main">
-        <ns0:nvSpPr>
-          <ns0:cNvPr id="10" name="Eyebrow"/>
-          <ns0:cNvSpPr>
-            <ns1:spLocks xmlns:ns1="http://schemas.openxmlformats.org/drawingml/2006/main" noGrp="1"/>
-          </ns0:cNvSpPr>
-          <ns0:nvPr>
-            <ns0:ph type="body" idx="1"/>
-          </ns0:nvPr>
-        </ns0:nvSpPr>
-        <ns0:spPr>
-          <ns2:xfrm xmlns:ns2="http://schemas.openxmlformats.org/drawingml/2006/main">
-            <ns2:off x="1143000" y="2428875"/>
-            <ns2:ext cx="16002000" cy="457200"/>
-          </ns2:xfrm>
-          <ns3:prstGeom xmlns:ns3="http://schemas.openxmlformats.org/drawingml/2006/main" prst="rect">
-            <ns3:avLst/>
-          </ns3:prstGeom>
-        </ns0:spPr>
-        <ns0:txBody>
-          <ns4:bodyPr xmlns:ns4="http://schemas.openxmlformats.org/drawingml/2006/main" wrap="square" rtlCol="0" anchor="t" lIns="0" tIns="0" rIns="0" bIns="0"/>
-          <ns5:lstStyle xmlns:ns5="http://schemas.openxmlformats.org/drawingml/2006/main">
-            <ns5:lvl1pPr marL="0" indent="0" algn="l">
-              <ns5:buNone/>
-              <ns5:defRPr sz="2800" b="1" cap="all" spc="140">
-                <ns5:solidFill>
-                  <ns5:srgbClr val="0F6BFF"/>
-                </ns5:solidFill>
-                <ns5:latin typeface="Aptos"/>
-              </ns5:defRPr>
-            </ns5:lvl1pPr>
-          </ns5:lstStyle>
-          <ns6:p xmlns:ns6="http://schemas.openxmlformats.org/drawingml/2006/main">
-            <ns6:r>
-              <ns6:rPr lang="en-US"/>
-              <ns6:t>EYEBROW</ns6:t>
-            </ns6:r>
-            <ns6:endParaRPr lang="en-US"/>
-          </ns6:p>
-        </ns0:txBody>
-      </ns0:sp>
-      <ns0:sp xmlns:ns0="http://schemas.openxmlformats.org/presentationml/2006/main">
-        <ns0:nvSpPr>
-          <ns0:cNvPr id="11" name="Title"/>
-          <ns0:cNvSpPr>
-            <ns1:spLocks xmlns:ns1="http://schemas.openxmlformats.org/drawingml/2006/main" noGrp="1"/>
-          </ns0:cNvSpPr>
-          <ns0:nvPr>
-            <ns0:ph type="title" idx="2"/>
-          </ns0:nvPr>
-        </ns0:nvSpPr>
-        <ns0:spPr>
-          <ns2:xfrm xmlns:ns2="http://schemas.openxmlformats.org/drawingml/2006/main">
-            <ns2:off x="1143000" y="2933700"/>
-            <ns2:ext cx="16002000" cy="1905000"/>
-          </ns2:xfrm>
-          <ns3:prstGeom xmlns:ns3="http://schemas.openxmlformats.org/drawingml/2006/main" prst="rect">
-            <ns3:avLst/>
-          </ns3:prstGeom>
-        </ns0:spPr>
-        <ns0:txBody>
-          <ns4:bodyPr xmlns:ns4="http://schemas.openxmlformats.org/drawingml/2006/main" wrap="square" rtlCol="0" anchor="t" lIns="0" tIns="0" rIns="0" bIns="0"/>
-          <ns5:lstStyle xmlns:ns5="http://schemas.openxmlformats.org/drawingml/2006/main">
-            <ns5:lvl1pPr marL="0" indent="0" algn="l">
-              <ns5:lnSpc>
-                <ns5:spcPct val="90000"/>
-              </ns5:lnSpc>
-              <ns5:buNone/>
-              <ns5:defRPr sz="6400" b="1">
-                <ns5:solidFill>
-                  <ns5:srgbClr val="000000"/>
-                </ns5:solidFill>
-                <ns5:latin typeface="Aptos Display"/>
-              </ns5:defRPr>
-            </ns5:lvl1pPr>
-          </ns5:lstStyle>
-          <ns6:p xmlns:ns6="http://schemas.openxmlformats.org/drawingml/2006/main">
-            <ns6:r>
-              <ns6:rPr lang="en-US"/>
-              <ns6:t>Section title goes here.</ns6:t>
-            </ns6:r>
-            <ns6:endParaRPr lang="en-US"/>
-          </ns6:p>
-        </ns0:txBody>
-      </ns0:sp>
-      <ns0:sp xmlns:ns0="http://schemas.openxmlformats.org/presentationml/2006/main">
-        <ns0:nvSpPr>
-          <ns0:cNvPr id="12" name="Col1 Rule"/>
-          <ns0:cNvSpPr/>
-          <ns0:nvPr/>
-        </ns0:nvSpPr>
-        <ns0:spPr>
-          <ns1:xfrm xmlns:ns1="http://schemas.openxmlformats.org/drawingml/2006/main">
-            <ns1:off x="1143000" y="4953000"/>
-            <ns1:ext cx="4972050" cy="38100"/>
-          </ns1:xfrm>
-          <ns2:prstGeom xmlns:ns2="http://schemas.openxmlformats.org/drawingml/2006/main" prst="rect">
-            <ns2:avLst/>
-          </ns2:prstGeom>
-          <ns3:solidFill xmlns:ns3="http://schemas.openxmlformats.org/drawingml/2006/main">
-            <ns3:srgbClr val="0F6BFF"/>
-          </ns3:solidFill>
-          <ns4:ln xmlns:ns4="http://schemas.openxmlformats.org/drawingml/2006/main">
-            <ns4:noFill/>
-          </ns4:ln>
-        </ns0:spPr>
-        <ns0:txBody>
-          <ns5:bodyPr xmlns:ns5="http://schemas.openxmlformats.org/drawingml/2006/main" rtlCol="0" anchor="ctr"/>
-          <ns6:lstStyle xmlns:ns6="http://schemas.openxmlformats.org/drawingml/2006/main"/>
-          <ns7:p xmlns:ns7="http://schemas.openxmlformats.org/drawingml/2006/main">
-            <ns7:endParaRPr lang="en-US"/>
-          </ns7:p>
-        </ns0:txBody>
-      </ns0:sp>
-      <ns0:sp xmlns:ns0="http://schemas.openxmlformats.org/presentationml/2006/main">
-        <ns0:nvSpPr>
-          <ns0:cNvPr id="13" name="Col1 Header"/>
-          <ns0:cNvSpPr>
-            <ns1:spLocks xmlns:ns1="http://schemas.openxmlformats.org/drawingml/2006/main" noGrp="1"/>
-          </ns0:cNvSpPr>
-          <ns0:nvPr>
-            <ns0:ph type="body" idx="10"/>
-          </ns0:nvPr>
-        </ns0:nvSpPr>
-        <ns0:spPr>
-          <ns2:xfrm xmlns:ns2="http://schemas.openxmlformats.org/drawingml/2006/main">
-            <ns2:off x="1143000" y="5105400"/>
-            <ns2:ext cx="4972050" cy="533400"/>
-          </ns2:xfrm>
-          <ns3:prstGeom xmlns:ns3="http://schemas.openxmlformats.org/drawingml/2006/main" prst="rect">
-            <ns3:avLst/>
-          </ns3:prstGeom>
-        </ns0:spPr>
-        <ns0:txBody>
-          <ns4:bodyPr xmlns:ns4="http://schemas.openxmlformats.org/drawingml/2006/main" wrap="square" rtlCol="0" anchor="t" lIns="0" tIns="0" rIns="0" bIns="0">
-            <ns4:noAutofit/>
-          </ns4:bodyPr>
-          <ns5:lstStyle xmlns:ns5="http://schemas.openxmlformats.org/drawingml/2006/main">
-            <ns5:lvl1pPr marL="0" indent="0" algn="l">
-              <ns5:buNone/>
-              <ns5:defRPr sz="2000" b="1" cap="all" spc="130">
-                <ns5:solidFill>
-                  <ns5:srgbClr val="0F6BFF"/>
-                </ns5:solidFill>
-                <ns5:latin typeface="Aptos"/>
-              </ns5:defRPr>
-            </ns5:lvl1pPr>
-          </ns5:lstStyle>
-          <ns6:p xmlns:ns6="http://schemas.openxmlformats.org/drawingml/2006/main">
-            <ns6:r>
-              <ns6:rPr lang="en-US"/>
-              <ns6:t>COLUMN 1 HEADER</ns6:t>
-            </ns6:r>
-            <ns6:endParaRPr lang="en-US"/>
-          </ns6:p>
-        </ns0:txBody>
-      </ns0:sp>
-      <ns0:sp xmlns:ns0="http://schemas.openxmlformats.org/presentationml/2006/main">
-        <ns0:nvSpPr>
-          <ns0:cNvPr id="14" name="Col1 Body"/>
-          <ns0:cNvSpPr>
-            <ns1:spLocks xmlns:ns1="http://schemas.openxmlformats.org/drawingml/2006/main" noGrp="1"/>
-          </ns0:cNvSpPr>
-          <ns0:nvPr>
-            <ns0:ph type="body" idx="11"/>
-          </ns0:nvPr>
-        </ns0:nvSpPr>
-        <ns0:spPr>
-          <ns2:xfrm xmlns:ns2="http://schemas.openxmlformats.org/drawingml/2006/main">
-            <ns2:off x="1143000" y="5905500"/>
-            <ns2:ext cx="4972050" cy="4229100"/>
-          </ns2:xfrm>
-          <ns3:prstGeom xmlns:ns3="http://schemas.openxmlformats.org/drawingml/2006/main" prst="rect">
-            <ns3:avLst/>
-          </ns3:prstGeom>
-        </ns0:spPr>
-        <ns0:txBody>
-          <ns4:bodyPr xmlns:ns4="http://schemas.openxmlformats.org/drawingml/2006/main" wrap="square" rtlCol="0" anchor="t" lIns="0" tIns="0" rIns="0" bIns="0"/>
-          <ns5:lstStyle xmlns:ns5="http://schemas.openxmlformats.org/drawingml/2006/main">
-            <ns5:lvl1pPr marL="0" indent="0" algn="l">
-              <ns5:buNone/>
-              <ns5:defRPr sz="2200">
-                <ns5:solidFill>
-                  <ns5:srgbClr val="000000"/>
-                </ns5:solidFill>
-                <ns5:latin typeface="Aptos"/>
-              </ns5:defRPr>
-            </ns5:lvl1pPr>
-          </ns5:lstStyle>
-          <ns6:p xmlns:ns6="http://schemas.openxmlformats.org/drawingml/2006/main">
-            <ns6:r>
-              <ns6:rPr lang="en-US"/>
-              <ns6:t>Column 1 body. Replace with one or two short sentences.</ns6:t>
-            </ns6:r>
-            <ns6:endParaRPr lang="en-US"/>
-          </ns6:p>
-        </ns0:txBody>
-      </ns0:sp>
-      <ns0:sp xmlns:ns0="http://schemas.openxmlformats.org/presentationml/2006/main">
-        <ns0:nvSpPr>
-          <ns0:cNvPr id="15" name="Col2 Rule"/>
-          <ns0:cNvSpPr/>
-          <ns0:nvPr/>
-        </ns0:nvSpPr>
-        <ns0:spPr>
-          <ns1:xfrm xmlns:ns1="http://schemas.openxmlformats.org/drawingml/2006/main">
-            <ns1:off x="6648450" y="4953000"/>
-            <ns1:ext cx="4972050" cy="38100"/>
-          </ns1:xfrm>
-          <ns2:prstGeom xmlns:ns2="http://schemas.openxmlformats.org/drawingml/2006/main" prst="rect">
-            <ns2:avLst/>
-          </ns2:prstGeom>
-          <ns3:solidFill xmlns:ns3="http://schemas.openxmlformats.org/drawingml/2006/main">
-            <ns3:srgbClr val="0F6BFF"/>
-          </ns3:solidFill>
-          <ns4:ln xmlns:ns4="http://schemas.openxmlformats.org/drawingml/2006/main">
-            <ns4:noFill/>
-          </ns4:ln>
-        </ns0:spPr>
-        <ns0:txBody>
-          <ns5:bodyPr xmlns:ns5="http://schemas.openxmlformats.org/drawingml/2006/main" rtlCol="0" anchor="ctr"/>
-          <ns6:lstStyle xmlns:ns6="http://schemas.openxmlformats.org/drawingml/2006/main"/>
-          <ns7:p xmlns:ns7="http://schemas.openxmlformats.org/drawingml/2006/main">
-            <ns7:endParaRPr lang="en-US"/>
-          </ns7:p>
-        </ns0:txBody>
-      </ns0:sp>
-      <ns0:sp xmlns:ns0="http://schemas.openxmlformats.org/presentationml/2006/main">
-        <ns0:nvSpPr>
-          <ns0:cNvPr id="16" name="Col2 Header"/>
-          <ns0:cNvSpPr>
-            <ns1:spLocks xmlns:ns1="http://schemas.openxmlformats.org/drawingml/2006/main" noGrp="1"/>
-          </ns0:cNvSpPr>
-          <ns0:nvPr>
-            <ns0:ph type="body" idx="12"/>
-          </ns0:nvPr>
-        </ns0:nvSpPr>
-        <ns0:spPr>
-          <ns2:xfrm xmlns:ns2="http://schemas.openxmlformats.org/drawingml/2006/main">
-            <ns2:off x="6648450" y="5105400"/>
-            <ns2:ext cx="4972050" cy="533400"/>
-          </ns2:xfrm>
-          <ns3:prstGeom xmlns:ns3="http://schemas.openxmlformats.org/drawingml/2006/main" prst="rect">
-            <ns3:avLst/>
-          </ns3:prstGeom>
-        </ns0:spPr>
-        <ns0:txBody>
-          <ns4:bodyPr xmlns:ns4="http://schemas.openxmlformats.org/drawingml/2006/main" wrap="square" rtlCol="0" anchor="t" lIns="0" tIns="0" rIns="0" bIns="0">
-            <ns4:noAutofit/>
-          </ns4:bodyPr>
-          <ns5:lstStyle xmlns:ns5="http://schemas.openxmlformats.org/drawingml/2006/main">
-            <ns5:lvl1pPr marL="0" indent="0" algn="l">
-              <ns5:buNone/>
-              <ns5:defRPr sz="2000" b="1" cap="all" spc="130">
-                <ns5:solidFill>
-                  <ns5:srgbClr val="0F6BFF"/>
-                </ns5:solidFill>
-                <ns5:latin typeface="Aptos"/>
-              </ns5:defRPr>
-            </ns5:lvl1pPr>
-          </ns5:lstStyle>
-          <ns6:p xmlns:ns6="http://schemas.openxmlformats.org/drawingml/2006/main">
-            <ns6:r>
-              <ns6:rPr lang="en-US"/>
-              <ns6:t>COLUMN 2 HEADER</ns6:t>
-            </ns6:r>
-            <ns6:endParaRPr lang="en-US"/>
-          </ns6:p>
-        </ns0:txBody>
-      </ns0:sp>
-      <ns0:sp xmlns:ns0="http://schemas.openxmlformats.org/presentationml/2006/main">
-        <ns0:nvSpPr>
-          <ns0:cNvPr id="17" name="Col2 Body"/>
-          <ns0:cNvSpPr>
-            <ns1:spLocks xmlns:ns1="http://schemas.openxmlformats.org/drawingml/2006/main" noGrp="1"/>
-          </ns0:cNvSpPr>
-          <ns0:nvPr>
-            <ns0:ph type="body" idx="13"/>
-          </ns0:nvPr>
-        </ns0:nvSpPr>
-        <ns0:spPr>
-          <ns2:xfrm xmlns:ns2="http://schemas.openxmlformats.org/drawingml/2006/main">
-            <ns2:off x="6648450" y="5905500"/>
-            <ns2:ext cx="4972050" cy="4229100"/>
-          </ns2:xfrm>
-          <ns3:prstGeom xmlns:ns3="http://schemas.openxmlformats.org/drawingml/2006/main" prst="rect">
-            <ns3:avLst/>
-          </ns3:prstGeom>
-        </ns0:spPr>
-        <ns0:txBody>
-          <ns4:bodyPr xmlns:ns4="http://schemas.openxmlformats.org/drawingml/2006/main" wrap="square" rtlCol="0" anchor="t" lIns="0" tIns="0" rIns="0" bIns="0"/>
-          <ns5:lstStyle xmlns:ns5="http://schemas.openxmlformats.org/drawingml/2006/main">
-            <ns5:lvl1pPr marL="0" indent="0" algn="l">
-              <ns5:buNone/>
-              <ns5:defRPr sz="2200">
-                <ns5:solidFill>
-                  <ns5:srgbClr val="000000"/>
-                </ns5:solidFill>
-                <ns5:latin typeface="Aptos"/>
-              </ns5:defRPr>
-            </ns5:lvl1pPr>
-          </ns5:lstStyle>
-          <ns6:p xmlns:ns6="http://schemas.openxmlformats.org/drawingml/2006/main">
-            <ns6:r>
-              <ns6:rPr lang="en-US"/>
-              <ns6:t>Column 2 body. Replace with one or two short sentences.</ns6:t>
-            </ns6:r>
-            <ns6:endParaRPr lang="en-US"/>
-          </ns6:p>
-        </ns0:txBody>
-      </ns0:sp>
-      <ns0:sp xmlns:ns0="http://schemas.openxmlformats.org/presentationml/2006/main">
-        <ns0:nvSpPr>
-          <ns0:cNvPr id="18" name="Col3 Rule"/>
-          <ns0:cNvSpPr/>
-          <ns0:nvPr/>
-        </ns0:nvSpPr>
-        <ns0:spPr>
-          <ns1:xfrm xmlns:ns1="http://schemas.openxmlformats.org/drawingml/2006/main">
-            <ns1:off x="12153900" y="4953000"/>
-            <ns1:ext cx="4972050" cy="38100"/>
-          </ns1:xfrm>
-          <ns2:prstGeom xmlns:ns2="http://schemas.openxmlformats.org/drawingml/2006/main" prst="rect">
-            <ns2:avLst/>
-          </ns2:prstGeom>
-          <ns3:solidFill xmlns:ns3="http://schemas.openxmlformats.org/drawingml/2006/main">
-            <ns3:srgbClr val="0F6BFF"/>
-          </ns3:solidFill>
-          <ns4:ln xmlns:ns4="http://schemas.openxmlformats.org/drawingml/2006/main">
-            <ns4:noFill/>
-          </ns4:ln>
-        </ns0:spPr>
-        <ns0:txBody>
-          <ns5:bodyPr xmlns:ns5="http://schemas.openxmlformats.org/drawingml/2006/main" rtlCol="0" anchor="ctr"/>
-          <ns6:lstStyle xmlns:ns6="http://schemas.openxmlformats.org/drawingml/2006/main"/>
-          <ns7:p xmlns:ns7="http://schemas.openxmlformats.org/drawingml/2006/main">
-            <ns7:endParaRPr lang="en-US"/>
-          </ns7:p>
-        </ns0:txBody>
-      </ns0:sp>
-      <ns0:sp xmlns:ns0="http://schemas.openxmlformats.org/presentationml/2006/main">
-        <ns0:nvSpPr>
-          <ns0:cNvPr id="19" name="Col3 Header"/>
-          <ns0:cNvSpPr>
-            <ns1:spLocks xmlns:ns1="http://schemas.openxmlformats.org/drawingml/2006/main" noGrp="1"/>
-          </ns0:cNvSpPr>
-          <ns0:nvPr>
-            <ns0:ph type="body" idx="14"/>
-          </ns0:nvPr>
-        </ns0:nvSpPr>
-        <ns0:spPr>
-          <ns2:xfrm xmlns:ns2="http://schemas.openxmlformats.org/drawingml/2006/main">
-            <ns2:off x="12153900" y="5105400"/>
-            <ns2:ext cx="4972050" cy="533400"/>
-          </ns2:xfrm>
-          <ns3:prstGeom xmlns:ns3="http://schemas.openxmlformats.org/drawingml/2006/main" prst="rect">
-            <ns3:avLst/>
-          </ns3:prstGeom>
-        </ns0:spPr>
-        <ns0:txBody>
-          <ns4:bodyPr xmlns:ns4="http://schemas.openxmlformats.org/drawingml/2006/main" wrap="square" rtlCol="0" anchor="t" lIns="0" tIns="0" rIns="0" bIns="0">
-            <ns4:noAutofit/>
-          </ns4:bodyPr>
-          <ns5:lstStyle xmlns:ns5="http://schemas.openxmlformats.org/drawingml/2006/main">
-            <ns5:lvl1pPr marL="0" indent="0" algn="l">
-              <ns5:buNone/>
-              <ns5:defRPr sz="2000" b="1" cap="all" spc="130">
-                <ns5:solidFill>
-                  <ns5:srgbClr val="0F6BFF"/>
-                </ns5:solidFill>
-                <ns5:latin typeface="Aptos"/>
-              </ns5:defRPr>
-            </ns5:lvl1pPr>
-          </ns5:lstStyle>
-          <ns6:p xmlns:ns6="http://schemas.openxmlformats.org/drawingml/2006/main">
-            <ns6:r>
-              <ns6:rPr lang="en-US"/>
-              <ns6:t>COLUMN 3 HEADER</ns6:t>
-            </ns6:r>
-            <ns6:endParaRPr lang="en-US"/>
-          </ns6:p>
-        </ns0:txBody>
-      </ns0:sp>
-      <ns0:sp xmlns:ns0="http://schemas.openxmlformats.org/presentationml/2006/main">
-        <ns0:nvSpPr>
-          <ns0:cNvPr id="20" name="Col3 Body"/>
-          <ns0:cNvSpPr>
-            <ns1:spLocks xmlns:ns1="http://schemas.openxmlformats.org/drawingml/2006/main" noGrp="1"/>
-          </ns0:cNvSpPr>
-          <ns0:nvPr>
-            <ns0:ph type="body" idx="15"/>
-          </ns0:nvPr>
-        </ns0:nvSpPr>
-        <ns0:spPr>
-          <ns2:xfrm xmlns:ns2="http://schemas.openxmlformats.org/drawingml/2006/main">
-            <ns2:off x="12153900" y="5905500"/>
-            <ns2:ext cx="4972050" cy="4229100"/>
-          </ns2:xfrm>
-          <ns3:prstGeom xmlns:ns3="http://schemas.openxmlformats.org/drawingml/2006/main" prst="rect">
-            <ns3:avLst/>
-          </ns3:prstGeom>
-        </ns0:spPr>
-        <ns0:txBody>
-          <ns4:bodyPr xmlns:ns4="http://schemas.openxmlformats.org/drawingml/2006/main" wrap="square" rtlCol="0" anchor="t" lIns="0" tIns="0" rIns="0" bIns="0"/>
-          <ns5:lstStyle xmlns:ns5="http://schemas.openxmlformats.org/drawingml/2006/main">
-            <ns5:lvl1pPr marL="0" indent="0" algn="l">
-              <ns5:buNone/>
-              <ns5:defRPr sz="2200">
-                <ns5:solidFill>
-                  <ns5:srgbClr val="000000"/>
-                </ns5:solidFill>
-                <ns5:latin typeface="Aptos"/>
-              </ns5:defRPr>
-            </ns5:lvl1pPr>
-          </ns5:lstStyle>
-          <ns6:p xmlns:ns6="http://schemas.openxmlformats.org/drawingml/2006/main">
-            <ns6:r>
-              <ns6:rPr lang="en-US"/>
-              <ns6:t>Column 3 body. Replace with one or two short sentences.</ns6:t>
-            </ns6:r>
-            <ns6:endParaRPr lang="en-US"/>
-          </ns6:p>
-        </ns0:txBody>
-      </ns0:sp>
-      <ns0:sp xmlns:ns0="http://schemas.openxmlformats.org/presentationml/2006/main">
-        <ns0:nvSpPr>
-          <ns0:cNvPr id="21" name="Footer"/>
-          <ns0:cNvSpPr>
-            <ns1:spLocks xmlns:ns1="http://schemas.openxmlformats.org/drawingml/2006/main" noGrp="1"/>
-          </ns0:cNvSpPr>
-          <ns0:nvPr/>
-        </ns0:nvSpPr>
-        <ns0:spPr>
-          <ns2:xfrm xmlns:ns2="http://schemas.openxmlformats.org/drawingml/2006/main">
-            <ns2:off x="1143000" y="9982200"/>
-            <ns2:ext cx="16002000" cy="228600"/>
-          </ns2:xfrm>
-          <ns3:prstGeom xmlns:ns3="http://schemas.openxmlformats.org/drawingml/2006/main" prst="rect">
-            <ns3:avLst/>
-          </ns3:prstGeom>
-        </ns0:spPr>
-        <ns0:txBody>
-          <ns4:bodyPr xmlns:ns4="http://schemas.openxmlformats.org/drawingml/2006/main" wrap="square" rtlCol="0" anchor="t" lIns="0" tIns="0" rIns="0" bIns="0"/>
-          <ns5:lstStyle xmlns:ns5="http://schemas.openxmlformats.org/drawingml/2006/main">
-            <ns5:lvl1pPr marL="0" indent="0" algn="l">
-              <ns5:buNone/>
-              <ns5:defRPr sz="900" cap="all" spc="50">
-                <ns5:solidFill>
-                  <ns5:srgbClr val="6B7280"/>
-                </ns5:solidFill>
-                <ns5:latin typeface="Aptos"/>
-              </ns5:defRPr>
-            </ns5:lvl1pPr>
-          </ns5:lstStyle>
-          <ns6:p xmlns:ns6="http://schemas.openxmlformats.org/drawingml/2006/main">
-            <ns6:r>
-              <ns6:rPr lang="en-US"/>
-              <ns6:t>OPEN COMPONENT MODEL · OCM.SOFTWARE</ns6:t>
-            </ns6:r>
-            <ns6:endParaRPr lang="en-US"/>
-          </ns6:p>
-        </ns0:txBody>
-      </ns0:sp>
-    </p:spTree>
-  </p:cSld>
-  <p:clrMapOvr>
-    <a:masterClrMapping/>
-  </p:clrMapOvr>
-</p:sldLayout>
-</file>
-
-<file path=ppt/slideLayouts/slideLayout5.xml><?xml version="1.0" encoding="utf-8"?>
-<p:sldLayout xmlns:a="http://schemas.openxmlformats.org/drawingml/2006/main" xmlns:r="http://schemas.openxmlformats.org/officeDocument/2006/relationships" xmlns:p="http://schemas.openxmlformats.org/presentationml/2006/main" type="obj" preserve="1" userDrawn="1">
-  <p:cSld name="Content / Diagram">
-    <p:bg>
-      <p:bgPr>
-        <a:solidFill>
-          <a:srgbClr val="FFFFFF"/>
-        </a:solidFill>
-        <a:effectLst/>
-      </p:bgPr>
-    </p:bg>
-    <p:spTree>
-      <p:nvGrpSpPr>
-        <p:cNvPr id="1" name=""/>
-        <p:cNvGrpSpPr/>
-        <p:nvPr/>
-      </p:nvGrpSpPr>
-      <p:grpSpPr>
-        <a:xfrm>
-          <a:off x="0" y="0"/>
-          <a:ext cx="0" cy="0"/>
-          <a:chOff x="0" y="0"/>
-          <a:chExt cx="0" cy="0"/>
-        </a:xfrm>
-      </p:grpSpPr>
-      <ns0:sp xmlns:ns0="http://schemas.openxmlformats.org/presentationml/2006/main">
-        <ns0:nvSpPr>
-          <ns0:cNvPr id="10" name="Eyebrow"/>
-          <ns0:cNvSpPr>
-            <ns1:spLocks xmlns:ns1="http://schemas.openxmlformats.org/drawingml/2006/main" noGrp="1"/>
-          </ns0:cNvSpPr>
-          <ns0:nvPr>
-            <ns0:ph type="body" idx="1"/>
-          </ns0:nvPr>
-        </ns0:nvSpPr>
-        <ns0:spPr>
-          <ns2:xfrm xmlns:ns2="http://schemas.openxmlformats.org/drawingml/2006/main">
-            <ns2:off x="1143000" y="2428875"/>
-            <ns2:ext cx="16002000" cy="457200"/>
-          </ns2:xfrm>
-          <ns3:prstGeom xmlns:ns3="http://schemas.openxmlformats.org/drawingml/2006/main" prst="rect">
-            <ns3:avLst/>
-          </ns3:prstGeom>
-        </ns0:spPr>
-        <ns0:txBody>
-          <ns4:bodyPr xmlns:ns4="http://schemas.openxmlformats.org/drawingml/2006/main" wrap="square" rtlCol="0" anchor="t" lIns="0" tIns="0" rIns="0" bIns="0"/>
-          <ns5:lstStyle xmlns:ns5="http://schemas.openxmlformats.org/drawingml/2006/main">
-            <ns5:lvl1pPr marL="0" indent="0" algn="l">
-              <ns5:buNone/>
-              <ns5:defRPr sz="2800" b="1" cap="all" spc="140">
-                <ns5:solidFill>
-                  <ns5:srgbClr val="0F6BFF"/>
-                </ns5:solidFill>
-                <ns5:latin typeface="Aptos"/>
-              </ns5:defRPr>
-            </ns5:lvl1pPr>
-          </ns5:lstStyle>
-          <ns6:p xmlns:ns6="http://schemas.openxmlformats.org/drawingml/2006/main">
-            <ns6:r>
-              <ns6:rPr lang="en-US"/>
-              <ns6:t>EYEBROW</ns6:t>
-            </ns6:r>
-            <ns6:endParaRPr lang="en-US"/>
-          </ns6:p>
-        </ns0:txBody>
-      </ns0:sp>
-      <ns0:sp xmlns:ns0="http://schemas.openxmlformats.org/presentationml/2006/main">
-        <ns0:nvSpPr>
-          <ns0:cNvPr id="11" name="Title"/>
-          <ns0:cNvSpPr>
-            <ns1:spLocks xmlns:ns1="http://schemas.openxmlformats.org/drawingml/2006/main" noGrp="1"/>
-          </ns0:cNvSpPr>
-          <ns0:nvPr>
-            <ns0:ph type="title" idx="2"/>
-          </ns0:nvPr>
-        </ns0:nvSpPr>
-        <ns0:spPr>
-          <ns2:xfrm xmlns:ns2="http://schemas.openxmlformats.org/drawingml/2006/main">
-            <ns2:off x="1143000" y="2933700"/>
-            <ns2:ext cx="16002000" cy="1143000"/>
-          </ns2:xfrm>
-          <ns3:prstGeom xmlns:ns3="http://schemas.openxmlformats.org/drawingml/2006/main" prst="rect">
-            <ns3:avLst/>
-          </ns3:prstGeom>
-        </ns0:spPr>
-        <ns0:txBody>
-          <ns4:bodyPr xmlns:ns4="http://schemas.openxmlformats.org/drawingml/2006/main" wrap="square" rtlCol="0" anchor="t" lIns="0" tIns="0" rIns="0" bIns="0"/>
-          <ns5:lstStyle xmlns:ns5="http://schemas.openxmlformats.org/drawingml/2006/main">
-            <ns5:lvl1pPr marL="0" indent="0" algn="l">
-              <ns5:lnSpc>
-                <ns5:spcPct val="90000"/>
-              </ns5:lnSpc>
-              <ns5:buNone/>
-              <ns5:defRPr sz="6400" b="1">
-                <ns5:solidFill>
-                  <ns5:srgbClr val="000000"/>
-                </ns5:solidFill>
-                <ns5:latin typeface="Aptos Display"/>
-              </ns5:defRPr>
-            </ns5:lvl1pPr>
-          </ns5:lstStyle>
-          <ns6:p xmlns:ns6="http://schemas.openxmlformats.org/drawingml/2006/main">
-            <ns6:r>
-              <ns6:rPr lang="en-US"/>
-              <ns6:t>Section title goes here.</ns6:t>
-            </ns6:r>
-            <ns6:endParaRPr lang="en-US"/>
-          </ns6:p>
-        </ns0:txBody>
-      </ns0:sp>
-      <ns0:sp xmlns:ns0="http://schemas.openxmlformats.org/presentationml/2006/main">
-        <ns0:nvSpPr>
-          <ns0:cNvPr id="12" name="Diagram"/>
-          <ns0:cNvSpPr>
-            <ns1:spLocks xmlns:ns1="http://schemas.openxmlformats.org/drawingml/2006/main" noGrp="1"/>
-          </ns0:cNvSpPr>
-          <ns0:nvPr>
-            <ns0:ph type="pic" idx="10"/>
-          </ns0:nvPr>
-        </ns0:nvSpPr>
-        <ns0:spPr>
-          <ns2:xfrm xmlns:ns2="http://schemas.openxmlformats.org/drawingml/2006/main">
-            <ns2:off x="571500" y="4381500"/>
-            <ns2:ext cx="17145000" cy="5715000"/>
-          </ns2:xfrm>
-          <ns3:prstGeom xmlns:ns3="http://schemas.openxmlformats.org/drawingml/2006/main" prst="rect">
-            <ns3:avLst/>
-          </ns3:prstGeom>
-        </ns0:spPr>
-        <ns0:txBody>
-          <ns4:bodyPr xmlns:ns4="http://schemas.openxmlformats.org/drawingml/2006/main" rtlCol="0" anchor="ctr"/>
-          <ns5:lstStyle xmlns:ns5="http://schemas.openxmlformats.org/drawingml/2006/main"/>
-          <ns6:p xmlns:ns6="http://schemas.openxmlformats.org/drawingml/2006/main">
-            <ns6:endParaRPr lang="en-US"/>
-          </ns6:p>
-        </ns0:txBody>
-      </ns0:sp>
-      <ns0:sp xmlns:ns0="http://schemas.openxmlformats.org/presentationml/2006/main">
-        <ns0:nvSpPr>
-          <ns0:cNvPr id="13" name="Footer"/>
-          <ns0:cNvSpPr>
-            <ns1:spLocks xmlns:ns1="http://schemas.openxmlformats.org/drawingml/2006/main" noGrp="1"/>
-          </ns0:cNvSpPr>
-          <ns0:nvPr/>
-        </ns0:nvSpPr>
-        <ns0:spPr>
-          <ns2:xfrm xmlns:ns2="http://schemas.openxmlformats.org/drawingml/2006/main">
-            <ns2:off x="1143000" y="9982200"/>
-            <ns2:ext cx="16002000" cy="228600"/>
-          </ns2:xfrm>
-          <ns3:prstGeom xmlns:ns3="http://schemas.openxmlformats.org/drawingml/2006/main" prst="rect">
-            <ns3:avLst/>
-          </ns3:prstGeom>
-        </ns0:spPr>
-        <ns0:txBody>
-          <ns4:bodyPr xmlns:ns4="http://schemas.openxmlformats.org/drawingml/2006/main" wrap="square" rtlCol="0" anchor="t" lIns="0" tIns="0" rIns="0" bIns="0"/>
-          <ns5:lstStyle xmlns:ns5="http://schemas.openxmlformats.org/drawingml/2006/main">
-            <ns5:lvl1pPr marL="0" indent="0" algn="l">
-              <ns5:buNone/>
-              <ns5:defRPr sz="900" cap="all" spc="50">
-                <ns5:solidFill>
-                  <ns5:srgbClr val="6B7280"/>
-                </ns5:solidFill>
-                <ns5:latin typeface="Aptos"/>
-              </ns5:defRPr>
-            </ns5:lvl1pPr>
-          </ns5:lstStyle>
-          <ns6:p xmlns:ns6="http://schemas.openxmlformats.org/drawingml/2006/main">
-            <ns6:r>
-              <ns6:rPr lang="en-US"/>
-              <ns6:t>OPEN COMPONENT MODEL · OCM.SOFTWARE</ns6:t>
-            </ns6:r>
-            <ns6:endParaRPr lang="en-US"/>
-          </ns6:p>
-        </ns0:txBody>
-      </ns0:sp>
-    </p:spTree>
-  </p:cSld>
-  <p:clrMapOvr>
-    <a:masterClrMapping/>
-  </p:clrMapOvr>
-</p:sldLayout>
-</file>
-
-<file path=ppt/slideLayouts/slideLayout6.xml><?xml version="1.0" encoding="utf-8"?>
-<p:sldLayout xmlns:a="http://schemas.openxmlformats.org/drawingml/2006/main" xmlns:r="http://schemas.openxmlformats.org/officeDocument/2006/relationships" xmlns:p="http://schemas.openxmlformats.org/presentationml/2006/main" type="obj" preserve="1" userDrawn="1">
-  <p:cSld name="Content / Tiles">
-    <p:bg>
-      <p:bgPr>
-        <a:solidFill>
-          <a:srgbClr val="FFFFFF"/>
-        </a:solidFill>
-        <a:effectLst/>
-      </p:bgPr>
-    </p:bg>
-    <p:spTree>
-      <p:nvGrpSpPr>
-        <p:cNvPr id="1" name=""/>
-        <p:cNvGrpSpPr/>
-        <p:nvPr/>
-      </p:nvGrpSpPr>
-      <p:grpSpPr>
-        <a:xfrm>
-          <a:off x="0" y="0"/>
-          <a:ext cx="0" cy="0"/>
-          <a:chOff x="0" y="0"/>
-          <a:chExt cx="0" cy="0"/>
-        </a:xfrm>
-      </p:grpSpPr>
-      <ns0:sp xmlns:ns0="http://schemas.openxmlformats.org/presentationml/2006/main">
-        <ns0:nvSpPr>
-          <ns0:cNvPr id="10" name="Eyebrow"/>
-          <ns0:cNvSpPr>
-            <ns1:spLocks xmlns:ns1="http://schemas.openxmlformats.org/drawingml/2006/main" noGrp="1"/>
-          </ns0:cNvSpPr>
-          <ns0:nvPr>
-            <ns0:ph type="body" idx="1"/>
-          </ns0:nvPr>
-        </ns0:nvSpPr>
-        <ns0:spPr>
-          <ns2:xfrm xmlns:ns2="http://schemas.openxmlformats.org/drawingml/2006/main">
-            <ns2:off x="1143000" y="2428875"/>
-            <ns2:ext cx="16002000" cy="457200"/>
-          </ns2:xfrm>
-          <ns3:prstGeom xmlns:ns3="http://schemas.openxmlformats.org/drawingml/2006/main" prst="rect">
-            <ns3:avLst/>
-          </ns3:prstGeom>
-        </ns0:spPr>
-        <ns0:txBody>
-          <ns4:bodyPr xmlns:ns4="http://schemas.openxmlformats.org/drawingml/2006/main" wrap="square" rtlCol="0" anchor="t" lIns="0" tIns="0" rIns="0" bIns="0"/>
-          <ns5:lstStyle xmlns:ns5="http://schemas.openxmlformats.org/drawingml/2006/main">
-            <ns5:lvl1pPr marL="0" indent="0" algn="l">
-              <ns5:buNone/>
-              <ns5:defRPr sz="2800" b="1" cap="all" spc="140">
-                <ns5:solidFill>
-                  <ns5:srgbClr val="0F6BFF"/>
-                </ns5:solidFill>
-                <ns5:latin typeface="Aptos"/>
-              </ns5:defRPr>
-            </ns5:lvl1pPr>
-          </ns5:lstStyle>
-          <ns6:p xmlns:ns6="http://schemas.openxmlformats.org/drawingml/2006/main">
-            <ns6:r>
-              <ns6:rPr lang="en-US"/>
-              <ns6:t>EYEBROW</ns6:t>
-            </ns6:r>
-            <ns6:endParaRPr lang="en-US"/>
-          </ns6:p>
-        </ns0:txBody>
-      </ns0:sp>
-      <ns0:sp xmlns:ns0="http://schemas.openxmlformats.org/presentationml/2006/main">
-        <ns0:nvSpPr>
-          <ns0:cNvPr id="11" name="Title"/>
-          <ns0:cNvSpPr>
-            <ns1:spLocks xmlns:ns1="http://schemas.openxmlformats.org/drawingml/2006/main" noGrp="1"/>
-          </ns0:cNvSpPr>
-          <ns0:nvPr>
-            <ns0:ph type="title" idx="2"/>
-          </ns0:nvPr>
-        </ns0:nvSpPr>
-        <ns0:spPr>
-          <ns2:xfrm xmlns:ns2="http://schemas.openxmlformats.org/drawingml/2006/main">
-            <ns2:off x="1143000" y="2933700"/>
-            <ns2:ext cx="16002000" cy="1905000"/>
-          </ns2:xfrm>
-          <ns3:prstGeom xmlns:ns3="http://schemas.openxmlformats.org/drawingml/2006/main" prst="rect">
-            <ns3:avLst/>
-          </ns3:prstGeom>
-        </ns0:spPr>
-        <ns0:txBody>
-          <ns4:bodyPr xmlns:ns4="http://schemas.openxmlformats.org/drawingml/2006/main" wrap="square" rtlCol="0" anchor="t" lIns="0" tIns="0" rIns="0" bIns="0"/>
-          <ns5:lstStyle xmlns:ns5="http://schemas.openxmlformats.org/drawingml/2006/main">
-            <ns5:lvl1pPr marL="0" indent="0" algn="l">
-              <ns5:lnSpc>
-                <ns5:spcPct val="90000"/>
-              </ns5:lnSpc>
-              <ns5:buNone/>
-              <ns5:defRPr sz="6400" b="1">
-                <ns5:solidFill>
-                  <ns5:srgbClr val="000000"/>
-                </ns5:solidFill>
-                <ns5:latin typeface="Aptos Display"/>
-              </ns5:defRPr>
-            </ns5:lvl1pPr>
-          </ns5:lstStyle>
-          <ns6:p xmlns:ns6="http://schemas.openxmlformats.org/drawingml/2006/main">
-            <ns6:r>
-              <ns6:rPr lang="en-US"/>
-              <ns6:t>Section title goes here.</ns6:t>
-            </ns6:r>
-            <ns6:endParaRPr lang="en-US"/>
-          </ns6:p>
-        </ns0:txBody>
-      </ns0:sp>
-      <ns0:sp xmlns:ns0="http://schemas.openxmlformats.org/presentationml/2006/main">
-        <ns0:nvSpPr>
-          <ns0:cNvPr id="12" name="Tile1 Bg"/>
-          <ns0:cNvSpPr/>
-          <ns0:nvPr/>
-        </ns0:nvSpPr>
-        <ns0:spPr>
-          <ns1:xfrm xmlns:ns1="http://schemas.openxmlformats.org/drawingml/2006/main">
-            <ns1:off x="1143000" y="4953000"/>
-            <ns1:ext cx="5181600" cy="2190750"/>
-          </ns1:xfrm>
-          <ns2:prstGeom xmlns:ns2="http://schemas.openxmlformats.org/drawingml/2006/main" prst="rect">
-            <ns2:avLst/>
-          </ns2:prstGeom>
-          <ns3:solidFill xmlns:ns3="http://schemas.openxmlformats.org/drawingml/2006/main">
-            <ns3:srgbClr val="F3F4F6"/>
-          </ns3:solidFill>
-          <ns4:ln xmlns:ns4="http://schemas.openxmlformats.org/drawingml/2006/main">
-            <ns4:noFill/>
-          </ns4:ln>
-        </ns0:spPr>
-        <ns0:txBody>
-          <ns5:bodyPr xmlns:ns5="http://schemas.openxmlformats.org/drawingml/2006/main" rtlCol="0" anchor="ctr"/>
-          <ns6:lstStyle xmlns:ns6="http://schemas.openxmlformats.org/drawingml/2006/main"/>
-          <ns7:p xmlns:ns7="http://schemas.openxmlformats.org/drawingml/2006/main">
-            <ns7:endParaRPr lang="en-US"/>
-          </ns7:p>
-        </ns0:txBody>
-      </ns0:sp>
-      <ns0:sp xmlns:ns0="http://schemas.openxmlformats.org/presentationml/2006/main">
-        <ns0:nvSpPr>
-          <ns0:cNvPr id="13" name="Tile1 Rule"/>
-          <ns0:cNvSpPr/>
-          <ns0:nvPr/>
-        </ns0:nvSpPr>
-        <ns0:spPr>
-          <ns1:xfrm xmlns:ns1="http://schemas.openxmlformats.org/drawingml/2006/main">
-            <ns1:off x="1143000" y="4953000"/>
-            <ns1:ext cx="5181600" cy="28575"/>
-          </ns1:xfrm>
-          <ns2:prstGeom xmlns:ns2="http://schemas.openxmlformats.org/drawingml/2006/main" prst="rect">
-            <ns2:avLst/>
-          </ns2:prstGeom>
-          <ns3:solidFill xmlns:ns3="http://schemas.openxmlformats.org/drawingml/2006/main">
-            <ns3:srgbClr val="0F6BFF"/>
-          </ns3:solidFill>
-          <ns4:ln xmlns:ns4="http://schemas.openxmlformats.org/drawingml/2006/main">
-            <ns4:noFill/>
-          </ns4:ln>
-        </ns0:spPr>
-        <ns0:txBody>
-          <ns5:bodyPr xmlns:ns5="http://schemas.openxmlformats.org/drawingml/2006/main" rtlCol="0" anchor="ctr"/>
-          <ns6:lstStyle xmlns:ns6="http://schemas.openxmlformats.org/drawingml/2006/main"/>
-          <ns7:p xmlns:ns7="http://schemas.openxmlformats.org/drawingml/2006/main">
-            <ns7:endParaRPr lang="en-US"/>
-          </ns7:p>
-        </ns0:txBody>
-      </ns0:sp>
-      <ns0:sp xmlns:ns0="http://schemas.openxmlformats.org/presentationml/2006/main">
-        <ns0:nvSpPr>
-          <ns0:cNvPr id="14" name="Tile1 Label"/>
-          <ns0:cNvSpPr>
-            <ns1:spLocks xmlns:ns1="http://schemas.openxmlformats.org/drawingml/2006/main" noGrp="1"/>
-          </ns0:cNvSpPr>
-          <ns0:nvPr>
-            <ns0:ph type="body" idx="20"/>
-          </ns0:nvPr>
-        </ns0:nvSpPr>
-        <ns0:spPr>
-          <ns2:xfrm xmlns:ns2="http://schemas.openxmlformats.org/drawingml/2006/main">
-            <ns2:off x="1371600" y="5791200"/>
-            <ns2:ext cx="4724400" cy="304800"/>
-          </ns2:xfrm>
-          <ns3:prstGeom xmlns:ns3="http://schemas.openxmlformats.org/drawingml/2006/main" prst="rect">
-            <ns3:avLst/>
-          </ns3:prstGeom>
-        </ns0:spPr>
-        <ns0:txBody>
-          <ns4:bodyPr xmlns:ns4="http://schemas.openxmlformats.org/drawingml/2006/main" wrap="square" rtlCol="0" anchor="t" lIns="0" tIns="0" rIns="0" bIns="0"/>
-          <ns5:lstStyle xmlns:ns5="http://schemas.openxmlformats.org/drawingml/2006/main">
-            <ns5:lvl1pPr marL="0" indent="0" algn="l">
-              <ns5:buNone/>
-              <ns5:defRPr sz="1600" b="1">
-                <ns5:solidFill>
-                  <ns5:srgbClr val="0F6BFF"/>
-                </ns5:solidFill>
-                <ns5:latin typeface="Aptos"/>
-              </ns5:defRPr>
-            </ns5:lvl1pPr>
-          </ns5:lstStyle>
-          <ns6:p xmlns:ns6="http://schemas.openxmlformats.org/drawingml/2006/main">
-            <ns6:r>
-              <ns6:rPr lang="en-US"/>
-              <ns6:t>Tile 1 label</ns6:t>
-            </ns6:r>
-            <ns6:endParaRPr lang="en-US"/>
-          </ns6:p>
-        </ns0:txBody>
-      </ns0:sp>
-      <ns0:sp xmlns:ns0="http://schemas.openxmlformats.org/presentationml/2006/main">
-        <ns0:nvSpPr>
-          <ns0:cNvPr id="15" name="Tile1 Body"/>
-          <ns0:cNvSpPr>
-            <ns1:spLocks xmlns:ns1="http://schemas.openxmlformats.org/drawingml/2006/main" noGrp="1"/>
-          </ns0:cNvSpPr>
-          <ns0:nvPr>
-            <ns0:ph type="body" idx="21"/>
-          </ns0:nvPr>
-        </ns0:nvSpPr>
-        <ns0:spPr>
-          <ns2:xfrm xmlns:ns2="http://schemas.openxmlformats.org/drawingml/2006/main">
-            <ns2:off x="1371600" y="6134100"/>
-            <ns2:ext cx="4724400" cy="857250"/>
-          </ns2:xfrm>
-          <ns3:prstGeom xmlns:ns3="http://schemas.openxmlformats.org/drawingml/2006/main" prst="rect">
-            <ns3:avLst/>
-          </ns3:prstGeom>
-        </ns0:spPr>
-        <ns0:txBody>
-          <ns4:bodyPr xmlns:ns4="http://schemas.openxmlformats.org/drawingml/2006/main" wrap="square" rtlCol="0" anchor="t" lIns="0" tIns="0" rIns="0" bIns="0"/>
-          <ns5:lstStyle xmlns:ns5="http://schemas.openxmlformats.org/drawingml/2006/main">
-            <ns5:lvl1pPr marL="0" indent="0" algn="l">
-              <ns5:buNone/>
-              <ns5:defRPr sz="1800">
-                <ns5:solidFill>
-                  <ns5:srgbClr val="000000"/>
-                </ns5:solidFill>
-                <ns5:latin typeface="Aptos"/>
-              </ns5:defRPr>
-            </ns5:lvl1pPr>
-          </ns5:lstStyle>
-          <ns6:p xmlns:ns6="http://schemas.openxmlformats.org/drawingml/2006/main">
-            <ns6:r>
-              <ns6:rPr lang="en-US"/>
-              <ns6:t>One short sentence describing this tile.</ns6:t>
-            </ns6:r>
-            <ns6:endParaRPr lang="en-US"/>
-          </ns6:p>
-        </ns0:txBody>
-      </ns0:sp>
-      <ns0:sp xmlns:ns0="http://schemas.openxmlformats.org/presentationml/2006/main">
-        <ns0:nvSpPr>
-          <ns0:cNvPr id="16" name="Tile2 Bg"/>
-          <ns0:cNvSpPr/>
-          <ns0:nvPr/>
-        </ns0:nvSpPr>
-        <ns0:spPr>
-          <ns1:xfrm xmlns:ns1="http://schemas.openxmlformats.org/drawingml/2006/main">
-            <ns1:off x="6553200" y="4953000"/>
-            <ns1:ext cx="5181600" cy="2190750"/>
-          </ns1:xfrm>
-          <ns2:prstGeom xmlns:ns2="http://schemas.openxmlformats.org/drawingml/2006/main" prst="rect">
-            <ns2:avLst/>
-          </ns2:prstGeom>
-          <ns3:solidFill xmlns:ns3="http://schemas.openxmlformats.org/drawingml/2006/main">
-            <ns3:srgbClr val="F3F4F6"/>
-          </ns3:solidFill>
-          <ns4:ln xmlns:ns4="http://schemas.openxmlformats.org/drawingml/2006/main">
-            <ns4:noFill/>
-          </ns4:ln>
-        </ns0:spPr>
-        <ns0:txBody>
-          <ns5:bodyPr xmlns:ns5="http://schemas.openxmlformats.org/drawingml/2006/main" rtlCol="0" anchor="ctr"/>
-          <ns6:lstStyle xmlns:ns6="http://schemas.openxmlformats.org/drawingml/2006/main"/>
-          <ns7:p xmlns:ns7="http://schemas.openxmlformats.org/drawingml/2006/main">
-            <ns7:endParaRPr lang="en-US"/>
-          </ns7:p>
-        </ns0:txBody>
-      </ns0:sp>
-      <ns0:sp xmlns:ns0="http://schemas.openxmlformats.org/presentationml/2006/main">
-        <ns0:nvSpPr>
-          <ns0:cNvPr id="17" name="Tile2 Rule"/>
-          <ns0:cNvSpPr/>
-          <ns0:nvPr/>
-        </ns0:nvSpPr>
-        <ns0:spPr>
-          <ns1:xfrm xmlns:ns1="http://schemas.openxmlformats.org/drawingml/2006/main">
-            <ns1:off x="6553200" y="4953000"/>
-            <ns1:ext cx="5181600" cy="28575"/>
-          </ns1:xfrm>
-          <ns2:prstGeom xmlns:ns2="http://schemas.openxmlformats.org/drawingml/2006/main" prst="rect">
-            <ns2:avLst/>
-          </ns2:prstGeom>
-          <ns3:solidFill xmlns:ns3="http://schemas.openxmlformats.org/drawingml/2006/main">
-            <ns3:srgbClr val="0F6BFF"/>
-          </ns3:solidFill>
-          <ns4:ln xmlns:ns4="http://schemas.openxmlformats.org/drawingml/2006/main">
-            <ns4:noFill/>
-          </ns4:ln>
-        </ns0:spPr>
-        <ns0:txBody>
-          <ns5:bodyPr xmlns:ns5="http://schemas.openxmlformats.org/drawingml/2006/main" rtlCol="0" anchor="ctr"/>
-          <ns6:lstStyle xmlns:ns6="http://schemas.openxmlformats.org/drawingml/2006/main"/>
-          <ns7:p xmlns:ns7="http://schemas.openxmlformats.org/drawingml/2006/main">
-            <ns7:endParaRPr lang="en-US"/>
-          </ns7:p>
-        </ns0:txBody>
-      </ns0:sp>
-      <ns0:sp xmlns:ns0="http://schemas.openxmlformats.org/presentationml/2006/main">
-        <ns0:nvSpPr>
-          <ns0:cNvPr id="18" name="Tile2 Label"/>
-          <ns0:cNvSpPr>
-            <ns1:spLocks xmlns:ns1="http://schemas.openxmlformats.org/drawingml/2006/main" noGrp="1"/>
-          </ns0:cNvSpPr>
-          <ns0:nvPr>
-            <ns0:ph type="body" idx="22"/>
-          </ns0:nvPr>
-        </ns0:nvSpPr>
-        <ns0:spPr>
-          <ns2:xfrm xmlns:ns2="http://schemas.openxmlformats.org/drawingml/2006/main">
-            <ns2:off x="6781800" y="5791200"/>
-            <ns2:ext cx="4724400" cy="304800"/>
-          </ns2:xfrm>
-          <ns3:prstGeom xmlns:ns3="http://schemas.openxmlformats.org/drawingml/2006/main" prst="rect">
-            <ns3:avLst/>
-          </ns3:prstGeom>
-        </ns0:spPr>
-        <ns0:txBody>
-          <ns4:bodyPr xmlns:ns4="http://schemas.openxmlformats.org/drawingml/2006/main" wrap="square" rtlCol="0" anchor="t" lIns="0" tIns="0" rIns="0" bIns="0"/>
-          <ns5:lstStyle xmlns:ns5="http://schemas.openxmlformats.org/drawingml/2006/main">
-            <ns5:lvl1pPr marL="0" indent="0" algn="l">
-              <ns5:buNone/>
-              <ns5:defRPr sz="1600" b="1">
-                <ns5:solidFill>
-                  <ns5:srgbClr val="0F6BFF"/>
-                </ns5:solidFill>
-                <ns5:latin typeface="Aptos"/>
-              </ns5:defRPr>
-            </ns5:lvl1pPr>
-          </ns5:lstStyle>
-          <ns6:p xmlns:ns6="http://schemas.openxmlformats.org/drawingml/2006/main">
-            <ns6:r>
-              <ns6:rPr lang="en-US"/>
-              <ns6:t>Tile 2 label</ns6:t>
-            </ns6:r>
-            <ns6:endParaRPr lang="en-US"/>
-          </ns6:p>
-        </ns0:txBody>
-      </ns0:sp>
-      <ns0:sp xmlns:ns0="http://schemas.openxmlformats.org/presentationml/2006/main">
-        <ns0:nvSpPr>
-          <ns0:cNvPr id="19" name="Tile2 Body"/>
-          <ns0:cNvSpPr>
-            <ns1:spLocks xmlns:ns1="http://schemas.openxmlformats.org/drawingml/2006/main" noGrp="1"/>
-          </ns0:cNvSpPr>
-          <ns0:nvPr>
-            <ns0:ph type="body" idx="23"/>
-          </ns0:nvPr>
-        </ns0:nvSpPr>
-        <ns0:spPr>
-          <ns2:xfrm xmlns:ns2="http://schemas.openxmlformats.org/drawingml/2006/main">
-            <ns2:off x="6781800" y="6134100"/>
-            <ns2:ext cx="4724400" cy="857250"/>
-          </ns2:xfrm>
-          <ns3:prstGeom xmlns:ns3="http://schemas.openxmlformats.org/drawingml/2006/main" prst="rect">
-            <ns3:avLst/>
-          </ns3:prstGeom>
-        </ns0:spPr>
-        <ns0:txBody>
-          <ns4:bodyPr xmlns:ns4="http://schemas.openxmlformats.org/drawingml/2006/main" wrap="square" rtlCol="0" anchor="t" lIns="0" tIns="0" rIns="0" bIns="0"/>
-          <ns5:lstStyle xmlns:ns5="http://schemas.openxmlformats.org/drawingml/2006/main">
-            <ns5:lvl1pPr marL="0" indent="0" algn="l">
-              <ns5:buNone/>
-              <ns5:defRPr sz="1800">
-                <ns5:solidFill>
-                  <ns5:srgbClr val="000000"/>
-                </ns5:solidFill>
-                <ns5:latin typeface="Aptos"/>
-              </ns5:defRPr>
-            </ns5:lvl1pPr>
-          </ns5:lstStyle>
-          <ns6:p xmlns:ns6="http://schemas.openxmlformats.org/drawingml/2006/main">
-            <ns6:r>
-              <ns6:rPr lang="en-US"/>
-              <ns6:t>One short sentence describing this tile.</ns6:t>
-            </ns6:r>
-            <ns6:endParaRPr lang="en-US"/>
-          </ns6:p>
-        </ns0:txBody>
-      </ns0:sp>
-      <ns0:sp xmlns:ns0="http://schemas.openxmlformats.org/presentationml/2006/main">
-        <ns0:nvSpPr>
-          <ns0:cNvPr id="20" name="Tile3 Bg"/>
-          <ns0:cNvSpPr/>
-          <ns0:nvPr/>
-        </ns0:nvSpPr>
-        <ns0:spPr>
-          <ns1:xfrm xmlns:ns1="http://schemas.openxmlformats.org/drawingml/2006/main">
-            <ns1:off x="11963400" y="4953000"/>
-            <ns1:ext cx="5181600" cy="2190750"/>
-          </ns1:xfrm>
-          <ns2:prstGeom xmlns:ns2="http://schemas.openxmlformats.org/drawingml/2006/main" prst="rect">
-            <ns2:avLst/>
-          </ns2:prstGeom>
-          <ns3:solidFill xmlns:ns3="http://schemas.openxmlformats.org/drawingml/2006/main">
-            <ns3:srgbClr val="F3F4F6"/>
-          </ns3:solidFill>
-          <ns4:ln xmlns:ns4="http://schemas.openxmlformats.org/drawingml/2006/main">
-            <ns4:noFill/>
-          </ns4:ln>
-        </ns0:spPr>
-        <ns0:txBody>
-          <ns5:bodyPr xmlns:ns5="http://schemas.openxmlformats.org/drawingml/2006/main" rtlCol="0" anchor="ctr"/>
-          <ns6:lstStyle xmlns:ns6="http://schemas.openxmlformats.org/drawingml/2006/main"/>
-          <ns7:p xmlns:ns7="http://schemas.openxmlformats.org/drawingml/2006/main">
-            <ns7:endParaRPr lang="en-US"/>
-          </ns7:p>
-        </ns0:txBody>
-      </ns0:sp>
-      <ns0:sp xmlns:ns0="http://schemas.openxmlformats.org/presentationml/2006/main">
-        <ns0:nvSpPr>
-          <ns0:cNvPr id="21" name="Tile3 Rule"/>
-          <ns0:cNvSpPr/>
-          <ns0:nvPr/>
-        </ns0:nvSpPr>
-        <ns0:spPr>
-          <ns1:xfrm xmlns:ns1="http://schemas.openxmlformats.org/drawingml/2006/main">
-            <ns1:off x="11963400" y="4953000"/>
-            <ns1:ext cx="5181600" cy="28575"/>
-          </ns1:xfrm>
-          <ns2:prstGeom xmlns:ns2="http://schemas.openxmlformats.org/drawingml/2006/main" prst="rect">
-            <ns2:avLst/>
-          </ns2:prstGeom>
-          <ns3:solidFill xmlns:ns3="http://schemas.openxmlformats.org/drawingml/2006/main">
-            <ns3:srgbClr val="0F6BFF"/>
-          </ns3:solidFill>
-          <ns4:ln xmlns:ns4="http://schemas.openxmlformats.org/drawingml/2006/main">
-            <ns4:noFill/>
-          </ns4:ln>
-        </ns0:spPr>
-        <ns0:txBody>
-          <ns5:bodyPr xmlns:ns5="http://schemas.openxmlformats.org/drawingml/2006/main" rtlCol="0" anchor="ctr"/>
-          <ns6:lstStyle xmlns:ns6="http://schemas.openxmlformats.org/drawingml/2006/main"/>
-          <ns7:p xmlns:ns7="http://schemas.openxmlformats.org/drawingml/2006/main">
-            <ns7:endParaRPr lang="en-US"/>
-          </ns7:p>
-        </ns0:txBody>
-      </ns0:sp>
-      <ns0:sp xmlns:ns0="http://schemas.openxmlformats.org/presentationml/2006/main">
-        <ns0:nvSpPr>
-          <ns0:cNvPr id="22" name="Tile3 Label"/>
-          <ns0:cNvSpPr>
-            <ns1:spLocks xmlns:ns1="http://schemas.openxmlformats.org/drawingml/2006/main" noGrp="1"/>
-          </ns0:cNvSpPr>
-          <ns0:nvPr>
-            <ns0:ph type="body" idx="24"/>
-          </ns0:nvPr>
-        </ns0:nvSpPr>
-        <ns0:spPr>
-          <ns2:xfrm xmlns:ns2="http://schemas.openxmlformats.org/drawingml/2006/main">
-            <ns2:off x="12192000" y="5791200"/>
-            <ns2:ext cx="4724400" cy="304800"/>
-          </ns2:xfrm>
-          <ns3:prstGeom xmlns:ns3="http://schemas.openxmlformats.org/drawingml/2006/main" prst="rect">
-            <ns3:avLst/>
-          </ns3:prstGeom>
-        </ns0:spPr>
-        <ns0:txBody>
-          <ns4:bodyPr xmlns:ns4="http://schemas.openxmlformats.org/drawingml/2006/main" wrap="square" rtlCol="0" anchor="t" lIns="0" tIns="0" rIns="0" bIns="0"/>
-          <ns5:lstStyle xmlns:ns5="http://schemas.openxmlformats.org/drawingml/2006/main">
-            <ns5:lvl1pPr marL="0" indent="0" algn="l">
-              <ns5:buNone/>
-              <ns5:defRPr sz="1600" b="1">
-                <ns5:solidFill>
-                  <ns5:srgbClr val="0F6BFF"/>
-                </ns5:solidFill>
-                <ns5:latin typeface="Aptos"/>
-              </ns5:defRPr>
-            </ns5:lvl1pPr>
-          </ns5:lstStyle>
-          <ns6:p xmlns:ns6="http://schemas.openxmlformats.org/drawingml/2006/main">
-            <ns6:r>
-              <ns6:rPr lang="en-US"/>
-              <ns6:t>Tile 3 label</ns6:t>
-            </ns6:r>
-            <ns6:endParaRPr lang="en-US"/>
-          </ns6:p>
-        </ns0:txBody>
-      </ns0:sp>
-      <ns0:sp xmlns:ns0="http://schemas.openxmlformats.org/presentationml/2006/main">
-        <ns0:nvSpPr>
-          <ns0:cNvPr id="23" name="Tile3 Body"/>
-          <ns0:cNvSpPr>
-            <ns1:spLocks xmlns:ns1="http://schemas.openxmlformats.org/drawingml/2006/main" noGrp="1"/>
-          </ns0:cNvSpPr>
-          <ns0:nvPr>
-            <ns0:ph type="body" idx="25"/>
-          </ns0:nvPr>
-        </ns0:nvSpPr>
-        <ns0:spPr>
-          <ns2:xfrm xmlns:ns2="http://schemas.openxmlformats.org/drawingml/2006/main">
-            <ns2:off x="12192000" y="6134100"/>
-            <ns2:ext cx="4724400" cy="857250"/>
-          </ns2:xfrm>
-          <ns3:prstGeom xmlns:ns3="http://schemas.openxmlformats.org/drawingml/2006/main" prst="rect">
-            <ns3:avLst/>
-          </ns3:prstGeom>
-        </ns0:spPr>
-        <ns0:txBody>
-          <ns4:bodyPr xmlns:ns4="http://schemas.openxmlformats.org/drawingml/2006/main" wrap="square" rtlCol="0" anchor="t" lIns="0" tIns="0" rIns="0" bIns="0"/>
-          <ns5:lstStyle xmlns:ns5="http://schemas.openxmlformats.org/drawingml/2006/main">
-            <ns5:lvl1pPr marL="0" indent="0" algn="l">
-              <ns5:buNone/>
-              <ns5:defRPr sz="1800">
-                <ns5:solidFill>
-                  <ns5:srgbClr val="000000"/>
-                </ns5:solidFill>
-                <ns5:latin typeface="Aptos"/>
-              </ns5:defRPr>
-            </ns5:lvl1pPr>
-          </ns5:lstStyle>
-          <ns6:p xmlns:ns6="http://schemas.openxmlformats.org/drawingml/2006/main">
-            <ns6:r>
-              <ns6:rPr lang="en-US"/>
-              <ns6:t>One short sentence describing this tile.</ns6:t>
-            </ns6:r>
-            <ns6:endParaRPr lang="en-US"/>
-          </ns6:p>
-        </ns0:txBody>
-      </ns0:sp>
-      <ns0:sp xmlns:ns0="http://schemas.openxmlformats.org/presentationml/2006/main">
-        <ns0:nvSpPr>
-          <ns0:cNvPr id="24" name="Tile4 Bg"/>
-          <ns0:cNvSpPr/>
-          <ns0:nvPr/>
-        </ns0:nvSpPr>
-        <ns0:spPr>
-          <ns1:xfrm xmlns:ns1="http://schemas.openxmlformats.org/drawingml/2006/main">
-            <ns1:off x="1143000" y="7372350"/>
-            <ns1:ext cx="5181600" cy="2190750"/>
-          </ns1:xfrm>
-          <ns2:prstGeom xmlns:ns2="http://schemas.openxmlformats.org/drawingml/2006/main" prst="rect">
-            <ns2:avLst/>
-          </ns2:prstGeom>
-          <ns3:solidFill xmlns:ns3="http://schemas.openxmlformats.org/drawingml/2006/main">
-            <ns3:srgbClr val="F3F4F6"/>
-          </ns3:solidFill>
-          <ns4:ln xmlns:ns4="http://schemas.openxmlformats.org/drawingml/2006/main">
-            <ns4:noFill/>
-          </ns4:ln>
-        </ns0:spPr>
-        <ns0:txBody>
-          <ns5:bodyPr xmlns:ns5="http://schemas.openxmlformats.org/drawingml/2006/main" rtlCol="0" anchor="ctr"/>
-          <ns6:lstStyle xmlns:ns6="http://schemas.openxmlformats.org/drawingml/2006/main"/>
-          <ns7:p xmlns:ns7="http://schemas.openxmlformats.org/drawingml/2006/main">
-            <ns7:endParaRPr lang="en-US"/>
-          </ns7:p>
-        </ns0:txBody>
-      </ns0:sp>
-      <ns0:sp xmlns:ns0="http://schemas.openxmlformats.org/presentationml/2006/main">
-        <ns0:nvSpPr>
-          <ns0:cNvPr id="25" name="Tile4 Rule"/>
-          <ns0:cNvSpPr/>
-          <ns0:nvPr/>
-        </ns0:nvSpPr>
-        <ns0:spPr>
-          <ns1:xfrm xmlns:ns1="http://schemas.openxmlformats.org/drawingml/2006/main">
-            <ns1:off x="1143000" y="7372350"/>
-            <ns1:ext cx="5181600" cy="28575"/>
-          </ns1:xfrm>
-          <ns2:prstGeom xmlns:ns2="http://schemas.openxmlformats.org/drawingml/2006/main" prst="rect">
-            <ns2:avLst/>
-          </ns2:prstGeom>
-          <ns3:solidFill xmlns:ns3="http://schemas.openxmlformats.org/drawingml/2006/main">
-            <ns3:srgbClr val="0F6BFF"/>
-          </ns3:solidFill>
-          <ns4:ln xmlns:ns4="http://schemas.openxmlformats.org/drawingml/2006/main">
-            <ns4:noFill/>
-          </ns4:ln>
-        </ns0:spPr>
-        <ns0:txBody>
-          <ns5:bodyPr xmlns:ns5="http://schemas.openxmlformats.org/drawingml/2006/main" rtlCol="0" anchor="ctr"/>
-          <ns6:lstStyle xmlns:ns6="http://schemas.openxmlformats.org/drawingml/2006/main"/>
-          <ns7:p xmlns:ns7="http://schemas.openxmlformats.org/drawingml/2006/main">
-            <ns7:endParaRPr lang="en-US"/>
-          </ns7:p>
-        </ns0:txBody>
-      </ns0:sp>
-      <ns0:sp xmlns:ns0="http://schemas.openxmlformats.org/presentationml/2006/main">
-        <ns0:nvSpPr>
-          <ns0:cNvPr id="26" name="Tile4 Label"/>
-          <ns0:cNvSpPr>
-            <ns1:spLocks xmlns:ns1="http://schemas.openxmlformats.org/drawingml/2006/main" noGrp="1"/>
-          </ns0:cNvSpPr>
-          <ns0:nvPr>
-            <ns0:ph type="body" idx="26"/>
-          </ns0:nvPr>
-        </ns0:nvSpPr>
-        <ns0:spPr>
-          <ns2:xfrm xmlns:ns2="http://schemas.openxmlformats.org/drawingml/2006/main">
-            <ns2:off x="1371600" y="8210550"/>
-            <ns2:ext cx="4724400" cy="304800"/>
-          </ns2:xfrm>
-          <ns3:prstGeom xmlns:ns3="http://schemas.openxmlformats.org/drawingml/2006/main" prst="rect">
-            <ns3:avLst/>
-          </ns3:prstGeom>
-        </ns0:spPr>
-        <ns0:txBody>
-          <ns4:bodyPr xmlns:ns4="http://schemas.openxmlformats.org/drawingml/2006/main" wrap="square" rtlCol="0" anchor="t" lIns="0" tIns="0" rIns="0" bIns="0"/>
-          <ns5:lstStyle xmlns:ns5="http://schemas.openxmlformats.org/drawingml/2006/main">
-            <ns5:lvl1pPr marL="0" indent="0" algn="l">
-              <ns5:buNone/>
-              <ns5:defRPr sz="1600" b="1">
-                <ns5:solidFill>
-                  <ns5:srgbClr val="0F6BFF"/>
-                </ns5:solidFill>
-                <ns5:latin typeface="Aptos"/>
-              </ns5:defRPr>
-            </ns5:lvl1pPr>
-          </ns5:lstStyle>
-          <ns6:p xmlns:ns6="http://schemas.openxmlformats.org/drawingml/2006/main">
-            <ns6:r>
-              <ns6:rPr lang="en-US"/>
-              <ns6:t>Tile 4 label</ns6:t>
-            </ns6:r>
-            <ns6:endParaRPr lang="en-US"/>
-          </ns6:p>
-        </ns0:txBody>
-      </ns0:sp>
-      <ns0:sp xmlns:ns0="http://schemas.openxmlformats.org/presentationml/2006/main">
-        <ns0:nvSpPr>
-          <ns0:cNvPr id="27" name="Tile4 Body"/>
-          <ns0:cNvSpPr>
-            <ns1:spLocks xmlns:ns1="http://schemas.openxmlformats.org/drawingml/2006/main" noGrp="1"/>
-          </ns0:cNvSpPr>
-          <ns0:nvPr>
-            <ns0:ph type="body" idx="27"/>
-          </ns0:nvPr>
-        </ns0:nvSpPr>
-        <ns0:spPr>
-          <ns2:xfrm xmlns:ns2="http://schemas.openxmlformats.org/drawingml/2006/main">
-            <ns2:off x="1371600" y="8553450"/>
-            <ns2:ext cx="4724400" cy="857250"/>
-          </ns2:xfrm>
-          <ns3:prstGeom xmlns:ns3="http://schemas.openxmlformats.org/drawingml/2006/main" prst="rect">
-            <ns3:avLst/>
-          </ns3:prstGeom>
-        </ns0:spPr>
-        <ns0:txBody>
-          <ns4:bodyPr xmlns:ns4="http://schemas.openxmlformats.org/drawingml/2006/main" wrap="square" rtlCol="0" anchor="t" lIns="0" tIns="0" rIns="0" bIns="0"/>
-          <ns5:lstStyle xmlns:ns5="http://schemas.openxmlformats.org/drawingml/2006/main">
-            <ns5:lvl1pPr marL="0" indent="0" algn="l">
-              <ns5:buNone/>
-              <ns5:defRPr sz="1800">
-                <ns5:solidFill>
-                  <ns5:srgbClr val="000000"/>
-                </ns5:solidFill>
-                <ns5:latin typeface="Aptos"/>
-              </ns5:defRPr>
-            </ns5:lvl1pPr>
-          </ns5:lstStyle>
-          <ns6:p xmlns:ns6="http://schemas.openxmlformats.org/drawingml/2006/main">
-            <ns6:r>
-              <ns6:rPr lang="en-US"/>
-              <ns6:t>One short sentence describing this tile.</ns6:t>
-            </ns6:r>
-            <ns6:endParaRPr lang="en-US"/>
-          </ns6:p>
-        </ns0:txBody>
-      </ns0:sp>
-      <ns0:sp xmlns:ns0="http://schemas.openxmlformats.org/presentationml/2006/main">
-        <ns0:nvSpPr>
-          <ns0:cNvPr id="28" name="Tile5 Bg"/>
-          <ns0:cNvSpPr/>
-          <ns0:nvPr/>
-        </ns0:nvSpPr>
-        <ns0:spPr>
-          <ns1:xfrm xmlns:ns1="http://schemas.openxmlformats.org/drawingml/2006/main">
-            <ns1:off x="6553200" y="7372350"/>
-            <ns1:ext cx="5181600" cy="2190750"/>
-          </ns1:xfrm>
-          <ns2:prstGeom xmlns:ns2="http://schemas.openxmlformats.org/drawingml/2006/main" prst="rect">
-            <ns2:avLst/>
-          </ns2:prstGeom>
-          <ns3:solidFill xmlns:ns3="http://schemas.openxmlformats.org/drawingml/2006/main">
-            <ns3:srgbClr val="F3F4F6"/>
-          </ns3:solidFill>
-          <ns4:ln xmlns:ns4="http://schemas.openxmlformats.org/drawingml/2006/main">
-            <ns4:noFill/>
-          </ns4:ln>
-        </ns0:spPr>
-        <ns0:txBody>
-          <ns5:bodyPr xmlns:ns5="http://schemas.openxmlformats.org/drawingml/2006/main" rtlCol="0" anchor="ctr"/>
-          <ns6:lstStyle xmlns:ns6="http://schemas.openxmlformats.org/drawingml/2006/main"/>
-          <ns7:p xmlns:ns7="http://schemas.openxmlformats.org/drawingml/2006/main">
-            <ns7:endParaRPr lang="en-US"/>
-          </ns7:p>
-        </ns0:txBody>
-      </ns0:sp>
-      <ns0:sp xmlns:ns0="http://schemas.openxmlformats.org/presentationml/2006/main">
-        <ns0:nvSpPr>
-          <ns0:cNvPr id="29" name="Tile5 Rule"/>
-          <ns0:cNvSpPr/>
-          <ns0:nvPr/>
-        </ns0:nvSpPr>
-        <ns0:spPr>
-          <ns1:xfrm xmlns:ns1="http://schemas.openxmlformats.org/drawingml/2006/main">
-            <ns1:off x="6553200" y="7372350"/>
-            <ns1:ext cx="5181600" cy="28575"/>
-          </ns1:xfrm>
-          <ns2:prstGeom xmlns:ns2="http://schemas.openxmlformats.org/drawingml/2006/main" prst="rect">
-            <ns2:avLst/>
-          </ns2:prstGeom>
-          <ns3:solidFill xmlns:ns3="http://schemas.openxmlformats.org/drawingml/2006/main">
-            <ns3:srgbClr val="0F6BFF"/>
-          </ns3:solidFill>
-          <ns4:ln xmlns:ns4="http://schemas.openxmlformats.org/drawingml/2006/main">
-            <ns4:noFill/>
-          </ns4:ln>
-        </ns0:spPr>
-        <ns0:txBody>
-          <ns5:bodyPr xmlns:ns5="http://schemas.openxmlformats.org/drawingml/2006/main" rtlCol="0" anchor="ctr"/>
-          <ns6:lstStyle xmlns:ns6="http://schemas.openxmlformats.org/drawingml/2006/main"/>
-          <ns7:p xmlns:ns7="http://schemas.openxmlformats.org/drawingml/2006/main">
-            <ns7:endParaRPr lang="en-US"/>
-          </ns7:p>
-        </ns0:txBody>
-      </ns0:sp>
-      <ns0:sp xmlns:ns0="http://schemas.openxmlformats.org/presentationml/2006/main">
-        <ns0:nvSpPr>
-          <ns0:cNvPr id="30" name="Tile5 Label"/>
-          <ns0:cNvSpPr>
-            <ns1:spLocks xmlns:ns1="http://schemas.openxmlformats.org/drawingml/2006/main" noGrp="1"/>
-          </ns0:cNvSpPr>
-          <ns0:nvPr>
-            <ns0:ph type="body" idx="28"/>
-          </ns0:nvPr>
-        </ns0:nvSpPr>
-        <ns0:spPr>
-          <ns2:xfrm xmlns:ns2="http://schemas.openxmlformats.org/drawingml/2006/main">
-            <ns2:off x="6781800" y="8210550"/>
-            <ns2:ext cx="4724400" cy="304800"/>
-          </ns2:xfrm>
-          <ns3:prstGeom xmlns:ns3="http://schemas.openxmlformats.org/drawingml/2006/main" prst="rect">
-            <ns3:avLst/>
-          </ns3:prstGeom>
-        </ns0:spPr>
-        <ns0:txBody>
-          <ns4:bodyPr xmlns:ns4="http://schemas.openxmlformats.org/drawingml/2006/main" wrap="square" rtlCol="0" anchor="t" lIns="0" tIns="0" rIns="0" bIns="0"/>
-          <ns5:lstStyle xmlns:ns5="http://schemas.openxmlformats.org/drawingml/2006/main">
-            <ns5:lvl1pPr marL="0" indent="0" algn="l">
-              <ns5:buNone/>
-              <ns5:defRPr sz="1600" b="1">
-                <ns5:solidFill>
-                  <ns5:srgbClr val="0F6BFF"/>
-                </ns5:solidFill>
-                <ns5:latin typeface="Aptos"/>
-              </ns5:defRPr>
-            </ns5:lvl1pPr>
-          </ns5:lstStyle>
-          <ns6:p xmlns:ns6="http://schemas.openxmlformats.org/drawingml/2006/main">
-            <ns6:r>
-              <ns6:rPr lang="en-US"/>
-              <ns6:t>Tile 5 label</ns6:t>
-            </ns6:r>
-            <ns6:endParaRPr lang="en-US"/>
-          </ns6:p>
-        </ns0:txBody>
-      </ns0:sp>
-      <ns0:sp xmlns:ns0="http://schemas.openxmlformats.org/presentationml/2006/main">
-        <ns0:nvSpPr>
-          <ns0:cNvPr id="31" name="Tile5 Body"/>
-          <ns0:cNvSpPr>
-            <ns1:spLocks xmlns:ns1="http://schemas.openxmlformats.org/drawingml/2006/main" noGrp="1"/>
-          </ns0:cNvSpPr>
-          <ns0:nvPr>
-            <ns0:ph type="body" idx="29"/>
-          </ns0:nvPr>
-        </ns0:nvSpPr>
-        <ns0:spPr>
-          <ns2:xfrm xmlns:ns2="http://schemas.openxmlformats.org/drawingml/2006/main">
-            <ns2:off x="6781800" y="8553450"/>
-            <ns2:ext cx="4724400" cy="857250"/>
-          </ns2:xfrm>
-          <ns3:prstGeom xmlns:ns3="http://schemas.openxmlformats.org/drawingml/2006/main" prst="rect">
-            <ns3:avLst/>
-          </ns3:prstGeom>
-        </ns0:spPr>
-        <ns0:txBody>
-          <ns4:bodyPr xmlns:ns4="http://schemas.openxmlformats.org/drawingml/2006/main" wrap="square" rtlCol="0" anchor="t" lIns="0" tIns="0" rIns="0" bIns="0"/>
-          <ns5:lstStyle xmlns:ns5="http://schemas.openxmlformats.org/drawingml/2006/main">
-            <ns5:lvl1pPr marL="0" indent="0" algn="l">
-              <ns5:buNone/>
-              <ns5:defRPr sz="1800">
-                <ns5:solidFill>
-                  <ns5:srgbClr val="000000"/>
-                </ns5:solidFill>
-                <ns5:latin typeface="Aptos"/>
-              </ns5:defRPr>
-            </ns5:lvl1pPr>
-          </ns5:lstStyle>
-          <ns6:p xmlns:ns6="http://schemas.openxmlformats.org/drawingml/2006/main">
-            <ns6:r>
-              <ns6:rPr lang="en-US"/>
-              <ns6:t>One short sentence describing this tile.</ns6:t>
-            </ns6:r>
-            <ns6:endParaRPr lang="en-US"/>
-          </ns6:p>
-        </ns0:txBody>
-      </ns0:sp>
-      <ns0:sp xmlns:ns0="http://schemas.openxmlformats.org/presentationml/2006/main">
-        <ns0:nvSpPr>
-          <ns0:cNvPr id="32" name="Tile6 Bg"/>
-          <ns0:cNvSpPr/>
-          <ns0:nvPr/>
-        </ns0:nvSpPr>
-        <ns0:spPr>
-          <ns1:xfrm xmlns:ns1="http://schemas.openxmlformats.org/drawingml/2006/main">
-            <ns1:off x="11963400" y="7372350"/>
-            <ns1:ext cx="5181600" cy="2190750"/>
-          </ns1:xfrm>
-          <ns2:prstGeom xmlns:ns2="http://schemas.openxmlformats.org/drawingml/2006/main" prst="rect">
-            <ns2:avLst/>
-          </ns2:prstGeom>
-          <ns3:solidFill xmlns:ns3="http://schemas.openxmlformats.org/drawingml/2006/main">
-            <ns3:srgbClr val="F3F4F6"/>
-          </ns3:solidFill>
-          <ns4:ln xmlns:ns4="http://schemas.openxmlformats.org/drawingml/2006/main">
-            <ns4:noFill/>
-          </ns4:ln>
-        </ns0:spPr>
-        <ns0:txBody>
-          <ns5:bodyPr xmlns:ns5="http://schemas.openxmlformats.org/drawingml/2006/main" rtlCol="0" anchor="ctr"/>
-          <ns6:lstStyle xmlns:ns6="http://schemas.openxmlformats.org/drawingml/2006/main"/>
-          <ns7:p xmlns:ns7="http://schemas.openxmlformats.org/drawingml/2006/main">
-            <ns7:endParaRPr lang="en-US"/>
-          </ns7:p>
-        </ns0:txBody>
-      </ns0:sp>
-      <ns0:sp xmlns:ns0="http://schemas.openxmlformats.org/presentationml/2006/main">
-        <ns0:nvSpPr>
-          <ns0:cNvPr id="33" name="Tile6 Rule"/>
-          <ns0:cNvSpPr/>
-          <ns0:nvPr/>
-        </ns0:nvSpPr>
-        <ns0:spPr>
-          <ns1:xfrm xmlns:ns1="http://schemas.openxmlformats.org/drawingml/2006/main">
-            <ns1:off x="11963400" y="7372350"/>
-            <ns1:ext cx="5181600" cy="28575"/>
-          </ns1:xfrm>
-          <ns2:prstGeom xmlns:ns2="http://schemas.openxmlformats.org/drawingml/2006/main" prst="rect">
-            <ns2:avLst/>
-          </ns2:prstGeom>
-          <ns3:solidFill xmlns:ns3="http://schemas.openxmlformats.org/drawingml/2006/main">
-            <ns3:srgbClr val="0F6BFF"/>
-          </ns3:solidFill>
-          <ns4:ln xmlns:ns4="http://schemas.openxmlformats.org/drawingml/2006/main">
-            <ns4:noFill/>
-          </ns4:ln>
-        </ns0:spPr>
-        <ns0:txBody>
-          <ns5:bodyPr xmlns:ns5="http://schemas.openxmlformats.org/drawingml/2006/main" rtlCol="0" anchor="ctr"/>
-          <ns6:lstStyle xmlns:ns6="http://schemas.openxmlformats.org/drawingml/2006/main"/>
-          <ns7:p xmlns:ns7="http://schemas.openxmlformats.org/drawingml/2006/main">
-            <ns7:endParaRPr lang="en-US"/>
-          </ns7:p>
-        </ns0:txBody>
-      </ns0:sp>
-      <ns0:sp xmlns:ns0="http://schemas.openxmlformats.org/presentationml/2006/main">
-        <ns0:nvSpPr>
-          <ns0:cNvPr id="34" name="Tile6 Label"/>
-          <ns0:cNvSpPr>
-            <ns1:spLocks xmlns:ns1="http://schemas.openxmlformats.org/drawingml/2006/main" noGrp="1"/>
-          </ns0:cNvSpPr>
-          <ns0:nvPr>
-            <ns0:ph type="body" idx="30"/>
-          </ns0:nvPr>
-        </ns0:nvSpPr>
-        <ns0:spPr>
-          <ns2:xfrm xmlns:ns2="http://schemas.openxmlformats.org/drawingml/2006/main">
-            <ns2:off x="12192000" y="8210550"/>
-            <ns2:ext cx="4724400" cy="304800"/>
-          </ns2:xfrm>
-          <ns3:prstGeom xmlns:ns3="http://schemas.openxmlformats.org/drawingml/2006/main" prst="rect">
-            <ns3:avLst/>
-          </ns3:prstGeom>
-        </ns0:spPr>
-        <ns0:txBody>
-          <ns4:bodyPr xmlns:ns4="http://schemas.openxmlformats.org/drawingml/2006/main" wrap="square" rtlCol="0" anchor="t" lIns="0" tIns="0" rIns="0" bIns="0"/>
-          <ns5:lstStyle xmlns:ns5="http://schemas.openxmlformats.org/drawingml/2006/main">
-            <ns5:lvl1pPr marL="0" indent="0" algn="l">
-              <ns5:buNone/>
-              <ns5:defRPr sz="1600" b="1">
-                <ns5:solidFill>
-                  <ns5:srgbClr val="0F6BFF"/>
-                </ns5:solidFill>
-                <ns5:latin typeface="Aptos"/>
-              </ns5:defRPr>
-            </ns5:lvl1pPr>
-          </ns5:lstStyle>
-          <ns6:p xmlns:ns6="http://schemas.openxmlformats.org/drawingml/2006/main">
-            <ns6:r>
-              <ns6:rPr lang="en-US"/>
-              <ns6:t>Tile 6 label</ns6:t>
-            </ns6:r>
-            <ns6:endParaRPr lang="en-US"/>
-          </ns6:p>
-        </ns0:txBody>
-      </ns0:sp>
-      <ns0:sp xmlns:ns0="http://schemas.openxmlformats.org/presentationml/2006/main">
-        <ns0:nvSpPr>
-          <ns0:cNvPr id="35" name="Tile6 Body"/>
-          <ns0:cNvSpPr>
-            <ns1:spLocks xmlns:ns1="http://schemas.openxmlformats.org/drawingml/2006/main" noGrp="1"/>
-          </ns0:cNvSpPr>
-          <ns0:nvPr>
-            <ns0:ph type="body" idx="31"/>
-          </ns0:nvPr>
-        </ns0:nvSpPr>
-        <ns0:spPr>
-          <ns2:xfrm xmlns:ns2="http://schemas.openxmlformats.org/drawingml/2006/main">
-            <ns2:off x="12192000" y="8553450"/>
-            <ns2:ext cx="4724400" cy="857250"/>
-          </ns2:xfrm>
-          <ns3:prstGeom xmlns:ns3="http://schemas.openxmlformats.org/drawingml/2006/main" prst="rect">
-            <ns3:avLst/>
-          </ns3:prstGeom>
-        </ns0:spPr>
-        <ns0:txBody>
-          <ns4:bodyPr xmlns:ns4="http://schemas.openxmlformats.org/drawingml/2006/main" wrap="square" rtlCol="0" anchor="t" lIns="0" tIns="0" rIns="0" bIns="0"/>
-          <ns5:lstStyle xmlns:ns5="http://schemas.openxmlformats.org/drawingml/2006/main">
-            <ns5:lvl1pPr marL="0" indent="0" algn="l">
-              <ns5:buNone/>
-              <ns5:defRPr sz="1800">
-                <ns5:solidFill>
-                  <ns5:srgbClr val="000000"/>
-                </ns5:solidFill>
-                <ns5:latin typeface="Aptos"/>
-              </ns5:defRPr>
-            </ns5:lvl1pPr>
-          </ns5:lstStyle>
-          <ns6:p xmlns:ns6="http://schemas.openxmlformats.org/drawingml/2006/main">
-            <ns6:r>
-              <ns6:rPr lang="en-US"/>
-              <ns6:t>One short sentence describing this tile.</ns6:t>
-            </ns6:r>
-            <ns6:endParaRPr lang="en-US"/>
-          </ns6:p>
-        </ns0:txBody>
-      </ns0:sp>
-      <ns0:sp xmlns:ns0="http://schemas.openxmlformats.org/presentationml/2006/main">
-        <ns0:nvSpPr>
-          <ns0:cNvPr id="36" name="Footer"/>
-          <ns0:cNvSpPr>
-            <ns1:spLocks xmlns:ns1="http://schemas.openxmlformats.org/drawingml/2006/main" noGrp="1"/>
-          </ns0:cNvSpPr>
-          <ns0:nvPr/>
-        </ns0:nvSpPr>
-        <ns0:spPr>
-          <ns2:xfrm xmlns:ns2="http://schemas.openxmlformats.org/drawingml/2006/main">
-            <ns2:off x="1143000" y="9982200"/>
-            <ns2:ext cx="16002000" cy="228600"/>
-          </ns2:xfrm>
-          <ns3:prstGeom xmlns:ns3="http://schemas.openxmlformats.org/drawingml/2006/main" prst="rect">
-            <ns3:avLst/>
-          </ns3:prstGeom>
-        </ns0:spPr>
-        <ns0:txBody>
-          <ns4:bodyPr xmlns:ns4="http://schemas.openxmlformats.org/drawingml/2006/main" wrap="square" rtlCol="0" anchor="t" lIns="0" tIns="0" rIns="0" bIns="0"/>
-          <ns5:lstStyle xmlns:ns5="http://schemas.openxmlformats.org/drawingml/2006/main">
-            <ns5:lvl1pPr marL="0" indent="0" algn="l">
-              <ns5:buNone/>
-              <ns5:defRPr sz="900" cap="all" spc="50">
-                <ns5:solidFill>
-                  <ns5:srgbClr val="6B7280"/>
-                </ns5:solidFill>
-                <ns5:latin typeface="Aptos"/>
-              </ns5:defRPr>
-            </ns5:lvl1pPr>
-          </ns5:lstStyle>
-          <ns6:p xmlns:ns6="http://schemas.openxmlformats.org/drawingml/2006/main">
-            <ns6:r>
-              <ns6:rPr lang="en-US"/>
-              <ns6:t>OPEN COMPONENT MODEL · OCM.SOFTWARE</ns6:t>
-            </ns6:r>
-            <ns6:endParaRPr lang="en-US"/>
-          </ns6:p>
-        </ns0:txBody>
-      </ns0:sp>
-    </p:spTree>
-  </p:cSld>
-  <p:clrMapOvr>
-    <a:masterClrMapping/>
-  </p:clrMapOvr>
-</p:sldLayout>
-</file>
-
-<file path=ppt/slideLayouts/slideLayout7.xml><?xml version="1.0" encoding="utf-8"?>
-<p:sldLayout xmlns:a="http://schemas.openxmlformats.org/drawingml/2006/main" xmlns:r="http://schemas.openxmlformats.org/officeDocument/2006/relationships" xmlns:p="http://schemas.openxmlformats.org/presentationml/2006/main" type="twoObj" preserve="1" userDrawn="1">
-  <p:cSld name="Content / 2-Column">
-    <p:bg>
-      <p:bgPr>
-        <a:solidFill>
-          <a:srgbClr val="FFFFFF"/>
-        </a:solidFill>
-        <a:effectLst/>
-      </p:bgPr>
-    </p:bg>
-    <p:spTree>
-      <p:nvGrpSpPr>
-        <p:cNvPr id="1" name=""/>
-        <p:cNvGrpSpPr/>
-        <p:nvPr/>
-      </p:nvGrpSpPr>
-      <p:grpSpPr>
-        <a:xfrm>
-          <a:off x="0" y="0"/>
-          <a:ext cx="0" cy="0"/>
-          <a:chOff x="0" y="0"/>
-          <a:chExt cx="0" cy="0"/>
-        </a:xfrm>
-      </p:grpSpPr>
-      <ns0:sp xmlns:ns0="http://schemas.openxmlformats.org/presentationml/2006/main">
-        <ns0:nvSpPr>
-          <ns0:cNvPr id="10" name="Eyebrow"/>
-          <ns0:cNvSpPr>
-            <ns1:spLocks xmlns:ns1="http://schemas.openxmlformats.org/drawingml/2006/main" noGrp="1"/>
-          </ns0:cNvSpPr>
-          <ns0:nvPr>
-            <ns0:ph type="body" idx="1"/>
-          </ns0:nvPr>
-        </ns0:nvSpPr>
-        <ns0:spPr>
-          <ns2:xfrm xmlns:ns2="http://schemas.openxmlformats.org/drawingml/2006/main">
-            <ns2:off x="1143000" y="2428875"/>
-            <ns2:ext cx="16002000" cy="457200"/>
-          </ns2:xfrm>
-          <ns3:prstGeom xmlns:ns3="http://schemas.openxmlformats.org/drawingml/2006/main" prst="rect">
-            <ns3:avLst/>
-          </ns3:prstGeom>
-        </ns0:spPr>
-        <ns0:txBody>
-          <ns4:bodyPr xmlns:ns4="http://schemas.openxmlformats.org/drawingml/2006/main" wrap="square" rtlCol="0" anchor="t" lIns="0" tIns="0" rIns="0" bIns="0"/>
-          <ns5:lstStyle xmlns:ns5="http://schemas.openxmlformats.org/drawingml/2006/main">
-            <ns5:lvl1pPr marL="0" indent="0" algn="l">
-              <ns5:buNone/>
-              <ns5:defRPr sz="2800" b="1" cap="all" spc="140">
-                <ns5:solidFill>
-                  <ns5:srgbClr val="0F6BFF"/>
-                </ns5:solidFill>
-                <ns5:latin typeface="Aptos"/>
-              </ns5:defRPr>
-            </ns5:lvl1pPr>
-          </ns5:lstStyle>
-          <ns6:p xmlns:ns6="http://schemas.openxmlformats.org/drawingml/2006/main">
-            <ns6:r>
-              <ns6:rPr lang="en-US"/>
-              <ns6:t>EYEBROW</ns6:t>
-            </ns6:r>
-            <ns6:endParaRPr lang="en-US"/>
-          </ns6:p>
-        </ns0:txBody>
-      </ns0:sp>
-      <ns0:sp xmlns:ns0="http://schemas.openxmlformats.org/presentationml/2006/main">
-        <ns0:nvSpPr>
-          <ns0:cNvPr id="11" name="Title"/>
-          <ns0:cNvSpPr>
-            <ns1:spLocks xmlns:ns1="http://schemas.openxmlformats.org/drawingml/2006/main" noGrp="1"/>
-          </ns0:cNvSpPr>
-          <ns0:nvPr>
-            <ns0:ph type="title" idx="2"/>
-          </ns0:nvPr>
-        </ns0:nvSpPr>
-        <ns0:spPr>
-          <ns2:xfrm xmlns:ns2="http://schemas.openxmlformats.org/drawingml/2006/main">
-            <ns2:off x="1143000" y="2933700"/>
-            <ns2:ext cx="16002000" cy="1905000"/>
-          </ns2:xfrm>
-          <ns3:prstGeom xmlns:ns3="http://schemas.openxmlformats.org/drawingml/2006/main" prst="rect">
-            <ns3:avLst/>
-          </ns3:prstGeom>
-        </ns0:spPr>
-        <ns0:txBody>
-          <ns4:bodyPr xmlns:ns4="http://schemas.openxmlformats.org/drawingml/2006/main" wrap="square" rtlCol="0" anchor="t" lIns="0" tIns="0" rIns="0" bIns="0"/>
-          <ns5:lstStyle xmlns:ns5="http://schemas.openxmlformats.org/drawingml/2006/main">
-            <ns5:lvl1pPr marL="0" indent="0" algn="l">
-              <ns5:lnSpc>
-                <ns5:spcPct val="90000"/>
-              </ns5:lnSpc>
-              <ns5:buNone/>
-              <ns5:defRPr sz="6400" b="1">
-                <ns5:solidFill>
-                  <ns5:srgbClr val="000000"/>
-                </ns5:solidFill>
-                <ns5:latin typeface="Aptos Display"/>
-              </ns5:defRPr>
-            </ns5:lvl1pPr>
-          </ns5:lstStyle>
-          <ns6:p xmlns:ns6="http://schemas.openxmlformats.org/drawingml/2006/main">
-            <ns6:r>
-              <ns6:rPr lang="en-US"/>
-              <ns6:t>Section title goes here.</ns6:t>
-            </ns6:r>
-            <ns6:endParaRPr lang="en-US"/>
-          </ns6:p>
-        </ns0:txBody>
-      </ns0:sp>
-      <ns0:sp xmlns:ns0="http://schemas.openxmlformats.org/presentationml/2006/main">
-        <ns0:nvSpPr>
-          <ns0:cNvPr id="12" name="Left Body"/>
-          <ns0:cNvSpPr>
-            <ns1:spLocks xmlns:ns1="http://schemas.openxmlformats.org/drawingml/2006/main" noGrp="1"/>
-          </ns0:cNvSpPr>
-          <ns0:nvPr>
-            <ns0:ph type="body" idx="10"/>
-          </ns0:nvPr>
-        </ns0:nvSpPr>
-        <ns0:spPr>
-          <ns2:xfrm xmlns:ns2="http://schemas.openxmlformats.org/drawingml/2006/main">
-            <ns2:off x="1143000" y="4953000"/>
-            <ns2:ext cx="7810500" cy="4381500"/>
-          </ns2:xfrm>
-          <ns3:prstGeom xmlns:ns3="http://schemas.openxmlformats.org/drawingml/2006/main" prst="rect">
-            <ns3:avLst/>
-          </ns3:prstGeom>
-        </ns0:spPr>
-        <ns0:txBody>
-          <ns4:bodyPr xmlns:ns4="http://schemas.openxmlformats.org/drawingml/2006/main" wrap="square" rtlCol="0" anchor="t" lIns="0" tIns="0" rIns="0" bIns="0"/>
-          <ns5:lstStyle xmlns:ns5="http://schemas.openxmlformats.org/drawingml/2006/main">
-            <ns5:lvl1pPr marL="0" indent="0" algn="l">
-              <ns5:buNone/>
-              <ns5:defRPr sz="2200">
-                <ns5:solidFill>
-                  <ns5:srgbClr val="000000"/>
-                </ns5:solidFill>
-                <ns5:latin typeface="Aptos"/>
-              </ns5:defRPr>
-            </ns5:lvl1pPr>
-          </ns5:lstStyle>
-          <ns6:p xmlns:ns6="http://schemas.openxmlformats.org/drawingml/2006/main">
-            <ns6:r>
-              <ns6:rPr lang="en-US"/>
-              <ns6:t>Left column body.</ns6:t>
-            </ns6:r>
-            <ns6:endParaRPr lang="en-US"/>
-          </ns6:p>
-        </ns0:txBody>
-      </ns0:sp>
-      <ns0:sp xmlns:ns0="http://schemas.openxmlformats.org/presentationml/2006/main">
-        <ns0:nvSpPr>
-          <ns0:cNvPr id="13" name="Right Body"/>
-          <ns0:cNvSpPr>
-            <ns1:spLocks xmlns:ns1="http://schemas.openxmlformats.org/drawingml/2006/main" noGrp="1"/>
-          </ns0:cNvSpPr>
-          <ns0:nvPr>
-            <ns0:ph type="body" idx="11"/>
-          </ns0:nvPr>
-        </ns0:nvSpPr>
-        <ns0:spPr>
-          <ns2:xfrm xmlns:ns2="http://schemas.openxmlformats.org/drawingml/2006/main">
-            <ns2:off x="9334500" y="4953000"/>
-            <ns2:ext cx="7810500" cy="4381500"/>
-          </ns2:xfrm>
-          <ns3:prstGeom xmlns:ns3="http://schemas.openxmlformats.org/drawingml/2006/main" prst="rect">
-            <ns3:avLst/>
-          </ns3:prstGeom>
-        </ns0:spPr>
-        <ns0:txBody>
-          <ns4:bodyPr xmlns:ns4="http://schemas.openxmlformats.org/drawingml/2006/main" wrap="square" rtlCol="0" anchor="t" lIns="0" tIns="0" rIns="0" bIns="0"/>
-          <ns5:lstStyle xmlns:ns5="http://schemas.openxmlformats.org/drawingml/2006/main">
-            <ns5:lvl1pPr marL="0" indent="0" algn="l">
-              <ns5:buNone/>
-              <ns5:defRPr sz="2200">
-                <ns5:solidFill>
-                  <ns5:srgbClr val="000000"/>
-                </ns5:solidFill>
-                <ns5:latin typeface="Aptos"/>
-              </ns5:defRPr>
-            </ns5:lvl1pPr>
-          </ns5:lstStyle>
-          <ns6:p xmlns:ns6="http://schemas.openxmlformats.org/drawingml/2006/main">
-            <ns6:r>
-              <ns6:rPr lang="en-US"/>
-              <ns6:t>Right column body.</ns6:t>
-            </ns6:r>
-            <ns6:endParaRPr lang="en-US"/>
-          </ns6:p>
-        </ns0:txBody>
-      </ns0:sp>
-      <ns0:sp xmlns:ns0="http://schemas.openxmlformats.org/presentationml/2006/main">
-        <ns0:nvSpPr>
-          <ns0:cNvPr id="14" name="Footer"/>
-          <ns0:cNvSpPr>
-            <ns1:spLocks xmlns:ns1="http://schemas.openxmlformats.org/drawingml/2006/main" noGrp="1"/>
-          </ns0:cNvSpPr>
-          <ns0:nvPr/>
-        </ns0:nvSpPr>
-        <ns0:spPr>
-          <ns2:xfrm xmlns:ns2="http://schemas.openxmlformats.org/drawingml/2006/main">
-            <ns2:off x="1143000" y="9982200"/>
-            <ns2:ext cx="16002000" cy="228600"/>
-          </ns2:xfrm>
-          <ns3:prstGeom xmlns:ns3="http://schemas.openxmlformats.org/drawingml/2006/main" prst="rect">
-            <ns3:avLst/>
-          </ns3:prstGeom>
-        </ns0:spPr>
-        <ns0:txBody>
-          <ns4:bodyPr xmlns:ns4="http://schemas.openxmlformats.org/drawingml/2006/main" wrap="square" rtlCol="0" anchor="t" lIns="0" tIns="0" rIns="0" bIns="0"/>
-          <ns5:lstStyle xmlns:ns5="http://schemas.openxmlformats.org/drawingml/2006/main">
-            <ns5:lvl1pPr marL="0" indent="0" algn="l">
-              <ns5:buNone/>
-              <ns5:defRPr sz="900" cap="all" spc="50">
-                <ns5:solidFill>
-                  <ns5:srgbClr val="6B7280"/>
-                </ns5:solidFill>
-                <ns5:latin typeface="Aptos"/>
-              </ns5:defRPr>
-            </ns5:lvl1pPr>
-          </ns5:lstStyle>
-          <ns6:p xmlns:ns6="http://schemas.openxmlformats.org/drawingml/2006/main">
-            <ns6:r>
-              <ns6:rPr lang="en-US"/>
-              <ns6:t>OPEN COMPONENT MODEL · OCM.SOFTWARE</ns6:t>
-            </ns6:r>
-            <ns6:endParaRPr lang="en-US"/>
-          </ns6:p>
-        </ns0:txBody>
-      </ns0:sp>
-    </p:spTree>
-  </p:cSld>
-  <p:clrMapOvr>
-    <a:masterClrMapping/>
-  </p:clrMapOvr>
-</p:sldLayout>
-</file>
-
-<file path=ppt/slideLayouts/slideLayout8.xml><?xml version="1.0" encoding="utf-8"?>
-<p:sldLayout xmlns:a="http://schemas.openxmlformats.org/drawingml/2006/main" xmlns:r="http://schemas.openxmlformats.org/officeDocument/2006/relationships" xmlns:p="http://schemas.openxmlformats.org/presentationml/2006/main" type="secHead" preserve="1" userDrawn="1">
-  <p:cSld name="Section Divider">
-    <p:bg>
-      <p:bgPr>
-        <a:solidFill>
-          <a:srgbClr val="0F6BFF"/>
-        </a:solidFill>
-        <a:effectLst/>
-      </p:bgPr>
-    </p:bg>
-    <p:spTree>
-      <p:nvGrpSpPr>
-        <p:cNvPr id="1" name=""/>
-        <p:cNvGrpSpPr/>
-        <p:nvPr/>
-      </p:nvGrpSpPr>
-      <p:grpSpPr>
-        <a:xfrm>
-          <a:off x="0" y="0"/>
-          <a:ext cx="0" cy="0"/>
-          <a:chOff x="0" y="0"/>
-          <a:chExt cx="0" cy="0"/>
-        </a:xfrm>
-      </p:grpSpPr>
-      <ns0:sp xmlns:ns0="http://schemas.openxmlformats.org/presentationml/2006/main">
-        <ns0:nvSpPr>
-          <ns0:cNvPr id="10" name="Section Title"/>
-          <ns0:cNvSpPr>
-            <ns1:spLocks xmlns:ns1="http://schemas.openxmlformats.org/drawingml/2006/main" noGrp="1"/>
-          </ns0:cNvSpPr>
-          <ns0:nvPr>
-            <ns0:ph type="title" idx="1"/>
-          </ns0:nvPr>
-        </ns0:nvSpPr>
-        <ns0:spPr>
-          <ns2:xfrm xmlns:ns2="http://schemas.openxmlformats.org/drawingml/2006/main">
-            <ns2:off x="762000" y="4381500"/>
-            <ns2:ext cx="16764000" cy="1905000"/>
-          </ns2:xfrm>
-          <ns3:prstGeom xmlns:ns3="http://schemas.openxmlformats.org/drawingml/2006/main" prst="rect">
-            <ns3:avLst/>
-          </ns3:prstGeom>
-        </ns0:spPr>
-        <ns0:txBody>
-          <ns4:bodyPr xmlns:ns4="http://schemas.openxmlformats.org/drawingml/2006/main" wrap="square" rtlCol="0" anchor="ctr" lIns="0" tIns="0" rIns="0" bIns="0"/>
-          <ns5:lstStyle xmlns:ns5="http://schemas.openxmlformats.org/drawingml/2006/main">
-            <ns5:lvl1pPr marL="0" indent="0" algn="ctr">
-              <ns5:buNone/>
-              <ns5:defRPr sz="7200" b="1">
-                <ns5:solidFill>
-                  <ns5:srgbClr val="FFFFFF"/>
-                </ns5:solidFill>
-                <ns5:latin typeface="Aptos Display"/>
-              </ns5:defRPr>
-            </ns5:lvl1pPr>
-          </ns5:lstStyle>
-          <ns6:p xmlns:ns6="http://schemas.openxmlformats.org/drawingml/2006/main">
-            <ns6:r>
-              <ns6:rPr lang="en-US"/>
-              <ns6:t>Section</ns6:t>
-            </ns6:r>
-            <ns6:endParaRPr lang="en-US"/>
-          </ns6:p>
-        </ns0:txBody>
-      </ns0:sp>
-    </p:spTree>
-  </p:cSld>
-  <p:clrMapOvr>
-    <a:masterClrMapping/>
-  </p:clrMapOvr>
-</p:sldLayout>
-</file>
-
-<file path=ppt/slideLayouts/slideLayout9.xml><?xml version="1.0" encoding="utf-8"?>
-<p:sldLayout xmlns:a="http://schemas.openxmlformats.org/drawingml/2006/main" xmlns:r="http://schemas.openxmlformats.org/officeDocument/2006/relationships" xmlns:p="http://schemas.openxmlformats.org/presentationml/2006/main" type="obj" preserve="1" userDrawn="1">
-  <p:cSld name="Plain">
-    <p:bg>
-      <p:bgPr>
-        <a:solidFill>
-          <a:srgbClr val="FFFFFF"/>
-        </a:solidFill>
-        <a:effectLst/>
-      </p:bgPr>
-    </p:bg>
-    <p:spTree>
-      <p:nvGrpSpPr>
-        <p:cNvPr id="1" name=""/>
-        <p:cNvGrpSpPr/>
-        <p:nvPr/>
-      </p:nvGrpSpPr>
-      <p:grpSpPr>
-        <a:xfrm>
-          <a:off x="0" y="0"/>
-          <a:ext cx="0" cy="0"/>
-          <a:chOff x="0" y="0"/>
-          <a:chExt cx="0" cy="0"/>
-        </a:xfrm>
-      </p:grpSpPr>
-      <ns0:sp xmlns:ns0="http://schemas.openxmlformats.org/presentationml/2006/main">
-        <ns0:nvSpPr>
-          <ns0:cNvPr id="10" name="Eyebrow"/>
-          <ns0:cNvSpPr>
-            <ns1:spLocks xmlns:ns1="http://schemas.openxmlformats.org/drawingml/2006/main" noGrp="1"/>
-          </ns0:cNvSpPr>
-          <ns0:nvPr>
-            <ns0:ph type="body" idx="1"/>
-          </ns0:nvPr>
-        </ns0:nvSpPr>
-        <ns0:spPr>
-          <ns2:xfrm xmlns:ns2="http://schemas.openxmlformats.org/drawingml/2006/main">
-            <ns2:off x="1143000" y="2428875"/>
-            <ns2:ext cx="16002000" cy="457200"/>
-          </ns2:xfrm>
-          <ns3:prstGeom xmlns:ns3="http://schemas.openxmlformats.org/drawingml/2006/main" prst="rect">
-            <ns3:avLst/>
-          </ns3:prstGeom>
-        </ns0:spPr>
-        <ns0:txBody>
-          <ns4:bodyPr xmlns:ns4="http://schemas.openxmlformats.org/drawingml/2006/main" wrap="square" rtlCol="0" anchor="t" lIns="0" tIns="0" rIns="0" bIns="0"/>
-          <ns5:lstStyle xmlns:ns5="http://schemas.openxmlformats.org/drawingml/2006/main">
-            <ns5:lvl1pPr marL="0" indent="0" algn="l">
-              <ns5:buNone/>
-              <ns5:defRPr sz="2800" b="1" cap="all" spc="140">
-                <ns5:solidFill>
-                  <ns5:srgbClr val="0F6BFF"/>
-                </ns5:solidFill>
-                <ns5:latin typeface="Aptos"/>
-              </ns5:defRPr>
-            </ns5:lvl1pPr>
-          </ns5:lstStyle>
-          <ns6:p xmlns:ns6="http://schemas.openxmlformats.org/drawingml/2006/main">
-            <ns6:r>
-              <ns6:rPr lang="en-US"/>
-              <ns6:t>EYEBROW</ns6:t>
-            </ns6:r>
-            <ns6:endParaRPr lang="en-US"/>
-          </ns6:p>
-        </ns0:txBody>
-      </ns0:sp>
-      <ns0:sp xmlns:ns0="http://schemas.openxmlformats.org/presentationml/2006/main">
-        <ns0:nvSpPr>
-          <ns0:cNvPr id="11" name="Title"/>
-          <ns0:cNvSpPr>
-            <ns1:spLocks xmlns:ns1="http://schemas.openxmlformats.org/drawingml/2006/main" noGrp="1"/>
-          </ns0:cNvSpPr>
-          <ns0:nvPr>
-            <ns0:ph type="title" idx="2"/>
-          </ns0:nvPr>
-        </ns0:nvSpPr>
-        <ns0:spPr>
-          <ns2:xfrm xmlns:ns2="http://schemas.openxmlformats.org/drawingml/2006/main">
-            <ns2:off x="1143000" y="2933700"/>
-            <ns2:ext cx="16002000" cy="1905000"/>
-          </ns2:xfrm>
-          <ns3:prstGeom xmlns:ns3="http://schemas.openxmlformats.org/drawingml/2006/main" prst="rect">
-            <ns3:avLst/>
-          </ns3:prstGeom>
-        </ns0:spPr>
-        <ns0:txBody>
-          <ns4:bodyPr xmlns:ns4="http://schemas.openxmlformats.org/drawingml/2006/main" wrap="square" rtlCol="0" anchor="t" lIns="0" tIns="0" rIns="0" bIns="0"/>
-          <ns5:lstStyle xmlns:ns5="http://schemas.openxmlformats.org/drawingml/2006/main">
-            <ns5:lvl1pPr marL="0" indent="0" algn="l">
-              <ns5:lnSpc>
-                <ns5:spcPct val="90000"/>
-              </ns5:lnSpc>
-              <ns5:buNone/>
-              <ns5:defRPr sz="6400" b="1">
-                <ns5:solidFill>
-                  <ns5:srgbClr val="000000"/>
-                </ns5:solidFill>
-                <ns5:latin typeface="Aptos Display"/>
-              </ns5:defRPr>
-            </ns5:lvl1pPr>
-          </ns5:lstStyle>
-          <ns6:p xmlns:ns6="http://schemas.openxmlformats.org/drawingml/2006/main">
-            <ns6:r>
-              <ns6:rPr lang="en-US"/>
-              <ns6:t>Section title goes here.</ns6:t>
-            </ns6:r>
-            <ns6:endParaRPr lang="en-US"/>
-          </ns6:p>
-        </ns0:txBody>
-      </ns0:sp>
-      <ns0:sp xmlns:ns0="http://schemas.openxmlformats.org/presentationml/2006/main">
-        <ns0:nvSpPr>
-          <ns0:cNvPr id="12" name="Body"/>
-          <ns0:cNvSpPr>
-            <ns1:spLocks xmlns:ns1="http://schemas.openxmlformats.org/drawingml/2006/main" noGrp="1"/>
-          </ns0:cNvSpPr>
-          <ns0:nvPr>
-            <ns0:ph type="body" idx="10"/>
-          </ns0:nvPr>
-        </ns0:nvSpPr>
-        <ns0:spPr>
-          <ns2:xfrm xmlns:ns2="http://schemas.openxmlformats.org/drawingml/2006/main">
-            <ns2:off x="1143000" y="5524500"/>
-            <ns2:ext cx="16002000" cy="3810000"/>
           </ns2:xfrm>
           <ns3:prstGeom xmlns:ns3="http://schemas.openxmlformats.org/drawingml/2006/main" prst="rect">
             <ns3:avLst/>
@@ -3333,7 +3082,6 @@
     <p:sldLayoutId id="2147483655" r:id="rId8"/>
     <p:sldLayoutId id="2147483656" r:id="rId9"/>
     <p:sldLayoutId id="2147483657" r:id="rId10"/>
-    <p:sldLayoutId id="2147483658" r:id="rId11"/>
   </p:sldLayoutIdLst>
   <p:txStyles>
     <p:titleStyle>
@@ -3600,7 +3348,7 @@
       <p:grpSpPr/>
       <p:pic>
         <p:nvPicPr>
-          <p:cNvPr id="7" name="Picture 6" descr="OCM-Banner.png"/>
+          <p:cNvPr id="6" name="Picture 5" descr="OCM-Banner.png"/>
           <p:cNvPicPr>
             <a:picLocks noChangeAspect="1"/>
           </p:cNvPicPr>
@@ -3643,7 +3391,7 @@
                   <a:srgbClr val="FFFFFF"/>
                 </a:solidFill>
               </a:rPr>
-              <a:t>Three minutes from now,</a:t>
+              <a:t>Your supply chain has</a:t>
             </a:r>
           </a:p>
         </p:txBody>
@@ -3656,32 +3404,6 @@
           </p:cNvSpPr>
           <p:nvPr>
             <p:ph type="body" idx="2"/>
-          </p:nvPr>
-        </p:nvSpPr>
-        <p:spPr/>
-        <p:txBody>
-          <a:bodyPr/>
-          <a:lstStyle/>
-          <a:p>
-            <a:r>
-              <a:rPr>
-                <a:solidFill>
-                  <a:srgbClr val="FFFFFF"/>
-                </a:solidFill>
-              </a:rPr>
-              <a:t>you'll know what your</a:t>
-            </a:r>
-          </a:p>
-        </p:txBody>
-      </p:sp>
-      <p:sp>
-        <p:nvSpPr>
-          <p:cNvPr id="4" name="Text Placeholder 3"/>
-          <p:cNvSpPr>
-            <a:spLocks noGrp="1"/>
-          </p:cNvSpPr>
-          <p:nvPr>
-            <p:ph type="body" idx="3"/>
           </p:nvPr>
         </p:nvSpPr>
         <p:spPr/>
@@ -3715,7 +3437,33 @@
                   <a:lin ang="0" scaled="1"/>
                 </a:gradFill>
               </a:rPr>
-              <a:t>supply chain doesn't</a:t>
+              <a:t>blind spots.</a:t>
+            </a:r>
+          </a:p>
+        </p:txBody>
+      </p:sp>
+      <p:sp>
+        <p:nvSpPr>
+          <p:cNvPr id="4" name="Text Placeholder 3"/>
+          <p:cNvSpPr>
+            <a:spLocks noGrp="1"/>
+          </p:cNvSpPr>
+          <p:nvPr>
+            <p:ph type="body" idx="3"/>
+          </p:nvPr>
+        </p:nvSpPr>
+        <p:spPr/>
+        <p:txBody>
+          <a:bodyPr/>
+          <a:lstStyle/>
+          <a:p>
+            <a:r>
+              <a:rPr>
+                <a:solidFill>
+                  <a:srgbClr val="5CD6FF"/>
+                </a:solidFill>
+              </a:rPr>
+              <a:t>Three minutes from now, you'll know what they are.</a:t>
             </a:r>
           </a:p>
         </p:txBody>
@@ -3738,32 +3486,6 @@
             <a:r>
               <a:rPr>
                 <a:solidFill>
-                  <a:srgbClr val="5CD6FF"/>
-                </a:solidFill>
-              </a:rPr>
-              <a:t>A new model for delivering software the auditor can verify, the operator can run, and the regulator already requires.</a:t>
-            </a:r>
-          </a:p>
-        </p:txBody>
-      </p:sp>
-      <p:sp>
-        <p:nvSpPr>
-          <p:cNvPr id="6" name="Text Placeholder 5"/>
-          <p:cNvSpPr>
-            <a:spLocks noGrp="1"/>
-          </p:cNvSpPr>
-          <p:nvPr>
-            <p:ph type="body" idx="5"/>
-          </p:nvPr>
-        </p:nvSpPr>
-        <p:spPr/>
-        <p:txBody>
-          <a:bodyPr/>
-          <a:lstStyle/>
-          <a:p>
-            <a:r>
-              <a:rPr>
-                <a:solidFill>
                   <a:srgbClr val="FFFFFF"/>
                 </a:solidFill>
               </a:rPr>
@@ -3774,7 +3496,7 @@
       </p:sp>
       <p:pic>
         <p:nvPicPr>
-          <p:cNvPr id="8" name="Picture 7" descr="ocm-horizontal-white_400.png"/>
+          <p:cNvPr id="7" name="Picture 6" descr="ocm-horizontal-white_400.png"/>
           <p:cNvPicPr>
             <a:picLocks noChangeAspect="1"/>
           </p:cNvPicPr>
@@ -3798,7 +3520,7 @@
       </p:pic>
       <p:pic>
         <p:nvPicPr>
-          <p:cNvPr id="9" name="Picture 8" descr="neonephos-foundation-horizontal-white_400.png"/>
+          <p:cNvPr id="8" name="Picture 7" descr="neonephos-foundation-horizontal-white_400.png"/>
           <p:cNvPicPr>
             <a:picLocks noChangeAspect="1"/>
           </p:cNvPicPr>
@@ -5208,7 +4930,7 @@
       </p:sp>
       <p:pic>
         <p:nvPicPr>
-          <p:cNvPr id="4" name="Picture 3" descr="03-meet-ocm-hub-and-spoke_1760.png"/>
+          <p:cNvPr id="4" name="Picture 3" descr="03-meet-ocm-hub-and-spoke_1890.png"/>
           <p:cNvPicPr>
             <a:picLocks noChangeAspect="1"/>
           </p:cNvPicPr>
@@ -5222,8 +4944,8 @@
         </p:blipFill>
         <p:spPr>
           <a:xfrm>
-            <a:off x="762000" y="4381500"/>
-            <a:ext cx="16764000" cy="5143500"/>
+            <a:off x="-866775" y="4191000"/>
+            <a:ext cx="18002250" cy="5734050"/>
           </a:xfrm>
           <a:prstGeom prst="rect">
             <a:avLst/>
@@ -5523,7 +5245,7 @@
           <a:lstStyle/>
           <a:p>
             <a:r>
-              <a:t>OCM doesn't replace your tools. It gives them something to sign together.</a:t>
+              <a:t>OCM doesn't replace your tools. It gives them an envelope to compose around.</a:t>
             </a:r>
           </a:p>
         </p:txBody>
@@ -5544,7 +5266,7 @@
           <a:lstStyle/>
           <a:p>
             <a:r>
-              <a:t>KEYLESS (SIGSTORE) / KEY-BASED (YOUR PKI)</a:t>
+              <a:t>SIGNING</a:t>
             </a:r>
           </a:p>
         </p:txBody>
@@ -5565,7 +5287,7 @@
           <a:lstStyle/>
           <a:p>
             <a:r>
-              <a:t>Only signs one artifact. OCM gives them the complete SBoD to sign. One signature, covering every artifact in the delivery, by digest. Your existing keys still work.</a:t>
+              <a:t>Keyless (Sigstore) or key-based (your PKI) signs one artifact at a time. OCM gives them the complete SBoD to sign — one signature covers every artifact in the delivery, by digest.</a:t>
             </a:r>
           </a:p>
         </p:txBody>
@@ -5586,7 +5308,7 @@
           <a:lstStyle/>
           <a:p>
             <a:r>
-              <a:t>YOUR SBOM TOOL OR FORMAT (SYFT, CYCLONEDX, SPDX)</a:t>
+              <a:t>TRANSPORT</a:t>
             </a:r>
           </a:p>
         </p:txBody>
@@ -5607,7 +5329,7 @@
           <a:lstStyle/>
           <a:p>
             <a:r>
-              <a:t>Lists what's in your software. The SBoD contains or references it. Your SBOM tool is unchanged; the SBOM now travels with the signature.</a:t>
+              <a:t>Helm registries, S3, OCI — each moves artifacts. OCM moves a signed envelope across any boundary: registry to registry, registry to air-gapped archive. The signature travels intact.</a:t>
             </a:r>
           </a:p>
         </p:txBody>
@@ -5628,7 +5350,7 @@
           <a:lstStyle/>
           <a:p>
             <a:r>
-              <a:t>A BIT OF OCI + SIGSTORE + YOUR OWN SCRIPTS</a:t>
+              <a:t>COMPLIANCE</a:t>
             </a:r>
           </a:p>
         </p:txBody>
@@ -5649,7 +5371,7 @@
           <a:lstStyle/>
           <a:p>
             <a:r>
-              <a:t>Can almost get you there, in pieces. OCM is the standardised version, openly governed, with conformance tests and the SBoD vocabulary your auditors are starting to expect.</a:t>
+              <a:t>Trivy, Grype, your SBOM tools — each scans in isolation. OCM (via Open Delivery Gear) correlates every finding by component identity. Compliance is a system output, not a quarterly project.</a:t>
             </a:r>
           </a:p>
         </p:txBody>

--- a/docs/community/marketing/decks/exec-phase1/OCM-Sovereign-Delivery-Exec.pptx
+++ b/docs/community/marketing/decks/exec-phase1/OCM-Sovereign-Delivery-Exec.pptx
@@ -156,8 +156,8 @@
         </ns0:nvSpPr>
         <ns0:spPr>
           <ns2:xfrm xmlns:ns2="http://schemas.openxmlformats.org/drawingml/2006/main">
-            <ns2:off x="914400" y="1905000"/>
-            <ns2:ext cx="16192500" cy="1333500"/>
+            <ns2:off x="914400" y="1714500"/>
+            <ns2:ext cx="16192500" cy="1524000"/>
           </ns2:xfrm>
           <ns3:prstGeom xmlns:ns3="http://schemas.openxmlformats.org/drawingml/2006/main" prst="rect">
             <ns3:avLst/>
@@ -199,8 +199,8 @@
         </ns0:nvSpPr>
         <ns0:spPr>
           <ns2:xfrm xmlns:ns2="http://schemas.openxmlformats.org/drawingml/2006/main">
-            <ns2:off x="914400" y="3333750"/>
-            <ns2:ext cx="16192500" cy="1333500"/>
+            <ns2:off x="914400" y="3524250"/>
+            <ns2:ext cx="16192500" cy="1524000"/>
           </ns2:xfrm>
           <ns3:prstGeom xmlns:ns3="http://schemas.openxmlformats.org/drawingml/2006/main" prst="rect">
             <ns3:avLst/>
@@ -242,7 +242,7 @@
         </ns0:nvSpPr>
         <ns0:spPr>
           <ns2:xfrm xmlns:ns2="http://schemas.openxmlformats.org/drawingml/2006/main">
-            <ns2:off x="914400" y="5048250"/>
+            <ns2:off x="914400" y="5334000"/>
             <ns2:ext cx="16192500" cy="857250"/>
           </ns2:xfrm>
           <ns3:prstGeom xmlns:ns3="http://schemas.openxmlformats.org/drawingml/2006/main" prst="rect">
@@ -288,7 +288,7 @@
         </ns0:nvSpPr>
         <ns0:spPr>
           <ns2:xfrm xmlns:ns2="http://schemas.openxmlformats.org/drawingml/2006/main">
-            <ns2:off x="914400" y="6286500"/>
+            <ns2:off x="914400" y="6572250"/>
             <ns2:ext cx="16192500" cy="571500"/>
           </ns2:xfrm>
           <ns3:prstGeom xmlns:ns3="http://schemas.openxmlformats.org/drawingml/2006/main" prst="rect">
@@ -3644,7 +3644,7 @@
                   <a:srgbClr val="000000"/>
                 </a:solidFill>
               </a:rPr>
-              <a:t>Open Delivery Gear (ODG) is OCM's compliance automation engine.</a:t>
+              <a:t>Open Delivery Gear (ODG) is the OCM compliance automation engine.</a:t>
             </a:r>
           </a:p>
           <a:p>
@@ -5702,7 +5702,7 @@
       </p:sp>
       <p:pic>
         <p:nvPicPr>
-          <p:cNvPr id="4" name="Picture 3" descr="06-sovereign-airgap_1760.png"/>
+          <p:cNvPr id="4" name="Picture 3" descr="06-sovereign-airgap_1519.png"/>
           <p:cNvPicPr>
             <a:picLocks noChangeAspect="1"/>
           </p:cNvPicPr>
@@ -5716,8 +5716,8 @@
         </p:blipFill>
         <p:spPr>
           <a:xfrm>
-            <a:off x="3048000" y="4381500"/>
-            <a:ext cx="12192000" cy="5334000"/>
+            <a:off x="1914149" y="3686175"/>
+            <a:ext cx="13326226" cy="6334125"/>
           </a:xfrm>
           <a:prstGeom prst="rect">
             <a:avLst/>

--- a/docs/community/marketing/decks/exec-phase1/OCM-Sovereign-Delivery-Exec.pptx
+++ b/docs/community/marketing/decks/exec-phase1/OCM-Sovereign-Delivery-Exec.pptx
@@ -3753,6 +3753,41 @@
           </a:p>
         </p:txBody>
       </p:sp>
+      <p:sp>
+        <p:nvSpPr>
+          <p:cNvPr id="5" name="TextBox 4"/>
+          <p:cNvSpPr txBox="1"/>
+          <p:nvPr/>
+        </p:nvSpPr>
+        <p:spPr>
+          <a:xfrm>
+            <a:off x="1143000" y="9715500"/>
+            <a:ext cx="16002000" cy="381000"/>
+          </a:xfrm>
+          <a:prstGeom prst="rect">
+            <a:avLst/>
+          </a:prstGeom>
+          <a:noFill/>
+        </p:spPr>
+        <p:txBody>
+          <a:bodyPr wrap="none" lIns="0" rIns="0" tIns="0" bIns="0">
+            <a:spAutoFit/>
+          </a:bodyPr>
+          <a:lstStyle/>
+          <a:p>
+            <a:pPr algn="ctr"/>
+            <a:r>
+              <a:rPr sz="1300">
+                <a:solidFill>
+                  <a:srgbClr val="6B7280"/>
+                </a:solidFill>
+                <a:latin typeface="Aptos"/>
+              </a:rPr>
+              <a:t>github.com/open-component-model/open-delivery-gear</a:t>
+            </a:r>
+          </a:p>
+        </p:txBody>
+      </p:sp>
     </p:spTree>
   </p:cSld>
   <p:clrMapOvr>
@@ -4520,6 +4555,41 @@
           </a:p>
         </p:txBody>
       </p:sp>
+      <p:sp>
+        <p:nvSpPr>
+          <p:cNvPr id="13" name="TextBox 12"/>
+          <p:cNvSpPr txBox="1"/>
+          <p:nvPr/>
+        </p:nvSpPr>
+        <p:spPr>
+          <a:xfrm>
+            <a:off x="1143000" y="9906000"/>
+            <a:ext cx="16002000" cy="381000"/>
+          </a:xfrm>
+          <a:prstGeom prst="rect">
+            <a:avLst/>
+          </a:prstGeom>
+          <a:noFill/>
+        </p:spPr>
+        <p:txBody>
+          <a:bodyPr wrap="none" lIns="0" rIns="0" tIns="0" bIns="0">
+            <a:spAutoFit/>
+          </a:bodyPr>
+          <a:lstStyle/>
+          <a:p>
+            <a:pPr algn="ctr"/>
+            <a:r>
+              <a:rPr sz="1300">
+                <a:solidFill>
+                  <a:srgbClr val="6B7280"/>
+                </a:solidFill>
+                <a:latin typeface="Aptos"/>
+              </a:rPr>
+              <a:t>neonephos.org · gardener.cloud · konfidence.cloud · platform-mesh.io · open-control-plane.io</a:t>
+            </a:r>
+          </a:p>
+        </p:txBody>
+      </p:sp>
     </p:spTree>
   </p:cSld>
   <p:clrMapOvr>
@@ -5049,7 +5119,7 @@
                   <a:srgbClr val="000000"/>
                 </a:solidFill>
               </a:rPr>
-              <a:t>An SBOM tells you what's in your software. It was built for inventory.</a:t>
+              <a:t>An SBOM (Software Bill of Materials) tells you what's in your software. It was built for inventory.</a:t>
             </a:r>
           </a:p>
           <a:p>

--- a/docs/community/marketing/decks/exec-phase1/OCM-Sovereign-Delivery-Exec.pptx
+++ b/docs/community/marketing/decks/exec-phase1/OCM-Sovereign-Delivery-Exec.pptx
@@ -18,6 +18,7 @@
     <p:sldId id="266" r:id="rId17"/>
     <p:sldId id="267" r:id="rId18"/>
     <p:sldId id="268" r:id="rId19"/>
+    <p:sldId id="269" r:id="rId20"/>
   </p:sldIdLst>
   <p:sldSz cx="18288000" cy="10287000"/>
   <p:notesSz cx="6858000" cy="9144000"/>
@@ -4340,7 +4341,9 @@
       </p:sp>
       <p:pic>
         <p:nvPicPr>
-          <p:cNvPr id="5" name="Picture 4" descr="sap-horizontal-color_640_crop.png"/>
+          <p:cNvPr id="5" name="Picture 4" descr="sap-horizontal-color_640_crop.png">
+            <a:hlinkClick r:id="rId3"/>
+          </p:cNvPr>
           <p:cNvPicPr>
             <a:picLocks noChangeAspect="1"/>
           </p:cNvPicPr>
@@ -4364,14 +4367,16 @@
       </p:pic>
       <p:pic>
         <p:nvPicPr>
-          <p:cNvPr id="6" name="Picture 5" descr="bwi-horizontal-color_640_crop.png"/>
+          <p:cNvPr id="6" name="Picture 5" descr="bwi-horizontal-color_640_crop.png">
+            <a:hlinkClick r:id="rId5"/>
+          </p:cNvPr>
           <p:cNvPicPr>
             <a:picLocks noChangeAspect="1"/>
           </p:cNvPicPr>
           <p:nvPr/>
         </p:nvPicPr>
         <p:blipFill>
-          <a:blip r:embed="rId3"/>
+          <a:blip r:embed="rId4"/>
           <a:stretch>
             <a:fillRect/>
           </a:stretch>
@@ -4388,14 +4393,16 @@
       </p:pic>
       <p:pic>
         <p:nvPicPr>
-          <p:cNvPr id="7" name="Picture 6" descr="sap-ns2-getlogovector_crop.png"/>
+          <p:cNvPr id="7" name="Picture 6" descr="sap-ns2-getlogovector_crop.png">
+            <a:hlinkClick r:id="rId7"/>
+          </p:cNvPr>
           <p:cNvPicPr>
             <a:picLocks noChangeAspect="1"/>
           </p:cNvPicPr>
           <p:nvPr/>
         </p:nvPicPr>
         <p:blipFill>
-          <a:blip r:embed="rId4"/>
+          <a:blip r:embed="rId6"/>
           <a:stretch>
             <a:fillRect/>
           </a:stretch>
@@ -4446,21 +4453,23 @@
       </p:sp>
       <p:pic>
         <p:nvPicPr>
-          <p:cNvPr id="9" name="Picture 8" descr="gardener-horizontal-color_640_crop.png"/>
+          <p:cNvPr id="9" name="Picture 8" descr="gardener-horizontal-color_640_crop.png">
+            <a:hlinkClick r:id="rId9"/>
+          </p:cNvPr>
           <p:cNvPicPr>
             <a:picLocks noChangeAspect="1"/>
           </p:cNvPicPr>
           <p:nvPr/>
         </p:nvPicPr>
         <p:blipFill>
-          <a:blip r:embed="rId5"/>
+          <a:blip r:embed="rId8"/>
           <a:stretch>
             <a:fillRect/>
           </a:stretch>
         </p:blipFill>
         <p:spPr>
           <a:xfrm>
-            <a:off x="2538412" y="7955322"/>
+            <a:off x="1905000" y="7955322"/>
             <a:ext cx="3048000" cy="662855"/>
           </a:xfrm>
           <a:prstGeom prst="rect">
@@ -4470,21 +4479,23 @@
       </p:pic>
       <p:pic>
         <p:nvPicPr>
-          <p:cNvPr id="10" name="Picture 9" descr="konfidence-horizontal-light_640_crop.png"/>
+          <p:cNvPr id="10" name="Picture 9" descr="konfidence-horizontal-light_640_crop.png">
+            <a:hlinkClick r:id="rId11"/>
+          </p:cNvPr>
           <p:cNvPicPr>
             <a:picLocks noChangeAspect="1"/>
           </p:cNvPicPr>
           <p:nvPr/>
         </p:nvPicPr>
         <p:blipFill>
-          <a:blip r:embed="rId6"/>
+          <a:blip r:embed="rId10"/>
           <a:stretch>
             <a:fillRect/>
           </a:stretch>
         </p:blipFill>
         <p:spPr>
           <a:xfrm>
-            <a:off x="7615237" y="8134848"/>
+            <a:off x="5715000" y="8134848"/>
             <a:ext cx="3048000" cy="303803"/>
           </a:xfrm>
           <a:prstGeom prst="rect">
@@ -4494,21 +4505,49 @@
       </p:pic>
       <p:pic>
         <p:nvPicPr>
-          <p:cNvPr id="11" name="Picture 10" descr="platform-mesh-horizontal-color_640_crop.png"/>
+          <p:cNvPr id="11" name="Picture 10" descr="opencontrolplane-icon-color_640_crop.png">
+            <a:hlinkClick r:id="rId13"/>
+          </p:cNvPr>
           <p:cNvPicPr>
             <a:picLocks noChangeAspect="1"/>
           </p:cNvPicPr>
           <p:nvPr/>
         </p:nvPicPr>
         <p:blipFill>
-          <a:blip r:embed="rId7"/>
+          <a:blip r:embed="rId12"/>
           <a:stretch>
             <a:fillRect/>
           </a:stretch>
         </p:blipFill>
         <p:spPr>
           <a:xfrm>
-            <a:off x="12692062" y="7922419"/>
+            <a:off x="10728940" y="7905750"/>
+            <a:ext cx="640120" cy="762000"/>
+          </a:xfrm>
+          <a:prstGeom prst="rect">
+            <a:avLst/>
+          </a:prstGeom>
+        </p:spPr>
+      </p:pic>
+      <p:pic>
+        <p:nvPicPr>
+          <p:cNvPr id="12" name="Picture 11" descr="platform-mesh-horizontal-color_640_crop.png">
+            <a:hlinkClick r:id="rId15"/>
+          </p:cNvPr>
+          <p:cNvPicPr>
+            <a:picLocks noChangeAspect="1"/>
+          </p:cNvPicPr>
+          <p:nvPr/>
+        </p:nvPicPr>
+        <p:blipFill>
+          <a:blip r:embed="rId14"/>
+          <a:stretch>
+            <a:fillRect/>
+          </a:stretch>
+        </p:blipFill>
+        <p:spPr>
+          <a:xfrm>
+            <a:off x="13335000" y="7922419"/>
             <a:ext cx="3048000" cy="728662"/>
           </a:xfrm>
           <a:prstGeom prst="rect">
@@ -4518,7 +4557,7 @@
       </p:pic>
       <p:sp>
         <p:nvSpPr>
-          <p:cNvPr id="12" name="TextBox 11"/>
+          <p:cNvPr id="13" name="TextBox 12"/>
           <p:cNvSpPr txBox="1"/>
           <p:nvPr/>
         </p:nvSpPr>
@@ -4557,7 +4596,7 @@
       </p:sp>
       <p:sp>
         <p:nvSpPr>
-          <p:cNvPr id="13" name="TextBox 12"/>
+          <p:cNvPr id="14" name="TextBox 13"/>
           <p:cNvSpPr txBox="1"/>
           <p:nvPr/>
         </p:nvSpPr>
@@ -4585,7 +4624,7 @@
                 </a:solidFill>
                 <a:latin typeface="Aptos"/>
               </a:rPr>
-              <a:t>neonephos.org · gardener.cloud · konfidence.cloud · platform-mesh.io · open-control-plane.io</a:t>
+              <a:t>sap.com · bwi.de · sapns2.com · neonephos.org · gardener.cloud · konfidence.cloud · platform-mesh.io · open-control-plane.io</a:t>
             </a:r>
           </a:p>
         </p:txBody>
@@ -4760,6 +4799,290 @@
 </p:sld>
 </file>
 
+<file path=ppt/slides/slide14.xml><?xml version="1.0" encoding="utf-8"?>
+<p:sld xmlns:a="http://schemas.openxmlformats.org/drawingml/2006/main" xmlns:p="http://schemas.openxmlformats.org/presentationml/2006/main" xmlns:r="http://schemas.openxmlformats.org/officeDocument/2006/relationships" show="0">
+  <p:cSld>
+    <p:spTree>
+      <p:nvGrpSpPr>
+        <p:cNvPr id="1" name=""/>
+        <p:cNvGrpSpPr/>
+        <p:nvPr/>
+      </p:nvGrpSpPr>
+      <p:grpSpPr/>
+      <p:sp>
+        <p:nvSpPr>
+          <p:cNvPr id="2" name="Text Placeholder 1"/>
+          <p:cNvSpPr>
+            <a:spLocks noGrp="1"/>
+          </p:cNvSpPr>
+          <p:nvPr>
+            <p:ph type="body" idx="1"/>
+          </p:nvPr>
+        </p:nvSpPr>
+        <p:spPr/>
+        <p:txBody>
+          <a:bodyPr/>
+          <a:lstStyle/>
+          <a:p>
+            <a:r>
+              <a:t>TRADEMARK &amp; LICENSE NOTICES</a:t>
+            </a:r>
+          </a:p>
+        </p:txBody>
+      </p:sp>
+      <p:sp>
+        <p:nvSpPr>
+          <p:cNvPr id="3" name="Title 2"/>
+          <p:cNvSpPr>
+            <a:spLocks noGrp="1"/>
+          </p:cNvSpPr>
+          <p:nvPr>
+            <p:ph type="title" idx="2"/>
+          </p:nvPr>
+        </p:nvSpPr>
+        <p:spPr/>
+        <p:txBody>
+          <a:bodyPr/>
+          <a:lstStyle/>
+          <a:p>
+            <a:r>
+              <a:t>Logos and trademarks belong to their respective owners.</a:t>
+            </a:r>
+          </a:p>
+        </p:txBody>
+      </p:sp>
+      <p:sp>
+        <p:nvSpPr>
+          <p:cNvPr id="4" name="Text Placeholder 3"/>
+          <p:cNvSpPr>
+            <a:spLocks noGrp="1"/>
+          </p:cNvSpPr>
+          <p:nvPr>
+            <p:ph type="body" idx="10"/>
+          </p:nvPr>
+        </p:nvSpPr>
+        <p:spPr/>
+        <p:txBody>
+          <a:bodyPr/>
+          <a:lstStyle/>
+          <a:p>
+            <a:pPr>
+              <a:spcBef>
+                <a:spcPts val="800"/>
+              </a:spcBef>
+              <a:spcAft>
+                <a:spcPts val="800"/>
+              </a:spcAft>
+            </a:pPr>
+            <a:r>
+              <a:rPr b="1">
+                <a:solidFill>
+                  <a:srgbClr val="0F6BFF"/>
+                </a:solidFill>
+              </a:rPr>
+              <a:t>▪  </a:t>
+            </a:r>
+            <a:r>
+              <a:rPr>
+                <a:solidFill>
+                  <a:srgbClr val="000000"/>
+                </a:solidFill>
+              </a:rPr>
+              <a:t>SAP, SAP NS2 — trademarks of SAP SE / SAP National Security Services. Editorial use only; no endorsement implied. sap.com · sapns2.com</a:t>
+            </a:r>
+          </a:p>
+          <a:p>
+            <a:pPr>
+              <a:spcBef>
+                <a:spcPts val="800"/>
+              </a:spcBef>
+              <a:spcAft>
+                <a:spcPts val="800"/>
+              </a:spcAft>
+            </a:pPr>
+            <a:r>
+              <a:rPr b="1">
+                <a:solidFill>
+                  <a:srgbClr val="0F6BFF"/>
+                </a:solidFill>
+              </a:rPr>
+              <a:t>▪  </a:t>
+            </a:r>
+            <a:r>
+              <a:rPr>
+                <a:solidFill>
+                  <a:srgbClr val="000000"/>
+                </a:solidFill>
+              </a:rPr>
+              <a:t>BWI — trademark of BWI GmbH (Bundeswehr-IT). Editorial use of the Wikimedia public-domain wordmark; verify against BWI press conditions before external publication. bwi.de</a:t>
+            </a:r>
+          </a:p>
+          <a:p>
+            <a:pPr>
+              <a:spcBef>
+                <a:spcPts val="800"/>
+              </a:spcBef>
+              <a:spcAft>
+                <a:spcPts val="800"/>
+              </a:spcAft>
+            </a:pPr>
+            <a:r>
+              <a:rPr b="1">
+                <a:solidFill>
+                  <a:srgbClr val="0F6BFF"/>
+                </a:solidFill>
+              </a:rPr>
+              <a:t>▪  </a:t>
+            </a:r>
+            <a:r>
+              <a:rPr>
+                <a:solidFill>
+                  <a:srgbClr val="000000"/>
+                </a:solidFill>
+              </a:rPr>
+              <a:t>Gardener, Platform Mesh, NeoNephos Foundation — Linux Foundation Europe artwork; usage governed by the Linux Foundation trademark usage guidelines (linuxfoundation.org/legal/trademark-usage). gardener.cloud · platform-mesh.io · neonephos.org</a:t>
+            </a:r>
+          </a:p>
+          <a:p>
+            <a:pPr>
+              <a:spcBef>
+                <a:spcPts val="800"/>
+              </a:spcBef>
+              <a:spcAft>
+                <a:spcPts val="800"/>
+              </a:spcAft>
+            </a:pPr>
+            <a:r>
+              <a:rPr b="1">
+                <a:solidFill>
+                  <a:srgbClr val="0F6BFF"/>
+                </a:solidFill>
+              </a:rPr>
+              <a:t>▪  </a:t>
+            </a:r>
+            <a:r>
+              <a:rPr>
+                <a:solidFill>
+                  <a:srgbClr val="000000"/>
+                </a:solidFill>
+              </a:rPr>
+              <a:t>Konfidence — SAP-supported open project; logo from konfidence.cloud. Editorial use only; verify with the Konfidence project before external publication. konfidence.cloud</a:t>
+            </a:r>
+          </a:p>
+          <a:p>
+            <a:pPr>
+              <a:spcBef>
+                <a:spcPts val="800"/>
+              </a:spcBef>
+              <a:spcAft>
+                <a:spcPts val="800"/>
+              </a:spcAft>
+            </a:pPr>
+            <a:r>
+              <a:rPr b="1">
+                <a:solidFill>
+                  <a:srgbClr val="0F6BFF"/>
+                </a:solidFill>
+              </a:rPr>
+              <a:t>▪  </a:t>
+            </a:r>
+            <a:r>
+              <a:rPr>
+                <a:solidFill>
+                  <a:srgbClr val="000000"/>
+                </a:solidFill>
+              </a:rPr>
+              <a:t>OpenControlPlane — open-source project at open-control-plane.io. Editorial use only; verify with the project before external publication. open-control-plane.io</a:t>
+            </a:r>
+          </a:p>
+          <a:p>
+            <a:pPr>
+              <a:spcBef>
+                <a:spcPts val="800"/>
+              </a:spcBef>
+              <a:spcAft>
+                <a:spcPts val="800"/>
+              </a:spcAft>
+            </a:pPr>
+            <a:r>
+              <a:rPr b="1">
+                <a:solidFill>
+                  <a:srgbClr val="0F6BFF"/>
+                </a:solidFill>
+              </a:rPr>
+              <a:t>▪  </a:t>
+            </a:r>
+            <a:r>
+              <a:rPr>
+                <a:solidFill>
+                  <a:srgbClr val="000000"/>
+                </a:solidFill>
+              </a:rPr>
+              <a:t>Kyma — SAP-originated open-source project at kyma-project.io. Editorial use only. kyma-project.io</a:t>
+            </a:r>
+          </a:p>
+          <a:p>
+            <a:pPr>
+              <a:spcBef>
+                <a:spcPts val="800"/>
+              </a:spcBef>
+              <a:spcAft>
+                <a:spcPts val="800"/>
+              </a:spcAft>
+            </a:pPr>
+            <a:r>
+              <a:rPr b="1">
+                <a:solidFill>
+                  <a:srgbClr val="0F6BFF"/>
+                </a:solidFill>
+              </a:rPr>
+              <a:t>▪  </a:t>
+            </a:r>
+            <a:r>
+              <a:rPr>
+                <a:solidFill>
+                  <a:srgbClr val="000000"/>
+                </a:solidFill>
+              </a:rPr>
+              <a:t>Trivy, Grype, Sigstore, Helm, OCI, Kubernetes, kro, Flux, Argo CD — third-party trademarks named for technical reference; ownership remains with their respective projects and organisations.</a:t>
+            </a:r>
+          </a:p>
+          <a:p>
+            <a:pPr>
+              <a:spcBef>
+                <a:spcPts val="800"/>
+              </a:spcBef>
+              <a:spcAft>
+                <a:spcPts val="800"/>
+              </a:spcAft>
+            </a:pPr>
+            <a:r>
+              <a:rPr b="1">
+                <a:solidFill>
+                  <a:srgbClr val="0F6BFF"/>
+                </a:solidFill>
+              </a:rPr>
+              <a:t>▪  </a:t>
+            </a:r>
+            <a:r>
+              <a:rPr>
+                <a:solidFill>
+                  <a:srgbClr val="000000"/>
+                </a:solidFill>
+              </a:rPr>
+              <a:t>Full sourcing record: assets/adopters/LICENSING.md in the OCM marketing repository.</a:t>
+            </a:r>
+          </a:p>
+        </p:txBody>
+      </p:sp>
+    </p:spTree>
+  </p:cSld>
+  <p:clrMapOvr>
+    <a:masterClrMapping/>
+  </p:clrMapOvr>
+</p:sld>
+</file>
+
 <file path=ppt/slides/slide2.xml><?xml version="1.0" encoding="utf-8"?>
 <p:sld xmlns:a="http://schemas.openxmlformats.org/drawingml/2006/main" xmlns:p="http://schemas.openxmlformats.org/presentationml/2006/main" xmlns:r="http://schemas.openxmlformats.org/officeDocument/2006/relationships">
   <p:cSld>
@@ -5399,7 +5722,7 @@
           <a:lstStyle/>
           <a:p>
             <a:r>
-              <a:t>Helm registries, S3, OCI — each moves artifacts. OCM moves a signed envelope across any boundary: registry to registry, registry to air-gapped archive. The signature travels intact.</a:t>
+              <a:t>S3, OCI and Helm registries — each stores artifacts differently. OCM transports a signed envelope of artifacts across any boundary: registry to registry, registry to air-gapped archive. The signature travels intact.</a:t>
             </a:r>
           </a:p>
         </p:txBody>

--- a/docs/community/marketing/decks/exec-phase1/OCM-Sovereign-Delivery-Exec.pptx
+++ b/docs/community/marketing/decks/exec-phase1/OCM-Sovereign-Delivery-Exec.pptx
@@ -19,6 +19,7 @@
     <p:sldId id="267" r:id="rId18"/>
     <p:sldId id="268" r:id="rId19"/>
     <p:sldId id="269" r:id="rId20"/>
+    <p:sldId id="270" r:id="rId21"/>
   </p:sldIdLst>
   <p:sldSz cx="18288000" cy="10287000"/>
   <p:notesSz cx="6858000" cy="9144000"/>
@@ -200,7 +201,7 @@
         </ns0:nvSpPr>
         <ns0:spPr>
           <ns2:xfrm xmlns:ns2="http://schemas.openxmlformats.org/drawingml/2006/main">
-            <ns2:off x="914400" y="3524250"/>
+            <ns2:off x="914400" y="3286125"/>
             <ns2:ext cx="16192500" cy="1524000"/>
           </ns2:xfrm>
           <ns3:prstGeom xmlns:ns3="http://schemas.openxmlformats.org/drawingml/2006/main" prst="rect">
@@ -3754,41 +3755,6 @@
           </a:p>
         </p:txBody>
       </p:sp>
-      <p:sp>
-        <p:nvSpPr>
-          <p:cNvPr id="5" name="TextBox 4"/>
-          <p:cNvSpPr txBox="1"/>
-          <p:nvPr/>
-        </p:nvSpPr>
-        <p:spPr>
-          <a:xfrm>
-            <a:off x="1143000" y="9715500"/>
-            <a:ext cx="16002000" cy="381000"/>
-          </a:xfrm>
-          <a:prstGeom prst="rect">
-            <a:avLst/>
-          </a:prstGeom>
-          <a:noFill/>
-        </p:spPr>
-        <p:txBody>
-          <a:bodyPr wrap="none" lIns="0" rIns="0" tIns="0" bIns="0">
-            <a:spAutoFit/>
-          </a:bodyPr>
-          <a:lstStyle/>
-          <a:p>
-            <a:pPr algn="ctr"/>
-            <a:r>
-              <a:rPr sz="1300">
-                <a:solidFill>
-                  <a:srgbClr val="6B7280"/>
-                </a:solidFill>
-                <a:latin typeface="Aptos"/>
-              </a:rPr>
-              <a:t>github.com/open-component-model/open-delivery-gear</a:t>
-            </a:r>
-          </a:p>
-        </p:txBody>
-      </p:sp>
     </p:spTree>
   </p:cSld>
   <p:clrMapOvr>
@@ -4127,7 +4093,7 @@
       </p:pic>
       <p:pic>
         <p:nvPicPr>
-          <p:cNvPr id="17" name="Picture 16" descr="cloud-upload_72.png"/>
+          <p:cNvPr id="17" name="Picture 16" descr="package-export_72.png"/>
           <p:cNvPicPr>
             <a:picLocks noChangeAspect="1"/>
           </p:cNvPicPr>
@@ -4334,14 +4300,14 @@
                 </a:solidFill>
                 <a:latin typeface="Aptos"/>
               </a:rPr>
-              <a:t>ADOPTED BY ENTERPRISES SHIPPING INTO REGULATED ENVIRONMENTS</a:t>
+              <a:t>ADOPTED BY ENTERPRISES SHIPPING INTO REGULATED ENVIRONMENTS AND THE OPEN-SOURCE ECOSYSTEM</a:t>
             </a:r>
           </a:p>
         </p:txBody>
       </p:sp>
       <p:pic>
         <p:nvPicPr>
-          <p:cNvPr id="5" name="Picture 4" descr="sap-horizontal-color_640_crop.png">
+          <p:cNvPr id="5" name="Picture 4" descr="neonephos-foundation-horizontal-color_520_crop.png">
             <a:hlinkClick r:id="rId3"/>
           </p:cNvPr>
           <p:cNvPicPr>
@@ -4357,17 +4323,53 @@
         </p:blipFill>
         <p:spPr>
           <a:xfrm>
-            <a:off x="3293201" y="5715000"/>
-            <a:ext cx="1538422" cy="762000"/>
+            <a:off x="2190750" y="5858888"/>
+            <a:ext cx="2476500" cy="474223"/>
           </a:xfrm>
           <a:prstGeom prst="rect">
             <a:avLst/>
           </a:prstGeom>
         </p:spPr>
       </p:pic>
+      <p:sp>
+        <p:nvSpPr>
+          <p:cNvPr id="6" name="TextBox 5"/>
+          <p:cNvSpPr txBox="1"/>
+          <p:nvPr/>
+        </p:nvSpPr>
+        <p:spPr>
+          <a:xfrm>
+            <a:off x="1524000" y="6724650"/>
+            <a:ext cx="3810000" cy="266700"/>
+          </a:xfrm>
+          <a:prstGeom prst="rect">
+            <a:avLst/>
+          </a:prstGeom>
+          <a:noFill/>
+        </p:spPr>
+        <p:txBody>
+          <a:bodyPr wrap="none" lIns="0" rIns="0" tIns="0" bIns="0">
+            <a:spAutoFit/>
+          </a:bodyPr>
+          <a:lstStyle/>
+          <a:p>
+            <a:pPr algn="ctr"/>
+            <a:r>
+              <a:rPr sz="2000">
+                <a:solidFill>
+                  <a:srgbClr val="6B7280"/>
+                </a:solidFill>
+                <a:latin typeface="Aptos"/>
+                <a:hlinkClick r:id="rId3"/>
+              </a:rPr>
+              <a:t>NeoNephos</a:t>
+            </a:r>
+          </a:p>
+        </p:txBody>
+      </p:sp>
       <p:pic>
         <p:nvPicPr>
-          <p:cNvPr id="6" name="Picture 5" descr="bwi-horizontal-color_640_crop.png">
+          <p:cNvPr id="7" name="Picture 6" descr="sap-horizontal-color_520_crop.png">
             <a:hlinkClick r:id="rId5"/>
           </p:cNvPr>
           <p:cNvPicPr>
@@ -4383,17 +4385,53 @@
         </p:blipFill>
         <p:spPr>
           <a:xfrm>
-            <a:off x="8317603" y="5715000"/>
-            <a:ext cx="1643269" cy="762000"/>
+            <a:off x="6547884" y="5753100"/>
+            <a:ext cx="1382232" cy="685800"/>
           </a:xfrm>
           <a:prstGeom prst="rect">
             <a:avLst/>
           </a:prstGeom>
         </p:spPr>
       </p:pic>
+      <p:sp>
+        <p:nvSpPr>
+          <p:cNvPr id="8" name="TextBox 7"/>
+          <p:cNvSpPr txBox="1"/>
+          <p:nvPr/>
+        </p:nvSpPr>
+        <p:spPr>
+          <a:xfrm>
+            <a:off x="5334000" y="6724650"/>
+            <a:ext cx="3810000" cy="266700"/>
+          </a:xfrm>
+          <a:prstGeom prst="rect">
+            <a:avLst/>
+          </a:prstGeom>
+          <a:noFill/>
+        </p:spPr>
+        <p:txBody>
+          <a:bodyPr wrap="none" lIns="0" rIns="0" tIns="0" bIns="0">
+            <a:spAutoFit/>
+          </a:bodyPr>
+          <a:lstStyle/>
+          <a:p>
+            <a:pPr algn="ctr"/>
+            <a:r>
+              <a:rPr sz="2000">
+                <a:solidFill>
+                  <a:srgbClr val="6B7280"/>
+                </a:solidFill>
+                <a:latin typeface="Aptos"/>
+                <a:hlinkClick r:id="rId5"/>
+              </a:rPr>
+              <a:t>SAP</a:t>
+            </a:r>
+          </a:p>
+        </p:txBody>
+      </p:sp>
       <p:pic>
         <p:nvPicPr>
-          <p:cNvPr id="7" name="Picture 6" descr="sap-ns2-getlogovector_crop.png">
+          <p:cNvPr id="9" name="Picture 8" descr="bwi-horizontal-color_520_crop.png">
             <a:hlinkClick r:id="rId7"/>
           </p:cNvPr>
           <p:cNvPicPr>
@@ -4409,8 +4447,8 @@
         </p:blipFill>
         <p:spPr>
           <a:xfrm>
-            <a:off x="12936673" y="5715000"/>
-            <a:ext cx="2558778" cy="762000"/>
+            <a:off x="10308189" y="5753100"/>
+            <a:ext cx="1481621" cy="685800"/>
           </a:xfrm>
           <a:prstGeom prst="rect">
             <a:avLst/>
@@ -4419,14 +4457,14 @@
       </p:pic>
       <p:sp>
         <p:nvSpPr>
-          <p:cNvPr id="8" name="TextBox 7"/>
+          <p:cNvPr id="10" name="TextBox 9"/>
           <p:cNvSpPr txBox="1"/>
           <p:nvPr/>
         </p:nvSpPr>
         <p:spPr>
           <a:xfrm>
-            <a:off x="1143000" y="7048500"/>
-            <a:ext cx="16002000" cy="342900"/>
+            <a:off x="9144000" y="6724650"/>
+            <a:ext cx="3810000" cy="266700"/>
           </a:xfrm>
           <a:prstGeom prst="rect">
             <a:avLst/>
@@ -4439,21 +4477,23 @@
           </a:bodyPr>
           <a:lstStyle/>
           <a:p>
-            <a:r>
-              <a:rPr sz="1800" b="1" cap="all" spc="110">
+            <a:pPr algn="ctr"/>
+            <a:r>
+              <a:rPr sz="2000">
                 <a:solidFill>
-                  <a:srgbClr val="0F6BFF"/>
+                  <a:srgbClr val="6B7280"/>
                 </a:solidFill>
                 <a:latin typeface="Aptos"/>
+                <a:hlinkClick r:id="rId7"/>
               </a:rPr>
-              <a:t>BUILT INTO THE OPEN-SOURCE ECOSYSTEM</a:t>
+              <a:t>BWI</a:t>
             </a:r>
           </a:p>
         </p:txBody>
       </p:sp>
       <p:pic>
         <p:nvPicPr>
-          <p:cNvPr id="9" name="Picture 8" descr="gardener-horizontal-color_640_crop.png">
+          <p:cNvPr id="11" name="Picture 10" descr="sap-ns2-getlogovector_crop.png">
             <a:hlinkClick r:id="rId9"/>
           </p:cNvPr>
           <p:cNvPicPr>
@@ -4469,17 +4509,53 @@
         </p:blipFill>
         <p:spPr>
           <a:xfrm>
-            <a:off x="1905000" y="7955322"/>
-            <a:ext cx="3048000" cy="662855"/>
+            <a:off x="13707550" y="5753100"/>
+            <a:ext cx="2302900" cy="685800"/>
           </a:xfrm>
           <a:prstGeom prst="rect">
             <a:avLst/>
           </a:prstGeom>
         </p:spPr>
       </p:pic>
+      <p:sp>
+        <p:nvSpPr>
+          <p:cNvPr id="12" name="TextBox 11"/>
+          <p:cNvSpPr txBox="1"/>
+          <p:nvPr/>
+        </p:nvSpPr>
+        <p:spPr>
+          <a:xfrm>
+            <a:off x="12954000" y="6724650"/>
+            <a:ext cx="3810000" cy="266700"/>
+          </a:xfrm>
+          <a:prstGeom prst="rect">
+            <a:avLst/>
+          </a:prstGeom>
+          <a:noFill/>
+        </p:spPr>
+        <p:txBody>
+          <a:bodyPr wrap="none" lIns="0" rIns="0" tIns="0" bIns="0">
+            <a:spAutoFit/>
+          </a:bodyPr>
+          <a:lstStyle/>
+          <a:p>
+            <a:pPr algn="ctr"/>
+            <a:r>
+              <a:rPr sz="2000">
+                <a:solidFill>
+                  <a:srgbClr val="6B7280"/>
+                </a:solidFill>
+                <a:latin typeface="Aptos"/>
+                <a:hlinkClick r:id="rId9"/>
+              </a:rPr>
+              <a:t>SAP NS2</a:t>
+            </a:r>
+          </a:p>
+        </p:txBody>
+      </p:sp>
       <p:pic>
         <p:nvPicPr>
-          <p:cNvPr id="10" name="Picture 9" descr="konfidence-horizontal-light_640_crop.png">
+          <p:cNvPr id="13" name="Picture 12" descr="gardener-horizontal-color_520_crop.png">
             <a:hlinkClick r:id="rId11"/>
           </p:cNvPr>
           <p:cNvPicPr>
@@ -4495,17 +4571,53 @@
         </p:blipFill>
         <p:spPr>
           <a:xfrm>
-            <a:off x="5715000" y="8134848"/>
-            <a:ext cx="3048000" cy="303803"/>
+            <a:off x="2190750" y="8208680"/>
+            <a:ext cx="2476500" cy="537140"/>
           </a:xfrm>
           <a:prstGeom prst="rect">
             <a:avLst/>
           </a:prstGeom>
         </p:spPr>
       </p:pic>
+      <p:sp>
+        <p:nvSpPr>
+          <p:cNvPr id="14" name="TextBox 13"/>
+          <p:cNvSpPr txBox="1"/>
+          <p:nvPr/>
+        </p:nvSpPr>
+        <p:spPr>
+          <a:xfrm>
+            <a:off x="1524000" y="9105900"/>
+            <a:ext cx="3810000" cy="266700"/>
+          </a:xfrm>
+          <a:prstGeom prst="rect">
+            <a:avLst/>
+          </a:prstGeom>
+          <a:noFill/>
+        </p:spPr>
+        <p:txBody>
+          <a:bodyPr wrap="none" lIns="0" rIns="0" tIns="0" bIns="0">
+            <a:spAutoFit/>
+          </a:bodyPr>
+          <a:lstStyle/>
+          <a:p>
+            <a:pPr algn="ctr"/>
+            <a:r>
+              <a:rPr sz="2000">
+                <a:solidFill>
+                  <a:srgbClr val="6B7280"/>
+                </a:solidFill>
+                <a:latin typeface="Aptos"/>
+                <a:hlinkClick r:id="rId11"/>
+              </a:rPr>
+              <a:t>Gardener</a:t>
+            </a:r>
+          </a:p>
+        </p:txBody>
+      </p:sp>
       <p:pic>
         <p:nvPicPr>
-          <p:cNvPr id="11" name="Picture 10" descr="opencontrolplane-icon-color_640_crop.png">
+          <p:cNvPr id="15" name="Picture 14" descr="konfidence-horizontal-light_520_crop.png">
             <a:hlinkClick r:id="rId13"/>
           </p:cNvPr>
           <p:cNvPicPr>
@@ -4521,17 +4633,53 @@
         </p:blipFill>
         <p:spPr>
           <a:xfrm>
-            <a:off x="10728940" y="7905750"/>
-            <a:ext cx="640120" cy="762000"/>
+            <a:off x="6000750" y="8352426"/>
+            <a:ext cx="2476500" cy="249647"/>
           </a:xfrm>
           <a:prstGeom prst="rect">
             <a:avLst/>
           </a:prstGeom>
         </p:spPr>
       </p:pic>
+      <p:sp>
+        <p:nvSpPr>
+          <p:cNvPr id="16" name="TextBox 15"/>
+          <p:cNvSpPr txBox="1"/>
+          <p:nvPr/>
+        </p:nvSpPr>
+        <p:spPr>
+          <a:xfrm>
+            <a:off x="5334000" y="9105900"/>
+            <a:ext cx="3810000" cy="266700"/>
+          </a:xfrm>
+          <a:prstGeom prst="rect">
+            <a:avLst/>
+          </a:prstGeom>
+          <a:noFill/>
+        </p:spPr>
+        <p:txBody>
+          <a:bodyPr wrap="none" lIns="0" rIns="0" tIns="0" bIns="0">
+            <a:spAutoFit/>
+          </a:bodyPr>
+          <a:lstStyle/>
+          <a:p>
+            <a:pPr algn="ctr"/>
+            <a:r>
+              <a:rPr sz="2000">
+                <a:solidFill>
+                  <a:srgbClr val="6B7280"/>
+                </a:solidFill>
+                <a:latin typeface="Aptos"/>
+                <a:hlinkClick r:id="rId13"/>
+              </a:rPr>
+              <a:t>Konfidence</a:t>
+            </a:r>
+          </a:p>
+        </p:txBody>
+      </p:sp>
       <p:pic>
         <p:nvPicPr>
-          <p:cNvPr id="12" name="Picture 11" descr="platform-mesh-horizontal-color_640_crop.png">
+          <p:cNvPr id="17" name="Picture 16" descr="opencontrolplane-icon-color_520_crop.png">
             <a:hlinkClick r:id="rId15"/>
           </p:cNvPr>
           <p:cNvPicPr>
@@ -4547,8 +4695,8 @@
         </p:blipFill>
         <p:spPr>
           <a:xfrm>
-            <a:off x="13335000" y="7922419"/>
-            <a:ext cx="3048000" cy="728662"/>
+            <a:off x="10761077" y="8134350"/>
+            <a:ext cx="575845" cy="685800"/>
           </a:xfrm>
           <a:prstGeom prst="rect">
             <a:avLst/>
@@ -4557,14 +4705,14 @@
       </p:pic>
       <p:sp>
         <p:nvSpPr>
-          <p:cNvPr id="13" name="TextBox 12"/>
+          <p:cNvPr id="18" name="TextBox 17"/>
           <p:cNvSpPr txBox="1"/>
           <p:nvPr/>
         </p:nvSpPr>
         <p:spPr>
           <a:xfrm>
-            <a:off x="1143000" y="9239250"/>
-            <a:ext cx="16002000" cy="762000"/>
+            <a:off x="9144000" y="9105900"/>
+            <a:ext cx="3810000" cy="266700"/>
           </a:xfrm>
           <a:prstGeom prst="rect">
             <a:avLst/>
@@ -4577,33 +4725,56 @@
           </a:bodyPr>
           <a:lstStyle/>
           <a:p>
-            <a:pPr algn="ctr">
-              <a:lnSpc>
-                <a:spcPct val="140000"/>
-              </a:lnSpc>
-            </a:pPr>
-            <a:r>
-              <a:rPr sz="1800">
+            <a:pPr algn="ctr"/>
+            <a:r>
+              <a:rPr sz="2000">
                 <a:solidFill>
-                  <a:srgbClr val="0A3A99"/>
+                  <a:srgbClr val="6B7280"/>
                 </a:solidFill>
                 <a:latin typeface="Aptos"/>
+                <a:hlinkClick r:id="rId15"/>
               </a:rPr>
-              <a:t>An open standard, neutrally governed — your stack stays portable, your dependencies stay yours.</a:t>
-            </a:r>
-          </a:p>
-        </p:txBody>
-      </p:sp>
-      <p:sp>
-        <p:nvSpPr>
-          <p:cNvPr id="14" name="TextBox 13"/>
+              <a:t>OpenControlPlane</a:t>
+            </a:r>
+          </a:p>
+        </p:txBody>
+      </p:sp>
+      <p:pic>
+        <p:nvPicPr>
+          <p:cNvPr id="19" name="Picture 18" descr="platform-mesh-horizontal-color_520_crop.png">
+            <a:hlinkClick r:id="rId17"/>
+          </p:cNvPr>
+          <p:cNvPicPr>
+            <a:picLocks noChangeAspect="1"/>
+          </p:cNvPicPr>
+          <p:nvPr/>
+        </p:nvPicPr>
+        <p:blipFill>
+          <a:blip r:embed="rId16"/>
+          <a:stretch>
+            <a:fillRect/>
+          </a:stretch>
+        </p:blipFill>
+        <p:spPr>
+          <a:xfrm>
+            <a:off x="13620750" y="8181975"/>
+            <a:ext cx="2476500" cy="590550"/>
+          </a:xfrm>
+          <a:prstGeom prst="rect">
+            <a:avLst/>
+          </a:prstGeom>
+        </p:spPr>
+      </p:pic>
+      <p:sp>
+        <p:nvSpPr>
+          <p:cNvPr id="20" name="TextBox 19"/>
           <p:cNvSpPr txBox="1"/>
           <p:nvPr/>
         </p:nvSpPr>
         <p:spPr>
           <a:xfrm>
-            <a:off x="1143000" y="9906000"/>
-            <a:ext cx="16002000" cy="381000"/>
+            <a:off x="12954000" y="9105900"/>
+            <a:ext cx="3810000" cy="266700"/>
           </a:xfrm>
           <a:prstGeom prst="rect">
             <a:avLst/>
@@ -4618,13 +4789,14 @@
           <a:p>
             <a:pPr algn="ctr"/>
             <a:r>
-              <a:rPr sz="1300">
+              <a:rPr sz="2000">
                 <a:solidFill>
                   <a:srgbClr val="6B7280"/>
                 </a:solidFill>
                 <a:latin typeface="Aptos"/>
+                <a:hlinkClick r:id="rId17"/>
               </a:rPr>
-              <a:t>sap.com · bwi.de · sapns2.com · neonephos.org · gardener.cloud · konfidence.cloud · platform-mesh.io · open-control-plane.io</a:t>
+              <a:t>Platform Mesh</a:t>
             </a:r>
           </a:p>
         </p:txBody>
@@ -4825,7 +4997,7 @@
           <a:lstStyle/>
           <a:p>
             <a:r>
-              <a:t>TRADEMARK &amp; LICENSE NOTICES</a:t>
+              <a:t>TRADEMARK &amp; LICENSE NOTICES (1/2)</a:t>
             </a:r>
           </a:p>
         </p:txBody>
@@ -4995,6 +5167,82 @@
               <a:t>OpenControlPlane — open-source project at open-control-plane.io. Editorial use only; verify with the project before external publication. open-control-plane.io</a:t>
             </a:r>
           </a:p>
+        </p:txBody>
+      </p:sp>
+    </p:spTree>
+  </p:cSld>
+  <p:clrMapOvr>
+    <a:masterClrMapping/>
+  </p:clrMapOvr>
+</p:sld>
+</file>
+
+<file path=ppt/slides/slide15.xml><?xml version="1.0" encoding="utf-8"?>
+<p:sld xmlns:a="http://schemas.openxmlformats.org/drawingml/2006/main" xmlns:p="http://schemas.openxmlformats.org/presentationml/2006/main" xmlns:r="http://schemas.openxmlformats.org/officeDocument/2006/relationships" show="0">
+  <p:cSld>
+    <p:spTree>
+      <p:nvGrpSpPr>
+        <p:cNvPr id="1" name=""/>
+        <p:cNvGrpSpPr/>
+        <p:nvPr/>
+      </p:nvGrpSpPr>
+      <p:grpSpPr/>
+      <p:sp>
+        <p:nvSpPr>
+          <p:cNvPr id="2" name="Text Placeholder 1"/>
+          <p:cNvSpPr>
+            <a:spLocks noGrp="1"/>
+          </p:cNvSpPr>
+          <p:nvPr>
+            <p:ph type="body" idx="1"/>
+          </p:nvPr>
+        </p:nvSpPr>
+        <p:spPr/>
+        <p:txBody>
+          <a:bodyPr/>
+          <a:lstStyle/>
+          <a:p>
+            <a:r>
+              <a:t>TRADEMARK &amp; LICENSE NOTICES (2/2)</a:t>
+            </a:r>
+          </a:p>
+        </p:txBody>
+      </p:sp>
+      <p:sp>
+        <p:nvSpPr>
+          <p:cNvPr id="3" name="Title 2"/>
+          <p:cNvSpPr>
+            <a:spLocks noGrp="1"/>
+          </p:cNvSpPr>
+          <p:nvPr>
+            <p:ph type="title" idx="2"/>
+          </p:nvPr>
+        </p:nvSpPr>
+        <p:spPr/>
+        <p:txBody>
+          <a:bodyPr/>
+          <a:lstStyle/>
+          <a:p>
+            <a:r>
+              <a:t>Third-party trademarks named for technical reference.</a:t>
+            </a:r>
+          </a:p>
+        </p:txBody>
+      </p:sp>
+      <p:sp>
+        <p:nvSpPr>
+          <p:cNvPr id="4" name="Text Placeholder 3"/>
+          <p:cNvSpPr>
+            <a:spLocks noGrp="1"/>
+          </p:cNvSpPr>
+          <p:nvPr>
+            <p:ph type="body" idx="10"/>
+          </p:nvPr>
+        </p:nvSpPr>
+        <p:spPr/>
+        <p:txBody>
+          <a:bodyPr/>
+          <a:lstStyle/>
           <a:p>
             <a:pPr>
               <a:spcBef>

--- a/docs/community/marketing/decks/exec-phase1/OCM-Sovereign-Delivery-Exec.pptx
+++ b/docs/community/marketing/decks/exec-phase1/OCM-Sovereign-Delivery-Exec.pptx
@@ -20,6 +20,7 @@
     <p:sldId id="268" r:id="rId19"/>
     <p:sldId id="269" r:id="rId20"/>
     <p:sldId id="270" r:id="rId21"/>
+    <p:sldId id="271" r:id="rId22"/>
   </p:sldIdLst>
   <p:sldSz cx="18288000" cy="10287000"/>
   <p:notesSz cx="6858000" cy="9144000"/>
@@ -1304,8 +1305,8 @@
         </ns0:nvSpPr>
         <ns0:spPr>
           <ns2:xfrm xmlns:ns2="http://schemas.openxmlformats.org/drawingml/2006/main">
-            <ns2:off x="1371600" y="5791200"/>
-            <ns2:ext cx="4724400" cy="304800"/>
+            <ns2:off x="1981200" y="5181600"/>
+            <ns2:ext cx="4114800" cy="457200"/>
           </ns2:xfrm>
           <ns3:prstGeom xmlns:ns3="http://schemas.openxmlformats.org/drawingml/2006/main" prst="rect">
             <ns3:avLst/>
@@ -1316,7 +1317,7 @@
           <ns5:lstStyle xmlns:ns5="http://schemas.openxmlformats.org/drawingml/2006/main">
             <ns5:lvl1pPr marL="0" indent="0" algn="l">
               <ns5:buNone/>
-              <ns5:defRPr sz="1600" b="1">
+              <ns5:defRPr sz="1800" b="1">
                 <ns5:solidFill>
                   <ns5:srgbClr val="0F6BFF"/>
                 </ns5:solidFill>
@@ -1345,8 +1346,8 @@
         </ns0:nvSpPr>
         <ns0:spPr>
           <ns2:xfrm xmlns:ns2="http://schemas.openxmlformats.org/drawingml/2006/main">
-            <ns2:off x="1371600" y="6134100"/>
-            <ns2:ext cx="4724400" cy="857250"/>
+            <ns2:off x="1371600" y="5867400"/>
+            <ns2:ext cx="4724400" cy="1085850"/>
           </ns2:xfrm>
           <ns3:prstGeom xmlns:ns3="http://schemas.openxmlformats.org/drawingml/2006/main" prst="rect">
             <ns3:avLst/>
@@ -1444,8 +1445,8 @@
         </ns0:nvSpPr>
         <ns0:spPr>
           <ns2:xfrm xmlns:ns2="http://schemas.openxmlformats.org/drawingml/2006/main">
-            <ns2:off x="6781800" y="5791200"/>
-            <ns2:ext cx="4724400" cy="304800"/>
+            <ns2:off x="7391400" y="5181600"/>
+            <ns2:ext cx="4114800" cy="457200"/>
           </ns2:xfrm>
           <ns3:prstGeom xmlns:ns3="http://schemas.openxmlformats.org/drawingml/2006/main" prst="rect">
             <ns3:avLst/>
@@ -1456,7 +1457,7 @@
           <ns5:lstStyle xmlns:ns5="http://schemas.openxmlformats.org/drawingml/2006/main">
             <ns5:lvl1pPr marL="0" indent="0" algn="l">
               <ns5:buNone/>
-              <ns5:defRPr sz="1600" b="1">
+              <ns5:defRPr sz="1800" b="1">
                 <ns5:solidFill>
                   <ns5:srgbClr val="0F6BFF"/>
                 </ns5:solidFill>
@@ -1485,8 +1486,8 @@
         </ns0:nvSpPr>
         <ns0:spPr>
           <ns2:xfrm xmlns:ns2="http://schemas.openxmlformats.org/drawingml/2006/main">
-            <ns2:off x="6781800" y="6134100"/>
-            <ns2:ext cx="4724400" cy="857250"/>
+            <ns2:off x="6781800" y="5867400"/>
+            <ns2:ext cx="4724400" cy="1085850"/>
           </ns2:xfrm>
           <ns3:prstGeom xmlns:ns3="http://schemas.openxmlformats.org/drawingml/2006/main" prst="rect">
             <ns3:avLst/>
@@ -1584,8 +1585,8 @@
         </ns0:nvSpPr>
         <ns0:spPr>
           <ns2:xfrm xmlns:ns2="http://schemas.openxmlformats.org/drawingml/2006/main">
-            <ns2:off x="12192000" y="5791200"/>
-            <ns2:ext cx="4724400" cy="304800"/>
+            <ns2:off x="12801600" y="5181600"/>
+            <ns2:ext cx="4114800" cy="457200"/>
           </ns2:xfrm>
           <ns3:prstGeom xmlns:ns3="http://schemas.openxmlformats.org/drawingml/2006/main" prst="rect">
             <ns3:avLst/>
@@ -1596,7 +1597,7 @@
           <ns5:lstStyle xmlns:ns5="http://schemas.openxmlformats.org/drawingml/2006/main">
             <ns5:lvl1pPr marL="0" indent="0" algn="l">
               <ns5:buNone/>
-              <ns5:defRPr sz="1600" b="1">
+              <ns5:defRPr sz="1800" b="1">
                 <ns5:solidFill>
                   <ns5:srgbClr val="0F6BFF"/>
                 </ns5:solidFill>
@@ -1625,8 +1626,8 @@
         </ns0:nvSpPr>
         <ns0:spPr>
           <ns2:xfrm xmlns:ns2="http://schemas.openxmlformats.org/drawingml/2006/main">
-            <ns2:off x="12192000" y="6134100"/>
-            <ns2:ext cx="4724400" cy="857250"/>
+            <ns2:off x="12192000" y="5867400"/>
+            <ns2:ext cx="4724400" cy="1085850"/>
           </ns2:xfrm>
           <ns3:prstGeom xmlns:ns3="http://schemas.openxmlformats.org/drawingml/2006/main" prst="rect">
             <ns3:avLst/>
@@ -1724,8 +1725,8 @@
         </ns0:nvSpPr>
         <ns0:spPr>
           <ns2:xfrm xmlns:ns2="http://schemas.openxmlformats.org/drawingml/2006/main">
-            <ns2:off x="1371600" y="8210550"/>
-            <ns2:ext cx="4724400" cy="304800"/>
+            <ns2:off x="1981200" y="7600950"/>
+            <ns2:ext cx="4114800" cy="457200"/>
           </ns2:xfrm>
           <ns3:prstGeom xmlns:ns3="http://schemas.openxmlformats.org/drawingml/2006/main" prst="rect">
             <ns3:avLst/>
@@ -1736,7 +1737,7 @@
           <ns5:lstStyle xmlns:ns5="http://schemas.openxmlformats.org/drawingml/2006/main">
             <ns5:lvl1pPr marL="0" indent="0" algn="l">
               <ns5:buNone/>
-              <ns5:defRPr sz="1600" b="1">
+              <ns5:defRPr sz="1800" b="1">
                 <ns5:solidFill>
                   <ns5:srgbClr val="0F6BFF"/>
                 </ns5:solidFill>
@@ -1765,8 +1766,8 @@
         </ns0:nvSpPr>
         <ns0:spPr>
           <ns2:xfrm xmlns:ns2="http://schemas.openxmlformats.org/drawingml/2006/main">
-            <ns2:off x="1371600" y="8553450"/>
-            <ns2:ext cx="4724400" cy="857250"/>
+            <ns2:off x="1371600" y="8286750"/>
+            <ns2:ext cx="4724400" cy="1085850"/>
           </ns2:xfrm>
           <ns3:prstGeom xmlns:ns3="http://schemas.openxmlformats.org/drawingml/2006/main" prst="rect">
             <ns3:avLst/>
@@ -1864,8 +1865,8 @@
         </ns0:nvSpPr>
         <ns0:spPr>
           <ns2:xfrm xmlns:ns2="http://schemas.openxmlformats.org/drawingml/2006/main">
-            <ns2:off x="6781800" y="8210550"/>
-            <ns2:ext cx="4724400" cy="304800"/>
+            <ns2:off x="7391400" y="7600950"/>
+            <ns2:ext cx="4114800" cy="457200"/>
           </ns2:xfrm>
           <ns3:prstGeom xmlns:ns3="http://schemas.openxmlformats.org/drawingml/2006/main" prst="rect">
             <ns3:avLst/>
@@ -1876,7 +1877,7 @@
           <ns5:lstStyle xmlns:ns5="http://schemas.openxmlformats.org/drawingml/2006/main">
             <ns5:lvl1pPr marL="0" indent="0" algn="l">
               <ns5:buNone/>
-              <ns5:defRPr sz="1600" b="1">
+              <ns5:defRPr sz="1800" b="1">
                 <ns5:solidFill>
                   <ns5:srgbClr val="0F6BFF"/>
                 </ns5:solidFill>
@@ -1905,8 +1906,8 @@
         </ns0:nvSpPr>
         <ns0:spPr>
           <ns2:xfrm xmlns:ns2="http://schemas.openxmlformats.org/drawingml/2006/main">
-            <ns2:off x="6781800" y="8553450"/>
-            <ns2:ext cx="4724400" cy="857250"/>
+            <ns2:off x="6781800" y="8286750"/>
+            <ns2:ext cx="4724400" cy="1085850"/>
           </ns2:xfrm>
           <ns3:prstGeom xmlns:ns3="http://schemas.openxmlformats.org/drawingml/2006/main" prst="rect">
             <ns3:avLst/>
@@ -2004,8 +2005,8 @@
         </ns0:nvSpPr>
         <ns0:spPr>
           <ns2:xfrm xmlns:ns2="http://schemas.openxmlformats.org/drawingml/2006/main">
-            <ns2:off x="12192000" y="8210550"/>
-            <ns2:ext cx="4724400" cy="304800"/>
+            <ns2:off x="12801600" y="7600950"/>
+            <ns2:ext cx="4114800" cy="457200"/>
           </ns2:xfrm>
           <ns3:prstGeom xmlns:ns3="http://schemas.openxmlformats.org/drawingml/2006/main" prst="rect">
             <ns3:avLst/>
@@ -2016,7 +2017,7 @@
           <ns5:lstStyle xmlns:ns5="http://schemas.openxmlformats.org/drawingml/2006/main">
             <ns5:lvl1pPr marL="0" indent="0" algn="l">
               <ns5:buNone/>
-              <ns5:defRPr sz="1600" b="1">
+              <ns5:defRPr sz="1800" b="1">
                 <ns5:solidFill>
                   <ns5:srgbClr val="0F6BFF"/>
                 </ns5:solidFill>
@@ -2045,8 +2046,8 @@
         </ns0:nvSpPr>
         <ns0:spPr>
           <ns2:xfrm xmlns:ns2="http://schemas.openxmlformats.org/drawingml/2006/main">
-            <ns2:off x="12192000" y="8553450"/>
-            <ns2:ext cx="4724400" cy="857250"/>
+            <ns2:off x="12192000" y="8286750"/>
+            <ns2:ext cx="4724400" cy="1085850"/>
           </ns2:xfrm>
           <ns3:prstGeom xmlns:ns3="http://schemas.openxmlformats.org/drawingml/2006/main" prst="rect">
             <ns3:avLst/>
@@ -4069,7 +4070,7 @@
       </p:sp>
       <p:pic>
         <p:nvPicPr>
-          <p:cNvPr id="16" name="Picture 15" descr="lock_72.png"/>
+          <p:cNvPr id="16" name="Picture 15" descr="lock_96_0F6BFF.png"/>
           <p:cNvPicPr>
             <a:picLocks noChangeAspect="1"/>
           </p:cNvPicPr>
@@ -4084,7 +4085,7 @@
         <p:spPr>
           <a:xfrm>
             <a:off x="1371600" y="5181600"/>
-            <a:ext cx="381000" cy="381000"/>
+            <a:ext cx="457200" cy="457200"/>
           </a:xfrm>
           <a:prstGeom prst="rect">
             <a:avLst/>
@@ -4093,7 +4094,7 @@
       </p:pic>
       <p:pic>
         <p:nvPicPr>
-          <p:cNvPr id="17" name="Picture 16" descr="package-export_72.png"/>
+          <p:cNvPr id="17" name="Picture 16" descr="package-export_96_0F6BFF.png"/>
           <p:cNvPicPr>
             <a:picLocks noChangeAspect="1"/>
           </p:cNvPicPr>
@@ -4108,7 +4109,7 @@
         <p:spPr>
           <a:xfrm>
             <a:off x="6781800" y="5181600"/>
-            <a:ext cx="381000" cy="381000"/>
+            <a:ext cx="457200" cy="457200"/>
           </a:xfrm>
           <a:prstGeom prst="rect">
             <a:avLst/>
@@ -4117,7 +4118,7 @@
       </p:pic>
       <p:pic>
         <p:nvPicPr>
-          <p:cNvPr id="18" name="Picture 17" descr="rocket_72.png"/>
+          <p:cNvPr id="18" name="Picture 17" descr="rocket_96_0F6BFF.png"/>
           <p:cNvPicPr>
             <a:picLocks noChangeAspect="1"/>
           </p:cNvPicPr>
@@ -4132,7 +4133,7 @@
         <p:spPr>
           <a:xfrm>
             <a:off x="12192000" y="5181600"/>
-            <a:ext cx="381000" cy="381000"/>
+            <a:ext cx="457200" cy="457200"/>
           </a:xfrm>
           <a:prstGeom prst="rect">
             <a:avLst/>
@@ -4141,7 +4142,7 @@
       </p:pic>
       <p:pic>
         <p:nvPicPr>
-          <p:cNvPr id="19" name="Picture 18" descr="radar_72.png"/>
+          <p:cNvPr id="19" name="Picture 18" descr="radar_96_0F6BFF.png"/>
           <p:cNvPicPr>
             <a:picLocks noChangeAspect="1"/>
           </p:cNvPicPr>
@@ -4156,7 +4157,7 @@
         <p:spPr>
           <a:xfrm>
             <a:off x="1371600" y="7600950"/>
-            <a:ext cx="381000" cy="381000"/>
+            <a:ext cx="457200" cy="457200"/>
           </a:xfrm>
           <a:prstGeom prst="rect">
             <a:avLst/>
@@ -4165,7 +4166,7 @@
       </p:pic>
       <p:pic>
         <p:nvPicPr>
-          <p:cNvPr id="20" name="Picture 19" descr="source-of-truth_72.png"/>
+          <p:cNvPr id="20" name="Picture 19" descr="source-of-truth_96_0F6BFF.png"/>
           <p:cNvPicPr>
             <a:picLocks noChangeAspect="1"/>
           </p:cNvPicPr>
@@ -4180,7 +4181,7 @@
         <p:spPr>
           <a:xfrm>
             <a:off x="6781800" y="7600950"/>
-            <a:ext cx="381000" cy="381000"/>
+            <a:ext cx="457200" cy="457200"/>
           </a:xfrm>
           <a:prstGeom prst="rect">
             <a:avLst/>
@@ -4189,7 +4190,7 @@
       </p:pic>
       <p:pic>
         <p:nvPicPr>
-          <p:cNvPr id="21" name="Picture 20" descr="report-analytics_72.png"/>
+          <p:cNvPr id="21" name="Picture 20" descr="report-analytics_96_0F6BFF.png"/>
           <p:cNvPicPr>
             <a:picLocks noChangeAspect="1"/>
           </p:cNvPicPr>
@@ -4204,7 +4205,7 @@
         <p:spPr>
           <a:xfrm>
             <a:off x="12192000" y="7600950"/>
-            <a:ext cx="381000" cy="381000"/>
+            <a:ext cx="457200" cy="457200"/>
           </a:xfrm>
           <a:prstGeom prst="rect">
             <a:avLst/>
@@ -4972,6 +4973,756 @@
 </file>
 
 <file path=ppt/slides/slide14.xml><?xml version="1.0" encoding="utf-8"?>
+<p:sld xmlns:a="http://schemas.openxmlformats.org/drawingml/2006/main" xmlns:p="http://schemas.openxmlformats.org/presentationml/2006/main" xmlns:r="http://schemas.openxmlformats.org/officeDocument/2006/relationships">
+  <p:cSld>
+    <p:spTree>
+      <p:nvGrpSpPr>
+        <p:cNvPr id="1" name=""/>
+        <p:cNvGrpSpPr/>
+        <p:nvPr/>
+      </p:nvGrpSpPr>
+      <p:grpSpPr/>
+      <p:sp>
+        <p:nvSpPr>
+          <p:cNvPr id="2" name="Text Placeholder 1"/>
+          <p:cNvSpPr>
+            <a:spLocks noGrp="1"/>
+          </p:cNvSpPr>
+          <p:nvPr>
+            <p:ph type="body" idx="1"/>
+          </p:nvPr>
+        </p:nvSpPr>
+        <p:spPr/>
+        <p:txBody>
+          <a:bodyPr/>
+          <a:lstStyle/>
+          <a:p>
+            <a:r>
+              <a:t>APPENDIX — ABBREVIATIONS</a:t>
+            </a:r>
+          </a:p>
+        </p:txBody>
+      </p:sp>
+      <p:sp>
+        <p:nvSpPr>
+          <p:cNvPr id="3" name="Title 2"/>
+          <p:cNvSpPr>
+            <a:spLocks noGrp="1"/>
+          </p:cNvSpPr>
+          <p:nvPr>
+            <p:ph type="title" idx="2"/>
+          </p:nvPr>
+        </p:nvSpPr>
+        <p:spPr/>
+        <p:txBody>
+          <a:bodyPr/>
+          <a:lstStyle/>
+          <a:p>
+            <a:r>
+              <a:t>Quick reference for the acronyms used in this deck.</a:t>
+            </a:r>
+          </a:p>
+        </p:txBody>
+      </p:sp>
+      <p:sp>
+        <p:nvSpPr>
+          <p:cNvPr id="4" name="TextBox 3"/>
+          <p:cNvSpPr txBox="1"/>
+          <p:nvPr/>
+        </p:nvSpPr>
+        <p:spPr>
+          <a:xfrm>
+            <a:off x="1143000" y="3429000"/>
+            <a:ext cx="7715250" cy="4572000"/>
+          </a:xfrm>
+          <a:prstGeom prst="rect">
+            <a:avLst/>
+          </a:prstGeom>
+          <a:noFill/>
+        </p:spPr>
+        <p:txBody>
+          <a:bodyPr wrap="square" lIns="0" rIns="0" tIns="0" bIns="0">
+            <a:spAutoFit/>
+          </a:bodyPr>
+          <a:lstStyle/>
+          <a:p>
+            <a:pPr>
+              <a:spcBef>
+                <a:spcPts val="200"/>
+              </a:spcBef>
+              <a:spcAft>
+                <a:spcPts val="600"/>
+              </a:spcAft>
+            </a:pPr>
+            <a:r>
+              <a:rPr sz="1400" b="1">
+                <a:solidFill>
+                  <a:srgbClr val="0F6BFF"/>
+                </a:solidFill>
+                <a:latin typeface="Aptos"/>
+              </a:rPr>
+              <a:t>CRA</a:t>
+            </a:r>
+            <a:r>
+              <a:rPr sz="1300">
+                <a:solidFill>
+                  <a:srgbClr val="000000"/>
+                </a:solidFill>
+                <a:latin typeface="Aptos"/>
+              </a:rPr>
+              <a:t>  —  Cyber Resilience Act — EU regulation on cybersecurity for products with digital elements.</a:t>
+            </a:r>
+          </a:p>
+          <a:p>
+            <a:pPr>
+              <a:spcBef>
+                <a:spcPts val="200"/>
+              </a:spcBef>
+              <a:spcAft>
+                <a:spcPts val="600"/>
+              </a:spcAft>
+            </a:pPr>
+            <a:r>
+              <a:rPr sz="1400" b="1">
+                <a:solidFill>
+                  <a:srgbClr val="0F6BFF"/>
+                </a:solidFill>
+                <a:latin typeface="Aptos"/>
+              </a:rPr>
+              <a:t>DORA</a:t>
+            </a:r>
+            <a:r>
+              <a:rPr sz="1300">
+                <a:solidFill>
+                  <a:srgbClr val="000000"/>
+                </a:solidFill>
+                <a:latin typeface="Aptos"/>
+              </a:rPr>
+              <a:t>  —  Digital Operational Resilience Act — EU regulation for ICT risk in financial services.</a:t>
+            </a:r>
+          </a:p>
+          <a:p>
+            <a:pPr>
+              <a:spcBef>
+                <a:spcPts val="200"/>
+              </a:spcBef>
+              <a:spcAft>
+                <a:spcPts val="600"/>
+              </a:spcAft>
+            </a:pPr>
+            <a:r>
+              <a:rPr sz="1400" b="1">
+                <a:solidFill>
+                  <a:srgbClr val="0F6BFF"/>
+                </a:solidFill>
+                <a:latin typeface="Aptos"/>
+              </a:rPr>
+              <a:t>NIS2</a:t>
+            </a:r>
+            <a:r>
+              <a:rPr sz="1300">
+                <a:solidFill>
+                  <a:srgbClr val="000000"/>
+                </a:solidFill>
+                <a:latin typeface="Aptos"/>
+              </a:rPr>
+              <a:t>  —  Network and Information Security Directive 2 — EU baseline for cybersecurity of essential entities.</a:t>
+            </a:r>
+          </a:p>
+          <a:p>
+            <a:pPr>
+              <a:spcBef>
+                <a:spcPts val="200"/>
+              </a:spcBef>
+              <a:spcAft>
+                <a:spcPts val="600"/>
+              </a:spcAft>
+            </a:pPr>
+            <a:r>
+              <a:rPr sz="1400" b="1">
+                <a:solidFill>
+                  <a:srgbClr val="0F6BFF"/>
+                </a:solidFill>
+                <a:latin typeface="Aptos"/>
+              </a:rPr>
+              <a:t>FedRAMP</a:t>
+            </a:r>
+            <a:r>
+              <a:rPr sz="1300">
+                <a:solidFill>
+                  <a:srgbClr val="000000"/>
+                </a:solidFill>
+                <a:latin typeface="Aptos"/>
+              </a:rPr>
+              <a:t>  —  Federal Risk and Authorization Management Program — US standardised cloud security assessment.</a:t>
+            </a:r>
+          </a:p>
+          <a:p>
+            <a:pPr>
+              <a:spcBef>
+                <a:spcPts val="200"/>
+              </a:spcBef>
+              <a:spcAft>
+                <a:spcPts val="600"/>
+              </a:spcAft>
+            </a:pPr>
+            <a:r>
+              <a:rPr sz="1400" b="1">
+                <a:solidFill>
+                  <a:srgbClr val="0F6BFF"/>
+                </a:solidFill>
+                <a:latin typeface="Aptos"/>
+              </a:rPr>
+              <a:t>FISMA</a:t>
+            </a:r>
+            <a:r>
+              <a:rPr sz="1300">
+                <a:solidFill>
+                  <a:srgbClr val="000000"/>
+                </a:solidFill>
+                <a:latin typeface="Aptos"/>
+              </a:rPr>
+              <a:t>  —  Federal Information Security Modernization Act — US federal information security mandate.</a:t>
+            </a:r>
+          </a:p>
+          <a:p>
+            <a:pPr>
+              <a:spcBef>
+                <a:spcPts val="200"/>
+              </a:spcBef>
+              <a:spcAft>
+                <a:spcPts val="600"/>
+              </a:spcAft>
+            </a:pPr>
+            <a:r>
+              <a:rPr sz="1400" b="1">
+                <a:solidFill>
+                  <a:srgbClr val="0F6BFF"/>
+                </a:solidFill>
+                <a:latin typeface="Aptos"/>
+              </a:rPr>
+              <a:t>BSI C5</a:t>
+            </a:r>
+            <a:r>
+              <a:rPr sz="1300">
+                <a:solidFill>
+                  <a:srgbClr val="000000"/>
+                </a:solidFill>
+                <a:latin typeface="Aptos"/>
+              </a:rPr>
+              <a:t>  —  Bundesamt für Sicherheit in der Informationstechnik — Cloud Computing Compliance Criteria Catalogue.</a:t>
+            </a:r>
+          </a:p>
+          <a:p>
+            <a:pPr>
+              <a:spcBef>
+                <a:spcPts val="200"/>
+              </a:spcBef>
+              <a:spcAft>
+                <a:spcPts val="600"/>
+              </a:spcAft>
+            </a:pPr>
+            <a:r>
+              <a:rPr sz="1400" b="1">
+                <a:solidFill>
+                  <a:srgbClr val="0F6BFF"/>
+                </a:solidFill>
+                <a:latin typeface="Aptos"/>
+              </a:rPr>
+              <a:t>SecNumCloud</a:t>
+            </a:r>
+            <a:r>
+              <a:rPr sz="1300">
+                <a:solidFill>
+                  <a:srgbClr val="000000"/>
+                </a:solidFill>
+                <a:latin typeface="Aptos"/>
+              </a:rPr>
+              <a:t>  —  French cloud security qualification scheme operated by ANSSI.</a:t>
+            </a:r>
+          </a:p>
+          <a:p>
+            <a:pPr>
+              <a:spcBef>
+                <a:spcPts val="200"/>
+              </a:spcBef>
+              <a:spcAft>
+                <a:spcPts val="600"/>
+              </a:spcAft>
+            </a:pPr>
+            <a:r>
+              <a:rPr sz="1400" b="1">
+                <a:solidFill>
+                  <a:srgbClr val="0F6BFF"/>
+                </a:solidFill>
+                <a:latin typeface="Aptos"/>
+              </a:rPr>
+              <a:t>OCM</a:t>
+            </a:r>
+            <a:r>
+              <a:rPr sz="1300">
+                <a:solidFill>
+                  <a:srgbClr val="000000"/>
+                </a:solidFill>
+                <a:latin typeface="Aptos"/>
+              </a:rPr>
+              <a:t>  —  Open Component Model — vendor-neutral specification for signed, transportable software components.</a:t>
+            </a:r>
+          </a:p>
+          <a:p>
+            <a:pPr>
+              <a:spcBef>
+                <a:spcPts val="200"/>
+              </a:spcBef>
+              <a:spcAft>
+                <a:spcPts val="600"/>
+              </a:spcAft>
+            </a:pPr>
+            <a:r>
+              <a:rPr sz="1400" b="1">
+                <a:solidFill>
+                  <a:srgbClr val="0F6BFF"/>
+                </a:solidFill>
+                <a:latin typeface="Aptos"/>
+              </a:rPr>
+              <a:t>ODG</a:t>
+            </a:r>
+            <a:r>
+              <a:rPr sz="1300">
+                <a:solidFill>
+                  <a:srgbClr val="000000"/>
+                </a:solidFill>
+                <a:latin typeface="Aptos"/>
+              </a:rPr>
+              <a:t>  —  Open Delivery Gear — OCM-native compliance automation engine and dashboard.</a:t>
+            </a:r>
+          </a:p>
+          <a:p>
+            <a:pPr>
+              <a:spcBef>
+                <a:spcPts val="200"/>
+              </a:spcBef>
+              <a:spcAft>
+                <a:spcPts val="600"/>
+              </a:spcAft>
+            </a:pPr>
+            <a:r>
+              <a:rPr sz="1400" b="1">
+                <a:solidFill>
+                  <a:srgbClr val="0F6BFF"/>
+                </a:solidFill>
+                <a:latin typeface="Aptos"/>
+              </a:rPr>
+              <a:t>OCI</a:t>
+            </a:r>
+            <a:r>
+              <a:rPr sz="1300">
+                <a:solidFill>
+                  <a:srgbClr val="000000"/>
+                </a:solidFill>
+                <a:latin typeface="Aptos"/>
+              </a:rPr>
+              <a:t>  —  Open Container Initiative — open standards for container image format and distribution.</a:t>
+            </a:r>
+          </a:p>
+          <a:p>
+            <a:pPr>
+              <a:spcBef>
+                <a:spcPts val="200"/>
+              </a:spcBef>
+              <a:spcAft>
+                <a:spcPts val="600"/>
+              </a:spcAft>
+            </a:pPr>
+            <a:r>
+              <a:rPr sz="1400" b="1">
+                <a:solidFill>
+                  <a:srgbClr val="0F6BFF"/>
+                </a:solidFill>
+                <a:latin typeface="Aptos"/>
+              </a:rPr>
+              <a:t>SBOM</a:t>
+            </a:r>
+            <a:r>
+              <a:rPr sz="1300">
+                <a:solidFill>
+                  <a:srgbClr val="000000"/>
+                </a:solidFill>
+                <a:latin typeface="Aptos"/>
+              </a:rPr>
+              <a:t>  —  Software Bill of Materials — inventory of components and dependencies inside a software artifact.</a:t>
+            </a:r>
+          </a:p>
+          <a:p>
+            <a:pPr>
+              <a:spcBef>
+                <a:spcPts val="200"/>
+              </a:spcBef>
+              <a:spcAft>
+                <a:spcPts val="600"/>
+              </a:spcAft>
+            </a:pPr>
+            <a:r>
+              <a:rPr sz="1400" b="1">
+                <a:solidFill>
+                  <a:srgbClr val="0F6BFF"/>
+                </a:solidFill>
+                <a:latin typeface="Aptos"/>
+              </a:rPr>
+              <a:t>SBoD</a:t>
+            </a:r>
+            <a:r>
+              <a:rPr sz="1300">
+                <a:solidFill>
+                  <a:srgbClr val="000000"/>
+                </a:solidFill>
+                <a:latin typeface="Aptos"/>
+              </a:rPr>
+              <a:t>  —  Signed Bill of Delivery — OCM's signed envelope describing what was actually delivered, where, and by whom.</a:t>
+            </a:r>
+          </a:p>
+        </p:txBody>
+      </p:sp>
+      <p:sp>
+        <p:nvSpPr>
+          <p:cNvPr id="5" name="TextBox 4"/>
+          <p:cNvSpPr txBox="1"/>
+          <p:nvPr/>
+        </p:nvSpPr>
+        <p:spPr>
+          <a:xfrm>
+            <a:off x="9429750" y="3429000"/>
+            <a:ext cx="7715250" cy="4572000"/>
+          </a:xfrm>
+          <a:prstGeom prst="rect">
+            <a:avLst/>
+          </a:prstGeom>
+          <a:noFill/>
+        </p:spPr>
+        <p:txBody>
+          <a:bodyPr wrap="square" lIns="0" rIns="0" tIns="0" bIns="0">
+            <a:spAutoFit/>
+          </a:bodyPr>
+          <a:lstStyle/>
+          <a:p>
+            <a:pPr>
+              <a:spcBef>
+                <a:spcPts val="200"/>
+              </a:spcBef>
+              <a:spcAft>
+                <a:spcPts val="600"/>
+              </a:spcAft>
+            </a:pPr>
+            <a:r>
+              <a:rPr sz="1400" b="1">
+                <a:solidFill>
+                  <a:srgbClr val="0F6BFF"/>
+                </a:solidFill>
+                <a:latin typeface="Aptos"/>
+              </a:rPr>
+              <a:t>SPDX</a:t>
+            </a:r>
+            <a:r>
+              <a:rPr sz="1300">
+                <a:solidFill>
+                  <a:srgbClr val="000000"/>
+                </a:solidFill>
+                <a:latin typeface="Aptos"/>
+              </a:rPr>
+              <a:t>  —  Software Package Data Exchange — ISO/IEC 5962 standard format for SBOM data.</a:t>
+            </a:r>
+          </a:p>
+          <a:p>
+            <a:pPr>
+              <a:spcBef>
+                <a:spcPts val="200"/>
+              </a:spcBef>
+              <a:spcAft>
+                <a:spcPts val="600"/>
+              </a:spcAft>
+            </a:pPr>
+            <a:r>
+              <a:rPr sz="1400" b="1">
+                <a:solidFill>
+                  <a:srgbClr val="0F6BFF"/>
+                </a:solidFill>
+                <a:latin typeface="Aptos"/>
+              </a:rPr>
+              <a:t>SWID</a:t>
+            </a:r>
+            <a:r>
+              <a:rPr sz="1300">
+                <a:solidFill>
+                  <a:srgbClr val="000000"/>
+                </a:solidFill>
+                <a:latin typeface="Aptos"/>
+              </a:rPr>
+              <a:t>  —  Software Identification Tags — ISO/IEC 19770-2 standard for software inventory.</a:t>
+            </a:r>
+          </a:p>
+          <a:p>
+            <a:pPr>
+              <a:spcBef>
+                <a:spcPts val="200"/>
+              </a:spcBef>
+              <a:spcAft>
+                <a:spcPts val="600"/>
+              </a:spcAft>
+            </a:pPr>
+            <a:r>
+              <a:rPr sz="1400" b="1">
+                <a:solidFill>
+                  <a:srgbClr val="0F6BFF"/>
+                </a:solidFill>
+                <a:latin typeface="Aptos"/>
+              </a:rPr>
+              <a:t>PKI</a:t>
+            </a:r>
+            <a:r>
+              <a:rPr sz="1300">
+                <a:solidFill>
+                  <a:srgbClr val="000000"/>
+                </a:solidFill>
+                <a:latin typeface="Aptos"/>
+              </a:rPr>
+              <a:t>  —  Public Key Infrastructure — framework for managing certificates and signing keys.</a:t>
+            </a:r>
+          </a:p>
+          <a:p>
+            <a:pPr>
+              <a:spcBef>
+                <a:spcPts val="200"/>
+              </a:spcBef>
+              <a:spcAft>
+                <a:spcPts val="600"/>
+              </a:spcAft>
+            </a:pPr>
+            <a:r>
+              <a:rPr sz="1400" b="1">
+                <a:solidFill>
+                  <a:srgbClr val="0F6BFF"/>
+                </a:solidFill>
+                <a:latin typeface="Aptos"/>
+              </a:rPr>
+              <a:t>Sigstore</a:t>
+            </a:r>
+            <a:r>
+              <a:rPr sz="1300">
+                <a:solidFill>
+                  <a:srgbClr val="000000"/>
+                </a:solidFill>
+                <a:latin typeface="Aptos"/>
+              </a:rPr>
+              <a:t>  —  Open-source project for keyless software signing using OIDC identities.</a:t>
+            </a:r>
+          </a:p>
+          <a:p>
+            <a:pPr>
+              <a:spcBef>
+                <a:spcPts val="200"/>
+              </a:spcBef>
+              <a:spcAft>
+                <a:spcPts val="600"/>
+              </a:spcAft>
+            </a:pPr>
+            <a:r>
+              <a:rPr sz="1400" b="1">
+                <a:solidFill>
+                  <a:srgbClr val="0F6BFF"/>
+                </a:solidFill>
+                <a:latin typeface="Aptos"/>
+              </a:rPr>
+              <a:t>LoB</a:t>
+            </a:r>
+            <a:r>
+              <a:rPr sz="1300">
+                <a:solidFill>
+                  <a:srgbClr val="000000"/>
+                </a:solidFill>
+                <a:latin typeface="Aptos"/>
+              </a:rPr>
+              <a:t>  —  Line of Business — SAP organisational unit owning a product portfolio.</a:t>
+            </a:r>
+          </a:p>
+          <a:p>
+            <a:pPr>
+              <a:spcBef>
+                <a:spcPts val="200"/>
+              </a:spcBef>
+              <a:spcAft>
+                <a:spcPts val="600"/>
+              </a:spcAft>
+            </a:pPr>
+            <a:r>
+              <a:rPr sz="1400" b="1">
+                <a:solidFill>
+                  <a:srgbClr val="0F6BFF"/>
+                </a:solidFill>
+                <a:latin typeface="Aptos"/>
+              </a:rPr>
+              <a:t>BTP</a:t>
+            </a:r>
+            <a:r>
+              <a:rPr sz="1300">
+                <a:solidFill>
+                  <a:srgbClr val="000000"/>
+                </a:solidFill>
+                <a:latin typeface="Aptos"/>
+              </a:rPr>
+              <a:t>  —  SAP Business Technology Platform.</a:t>
+            </a:r>
+          </a:p>
+          <a:p>
+            <a:pPr>
+              <a:spcBef>
+                <a:spcPts val="200"/>
+              </a:spcBef>
+              <a:spcAft>
+                <a:spcPts val="600"/>
+              </a:spcAft>
+            </a:pPr>
+            <a:r>
+              <a:rPr sz="1400" b="1">
+                <a:solidFill>
+                  <a:srgbClr val="0F6BFF"/>
+                </a:solidFill>
+                <a:latin typeface="Aptos"/>
+              </a:rPr>
+              <a:t>OSS</a:t>
+            </a:r>
+            <a:r>
+              <a:rPr sz="1300">
+                <a:solidFill>
+                  <a:srgbClr val="000000"/>
+                </a:solidFill>
+                <a:latin typeface="Aptos"/>
+              </a:rPr>
+              <a:t>  —  Open Source Software.</a:t>
+            </a:r>
+          </a:p>
+          <a:p>
+            <a:pPr>
+              <a:spcBef>
+                <a:spcPts val="200"/>
+              </a:spcBef>
+              <a:spcAft>
+                <a:spcPts val="600"/>
+              </a:spcAft>
+            </a:pPr>
+            <a:r>
+              <a:rPr sz="1400" b="1">
+                <a:solidFill>
+                  <a:srgbClr val="0F6BFF"/>
+                </a:solidFill>
+                <a:latin typeface="Aptos"/>
+              </a:rPr>
+              <a:t>NeoNephos</a:t>
+            </a:r>
+            <a:r>
+              <a:rPr sz="1300">
+                <a:solidFill>
+                  <a:srgbClr val="000000"/>
+                </a:solidFill>
+                <a:latin typeface="Aptos"/>
+              </a:rPr>
+              <a:t>  —  European foundation for sovereign cloud open-source projects, hosted under the Linux Foundation.</a:t>
+            </a:r>
+          </a:p>
+          <a:p>
+            <a:pPr>
+              <a:spcBef>
+                <a:spcPts val="200"/>
+              </a:spcBef>
+              <a:spcAft>
+                <a:spcPts val="600"/>
+              </a:spcAft>
+            </a:pPr>
+            <a:r>
+              <a:rPr sz="1400" b="1">
+                <a:solidFill>
+                  <a:srgbClr val="0F6BFF"/>
+                </a:solidFill>
+                <a:latin typeface="Aptos"/>
+              </a:rPr>
+              <a:t>Grype</a:t>
+            </a:r>
+            <a:r>
+              <a:rPr sz="1300">
+                <a:solidFill>
+                  <a:srgbClr val="000000"/>
+                </a:solidFill>
+                <a:latin typeface="Aptos"/>
+              </a:rPr>
+              <a:t>  —  Open-source vulnerability scanner for container images and filesystems (Anchore).</a:t>
+            </a:r>
+          </a:p>
+          <a:p>
+            <a:pPr>
+              <a:spcBef>
+                <a:spcPts val="200"/>
+              </a:spcBef>
+              <a:spcAft>
+                <a:spcPts val="600"/>
+              </a:spcAft>
+            </a:pPr>
+            <a:r>
+              <a:rPr sz="1400" b="1">
+                <a:solidFill>
+                  <a:srgbClr val="0F6BFF"/>
+                </a:solidFill>
+                <a:latin typeface="Aptos"/>
+              </a:rPr>
+              <a:t>Trivy</a:t>
+            </a:r>
+            <a:r>
+              <a:rPr sz="1300">
+                <a:solidFill>
+                  <a:srgbClr val="000000"/>
+                </a:solidFill>
+                <a:latin typeface="Aptos"/>
+              </a:rPr>
+              <a:t>  —  Open-source security scanner for containers, IaC, and code (Aqua Security).</a:t>
+            </a:r>
+          </a:p>
+          <a:p>
+            <a:pPr>
+              <a:spcBef>
+                <a:spcPts val="200"/>
+              </a:spcBef>
+              <a:spcAft>
+                <a:spcPts val="600"/>
+              </a:spcAft>
+            </a:pPr>
+            <a:r>
+              <a:rPr sz="1400" b="1">
+                <a:solidFill>
+                  <a:srgbClr val="0F6BFF"/>
+                </a:solidFill>
+                <a:latin typeface="Aptos"/>
+              </a:rPr>
+              <a:t>Helm</a:t>
+            </a:r>
+            <a:r>
+              <a:rPr sz="1300">
+                <a:solidFill>
+                  <a:srgbClr val="000000"/>
+                </a:solidFill>
+                <a:latin typeface="Aptos"/>
+              </a:rPr>
+              <a:t>  —  Package manager for Kubernetes; reference artifact type for OCM.</a:t>
+            </a:r>
+          </a:p>
+        </p:txBody>
+      </p:sp>
+    </p:spTree>
+  </p:cSld>
+  <p:clrMapOvr>
+    <a:masterClrMapping/>
+  </p:clrMapOvr>
+</p:sld>
+</file>
+
+<file path=ppt/slides/slide15.xml><?xml version="1.0" encoding="utf-8"?>
 <p:sld xmlns:a="http://schemas.openxmlformats.org/drawingml/2006/main" xmlns:p="http://schemas.openxmlformats.org/presentationml/2006/main" xmlns:r="http://schemas.openxmlformats.org/officeDocument/2006/relationships" show="0">
   <p:cSld>
     <p:spTree>
@@ -5177,7 +5928,7 @@
 </p:sld>
 </file>
 
-<file path=ppt/slides/slide15.xml><?xml version="1.0" encoding="utf-8"?>
+<file path=ppt/slides/slide16.xml><?xml version="1.0" encoding="utf-8"?>
 <p:sld xmlns:a="http://schemas.openxmlformats.org/drawingml/2006/main" xmlns:p="http://schemas.openxmlformats.org/presentationml/2006/main" xmlns:r="http://schemas.openxmlformats.org/officeDocument/2006/relationships" show="0">
   <p:cSld>
     <p:spTree>
@@ -5690,7 +6441,7 @@
                   <a:srgbClr val="000000"/>
                 </a:solidFill>
               </a:rPr>
-              <a:t>An SBOM (Software Bill of Materials) tells you what's in your software. It was built for inventory.</a:t>
+              <a:t>An SBOM tells you what's in your software. It was built for inventory.</a:t>
             </a:r>
           </a:p>
           <a:p>
@@ -5716,7 +6467,7 @@
                   <a:srgbClr val="000000"/>
                 </a:solidFill>
               </a:rPr>
-              <a:t>A Software Bill of Delivery (SBoD) tells you what you delivered, how to verify it, how to transport it, and how to operate it. It was built for delivery.</a:t>
+              <a:t>A Software Bill of Delivery (SBoD) tells you what you delivered, how to verify, transport, and operate it. It was built for delivery.</a:t>
             </a:r>
           </a:p>
           <a:p>

--- a/docs/community/marketing/decks/exec-phase1/OCM-Sovereign-Delivery-Exec.pptx
+++ b/docs/community/marketing/decks/exec-phase1/OCM-Sovereign-Delivery-Exec.pptx
@@ -1313,7 +1313,7 @@
           </ns3:prstGeom>
         </ns0:spPr>
         <ns0:txBody>
-          <ns4:bodyPr xmlns:ns4="http://schemas.openxmlformats.org/drawingml/2006/main" wrap="square" rtlCol="0" anchor="t" lIns="0" tIns="0" rIns="0" bIns="0"/>
+          <ns4:bodyPr xmlns:ns4="http://schemas.openxmlformats.org/drawingml/2006/main" wrap="square" rtlCol="0" anchor="ctr" lIns="0" tIns="0" rIns="0" bIns="0"/>
           <ns5:lstStyle xmlns:ns5="http://schemas.openxmlformats.org/drawingml/2006/main">
             <ns5:lvl1pPr marL="0" indent="0" algn="l">
               <ns5:buNone/>
@@ -1453,7 +1453,7 @@
           </ns3:prstGeom>
         </ns0:spPr>
         <ns0:txBody>
-          <ns4:bodyPr xmlns:ns4="http://schemas.openxmlformats.org/drawingml/2006/main" wrap="square" rtlCol="0" anchor="t" lIns="0" tIns="0" rIns="0" bIns="0"/>
+          <ns4:bodyPr xmlns:ns4="http://schemas.openxmlformats.org/drawingml/2006/main" wrap="square" rtlCol="0" anchor="ctr" lIns="0" tIns="0" rIns="0" bIns="0"/>
           <ns5:lstStyle xmlns:ns5="http://schemas.openxmlformats.org/drawingml/2006/main">
             <ns5:lvl1pPr marL="0" indent="0" algn="l">
               <ns5:buNone/>
@@ -1593,7 +1593,7 @@
           </ns3:prstGeom>
         </ns0:spPr>
         <ns0:txBody>
-          <ns4:bodyPr xmlns:ns4="http://schemas.openxmlformats.org/drawingml/2006/main" wrap="square" rtlCol="0" anchor="t" lIns="0" tIns="0" rIns="0" bIns="0"/>
+          <ns4:bodyPr xmlns:ns4="http://schemas.openxmlformats.org/drawingml/2006/main" wrap="square" rtlCol="0" anchor="ctr" lIns="0" tIns="0" rIns="0" bIns="0"/>
           <ns5:lstStyle xmlns:ns5="http://schemas.openxmlformats.org/drawingml/2006/main">
             <ns5:lvl1pPr marL="0" indent="0" algn="l">
               <ns5:buNone/>
@@ -1733,7 +1733,7 @@
           </ns3:prstGeom>
         </ns0:spPr>
         <ns0:txBody>
-          <ns4:bodyPr xmlns:ns4="http://schemas.openxmlformats.org/drawingml/2006/main" wrap="square" rtlCol="0" anchor="t" lIns="0" tIns="0" rIns="0" bIns="0"/>
+          <ns4:bodyPr xmlns:ns4="http://schemas.openxmlformats.org/drawingml/2006/main" wrap="square" rtlCol="0" anchor="ctr" lIns="0" tIns="0" rIns="0" bIns="0"/>
           <ns5:lstStyle xmlns:ns5="http://schemas.openxmlformats.org/drawingml/2006/main">
             <ns5:lvl1pPr marL="0" indent="0" algn="l">
               <ns5:buNone/>
@@ -1873,7 +1873,7 @@
           </ns3:prstGeom>
         </ns0:spPr>
         <ns0:txBody>
-          <ns4:bodyPr xmlns:ns4="http://schemas.openxmlformats.org/drawingml/2006/main" wrap="square" rtlCol="0" anchor="t" lIns="0" tIns="0" rIns="0" bIns="0"/>
+          <ns4:bodyPr xmlns:ns4="http://schemas.openxmlformats.org/drawingml/2006/main" wrap="square" rtlCol="0" anchor="ctr" lIns="0" tIns="0" rIns="0" bIns="0"/>
           <ns5:lstStyle xmlns:ns5="http://schemas.openxmlformats.org/drawingml/2006/main">
             <ns5:lvl1pPr marL="0" indent="0" algn="l">
               <ns5:buNone/>
@@ -2013,7 +2013,7 @@
           </ns3:prstGeom>
         </ns0:spPr>
         <ns0:txBody>
-          <ns4:bodyPr xmlns:ns4="http://schemas.openxmlformats.org/drawingml/2006/main" wrap="square" rtlCol="0" anchor="t" lIns="0" tIns="0" rIns="0" bIns="0"/>
+          <ns4:bodyPr xmlns:ns4="http://schemas.openxmlformats.org/drawingml/2006/main" wrap="square" rtlCol="0" anchor="ctr" lIns="0" tIns="0" rIns="0" bIns="0"/>
           <ns5:lstStyle xmlns:ns5="http://schemas.openxmlformats.org/drawingml/2006/main">
             <ns5:lvl1pPr marL="0" indent="0" algn="l">
               <ns5:buNone/>
@@ -4063,7 +4063,7 @@
           <a:lstStyle/>
           <a:p>
             <a:r>
-              <a:t>Reports composed from SBoD metadata — no spreadsheet drift.</a:t>
+              <a:t>Reports composed from SBOD metadata — no spreadsheet drift.</a:t>
             </a:r>
           </a:p>
         </p:txBody>
@@ -4272,43 +4272,9 @@
           </a:p>
         </p:txBody>
       </p:sp>
-      <p:sp>
-        <p:nvSpPr>
-          <p:cNvPr id="4" name="TextBox 3"/>
-          <p:cNvSpPr txBox="1"/>
-          <p:nvPr/>
-        </p:nvSpPr>
-        <p:spPr>
-          <a:xfrm>
-            <a:off x="1143000" y="4857750"/>
-            <a:ext cx="16002000" cy="342900"/>
-          </a:xfrm>
-          <a:prstGeom prst="rect">
-            <a:avLst/>
-          </a:prstGeom>
-          <a:noFill/>
-        </p:spPr>
-        <p:txBody>
-          <a:bodyPr wrap="none" lIns="0" rIns="0" tIns="0" bIns="0">
-            <a:spAutoFit/>
-          </a:bodyPr>
-          <a:lstStyle/>
-          <a:p>
-            <a:r>
-              <a:rPr sz="1800" b="1" cap="all" spc="110">
-                <a:solidFill>
-                  <a:srgbClr val="0F6BFF"/>
-                </a:solidFill>
-                <a:latin typeface="Aptos"/>
-              </a:rPr>
-              <a:t>ADOPTED BY ENTERPRISES SHIPPING INTO REGULATED ENVIRONMENTS AND THE OPEN-SOURCE ECOSYSTEM</a:t>
-            </a:r>
-          </a:p>
-        </p:txBody>
-      </p:sp>
       <p:pic>
         <p:nvPicPr>
-          <p:cNvPr id="5" name="Picture 4" descr="neonephos-foundation-horizontal-color_520_crop.png">
+          <p:cNvPr id="4" name="Picture 3" descr="neonephos-foundation-horizontal-color_640_crop.png">
             <a:hlinkClick r:id="rId3"/>
           </p:cNvPr>
           <p:cNvPicPr>
@@ -4324,8 +4290,8 @@
         </p:blipFill>
         <p:spPr>
           <a:xfrm>
-            <a:off x="2190750" y="5858888"/>
-            <a:ext cx="2476500" cy="474223"/>
+            <a:off x="1905000" y="5517910"/>
+            <a:ext cx="3048000" cy="584679"/>
           </a:xfrm>
           <a:prstGeom prst="rect">
             <a:avLst/>
@@ -4334,13 +4300,13 @@
       </p:pic>
       <p:sp>
         <p:nvSpPr>
-          <p:cNvPr id="6" name="TextBox 5"/>
+          <p:cNvPr id="5" name="TextBox 4"/>
           <p:cNvSpPr txBox="1"/>
           <p:nvPr/>
         </p:nvSpPr>
         <p:spPr>
           <a:xfrm>
-            <a:off x="1524000" y="6724650"/>
+            <a:off x="1524000" y="6438900"/>
             <a:ext cx="3810000" cy="266700"/>
           </a:xfrm>
           <a:prstGeom prst="rect">
@@ -4370,7 +4336,7 @@
       </p:sp>
       <p:pic>
         <p:nvPicPr>
-          <p:cNvPr id="7" name="Picture 6" descr="sap-horizontal-color_520_crop.png">
+          <p:cNvPr id="6" name="Picture 5" descr="sap-horizontal-color_640_crop.png">
             <a:hlinkClick r:id="rId5"/>
           </p:cNvPr>
           <p:cNvPicPr>
@@ -4386,8 +4352,8 @@
         </p:blipFill>
         <p:spPr>
           <a:xfrm>
-            <a:off x="6547884" y="5753100"/>
-            <a:ext cx="1382232" cy="685800"/>
+            <a:off x="6315946" y="5353050"/>
+            <a:ext cx="1846107" cy="914400"/>
           </a:xfrm>
           <a:prstGeom prst="rect">
             <a:avLst/>
@@ -4396,13 +4362,13 @@
       </p:pic>
       <p:sp>
         <p:nvSpPr>
-          <p:cNvPr id="8" name="TextBox 7"/>
+          <p:cNvPr id="7" name="TextBox 6"/>
           <p:cNvSpPr txBox="1"/>
           <p:nvPr/>
         </p:nvSpPr>
         <p:spPr>
           <a:xfrm>
-            <a:off x="5334000" y="6724650"/>
+            <a:off x="5334000" y="6438900"/>
             <a:ext cx="3810000" cy="266700"/>
           </a:xfrm>
           <a:prstGeom prst="rect">
@@ -4432,7 +4398,7 @@
       </p:sp>
       <p:pic>
         <p:nvPicPr>
-          <p:cNvPr id="9" name="Picture 8" descr="bwi-horizontal-color_520_crop.png">
+          <p:cNvPr id="8" name="Picture 7" descr="bwi-horizontal-color_640_crop.png">
             <a:hlinkClick r:id="rId7"/>
           </p:cNvPr>
           <p:cNvPicPr>
@@ -4448,8 +4414,8 @@
         </p:blipFill>
         <p:spPr>
           <a:xfrm>
-            <a:off x="10308189" y="5753100"/>
-            <a:ext cx="1481621" cy="685800"/>
+            <a:off x="10063038" y="5353050"/>
+            <a:ext cx="1971923" cy="914400"/>
           </a:xfrm>
           <a:prstGeom prst="rect">
             <a:avLst/>
@@ -4458,13 +4424,13 @@
       </p:pic>
       <p:sp>
         <p:nvSpPr>
-          <p:cNvPr id="10" name="TextBox 9"/>
+          <p:cNvPr id="9" name="TextBox 8"/>
           <p:cNvSpPr txBox="1"/>
           <p:nvPr/>
         </p:nvSpPr>
         <p:spPr>
           <a:xfrm>
-            <a:off x="9144000" y="6724650"/>
+            <a:off x="9144000" y="6438900"/>
             <a:ext cx="3810000" cy="266700"/>
           </a:xfrm>
           <a:prstGeom prst="rect">
@@ -4494,7 +4460,7 @@
       </p:sp>
       <p:pic>
         <p:nvPicPr>
-          <p:cNvPr id="11" name="Picture 10" descr="sap-ns2-getlogovector_crop.png">
+          <p:cNvPr id="10" name="Picture 9" descr="sap-ns2-getlogovector_crop.png">
             <a:hlinkClick r:id="rId9"/>
           </p:cNvPr>
           <p:cNvPicPr>
@@ -4510,8 +4476,8 @@
         </p:blipFill>
         <p:spPr>
           <a:xfrm>
-            <a:off x="13707550" y="5753100"/>
-            <a:ext cx="2302900" cy="685800"/>
+            <a:off x="13335000" y="5356405"/>
+            <a:ext cx="3048000" cy="907689"/>
           </a:xfrm>
           <a:prstGeom prst="rect">
             <a:avLst/>
@@ -4520,13 +4486,13 @@
       </p:pic>
       <p:sp>
         <p:nvSpPr>
-          <p:cNvPr id="12" name="TextBox 11"/>
+          <p:cNvPr id="11" name="TextBox 10"/>
           <p:cNvSpPr txBox="1"/>
           <p:nvPr/>
         </p:nvSpPr>
         <p:spPr>
           <a:xfrm>
-            <a:off x="12954000" y="6724650"/>
+            <a:off x="12954000" y="6438900"/>
             <a:ext cx="3810000" cy="266700"/>
           </a:xfrm>
           <a:prstGeom prst="rect">
@@ -4556,7 +4522,7 @@
       </p:sp>
       <p:pic>
         <p:nvPicPr>
-          <p:cNvPr id="13" name="Picture 12" descr="gardener-horizontal-color_520_crop.png">
+          <p:cNvPr id="12" name="Picture 11" descr="gardener-horizontal-color_640_crop.png">
             <a:hlinkClick r:id="rId11"/>
           </p:cNvPr>
           <p:cNvPicPr>
@@ -4572,8 +4538,8 @@
         </p:blipFill>
         <p:spPr>
           <a:xfrm>
-            <a:off x="2190750" y="8208680"/>
-            <a:ext cx="2476500" cy="537140"/>
+            <a:off x="1905000" y="7764822"/>
+            <a:ext cx="3048000" cy="662855"/>
           </a:xfrm>
           <a:prstGeom prst="rect">
             <a:avLst/>
@@ -4582,13 +4548,13 @@
       </p:pic>
       <p:sp>
         <p:nvSpPr>
-          <p:cNvPr id="14" name="TextBox 13"/>
+          <p:cNvPr id="13" name="TextBox 12"/>
           <p:cNvSpPr txBox="1"/>
           <p:nvPr/>
         </p:nvSpPr>
         <p:spPr>
           <a:xfrm>
-            <a:off x="1524000" y="9105900"/>
+            <a:off x="1524000" y="8724900"/>
             <a:ext cx="3810000" cy="266700"/>
           </a:xfrm>
           <a:prstGeom prst="rect">
@@ -4618,7 +4584,7 @@
       </p:sp>
       <p:pic>
         <p:nvPicPr>
-          <p:cNvPr id="15" name="Picture 14" descr="konfidence-horizontal-light_520_crop.png">
+          <p:cNvPr id="14" name="Picture 13" descr="konfidence-horizontal-light_640_crop.png">
             <a:hlinkClick r:id="rId13"/>
           </p:cNvPr>
           <p:cNvPicPr>
@@ -4634,8 +4600,8 @@
         </p:blipFill>
         <p:spPr>
           <a:xfrm>
-            <a:off x="6000750" y="8352426"/>
-            <a:ext cx="2476500" cy="249647"/>
+            <a:off x="5715000" y="7944348"/>
+            <a:ext cx="3048000" cy="303803"/>
           </a:xfrm>
           <a:prstGeom prst="rect">
             <a:avLst/>
@@ -4644,13 +4610,13 @@
       </p:pic>
       <p:sp>
         <p:nvSpPr>
-          <p:cNvPr id="16" name="TextBox 15"/>
+          <p:cNvPr id="15" name="TextBox 14"/>
           <p:cNvSpPr txBox="1"/>
           <p:nvPr/>
         </p:nvSpPr>
         <p:spPr>
           <a:xfrm>
-            <a:off x="5334000" y="9105900"/>
+            <a:off x="5334000" y="8724900"/>
             <a:ext cx="3810000" cy="266700"/>
           </a:xfrm>
           <a:prstGeom prst="rect">
@@ -4680,7 +4646,7 @@
       </p:sp>
       <p:pic>
         <p:nvPicPr>
-          <p:cNvPr id="17" name="Picture 16" descr="opencontrolplane-icon-color_520_crop.png">
+          <p:cNvPr id="16" name="Picture 15" descr="opencontrolplane-icon-color_640_crop.png">
             <a:hlinkClick r:id="rId15"/>
           </p:cNvPr>
           <p:cNvPicPr>
@@ -4696,8 +4662,8 @@
         </p:blipFill>
         <p:spPr>
           <a:xfrm>
-            <a:off x="10761077" y="8134350"/>
-            <a:ext cx="575845" cy="685800"/>
+            <a:off x="10664927" y="7639050"/>
+            <a:ext cx="768145" cy="914400"/>
           </a:xfrm>
           <a:prstGeom prst="rect">
             <a:avLst/>
@@ -4706,13 +4672,13 @@
       </p:pic>
       <p:sp>
         <p:nvSpPr>
-          <p:cNvPr id="18" name="TextBox 17"/>
+          <p:cNvPr id="17" name="TextBox 16"/>
           <p:cNvSpPr txBox="1"/>
           <p:nvPr/>
         </p:nvSpPr>
         <p:spPr>
           <a:xfrm>
-            <a:off x="9144000" y="9105900"/>
+            <a:off x="9144000" y="8724900"/>
             <a:ext cx="3810000" cy="266700"/>
           </a:xfrm>
           <a:prstGeom prst="rect">
@@ -4742,7 +4708,7 @@
       </p:sp>
       <p:pic>
         <p:nvPicPr>
-          <p:cNvPr id="19" name="Picture 18" descr="platform-mesh-horizontal-color_520_crop.png">
+          <p:cNvPr id="18" name="Picture 17" descr="platform-mesh-horizontal-color_640_crop.png">
             <a:hlinkClick r:id="rId17"/>
           </p:cNvPr>
           <p:cNvPicPr>
@@ -4758,8 +4724,8 @@
         </p:blipFill>
         <p:spPr>
           <a:xfrm>
-            <a:off x="13620750" y="8181975"/>
-            <a:ext cx="2476500" cy="590550"/>
+            <a:off x="13335000" y="7731919"/>
+            <a:ext cx="3048000" cy="728662"/>
           </a:xfrm>
           <a:prstGeom prst="rect">
             <a:avLst/>
@@ -4768,13 +4734,13 @@
       </p:pic>
       <p:sp>
         <p:nvSpPr>
-          <p:cNvPr id="20" name="TextBox 19"/>
+          <p:cNvPr id="19" name="TextBox 18"/>
           <p:cNvSpPr txBox="1"/>
           <p:nvPr/>
         </p:nvSpPr>
         <p:spPr>
           <a:xfrm>
-            <a:off x="12954000" y="9105900"/>
+            <a:off x="12954000" y="8724900"/>
             <a:ext cx="3810000" cy="266700"/>
           </a:xfrm>
           <a:prstGeom prst="rect">
@@ -5032,7 +4998,7 @@
         </p:nvSpPr>
         <p:spPr>
           <a:xfrm>
-            <a:off x="1143000" y="3429000"/>
+            <a:off x="1143000" y="4953000"/>
             <a:ext cx="7715250" cy="4572000"/>
           </a:xfrm>
           <a:prstGeom prst="rect">
@@ -5061,7 +5027,7 @@
                 </a:solidFill>
                 <a:latin typeface="Aptos"/>
               </a:rPr>
-              <a:t>CRA</a:t>
+              <a:t>BSI C5</a:t>
             </a:r>
             <a:r>
               <a:rPr sz="1300">
@@ -5070,7 +5036,7 @@
                 </a:solidFill>
                 <a:latin typeface="Aptos"/>
               </a:rPr>
-              <a:t>  —  Cyber Resilience Act — EU regulation on cybersecurity for products with digital elements.</a:t>
+              <a:t>  —  Bundesamt für Sicherheit in der Informationstechnik — Cloud Computing Compliance Criteria Catalogue.</a:t>
             </a:r>
           </a:p>
           <a:p>
@@ -5089,7 +5055,7 @@
                 </a:solidFill>
                 <a:latin typeface="Aptos"/>
               </a:rPr>
-              <a:t>DORA</a:t>
+              <a:t>BTP</a:t>
             </a:r>
             <a:r>
               <a:rPr sz="1300">
@@ -5098,7 +5064,7 @@
                 </a:solidFill>
                 <a:latin typeface="Aptos"/>
               </a:rPr>
-              <a:t>  —  Digital Operational Resilience Act — EU regulation for ICT risk in financial services.</a:t>
+              <a:t>  —  SAP Business Technology Platform.</a:t>
             </a:r>
           </a:p>
           <a:p>
@@ -5117,7 +5083,7 @@
                 </a:solidFill>
                 <a:latin typeface="Aptos"/>
               </a:rPr>
-              <a:t>NIS2</a:t>
+              <a:t>CRA</a:t>
             </a:r>
             <a:r>
               <a:rPr sz="1300">
@@ -5126,7 +5092,7 @@
                 </a:solidFill>
                 <a:latin typeface="Aptos"/>
               </a:rPr>
-              <a:t>  —  Network and Information Security Directive 2 — EU baseline for cybersecurity of essential entities.</a:t>
+              <a:t>  —  Cyber Resilience Act — EU regulation on cybersecurity for products with digital elements.</a:t>
             </a:r>
           </a:p>
           <a:p>
@@ -5145,7 +5111,7 @@
                 </a:solidFill>
                 <a:latin typeface="Aptos"/>
               </a:rPr>
-              <a:t>FedRAMP</a:t>
+              <a:t>DORA</a:t>
             </a:r>
             <a:r>
               <a:rPr sz="1300">
@@ -5154,7 +5120,7 @@
                 </a:solidFill>
                 <a:latin typeface="Aptos"/>
               </a:rPr>
-              <a:t>  —  Federal Risk and Authorization Management Program — US standardised cloud security assessment.</a:t>
+              <a:t>  —  Digital Operational Resilience Act — EU regulation for ICT risk in financial services.</a:t>
             </a:r>
           </a:p>
           <a:p>
@@ -5173,7 +5139,7 @@
                 </a:solidFill>
                 <a:latin typeface="Aptos"/>
               </a:rPr>
-              <a:t>FISMA</a:t>
+              <a:t>FedRAMP</a:t>
             </a:r>
             <a:r>
               <a:rPr sz="1300">
@@ -5182,7 +5148,7 @@
                 </a:solidFill>
                 <a:latin typeface="Aptos"/>
               </a:rPr>
-              <a:t>  —  Federal Information Security Modernization Act — US federal information security mandate.</a:t>
+              <a:t>  —  Federal Risk and Authorization Management Program — US standardised cloud security assessment.</a:t>
             </a:r>
           </a:p>
           <a:p>
@@ -5201,7 +5167,7 @@
                 </a:solidFill>
                 <a:latin typeface="Aptos"/>
               </a:rPr>
-              <a:t>BSI C5</a:t>
+              <a:t>FISMA</a:t>
             </a:r>
             <a:r>
               <a:rPr sz="1300">
@@ -5210,7 +5176,7 @@
                 </a:solidFill>
                 <a:latin typeface="Aptos"/>
               </a:rPr>
-              <a:t>  —  Bundesamt für Sicherheit in der Informationstechnik — Cloud Computing Compliance Criteria Catalogue.</a:t>
+              <a:t>  —  Federal Information Security Modernization Act — US federal information security mandate.</a:t>
             </a:r>
           </a:p>
           <a:p>
@@ -5229,7 +5195,7 @@
                 </a:solidFill>
                 <a:latin typeface="Aptos"/>
               </a:rPr>
-              <a:t>SecNumCloud</a:t>
+              <a:t>Grype</a:t>
             </a:r>
             <a:r>
               <a:rPr sz="1300">
@@ -5238,7 +5204,7 @@
                 </a:solidFill>
                 <a:latin typeface="Aptos"/>
               </a:rPr>
-              <a:t>  —  French cloud security qualification scheme operated by ANSSI.</a:t>
+              <a:t>  —  Open-source vulnerability scanner for container images and filesystems (Anchore).</a:t>
             </a:r>
           </a:p>
           <a:p>
@@ -5257,7 +5223,7 @@
                 </a:solidFill>
                 <a:latin typeface="Aptos"/>
               </a:rPr>
-              <a:t>OCM</a:t>
+              <a:t>Helm</a:t>
             </a:r>
             <a:r>
               <a:rPr sz="1300">
@@ -5266,7 +5232,7 @@
                 </a:solidFill>
                 <a:latin typeface="Aptos"/>
               </a:rPr>
-              <a:t>  —  Open Component Model — vendor-neutral specification for signed, transportable software components.</a:t>
+              <a:t>  —  Package manager for Kubernetes; reference artifact type for OCM.</a:t>
             </a:r>
           </a:p>
           <a:p>
@@ -5285,7 +5251,7 @@
                 </a:solidFill>
                 <a:latin typeface="Aptos"/>
               </a:rPr>
-              <a:t>ODG</a:t>
+              <a:t>LoB</a:t>
             </a:r>
             <a:r>
               <a:rPr sz="1300">
@@ -5294,7 +5260,7 @@
                 </a:solidFill>
                 <a:latin typeface="Aptos"/>
               </a:rPr>
-              <a:t>  —  Open Delivery Gear — OCM-native compliance automation engine and dashboard.</a:t>
+              <a:t>  —  Line of Business — SAP organisational unit owning a product portfolio.</a:t>
             </a:r>
           </a:p>
           <a:p>
@@ -5313,7 +5279,7 @@
                 </a:solidFill>
                 <a:latin typeface="Aptos"/>
               </a:rPr>
-              <a:t>OCI</a:t>
+              <a:t>NeoNephos</a:t>
             </a:r>
             <a:r>
               <a:rPr sz="1300">
@@ -5322,7 +5288,7 @@
                 </a:solidFill>
                 <a:latin typeface="Aptos"/>
               </a:rPr>
-              <a:t>  —  Open Container Initiative — open standards for container image format and distribution.</a:t>
+              <a:t>  —  European foundation for sovereign cloud open-source projects, hosted under the Linux Foundation.</a:t>
             </a:r>
           </a:p>
           <a:p>
@@ -5341,7 +5307,7 @@
                 </a:solidFill>
                 <a:latin typeface="Aptos"/>
               </a:rPr>
-              <a:t>SBOM</a:t>
+              <a:t>NIS2</a:t>
             </a:r>
             <a:r>
               <a:rPr sz="1300">
@@ -5350,7 +5316,7 @@
                 </a:solidFill>
                 <a:latin typeface="Aptos"/>
               </a:rPr>
-              <a:t>  —  Software Bill of Materials — inventory of components and dependencies inside a software artifact.</a:t>
+              <a:t>  —  Network and Information Security Directive 2 — EU baseline for cybersecurity of essential entities.</a:t>
             </a:r>
           </a:p>
           <a:p>
@@ -5369,7 +5335,7 @@
                 </a:solidFill>
                 <a:latin typeface="Aptos"/>
               </a:rPr>
-              <a:t>SBoD</a:t>
+              <a:t>OCI</a:t>
             </a:r>
             <a:r>
               <a:rPr sz="1300">
@@ -5378,7 +5344,7 @@
                 </a:solidFill>
                 <a:latin typeface="Aptos"/>
               </a:rPr>
-              <a:t>  —  Signed Bill of Delivery — OCM's signed envelope describing what was actually delivered, where, and by whom.</a:t>
+              <a:t>  —  Open Container Initiative — open standards for container image format and distribution.</a:t>
             </a:r>
           </a:p>
         </p:txBody>
@@ -5391,7 +5357,7 @@
         </p:nvSpPr>
         <p:spPr>
           <a:xfrm>
-            <a:off x="9429750" y="3429000"/>
+            <a:off x="9429750" y="4953000"/>
             <a:ext cx="7715250" cy="4572000"/>
           </a:xfrm>
           <a:prstGeom prst="rect">
@@ -5420,7 +5386,7 @@
                 </a:solidFill>
                 <a:latin typeface="Aptos"/>
               </a:rPr>
-              <a:t>SPDX</a:t>
+              <a:t>OCM</a:t>
             </a:r>
             <a:r>
               <a:rPr sz="1300">
@@ -5429,7 +5395,7 @@
                 </a:solidFill>
                 <a:latin typeface="Aptos"/>
               </a:rPr>
-              <a:t>  —  Software Package Data Exchange — ISO/IEC 5962 standard format for SBOM data.</a:t>
+              <a:t>  —  Open Component Model — vendor-neutral specification for signed, transportable software components.</a:t>
             </a:r>
           </a:p>
           <a:p>
@@ -5448,7 +5414,7 @@
                 </a:solidFill>
                 <a:latin typeface="Aptos"/>
               </a:rPr>
-              <a:t>SWID</a:t>
+              <a:t>ODG</a:t>
             </a:r>
             <a:r>
               <a:rPr sz="1300">
@@ -5457,7 +5423,7 @@
                 </a:solidFill>
                 <a:latin typeface="Aptos"/>
               </a:rPr>
-              <a:t>  —  Software Identification Tags — ISO/IEC 19770-2 standard for software inventory.</a:t>
+              <a:t>  —  Open Delivery Gear — OCM-native compliance automation engine and dashboard.</a:t>
             </a:r>
           </a:p>
           <a:p>
@@ -5476,7 +5442,7 @@
                 </a:solidFill>
                 <a:latin typeface="Aptos"/>
               </a:rPr>
-              <a:t>PKI</a:t>
+              <a:t>OSS</a:t>
             </a:r>
             <a:r>
               <a:rPr sz="1300">
@@ -5485,7 +5451,7 @@
                 </a:solidFill>
                 <a:latin typeface="Aptos"/>
               </a:rPr>
-              <a:t>  —  Public Key Infrastructure — framework for managing certificates and signing keys.</a:t>
+              <a:t>  —  Open Source Software.</a:t>
             </a:r>
           </a:p>
           <a:p>
@@ -5504,7 +5470,7 @@
                 </a:solidFill>
                 <a:latin typeface="Aptos"/>
               </a:rPr>
-              <a:t>Sigstore</a:t>
+              <a:t>PKI</a:t>
             </a:r>
             <a:r>
               <a:rPr sz="1300">
@@ -5513,7 +5479,7 @@
                 </a:solidFill>
                 <a:latin typeface="Aptos"/>
               </a:rPr>
-              <a:t>  —  Open-source project for keyless software signing using OIDC identities.</a:t>
+              <a:t>  —  Public Key Infrastructure — framework for managing certificates and signing keys.</a:t>
             </a:r>
           </a:p>
           <a:p>
@@ -5532,7 +5498,7 @@
                 </a:solidFill>
                 <a:latin typeface="Aptos"/>
               </a:rPr>
-              <a:t>LoB</a:t>
+              <a:t>SBOD</a:t>
             </a:r>
             <a:r>
               <a:rPr sz="1300">
@@ -5541,7 +5507,7 @@
                 </a:solidFill>
                 <a:latin typeface="Aptos"/>
               </a:rPr>
-              <a:t>  —  Line of Business — SAP organisational unit owning a product portfolio.</a:t>
+              <a:t>  —  Software Bill of Delivery — the OCM component descriptor, signed and traceable. Containing all artifacts and metadata for delivery and deployment.</a:t>
             </a:r>
           </a:p>
           <a:p>
@@ -5560,7 +5526,7 @@
                 </a:solidFill>
                 <a:latin typeface="Aptos"/>
               </a:rPr>
-              <a:t>BTP</a:t>
+              <a:t>SBOM</a:t>
             </a:r>
             <a:r>
               <a:rPr sz="1300">
@@ -5569,7 +5535,7 @@
                 </a:solidFill>
                 <a:latin typeface="Aptos"/>
               </a:rPr>
-              <a:t>  —  SAP Business Technology Platform.</a:t>
+              <a:t>  —  Software Bill of Materials — inventory of components and dependencies inside a software artifact.</a:t>
             </a:r>
           </a:p>
           <a:p>
@@ -5588,7 +5554,7 @@
                 </a:solidFill>
                 <a:latin typeface="Aptos"/>
               </a:rPr>
-              <a:t>OSS</a:t>
+              <a:t>SecNumCloud</a:t>
             </a:r>
             <a:r>
               <a:rPr sz="1300">
@@ -5597,7 +5563,7 @@
                 </a:solidFill>
                 <a:latin typeface="Aptos"/>
               </a:rPr>
-              <a:t>  —  Open Source Software.</a:t>
+              <a:t>  —  French cloud security qualification scheme operated by ANSSI.</a:t>
             </a:r>
           </a:p>
           <a:p>
@@ -5616,7 +5582,7 @@
                 </a:solidFill>
                 <a:latin typeface="Aptos"/>
               </a:rPr>
-              <a:t>NeoNephos</a:t>
+              <a:t>Sigstore</a:t>
             </a:r>
             <a:r>
               <a:rPr sz="1300">
@@ -5625,7 +5591,7 @@
                 </a:solidFill>
                 <a:latin typeface="Aptos"/>
               </a:rPr>
-              <a:t>  —  European foundation for sovereign cloud open-source projects, hosted under the Linux Foundation.</a:t>
+              <a:t>  —  Open-source project for keyless software signing using OIDC identities.</a:t>
             </a:r>
           </a:p>
           <a:p>
@@ -5644,7 +5610,7 @@
                 </a:solidFill>
                 <a:latin typeface="Aptos"/>
               </a:rPr>
-              <a:t>Grype</a:t>
+              <a:t>SPDX</a:t>
             </a:r>
             <a:r>
               <a:rPr sz="1300">
@@ -5653,7 +5619,7 @@
                 </a:solidFill>
                 <a:latin typeface="Aptos"/>
               </a:rPr>
-              <a:t>  —  Open-source vulnerability scanner for container images and filesystems (Anchore).</a:t>
+              <a:t>  —  Software Package Data Exchange — ISO/IEC 5962 standard format for SBOM data.</a:t>
             </a:r>
           </a:p>
           <a:p>
@@ -5672,7 +5638,7 @@
                 </a:solidFill>
                 <a:latin typeface="Aptos"/>
               </a:rPr>
-              <a:t>Trivy</a:t>
+              <a:t>SWID</a:t>
             </a:r>
             <a:r>
               <a:rPr sz="1300">
@@ -5681,7 +5647,7 @@
                 </a:solidFill>
                 <a:latin typeface="Aptos"/>
               </a:rPr>
-              <a:t>  —  Open-source security scanner for containers, IaC, and code (Aqua Security).</a:t>
+              <a:t>  —  Software Identification Tags — ISO/IEC 19770-2 standard for software inventory.</a:t>
             </a:r>
           </a:p>
           <a:p>
@@ -5700,7 +5666,7 @@
                 </a:solidFill>
                 <a:latin typeface="Aptos"/>
               </a:rPr>
-              <a:t>Helm</a:t>
+              <a:t>Trivy</a:t>
             </a:r>
             <a:r>
               <a:rPr sz="1300">
@@ -5709,7 +5675,7 @@
                 </a:solidFill>
                 <a:latin typeface="Aptos"/>
               </a:rPr>
-              <a:t>  —  Package manager for Kubernetes; reference artifact type for OCM.</a:t>
+              <a:t>  —  Open-source security scanner for containers, IaC, and code (Aqua Security).</a:t>
             </a:r>
           </a:p>
         </p:txBody>
@@ -6044,32 +6010,6 @@
                 </a:solidFill>
               </a:rPr>
               <a:t>Trivy, Grype, Sigstore, Helm, OCI, Kubernetes, kro, Flux, Argo CD — third-party trademarks named for technical reference; ownership remains with their respective projects and organisations.</a:t>
-            </a:r>
-          </a:p>
-          <a:p>
-            <a:pPr>
-              <a:spcBef>
-                <a:spcPts val="800"/>
-              </a:spcBef>
-              <a:spcAft>
-                <a:spcPts val="800"/>
-              </a:spcAft>
-            </a:pPr>
-            <a:r>
-              <a:rPr b="1">
-                <a:solidFill>
-                  <a:srgbClr val="0F6BFF"/>
-                </a:solidFill>
-              </a:rPr>
-              <a:t>▪  </a:t>
-            </a:r>
-            <a:r>
-              <a:rPr>
-                <a:solidFill>
-                  <a:srgbClr val="000000"/>
-                </a:solidFill>
-              </a:rPr>
-              <a:t>Full sourcing record: assets/adopters/LICENSING.md in the OCM marketing repository.</a:t>
             </a:r>
           </a:p>
         </p:txBody>
@@ -6399,7 +6339,7 @@
           <a:lstStyle/>
           <a:p>
             <a:r>
-              <a:t>SBOM lists. SBoD delivers.</a:t>
+              <a:t>SBOM lists. SBOD delivers.</a:t>
             </a:r>
           </a:p>
         </p:txBody>
@@ -6467,7 +6407,7 @@
                   <a:srgbClr val="000000"/>
                 </a:solidFill>
               </a:rPr>
-              <a:t>A Software Bill of Delivery (SBoD) tells you what you delivered, how to verify, transport, and operate it. It was built for delivery.</a:t>
+              <a:t>A Software Bill of Delivery (SBOD) tells you what you delivered, how to verify, transport, and operate it. It was built for delivery.</a:t>
             </a:r>
           </a:p>
           <a:p>
@@ -6493,7 +6433,7 @@
                   <a:srgbClr val="000000"/>
                 </a:solidFill>
               </a:rPr>
-              <a:t>The SBoD contains the SBOM. OCM doesn't replace your SBOM tooling — it gives the SBOM an envelope that's compliance-native, signed once, and travels intact across any boundary.</a:t>
+              <a:t>The SBOD contains the SBOM. OCM doesn't replace your SBOM tooling — it gives the SBOM an envelope that's compliance-native, signed once, and travels intact across any boundary.</a:t>
             </a:r>
           </a:p>
         </p:txBody>
@@ -6532,7 +6472,7 @@
           <a:lstStyle/>
           <a:p>
             <a:r>
-              <a:t>THE SHIFT — SBOM INSIDE SBoD</a:t>
+              <a:t>THE SHIFT — SBOM INSIDE SBOD</a:t>
             </a:r>
           </a:p>
         </p:txBody>
@@ -6679,7 +6619,7 @@
           <a:lstStyle/>
           <a:p>
             <a:r>
-              <a:t>Keyless (Sigstore) or key-based (your PKI) signs one artifact at a time. OCM gives them the complete SBoD to sign — one signature covers every artifact in the delivery, by digest.</a:t>
+              <a:t>Keyless (Sigstore) or key-based (your PKI) signs one artifact at a time. OCM gives them the complete SBOD to sign — one signature covers every artifact in the delivery, by digest.</a:t>
             </a:r>
           </a:p>
         </p:txBody>
